--- a/output/jun11_status_meeting_iv.pptx
+++ b/output/jun11_status_meeting_iv.pptx
@@ -3480,7 +3480,7 @@
                 </a:solidFill>
                 <a:latin typeface="Calibri"/>
               </a:rPr>
-              <a:t>•  To Prof. Hacker,do you have access to ESMUC or ChoralSynth multitrack data we could fold into Tier-2 before Sprint 4 acquisition?</a:t>
+              <a:t>•  To Prof. Hacker: do you have access to ESMUC multitrack data we could fold into Tier-2 alongside Dagstuhl? (ChoralSynth is openly licensed on Zenodo; we can acquire that ourselves.)</a:t>
             </a:r>
           </a:p>
           <a:p>
@@ -3496,7 +3496,7 @@
                 </a:solidFill>
                 <a:latin typeface="Calibri"/>
               </a:rPr>
-              <a:t>•  To Prof. Gloor,for the final paper figure, matplotlib-clean or Gephi/Cytoscape SVG-polished for the alchemical-stage diagram?</a:t>
+              <a:t>•  To Prof. Gloor: for the final paper figure, matplotlib-clean or Gephi/Cytoscape SVG-polished for the alchemical-stage diagram?</a:t>
             </a:r>
           </a:p>
           <a:p>
@@ -3512,7 +3512,7 @@
                 </a:solidFill>
                 <a:latin typeface="Calibri"/>
               </a:rPr>
-              <a:t>•  To everyone,is the Jul 23 final presentation in-person at Bamberg or remote? Affects how Hassan and Hammad coordinate travel.</a:t>
+              <a:t>•  To the coordinators: is there a path to compute time on a Bamberg or HSLU university cluster for Sprint-4 Tier-3 latency-injection runs? Per-window Granger on the full corpus is the current bottleneck.</a:t>
             </a:r>
           </a:p>
         </p:txBody>
@@ -3608,7 +3608,7 @@
                 </a:solidFill>
                 <a:latin typeface="Calibri"/>
               </a:rPr>
-              <a:t>What we said we'd do,Sprint 3 plan recap</a:t>
+              <a:t>What we said we'd do: Sprint 3 plan recap</a:t>
             </a:r>
           </a:p>
         </p:txBody>
@@ -3678,7 +3678,7 @@
                 </a:solidFill>
                 <a:latin typeface="Calibri"/>
               </a:rPr>
-              <a:t>Six deliverables. Four core, two pull-forward stretch. All six shipped.</a:t>
+              <a:t>Six deliverables in total: four core + two stretch. All six shipped within the sprint window.</a:t>
             </a:r>
           </a:p>
         </p:txBody>
@@ -3702,9 +3702,8 @@
                 <a:tableStyleId>{5C22544A-7EE6-4342-B048-85BDC9FD1C3A}</a:tableStyleId>
               </a:tblPr>
               <a:tblGrid>
-                <a:gridCol w="5943600"/>
-                <a:gridCol w="2286000"/>
-                <a:gridCol w="2743200"/>
+                <a:gridCol w="7772400"/>
+                <a:gridCol w="3200400"/>
               </a:tblGrid>
               <a:tr h="587828">
                 <a:tc>
@@ -3720,28 +3719,6 @@
                           <a:latin typeface="Calibri"/>
                         </a:rPr>
                         <a:t>Deliverable</a:t>
-                      </a:r>
-                    </a:p>
-                  </a:txBody>
-                  <a:tcPr>
-                    <a:solidFill>
-                      <a:srgbClr val="0E4D5E"/>
-                    </a:solidFill>
-                  </a:tcPr>
-                </a:tc>
-                <a:tc>
-                  <a:txBody>
-                    <a:bodyPr/>
-                    <a:lstStyle/>
-                    <a:p>
-                      <a:r>
-                        <a:rPr sz="1400" b="1">
-                          <a:solidFill>
-                            <a:srgbClr val="FDFBF5"/>
-                          </a:solidFill>
-                          <a:latin typeface="Calibri"/>
-                        </a:rPr>
-                        <a:t>Brief target</a:t>
                       </a:r>
                     </a:p>
                   </a:txBody>
@@ -3809,29 +3786,7 @@
                           </a:solidFill>
                           <a:latin typeface="Calibri"/>
                         </a:rPr>
-                        <a:t>Jun 4</a:t>
-                      </a:r>
-                    </a:p>
-                  </a:txBody>
-                  <a:tcPr>
-                    <a:solidFill>
-                      <a:srgbClr val="FAF6EC"/>
-                    </a:solidFill>
-                  </a:tcPr>
-                </a:tc>
-                <a:tc>
-                  <a:txBody>
-                    <a:bodyPr/>
-                    <a:lstStyle/>
-                    <a:p>
-                      <a:r>
-                        <a:rPr sz="1400" b="0">
-                          <a:solidFill>
-                            <a:srgbClr val="24262E"/>
-                          </a:solidFill>
-                          <a:latin typeface="Calibri"/>
-                        </a:rPr>
-                        <a:t>✓ done May 22</a:t>
+                        <a:t>✓ shipped</a:t>
                       </a:r>
                     </a:p>
                   </a:txBody>
@@ -3877,29 +3832,7 @@
                           </a:solidFill>
                           <a:latin typeface="Calibri"/>
                         </a:rPr>
-                        <a:t>Jun 11</a:t>
-                      </a:r>
-                    </a:p>
-                  </a:txBody>
-                  <a:tcPr>
-                    <a:solidFill>
-                      <a:srgbClr val="FDFBF5"/>
-                    </a:solidFill>
-                  </a:tcPr>
-                </a:tc>
-                <a:tc>
-                  <a:txBody>
-                    <a:bodyPr/>
-                    <a:lstStyle/>
-                    <a:p>
-                      <a:r>
-                        <a:rPr sz="1400" b="0">
-                          <a:solidFill>
-                            <a:srgbClr val="24262E"/>
-                          </a:solidFill>
-                          <a:latin typeface="Calibri"/>
-                        </a:rPr>
-                        <a:t>✓ done May 22</a:t>
+                        <a:t>✓ shipped</a:t>
                       </a:r>
                     </a:p>
                   </a:txBody>
@@ -3945,29 +3878,7 @@
                           </a:solidFill>
                           <a:latin typeface="Calibri"/>
                         </a:rPr>
-                        <a:t>Jun 11</a:t>
-                      </a:r>
-                    </a:p>
-                  </a:txBody>
-                  <a:tcPr>
-                    <a:solidFill>
-                      <a:srgbClr val="FAF6EC"/>
-                    </a:solidFill>
-                  </a:tcPr>
-                </a:tc>
-                <a:tc>
-                  <a:txBody>
-                    <a:bodyPr/>
-                    <a:lstStyle/>
-                    <a:p>
-                      <a:r>
-                        <a:rPr sz="1400" b="0">
-                          <a:solidFill>
-                            <a:srgbClr val="24262E"/>
-                          </a:solidFill>
-                          <a:latin typeface="Calibri"/>
-                        </a:rPr>
-                        <a:t>✓ done May 22</a:t>
+                        <a:t>✓ shipped</a:t>
                       </a:r>
                     </a:p>
                   </a:txBody>
@@ -4013,29 +3924,7 @@
                           </a:solidFill>
                           <a:latin typeface="Calibri"/>
                         </a:rPr>
-                        <a:t>Jun 11</a:t>
-                      </a:r>
-                    </a:p>
-                  </a:txBody>
-                  <a:tcPr>
-                    <a:solidFill>
-                      <a:srgbClr val="FDFBF5"/>
-                    </a:solidFill>
-                  </a:tcPr>
-                </a:tc>
-                <a:tc>
-                  <a:txBody>
-                    <a:bodyPr/>
-                    <a:lstStyle/>
-                    <a:p>
-                      <a:r>
-                        <a:rPr sz="1400" b="0">
-                          <a:solidFill>
-                            <a:srgbClr val="24262E"/>
-                          </a:solidFill>
-                          <a:latin typeface="Calibri"/>
-                        </a:rPr>
-                        <a:t>✓ done May 22</a:t>
+                        <a:t>✓ shipped</a:t>
                       </a:r>
                     </a:p>
                   </a:txBody>
@@ -4081,29 +3970,7 @@
                           </a:solidFill>
                           <a:latin typeface="Calibri"/>
                         </a:rPr>
-                        <a:t>Jun 14</a:t>
-                      </a:r>
-                    </a:p>
-                  </a:txBody>
-                  <a:tcPr>
-                    <a:solidFill>
-                      <a:srgbClr val="FAF6EC"/>
-                    </a:solidFill>
-                  </a:tcPr>
-                </a:tc>
-                <a:tc>
-                  <a:txBody>
-                    <a:bodyPr/>
-                    <a:lstStyle/>
-                    <a:p>
-                      <a:r>
-                        <a:rPr sz="1400" b="0">
-                          <a:solidFill>
-                            <a:srgbClr val="24262E"/>
-                          </a:solidFill>
-                          <a:latin typeface="Calibri"/>
-                        </a:rPr>
-                        <a:t>✓ done May 22 (23 days early)</a:t>
+                        <a:t>✓ shipped</a:t>
                       </a:r>
                     </a:p>
                   </a:txBody>
@@ -4149,29 +4016,7 @@
                           </a:solidFill>
                           <a:latin typeface="Calibri"/>
                         </a:rPr>
-                        <a:t>Jun 14</a:t>
-                      </a:r>
-                    </a:p>
-                  </a:txBody>
-                  <a:tcPr>
-                    <a:solidFill>
-                      <a:srgbClr val="FDFBF5"/>
-                    </a:solidFill>
-                  </a:tcPr>
-                </a:tc>
-                <a:tc>
-                  <a:txBody>
-                    <a:bodyPr/>
-                    <a:lstStyle/>
-                    <a:p>
-                      <a:r>
-                        <a:rPr sz="1400" b="0">
-                          <a:solidFill>
-                            <a:srgbClr val="24262E"/>
-                          </a:solidFill>
-                          <a:latin typeface="Calibri"/>
-                        </a:rPr>
-                        <a:t>✓ done May 22 (23 days early)</a:t>
+                        <a:t>✓ shipped</a:t>
                       </a:r>
                     </a:p>
                   </a:txBody>
@@ -4242,7 +4087,7 @@
                 </a:solidFill>
                 <a:latin typeface="Calibri"/>
               </a:rPr>
-              <a:t>Headline,E(t) works, 5/5 pieces beat null at p &lt; 0.001</a:t>
+              <a:t>Headline: E(t) works, 5/5 pieces beat null at p &lt; 0.001</a:t>
             </a:r>
           </a:p>
         </p:txBody>
@@ -4532,7 +4377,7 @@
                 </a:solidFill>
                 <a:latin typeface="Calibri"/>
               </a:rPr>
-              <a:t>WP1 audio scale,25 Dagstuhl musical takes</a:t>
+              <a:t>WP1 audio scale: 25 Dagstuhl musical takes</a:t>
             </a:r>
           </a:p>
         </p:txBody>
@@ -4803,7 +4648,7 @@
                 </a:solidFill>
                 <a:latin typeface="Calibri"/>
               </a:rPr>
-              <a:t>WP3 influence graph + COP-GC,Hacker flagship v2</a:t>
+              <a:t>WP3 influence graph + COP-GC: Hacker flagship v2</a:t>
             </a:r>
           </a:p>
         </p:txBody>
@@ -5074,7 +4919,7 @@
                 </a:solidFill>
                 <a:latin typeface="Calibri"/>
               </a:rPr>
-              <a:t>WP2 pose on 10 Tier-1 videos,5/10 pass detection floor</a:t>
+              <a:t>WP2 pose on 10 Tier-1 videos: 5/10 pass detection floor</a:t>
             </a:r>
           </a:p>
         </p:txBody>
@@ -5632,7 +5477,7 @@
                 </a:solidFill>
                 <a:latin typeface="Calibri"/>
               </a:rPr>
-              <a:t>Sprint 4 plan,Jun 12 to Jun 25</a:t>
+              <a:t>Sprint 4 plan: Jun 12 to Jun 25</a:t>
             </a:r>
           </a:p>
         </p:txBody>
@@ -5682,7 +5527,7 @@
         </p:nvGraphicFramePr>
         <p:xfrm>
           <a:off x="502920" y="1645920"/>
-          <a:ext cx="10972800" cy="3200400"/>
+          <a:ext cx="10972800" cy="3657600"/>
         </p:xfrm>
         <a:graphic>
           <a:graphicData uri="http://schemas.openxmlformats.org/drawingml/2006/table">
@@ -5692,10 +5537,9 @@
               </a:tblPr>
               <a:tblGrid>
                 <a:gridCol w="2286000"/>
-                <a:gridCol w="6858000"/>
-                <a:gridCol w="1828800"/>
+                <a:gridCol w="8686800"/>
               </a:tblGrid>
-              <a:tr h="640080">
+              <a:tr h="609600">
                 <a:tc>
                   <a:txBody>
                     <a:bodyPr/>
@@ -5740,30 +5584,8 @@
                     </a:solidFill>
                   </a:tcPr>
                 </a:tc>
-                <a:tc>
-                  <a:txBody>
-                    <a:bodyPr/>
-                    <a:lstStyle/>
-                    <a:p>
-                      <a:r>
-                        <a:rPr sz="1400" b="1">
-                          <a:solidFill>
-                            <a:srgbClr val="FDFBF5"/>
-                          </a:solidFill>
-                          <a:latin typeface="Calibri"/>
-                        </a:rPr>
-                        <a:t>Due</a:t>
-                      </a:r>
-                    </a:p>
-                  </a:txBody>
-                  <a:tcPr>
-                    <a:solidFill>
-                      <a:srgbClr val="0E4D5E"/>
-                    </a:solidFill>
-                  </a:tcPr>
-                </a:tc>
               </a:tr>
-              <a:tr h="640080">
+              <a:tr h="609600">
                 <a:tc>
                   <a:txBody>
                     <a:bodyPr/>
@@ -5808,30 +5630,8 @@
                     </a:solidFill>
                   </a:tcPr>
                 </a:tc>
-                <a:tc>
-                  <a:txBody>
-                    <a:bodyPr/>
-                    <a:lstStyle/>
-                    <a:p>
-                      <a:r>
-                        <a:rPr sz="1400" b="0">
-                          <a:solidFill>
-                            <a:srgbClr val="24262E"/>
-                          </a:solidFill>
-                          <a:latin typeface="Calibri"/>
-                        </a:rPr>
-                        <a:t>Jun 21</a:t>
-                      </a:r>
-                    </a:p>
-                  </a:txBody>
-                  <a:tcPr>
-                    <a:solidFill>
-                      <a:srgbClr val="FAF6EC"/>
-                    </a:solidFill>
-                  </a:tcPr>
-                </a:tc>
               </a:tr>
-              <a:tr h="640080">
+              <a:tr h="609600">
                 <a:tc>
                   <a:txBody>
                     <a:bodyPr/>
@@ -5866,29 +5666,7 @@
                           </a:solidFill>
                           <a:latin typeface="Calibri"/>
                         </a:rPr>
-                        <a:t>Pose on remaining 21 Tier-1 videos (triage)</a:t>
-                      </a:r>
-                    </a:p>
-                  </a:txBody>
-                  <a:tcPr>
-                    <a:solidFill>
-                      <a:srgbClr val="FDFBF5"/>
-                    </a:solidFill>
-                  </a:tcPr>
-                </a:tc>
-                <a:tc>
-                  <a:txBody>
-                    <a:bodyPr/>
-                    <a:lstStyle/>
-                    <a:p>
-                      <a:r>
-                        <a:rPr sz="1400" b="0">
-                          <a:solidFill>
-                            <a:srgbClr val="24262E"/>
-                          </a:solidFill>
-                          <a:latin typeface="Calibri"/>
-                        </a:rPr>
-                        <a:t>Jun 30</a:t>
+                        <a:t>Pose on remaining Tier-1 videos (quality-first triage)</a:t>
                       </a:r>
                     </a:p>
                   </a:txBody>
@@ -5899,7 +5677,7 @@
                   </a:tcPr>
                 </a:tc>
               </a:tr>
-              <a:tr h="640080">
+              <a:tr h="609600">
                 <a:tc>
                   <a:txBody>
                     <a:bodyPr/>
@@ -5934,29 +5712,7 @@
                           </a:solidFill>
                           <a:latin typeface="Calibri"/>
                         </a:rPr>
-                        <a:t>Tier-3 latency injection: jitter on Dagstuhl audio</a:t>
-                      </a:r>
-                    </a:p>
-                  </a:txBody>
-                  <a:tcPr>
-                    <a:solidFill>
-                      <a:srgbClr val="FAF6EC"/>
-                    </a:solidFill>
-                  </a:tcPr>
-                </a:tc>
-                <a:tc>
-                  <a:txBody>
-                    <a:bodyPr/>
-                    <a:lstStyle/>
-                    <a:p>
-                      <a:r>
-                        <a:rPr sz="1400" b="0">
-                          <a:solidFill>
-                            <a:srgbClr val="24262E"/>
-                          </a:solidFill>
-                          <a:latin typeface="Calibri"/>
-                        </a:rPr>
-                        <a:t>Jun 21</a:t>
+                        <a:t>Tier-3 latency injection: synthetic jitter on Dagstuhl audio</a:t>
                       </a:r>
                     </a:p>
                   </a:txBody>
@@ -5967,7 +5723,7 @@
                   </a:tcPr>
                 </a:tc>
               </a:tr>
-              <a:tr h="640080">
+              <a:tr h="609600">
                 <a:tc>
                   <a:txBody>
                     <a:bodyPr/>
@@ -6012,6 +5768,8 @@
                     </a:solidFill>
                   </a:tcPr>
                 </a:tc>
+              </a:tr>
+              <a:tr h="609600">
                 <a:tc>
                   <a:txBody>
                     <a:bodyPr/>
@@ -6024,13 +5782,35 @@
                           </a:solidFill>
                           <a:latin typeface="Calibri"/>
                         </a:rPr>
-                        <a:t>Jun 21</a:t>
+                        <a:t>Data</a:t>
                       </a:r>
                     </a:p>
                   </a:txBody>
                   <a:tcPr>
                     <a:solidFill>
-                      <a:srgbClr val="FDFBF5"/>
+                      <a:srgbClr val="FAF6EC"/>
+                    </a:solidFill>
+                  </a:tcPr>
+                </a:tc>
+                <a:tc>
+                  <a:txBody>
+                    <a:bodyPr/>
+                    <a:lstStyle/>
+                    <a:p>
+                      <a:r>
+                        <a:rPr sz="1400" b="0">
+                          <a:solidFill>
+                            <a:srgbClr val="24262E"/>
+                          </a:solidFill>
+                          <a:latin typeface="Calibri"/>
+                        </a:rPr>
+                        <a:t>Acquire ChoralSynth from Zenodo; pursue ESMUC if Hacker confirms a path</a:t>
+                      </a:r>
+                    </a:p>
+                  </a:txBody>
+                  <a:tcPr>
+                    <a:solidFill>
+                      <a:srgbClr val="FAF6EC"/>
                     </a:solidFill>
                   </a:tcPr>
                 </a:tc>
@@ -6047,7 +5827,7 @@
         </p:nvSpPr>
         <p:spPr>
           <a:xfrm>
-            <a:off x="502920" y="5212080"/>
+            <a:off x="502920" y="5577840"/>
             <a:ext cx="11185855" cy="457200"/>
           </a:xfrm>
           <a:prstGeom prst="rect">
@@ -6069,7 +5849,7 @@
                 </a:solidFill>
                 <a:latin typeface="Calibri"/>
               </a:rPr>
-              <a:t>Hard milestone: dashboard alpha runs on real data by Jun 21.</a:t>
+              <a:t>Hard milestone: dashboard alpha runs on real data + first Tier-3 cross-regime result.</a:t>
             </a:r>
           </a:p>
         </p:txBody>
@@ -6345,7 +6125,7 @@
                 </a:solidFill>
                 <a:latin typeface="Calibri"/>
               </a:rPr>
-              <a:t>•  ESMUC + ChoralSynth not acquired (proprietary / gate slipped May 15).</a:t>
+              <a:t>•  ESMUC + ChoralSynth not yet pulled into Tier-2.</a:t>
             </a:r>
           </a:p>
           <a:p>
@@ -6361,7 +6141,23 @@
                 </a:solidFill>
                 <a:latin typeface="Calibri"/>
               </a:rPr>
-              <a:t>•  To be revisited in Sprint 4 if licensing path opens.</a:t>
+              <a:t>•  ChoralSynth: openly licensed on Zenodo, Sprint-4 download.</a:t>
+            </a:r>
+          </a:p>
+          <a:p>
+            <a:pPr algn="l">
+              <a:spcAft>
+                <a:spcPts val="800"/>
+              </a:spcAft>
+            </a:pPr>
+            <a:r>
+              <a:rPr sz="1400">
+                <a:solidFill>
+                  <a:srgbClr val="24262E"/>
+                </a:solidFill>
+                <a:latin typeface="Calibri"/>
+              </a:rPr>
+              <a:t>•  ESMUC: needs UPF license; asking Hacker on next slide.</a:t>
             </a:r>
           </a:p>
         </p:txBody>

--- a/output/jun11_status_meeting_iv.pptx
+++ b/output/jun11_status_meeting_iv.pptx
@@ -13,8 +13,6 @@
     <p:sldId id="261" r:id="rId12"/>
     <p:sldId id="262" r:id="rId13"/>
     <p:sldId id="263" r:id="rId14"/>
-    <p:sldId id="264" r:id="rId15"/>
-    <p:sldId id="265" r:id="rId16"/>
   </p:sldIdLst>
   <p:sldSz cx="12191695" cy="6858000" type="screen4x3"/>
   <p:notesSz cx="6858000" cy="9144000"/>
@@ -3113,7 +3111,7 @@
         </p:nvSpPr>
         <p:spPr>
           <a:xfrm>
-            <a:off x="502920" y="1463040"/>
+            <a:off x="502920" y="1417320"/>
             <a:ext cx="11185855" cy="822960"/>
           </a:xfrm>
           <a:prstGeom prst="rect">
@@ -3122,14 +3120,18 @@
           <a:noFill/>
         </p:spPr>
         <p:txBody>
-          <a:bodyPr wrap="square" lIns="45720" rIns="45720">
+          <a:bodyPr wrap="square" anchor="t" lIns="27432" rIns="27432" tIns="18288" bIns="18288">
             <a:spAutoFit/>
           </a:bodyPr>
           <a:lstStyle/>
           <a:p>
-            <a:pPr algn="ctr"/>
-            <a:r>
-              <a:rPr sz="4600" b="1">
+            <a:pPr algn="ctr">
+              <a:lnSpc>
+                <a:spcPct val="100000"/>
+              </a:lnSpc>
+            </a:pPr>
+            <a:r>
+              <a:rPr sz="4800" b="1">
                 <a:solidFill>
                   <a:srgbClr val="FDFBF5"/>
                 </a:solidFill>
@@ -3148,8 +3150,8 @@
         </p:nvSpPr>
         <p:spPr>
           <a:xfrm>
-            <a:off x="502920" y="2468880"/>
-            <a:ext cx="11185855" cy="731520"/>
+            <a:off x="502920" y="2423160"/>
+            <a:ext cx="11185855" cy="640080"/>
           </a:xfrm>
           <a:prstGeom prst="rect">
             <a:avLst/>
@@ -3157,235 +3159,38 @@
           <a:noFill/>
         </p:spPr>
         <p:txBody>
-          <a:bodyPr wrap="square" lIns="45720" rIns="45720">
+          <a:bodyPr wrap="square" anchor="t" lIns="27432" rIns="27432" tIns="18288" bIns="18288">
             <a:spAutoFit/>
           </a:bodyPr>
           <a:lstStyle/>
           <a:p>
-            <a:pPr algn="ctr"/>
-            <a:r>
-              <a:rPr sz="2800" b="0">
+            <a:pPr algn="ctr">
+              <a:lnSpc>
+                <a:spcPct val="100000"/>
+              </a:lnSpc>
+            </a:pPr>
+            <a:r>
+              <a:rPr sz="2700" b="0">
                 <a:solidFill>
                   <a:srgbClr val="E6C670"/>
                 </a:solidFill>
                 <a:latin typeface="Calibri"/>
               </a:rPr>
               <a:t>Project 8: Entanglement in Online Choir</a:t>
-            </a:r>
-          </a:p>
-        </p:txBody>
-      </p:sp>
-      <p:sp>
-        <p:nvSpPr>
-          <p:cNvPr id="4" name="TextBox 3"/>
-          <p:cNvSpPr txBox="1"/>
-          <p:nvPr/>
-        </p:nvSpPr>
-        <p:spPr>
-          <a:xfrm>
-            <a:off x="502920" y="3383280"/>
-            <a:ext cx="11185855" cy="457200"/>
-          </a:xfrm>
-          <a:prstGeom prst="rect">
-            <a:avLst/>
-          </a:prstGeom>
-          <a:noFill/>
-        </p:spPr>
-        <p:txBody>
-          <a:bodyPr wrap="square" lIns="45720" rIns="45720">
-            <a:spAutoFit/>
-          </a:bodyPr>
-          <a:lstStyle/>
-          <a:p>
-            <a:pPr algn="ctr"/>
-            <a:r>
-              <a:rPr sz="1600" b="0">
-                <a:solidFill>
-                  <a:srgbClr val="CBD9DD"/>
-                </a:solidFill>
-                <a:latin typeface="Calibri"/>
-              </a:rPr>
-              <a:t>SNA-OSN-M Summer 2026   ·   Uni Bamberg × Uni Köln × HSLU</a:t>
-            </a:r>
-          </a:p>
-        </p:txBody>
-      </p:sp>
-      <p:sp>
-        <p:nvSpPr>
-          <p:cNvPr id="5" name="TextBox 4"/>
-          <p:cNvSpPr txBox="1"/>
-          <p:nvPr/>
-        </p:nvSpPr>
-        <p:spPr>
-          <a:xfrm>
-            <a:off x="502920" y="4572000"/>
-            <a:ext cx="11185855" cy="457200"/>
-          </a:xfrm>
-          <a:prstGeom prst="rect">
-            <a:avLst/>
-          </a:prstGeom>
-          <a:noFill/>
-        </p:spPr>
-        <p:txBody>
-          <a:bodyPr wrap="square" lIns="45720" rIns="45720">
-            <a:spAutoFit/>
-          </a:bodyPr>
-          <a:lstStyle/>
-          <a:p>
-            <a:pPr algn="ctr"/>
-            <a:r>
-              <a:rPr sz="1800" b="1">
-                <a:solidFill>
-                  <a:srgbClr val="FDFBF5"/>
-                </a:solidFill>
-                <a:latin typeface="Calibri"/>
-              </a:rPr>
-              <a:t>Presented by Hassan Ahmed</a:t>
-            </a:r>
-          </a:p>
-        </p:txBody>
-      </p:sp>
-      <p:sp>
-        <p:nvSpPr>
-          <p:cNvPr id="6" name="TextBox 5"/>
-          <p:cNvSpPr txBox="1"/>
-          <p:nvPr/>
-        </p:nvSpPr>
-        <p:spPr>
-          <a:xfrm>
-            <a:off x="502920" y="5029200"/>
-            <a:ext cx="11185855" cy="365760"/>
-          </a:xfrm>
-          <a:prstGeom prst="rect">
-            <a:avLst/>
-          </a:prstGeom>
-          <a:noFill/>
-        </p:spPr>
-        <p:txBody>
-          <a:bodyPr wrap="square" lIns="45720" rIns="45720">
-            <a:spAutoFit/>
-          </a:bodyPr>
-          <a:lstStyle/>
-          <a:p>
-            <a:pPr algn="ctr"/>
-            <a:r>
-              <a:rPr sz="1400" b="0">
-                <a:solidFill>
-                  <a:srgbClr val="CBD9DD"/>
-                </a:solidFill>
-                <a:latin typeface="Calibri"/>
-              </a:rPr>
-              <a:t>on behalf of the team</a:t>
-            </a:r>
-          </a:p>
-        </p:txBody>
-      </p:sp>
-      <p:sp>
-        <p:nvSpPr>
-          <p:cNvPr id="7" name="TextBox 6"/>
-          <p:cNvSpPr txBox="1"/>
-          <p:nvPr/>
-        </p:nvSpPr>
-        <p:spPr>
-          <a:xfrm>
-            <a:off x="502920" y="5943600"/>
-            <a:ext cx="11185855" cy="365760"/>
-          </a:xfrm>
-          <a:prstGeom prst="rect">
-            <a:avLst/>
-          </a:prstGeom>
-          <a:noFill/>
-        </p:spPr>
-        <p:txBody>
-          <a:bodyPr wrap="square" lIns="45720" rIns="45720">
-            <a:spAutoFit/>
-          </a:bodyPr>
-          <a:lstStyle/>
-          <a:p>
-            <a:pPr algn="ctr"/>
-            <a:r>
-              <a:rPr sz="1400" b="0">
-                <a:solidFill>
-                  <a:srgbClr val="E6C670"/>
-                </a:solidFill>
-                <a:latin typeface="Calibri"/>
-              </a:rPr>
-              <a:t>2026-06-11   ·   14:00 CET</a:t>
-            </a:r>
-          </a:p>
-        </p:txBody>
-      </p:sp>
-    </p:spTree>
-  </p:cSld>
-  <p:clrMapOvr>
-    <a:masterClrMapping/>
-  </p:clrMapOvr>
-</p:sld>
-</file>
-
-<file path=ppt/slides/slide10.xml><?xml version="1.0" encoding="utf-8"?>
-<p:sld xmlns:a="http://schemas.openxmlformats.org/drawingml/2006/main" xmlns:p="http://schemas.openxmlformats.org/presentationml/2006/main" xmlns:r="http://schemas.openxmlformats.org/officeDocument/2006/relationships">
-  <p:cSld>
-    <p:bg>
-      <p:bgPr>
-        <a:solidFill>
-          <a:srgbClr val="FAF6EC"/>
-        </a:solidFill>
-        <a:effectLst/>
-      </p:bgPr>
-    </p:bg>
-    <p:spTree>
-      <p:nvGrpSpPr>
-        <p:cNvPr id="1" name=""/>
-        <p:cNvGrpSpPr/>
-        <p:nvPr/>
-      </p:nvGrpSpPr>
-      <p:grpSpPr/>
-      <p:sp>
-        <p:nvSpPr>
-          <p:cNvPr id="2" name="TextBox 1"/>
-          <p:cNvSpPr txBox="1"/>
-          <p:nvPr/>
-        </p:nvSpPr>
-        <p:spPr>
-          <a:xfrm>
-            <a:off x="502920" y="411480"/>
-            <a:ext cx="11185855" cy="548640"/>
-          </a:xfrm>
-          <a:prstGeom prst="rect">
-            <a:avLst/>
-          </a:prstGeom>
-          <a:noFill/>
-        </p:spPr>
-        <p:txBody>
-          <a:bodyPr wrap="square" lIns="45720" rIns="45720">
-            <a:spAutoFit/>
-          </a:bodyPr>
-          <a:lstStyle/>
-          <a:p>
-            <a:pPr algn="l"/>
-            <a:r>
-              <a:rPr sz="2800" b="1">
-                <a:solidFill>
-                  <a:srgbClr val="0E4D5E"/>
-                </a:solidFill>
-                <a:latin typeface="Calibri"/>
-              </a:rPr>
-              <a:t>Open questions for the room</a:t>
             </a:r>
           </a:p>
         </p:txBody>
       </p:sp>
       <p:cxnSp>
         <p:nvCxnSpPr>
-          <p:cNvPr id="3" name="Connector 2"/>
+          <p:cNvPr id="4" name="Connector 3"/>
           <p:cNvCxnSpPr/>
           <p:nvPr/>
         </p:nvCxnSpPr>
         <p:spPr>
           <a:xfrm>
-            <a:off x="502920" y="960120"/>
-            <a:ext cx="1371600" cy="0"/>
+            <a:off x="5120640" y="3246120"/>
+            <a:ext cx="1920240" cy="0"/>
           </a:xfrm>
           <a:prstGeom prst="line">
             <a:avLst/>
@@ -3413,14 +3218,14 @@
       </p:cxnSp>
       <p:sp>
         <p:nvSpPr>
-          <p:cNvPr id="4" name="TextBox 3"/>
+          <p:cNvPr id="5" name="TextBox 4"/>
           <p:cNvSpPr txBox="1"/>
           <p:nvPr/>
         </p:nvSpPr>
         <p:spPr>
           <a:xfrm>
-            <a:off x="502920" y="1554480"/>
-            <a:ext cx="11185855" cy="457200"/>
+            <a:off x="502920" y="3520440"/>
+            <a:ext cx="11185855" cy="411480"/>
           </a:xfrm>
           <a:prstGeom prst="rect">
             <a:avLst/>
@@ -3428,34 +3233,38 @@
           <a:noFill/>
         </p:spPr>
         <p:txBody>
-          <a:bodyPr wrap="square" lIns="45720" rIns="45720">
+          <a:bodyPr wrap="square" anchor="t" lIns="27432" rIns="27432" tIns="18288" bIns="18288">
             <a:spAutoFit/>
           </a:bodyPr>
           <a:lstStyle/>
           <a:p>
-            <a:pPr algn="l"/>
-            <a:r>
-              <a:rPr sz="1800" b="0">
-                <a:solidFill>
-                  <a:srgbClr val="6E6A60"/>
-                </a:solidFill>
-                <a:latin typeface="Calibri"/>
-              </a:rPr>
-              <a:t>Three questions before we open the floor.</a:t>
-            </a:r>
-          </a:p>
-        </p:txBody>
-      </p:sp>
-      <p:sp>
-        <p:nvSpPr>
-          <p:cNvPr id="5" name="TextBox 4"/>
+            <a:pPr algn="ctr">
+              <a:lnSpc>
+                <a:spcPct val="100000"/>
+              </a:lnSpc>
+            </a:pPr>
+            <a:r>
+              <a:rPr sz="1500" b="0">
+                <a:solidFill>
+                  <a:srgbClr val="CBD9DD"/>
+                </a:solidFill>
+                <a:latin typeface="Calibri"/>
+              </a:rPr>
+              <a:t>SNA-OSN-M Summer 2026  ·  Uni Bamberg × Uni Köln × HSLU</a:t>
+            </a:r>
+          </a:p>
+        </p:txBody>
+      </p:sp>
+      <p:sp>
+        <p:nvSpPr>
+          <p:cNvPr id="6" name="TextBox 5"/>
           <p:cNvSpPr txBox="1"/>
           <p:nvPr/>
         </p:nvSpPr>
         <p:spPr>
           <a:xfrm>
-            <a:off x="502920" y="2286000"/>
-            <a:ext cx="11185855" cy="4114800"/>
+            <a:off x="502920" y="4526280"/>
+            <a:ext cx="11185855" cy="457200"/>
           </a:xfrm>
           <a:prstGeom prst="rect">
             <a:avLst/>
@@ -3463,70 +3272,38 @@
           <a:noFill/>
         </p:spPr>
         <p:txBody>
-          <a:bodyPr wrap="square" lIns="45720">
+          <a:bodyPr wrap="square" anchor="t" lIns="27432" rIns="27432" tIns="18288" bIns="18288">
             <a:spAutoFit/>
           </a:bodyPr>
           <a:lstStyle/>
           <a:p>
-            <a:pPr algn="l">
-              <a:spcAft>
-                <a:spcPts val="800"/>
-              </a:spcAft>
+            <a:pPr algn="ctr">
+              <a:lnSpc>
+                <a:spcPct val="100000"/>
+              </a:lnSpc>
             </a:pPr>
             <a:r>
-              <a:rPr sz="1800">
-                <a:solidFill>
-                  <a:srgbClr val="24262E"/>
-                </a:solidFill>
-                <a:latin typeface="Calibri"/>
-              </a:rPr>
-              <a:t>•  To Prof. Hacker: do you have access to ESMUC multitrack data we could fold into Tier-2 alongside Dagstuhl? (ChoralSynth is openly licensed on Zenodo; we can acquire that ourselves.)</a:t>
-            </a:r>
-          </a:p>
-          <a:p>
-            <a:pPr algn="l">
-              <a:spcAft>
-                <a:spcPts val="800"/>
-              </a:spcAft>
-            </a:pPr>
-            <a:r>
-              <a:rPr sz="1800">
-                <a:solidFill>
-                  <a:srgbClr val="24262E"/>
-                </a:solidFill>
-                <a:latin typeface="Calibri"/>
-              </a:rPr>
-              <a:t>•  To Prof. Gloor: for the final paper figure, matplotlib-clean or Gephi/Cytoscape SVG-polished for the alchemical-stage diagram?</a:t>
-            </a:r>
-          </a:p>
-          <a:p>
-            <a:pPr algn="l">
-              <a:spcAft>
-                <a:spcPts val="800"/>
-              </a:spcAft>
-            </a:pPr>
-            <a:r>
-              <a:rPr sz="1800">
-                <a:solidFill>
-                  <a:srgbClr val="24262E"/>
-                </a:solidFill>
-                <a:latin typeface="Calibri"/>
-              </a:rPr>
-              <a:t>•  To the coordinators: is there a path to compute time on a Bamberg or HSLU university cluster for Sprint-4 Tier-3 latency-injection runs? Per-window Granger on the full corpus is the current bottleneck.</a:t>
-            </a:r>
-          </a:p>
-        </p:txBody>
-      </p:sp>
-      <p:sp>
-        <p:nvSpPr>
-          <p:cNvPr id="6" name="TextBox 5"/>
+              <a:rPr sz="1800" b="1">
+                <a:solidFill>
+                  <a:srgbClr val="FDFBF5"/>
+                </a:solidFill>
+                <a:latin typeface="Calibri"/>
+              </a:rPr>
+              <a:t>Presented by Hassan Ahmed, on behalf of the team</a:t>
+            </a:r>
+          </a:p>
+        </p:txBody>
+      </p:sp>
+      <p:sp>
+        <p:nvSpPr>
+          <p:cNvPr id="7" name="TextBox 6"/>
           <p:cNvSpPr txBox="1"/>
           <p:nvPr/>
         </p:nvSpPr>
         <p:spPr>
           <a:xfrm>
-            <a:off x="502920" y="5943600"/>
-            <a:ext cx="11185855" cy="457200"/>
+            <a:off x="502920" y="5074920"/>
+            <a:ext cx="11185855" cy="365760"/>
           </a:xfrm>
           <a:prstGeom prst="rect">
             <a:avLst/>
@@ -3534,20 +3311,63 @@
           <a:noFill/>
         </p:spPr>
         <p:txBody>
-          <a:bodyPr wrap="square" lIns="45720" rIns="45720">
+          <a:bodyPr wrap="square" anchor="t" lIns="27432" rIns="27432" tIns="18288" bIns="18288">
             <a:spAutoFit/>
           </a:bodyPr>
           <a:lstStyle/>
           <a:p>
-            <a:pPr algn="ctr"/>
-            <a:r>
-              <a:rPr sz="2400" b="1">
-                <a:solidFill>
-                  <a:srgbClr val="0E4D5E"/>
-                </a:solidFill>
-                <a:latin typeface="Calibri"/>
-              </a:rPr>
-              <a:t>Thank you. Questions.</a:t>
+            <a:pPr algn="ctr">
+              <a:lnSpc>
+                <a:spcPct val="100000"/>
+              </a:lnSpc>
+            </a:pPr>
+            <a:r>
+              <a:rPr sz="1300" b="0">
+                <a:solidFill>
+                  <a:srgbClr val="CBD9DD"/>
+                </a:solidFill>
+                <a:latin typeface="Calibri"/>
+              </a:rPr>
+              <a:t>Supervisors: Prof. Janine Hacker (Uni Bamberg) · Prof. Peter Gloor (MIT/Köln)</a:t>
+            </a:r>
+          </a:p>
+        </p:txBody>
+      </p:sp>
+      <p:sp>
+        <p:nvSpPr>
+          <p:cNvPr id="8" name="TextBox 7"/>
+          <p:cNvSpPr txBox="1"/>
+          <p:nvPr/>
+        </p:nvSpPr>
+        <p:spPr>
+          <a:xfrm>
+            <a:off x="502920" y="5897880"/>
+            <a:ext cx="11185855" cy="365760"/>
+          </a:xfrm>
+          <a:prstGeom prst="rect">
+            <a:avLst/>
+          </a:prstGeom>
+          <a:noFill/>
+        </p:spPr>
+        <p:txBody>
+          <a:bodyPr wrap="square" anchor="t" lIns="27432" rIns="27432" tIns="18288" bIns="18288">
+            <a:spAutoFit/>
+          </a:bodyPr>
+          <a:lstStyle/>
+          <a:p>
+            <a:pPr algn="ctr">
+              <a:lnSpc>
+                <a:spcPct val="100000"/>
+              </a:lnSpc>
+            </a:pPr>
+            <a:r>
+              <a:rPr sz="1400" b="0">
+                <a:solidFill>
+                  <a:srgbClr val="E6C670"/>
+                </a:solidFill>
+                <a:latin typeface="Calibri"/>
+              </a:rPr>
+              <a:t>2026-06-11 · 14:00 CET</a:t>
             </a:r>
           </a:p>
         </p:txBody>
@@ -3586,8 +3406,8 @@
         </p:nvSpPr>
         <p:spPr>
           <a:xfrm>
-            <a:off x="502920" y="411480"/>
-            <a:ext cx="11185855" cy="548640"/>
+            <a:off x="502920" y="292608"/>
+            <a:ext cx="5486400" cy="274320"/>
           </a:xfrm>
           <a:prstGeom prst="rect">
             <a:avLst/>
@@ -3595,69 +3415,441 @@
           <a:noFill/>
         </p:spPr>
         <p:txBody>
-          <a:bodyPr wrap="square" lIns="45720" rIns="45720">
+          <a:bodyPr wrap="square" anchor="t" lIns="27432" rIns="27432" tIns="18288" bIns="18288">
             <a:spAutoFit/>
           </a:bodyPr>
           <a:lstStyle/>
           <a:p>
-            <a:pPr algn="l"/>
-            <a:r>
-              <a:rPr sz="2800" b="1">
+            <a:pPr algn="l">
+              <a:lnSpc>
+                <a:spcPct val="100000"/>
+              </a:lnSpc>
+            </a:pPr>
+            <a:r>
+              <a:rPr sz="1200" b="1">
+                <a:solidFill>
+                  <a:srgbClr val="C4902A"/>
+                </a:solidFill>
+                <a:latin typeface="Calibri"/>
+              </a:rPr>
+              <a:t>RECAP</a:t>
+            </a:r>
+          </a:p>
+        </p:txBody>
+      </p:sp>
+      <p:sp>
+        <p:nvSpPr>
+          <p:cNvPr id="3" name="TextBox 2"/>
+          <p:cNvSpPr txBox="1"/>
+          <p:nvPr/>
+        </p:nvSpPr>
+        <p:spPr>
+          <a:xfrm>
+            <a:off x="502920" y="530352"/>
+            <a:ext cx="11185855" cy="566928"/>
+          </a:xfrm>
+          <a:prstGeom prst="rect">
+            <a:avLst/>
+          </a:prstGeom>
+          <a:noFill/>
+        </p:spPr>
+        <p:txBody>
+          <a:bodyPr wrap="square" anchor="t" lIns="27432" rIns="27432" tIns="18288" bIns="18288">
+            <a:spAutoFit/>
+          </a:bodyPr>
+          <a:lstStyle/>
+          <a:p>
+            <a:pPr algn="l">
+              <a:lnSpc>
+                <a:spcPct val="100000"/>
+              </a:lnSpc>
+            </a:pPr>
+            <a:r>
+              <a:rPr sz="2700" b="1">
                 <a:solidFill>
                   <a:srgbClr val="0E4D5E"/>
                 </a:solidFill>
                 <a:latin typeface="Calibri"/>
               </a:rPr>
-              <a:t>What we said we'd do: Sprint 3 plan recap</a:t>
-            </a:r>
-          </a:p>
-        </p:txBody>
-      </p:sp>
-      <p:cxnSp>
-        <p:nvCxnSpPr>
-          <p:cNvPr id="3" name="Connector 2"/>
-          <p:cNvCxnSpPr/>
-          <p:nvPr/>
-        </p:nvCxnSpPr>
-        <p:spPr>
-          <a:xfrm>
-            <a:off x="502920" y="960120"/>
-            <a:ext cx="1371600" cy="0"/>
-          </a:xfrm>
-          <a:prstGeom prst="line">
-            <a:avLst/>
-          </a:prstGeom>
-          <a:ln w="31750">
+              <a:t>Our goals and plan, in 60 seconds</a:t>
+            </a:r>
+          </a:p>
+        </p:txBody>
+      </p:sp>
+      <p:sp>
+        <p:nvSpPr>
+          <p:cNvPr id="4" name="TextBox 3"/>
+          <p:cNvSpPr txBox="1"/>
+          <p:nvPr/>
+        </p:nvSpPr>
+        <p:spPr>
+          <a:xfrm>
+            <a:off x="10637215" y="6510528"/>
+            <a:ext cx="1097280" cy="274320"/>
+          </a:xfrm>
+          <a:prstGeom prst="rect">
+            <a:avLst/>
+          </a:prstGeom>
+          <a:noFill/>
+        </p:spPr>
+        <p:txBody>
+          <a:bodyPr wrap="square" anchor="t" lIns="27432" rIns="27432" tIns="18288" bIns="18288">
+            <a:spAutoFit/>
+          </a:bodyPr>
+          <a:lstStyle/>
+          <a:p>
+            <a:pPr algn="r">
+              <a:lnSpc>
+                <a:spcPct val="100000"/>
+              </a:lnSpc>
+            </a:pPr>
+            <a:r>
+              <a:rPr sz="1000" b="0">
+                <a:solidFill>
+                  <a:srgbClr val="6E6A60"/>
+                </a:solidFill>
+                <a:latin typeface="Calibri"/>
+              </a:rPr>
+              <a:t>2 / 8</a:t>
+            </a:r>
+          </a:p>
+        </p:txBody>
+      </p:sp>
+      <p:sp>
+        <p:nvSpPr>
+          <p:cNvPr id="5" name="TextBox 4"/>
+          <p:cNvSpPr txBox="1"/>
+          <p:nvPr/>
+        </p:nvSpPr>
+        <p:spPr>
+          <a:xfrm>
+            <a:off x="502920" y="6510528"/>
+            <a:ext cx="4572000" cy="274320"/>
+          </a:xfrm>
+          <a:prstGeom prst="rect">
+            <a:avLst/>
+          </a:prstGeom>
+          <a:noFill/>
+        </p:spPr>
+        <p:txBody>
+          <a:bodyPr wrap="square" anchor="t" lIns="27432" rIns="27432" tIns="18288" bIns="18288">
+            <a:spAutoFit/>
+          </a:bodyPr>
+          <a:lstStyle/>
+          <a:p>
+            <a:pPr algn="l">
+              <a:lnSpc>
+                <a:spcPct val="100000"/>
+              </a:lnSpc>
+            </a:pPr>
+            <a:r>
+              <a:rPr sz="1000" b="0">
+                <a:solidFill>
+                  <a:srgbClr val="6E6A60"/>
+                </a:solidFill>
+                <a:latin typeface="Calibri"/>
+              </a:rPr>
+              <a:t>Project 8 · Entanglement in Online Choir</a:t>
+            </a:r>
+          </a:p>
+        </p:txBody>
+      </p:sp>
+      <p:sp>
+        <p:nvSpPr>
+          <p:cNvPr id="6" name="Rounded Rectangle 5"/>
+          <p:cNvSpPr/>
+          <p:nvPr/>
+        </p:nvSpPr>
+        <p:spPr>
+          <a:xfrm>
+            <a:off x="502920" y="1325880"/>
+            <a:ext cx="5577840" cy="960120"/>
+          </a:xfrm>
+          <a:prstGeom prst="roundRect">
+            <a:avLst/>
+          </a:prstGeom>
+          <a:solidFill>
+            <a:srgbClr val="0E4D5E"/>
+          </a:solidFill>
+          <a:ln>
+            <a:noFill/>
+          </a:ln>
+        </p:spPr>
+        <p:style>
+          <a:lnRef idx="1">
+            <a:schemeClr val="accent1"/>
+          </a:lnRef>
+          <a:fillRef idx="3">
+            <a:schemeClr val="accent1"/>
+          </a:fillRef>
+          <a:effectRef idx="2">
+            <a:schemeClr val="accent1"/>
+          </a:effectRef>
+          <a:fontRef idx="minor">
+            <a:schemeClr val="lt1"/>
+          </a:fontRef>
+        </p:style>
+        <p:txBody>
+          <a:bodyPr rtlCol="0" anchor="ctr"/>
+          <a:lstStyle/>
+          <a:p>
+            <a:pPr algn="ctr"/>
+            <a:r>
+              <a:rPr sz="1900" b="1">
+                <a:solidFill>
+                  <a:srgbClr val="FDFBF5"/>
+                </a:solidFill>
+                <a:latin typeface="Calibri"/>
+              </a:rPr>
+              <a:t>E(t)  =  mean(  A(t) audio,  V(t) visual,  N(t) network  )</a:t>
+            </a:r>
+          </a:p>
+          <a:p>
+            <a:pPr algn="ctr"/>
+            <a:r>
+              <a:rPr sz="1200">
+                <a:solidFill>
+                  <a:srgbClr val="CBD9DD"/>
+                </a:solidFill>
+                <a:latin typeface="Calibri"/>
+              </a:rPr>
+              <a:t>one number per moment: how well is this choir coordinating?</a:t>
+            </a:r>
+          </a:p>
+        </p:txBody>
+      </p:sp>
+      <p:sp>
+        <p:nvSpPr>
+          <p:cNvPr id="7" name="Rounded Rectangle 6"/>
+          <p:cNvSpPr/>
+          <p:nvPr/>
+        </p:nvSpPr>
+        <p:spPr>
+          <a:xfrm>
+            <a:off x="502920" y="2514600"/>
+            <a:ext cx="5577840" cy="1033271"/>
+          </a:xfrm>
+          <a:prstGeom prst="roundRect">
+            <a:avLst/>
+          </a:prstGeom>
+          <a:solidFill>
+            <a:srgbClr val="FDFBF5"/>
+          </a:solidFill>
+          <a:ln w="12700">
             <a:solidFill>
-              <a:srgbClr val="C4902A"/>
+              <a:srgbClr val="CBD9DD"/>
             </a:solidFill>
           </a:ln>
         </p:spPr>
         <p:style>
-          <a:lnRef idx="2">
+          <a:lnRef idx="1">
             <a:schemeClr val="accent1"/>
           </a:lnRef>
-          <a:fillRef idx="0">
+          <a:fillRef idx="3">
             <a:schemeClr val="accent1"/>
           </a:fillRef>
-          <a:effectRef idx="1">
+          <a:effectRef idx="2">
             <a:schemeClr val="accent1"/>
           </a:effectRef>
           <a:fontRef idx="minor">
-            <a:schemeClr val="tx1"/>
+            <a:schemeClr val="lt1"/>
           </a:fontRef>
         </p:style>
-      </p:cxnSp>
-      <p:sp>
-        <p:nvSpPr>
-          <p:cNvPr id="4" name="TextBox 3"/>
+        <p:txBody>
+          <a:bodyPr rtlCol="0" anchor="ctr" wrap="square" lIns="128016" rIns="128016" tIns="91440"/>
+          <a:lstStyle/>
+          <a:p>
+            <a:pPr algn="ctr">
+              <a:spcAft>
+                <a:spcPts val="500"/>
+              </a:spcAft>
+            </a:pPr>
+            <a:r>
+              <a:rPr sz="1350" b="1">
+                <a:solidFill>
+                  <a:srgbClr val="0E4D5E"/>
+                </a:solidFill>
+                <a:latin typeface="Calibri"/>
+              </a:rPr>
+              <a:t>H1 · Latency regimes</a:t>
+            </a:r>
+          </a:p>
+          <a:p>
+            <a:pPr>
+              <a:spcAft>
+                <a:spcPts val="400"/>
+              </a:spcAft>
+            </a:pPr>
+            <a:r>
+              <a:rPr sz="1250">
+                <a:solidFill>
+                  <a:srgbClr val="24262E"/>
+                </a:solidFill>
+                <a:latin typeface="Calibri"/>
+              </a:rPr>
+              <a:t>Low-latency tools (Jamulus, SoundJack) score higher E(t) than Zoom.</a:t>
+            </a:r>
+          </a:p>
+        </p:txBody>
+      </p:sp>
+      <p:sp>
+        <p:nvSpPr>
+          <p:cNvPr id="8" name="Rounded Rectangle 7"/>
+          <p:cNvSpPr/>
+          <p:nvPr/>
+        </p:nvSpPr>
+        <p:spPr>
+          <a:xfrm>
+            <a:off x="502920" y="3657599"/>
+            <a:ext cx="5577840" cy="1033271"/>
+          </a:xfrm>
+          <a:prstGeom prst="roundRect">
+            <a:avLst/>
+          </a:prstGeom>
+          <a:solidFill>
+            <a:srgbClr val="FDFBF5"/>
+          </a:solidFill>
+          <a:ln w="12700">
+            <a:solidFill>
+              <a:srgbClr val="CBD9DD"/>
+            </a:solidFill>
+          </a:ln>
+        </p:spPr>
+        <p:style>
+          <a:lnRef idx="1">
+            <a:schemeClr val="accent1"/>
+          </a:lnRef>
+          <a:fillRef idx="3">
+            <a:schemeClr val="accent1"/>
+          </a:fillRef>
+          <a:effectRef idx="2">
+            <a:schemeClr val="accent1"/>
+          </a:effectRef>
+          <a:fontRef idx="minor">
+            <a:schemeClr val="lt1"/>
+          </a:fontRef>
+        </p:style>
+        <p:txBody>
+          <a:bodyPr rtlCol="0" anchor="ctr" wrap="square" lIns="128016" rIns="128016" tIns="91440"/>
+          <a:lstStyle/>
+          <a:p>
+            <a:pPr algn="ctr">
+              <a:spcAft>
+                <a:spcPts val="500"/>
+              </a:spcAft>
+            </a:pPr>
+            <a:r>
+              <a:rPr sz="1350" b="1">
+                <a:solidFill>
+                  <a:srgbClr val="0E4D5E"/>
+                </a:solidFill>
+                <a:latin typeface="Calibri"/>
+              </a:rPr>
+              <a:t>H2 · Network topology</a:t>
+            </a:r>
+          </a:p>
+          <a:p>
+            <a:pPr>
+              <a:spcAft>
+                <a:spcPts val="400"/>
+              </a:spcAft>
+            </a:pPr>
+            <a:r>
+              <a:rPr sz="1250">
+                <a:solidFill>
+                  <a:srgbClr val="24262E"/>
+                </a:solidFill>
+                <a:latin typeface="Calibri"/>
+              </a:rPr>
+              <a:t>Influence network shifts democratic → leader-dominated as latency rises.</a:t>
+            </a:r>
+          </a:p>
+        </p:txBody>
+      </p:sp>
+      <p:sp>
+        <p:nvSpPr>
+          <p:cNvPr id="9" name="Rounded Rectangle 8"/>
+          <p:cNvSpPr/>
+          <p:nvPr/>
+        </p:nvSpPr>
+        <p:spPr>
+          <a:xfrm>
+            <a:off x="502920" y="4800598"/>
+            <a:ext cx="5577840" cy="1033271"/>
+          </a:xfrm>
+          <a:prstGeom prst="roundRect">
+            <a:avLst/>
+          </a:prstGeom>
+          <a:solidFill>
+            <a:srgbClr val="FDFBF5"/>
+          </a:solidFill>
+          <a:ln w="12700">
+            <a:solidFill>
+              <a:srgbClr val="CBD9DD"/>
+            </a:solidFill>
+          </a:ln>
+        </p:spPr>
+        <p:style>
+          <a:lnRef idx="1">
+            <a:schemeClr val="accent1"/>
+          </a:lnRef>
+          <a:fillRef idx="3">
+            <a:schemeClr val="accent1"/>
+          </a:fillRef>
+          <a:effectRef idx="2">
+            <a:schemeClr val="accent1"/>
+          </a:effectRef>
+          <a:fontRef idx="minor">
+            <a:schemeClr val="lt1"/>
+          </a:fontRef>
+        </p:style>
+        <p:txBody>
+          <a:bodyPr rtlCol="0" anchor="ctr" wrap="square" lIns="128016" rIns="128016" tIns="91440"/>
+          <a:lstStyle/>
+          <a:p>
+            <a:pPr algn="ctr">
+              <a:spcAft>
+                <a:spcPts val="500"/>
+              </a:spcAft>
+            </a:pPr>
+            <a:r>
+              <a:rPr sz="1350" b="1">
+                <a:solidFill>
+                  <a:srgbClr val="0E4D5E"/>
+                </a:solidFill>
+                <a:latin typeface="Calibri"/>
+              </a:rPr>
+              <a:t>H3 · Honest signals</a:t>
+            </a:r>
+          </a:p>
+          <a:p>
+            <a:pPr>
+              <a:spcAft>
+                <a:spcPts val="400"/>
+              </a:spcAft>
+            </a:pPr>
+            <a:r>
+              <a:rPr sz="1250">
+                <a:solidFill>
+                  <a:srgbClr val="24262E"/>
+                </a:solidFill>
+                <a:latin typeface="Calibri"/>
+              </a:rPr>
+              <a:t>Body sway + breathing add ≥ 10 points of explained variance over audio.</a:t>
+            </a:r>
+          </a:p>
+        </p:txBody>
+      </p:sp>
+      <p:sp>
+        <p:nvSpPr>
+          <p:cNvPr id="10" name="TextBox 9"/>
           <p:cNvSpPr txBox="1"/>
           <p:nvPr/>
         </p:nvSpPr>
         <p:spPr>
           <a:xfrm>
-            <a:off x="502920" y="1371600"/>
-            <a:ext cx="11185855" cy="457200"/>
+            <a:off x="6583680" y="1325880"/>
+            <a:ext cx="5029200" cy="320040"/>
           </a:xfrm>
           <a:prstGeom prst="rect">
             <a:avLst/>
@@ -3665,372 +3857,927 @@
           <a:noFill/>
         </p:spPr>
         <p:txBody>
-          <a:bodyPr wrap="square" lIns="45720" rIns="45720">
+          <a:bodyPr wrap="square" anchor="t" lIns="27432" rIns="27432" tIns="18288" bIns="18288">
             <a:spAutoFit/>
           </a:bodyPr>
           <a:lstStyle/>
           <a:p>
-            <a:pPr algn="l"/>
-            <a:r>
-              <a:rPr sz="1600" b="0">
-                <a:solidFill>
-                  <a:srgbClr val="6E6A60"/>
-                </a:solidFill>
-                <a:latin typeface="Calibri"/>
-              </a:rPr>
-              <a:t>Six deliverables in total: four core + two stretch. All six shipped within the sprint window.</a:t>
-            </a:r>
-          </a:p>
-        </p:txBody>
-      </p:sp>
-      <p:graphicFrame>
-        <p:nvGraphicFramePr>
-          <p:cNvPr id="5" name="Table 4"/>
-          <p:cNvGraphicFramePr>
-            <a:graphicFrameLocks noGrp="1"/>
-          </p:cNvGraphicFramePr>
-          <p:nvPr/>
-        </p:nvGraphicFramePr>
-        <p:xfrm>
-          <a:off x="502920" y="2011680"/>
-          <a:ext cx="10972800" cy="4114800"/>
-        </p:xfrm>
-        <a:graphic>
-          <a:graphicData uri="http://schemas.openxmlformats.org/drawingml/2006/table">
-            <a:tbl>
-              <a:tblPr firstRow="1" bandRow="1">
-                <a:tableStyleId>{5C22544A-7EE6-4342-B048-85BDC9FD1C3A}</a:tableStyleId>
-              </a:tblPr>
-              <a:tblGrid>
-                <a:gridCol w="7772400"/>
-                <a:gridCol w="3200400"/>
-              </a:tblGrid>
-              <a:tr h="587828">
-                <a:tc>
-                  <a:txBody>
-                    <a:bodyPr/>
-                    <a:lstStyle/>
-                    <a:p>
-                      <a:r>
-                        <a:rPr sz="1400" b="1">
-                          <a:solidFill>
-                            <a:srgbClr val="FDFBF5"/>
-                          </a:solidFill>
-                          <a:latin typeface="Calibri"/>
-                        </a:rPr>
-                        <a:t>Deliverable</a:t>
-                      </a:r>
-                    </a:p>
-                  </a:txBody>
-                  <a:tcPr>
-                    <a:solidFill>
-                      <a:srgbClr val="0E4D5E"/>
-                    </a:solidFill>
-                  </a:tcPr>
-                </a:tc>
-                <a:tc>
-                  <a:txBody>
-                    <a:bodyPr/>
-                    <a:lstStyle/>
-                    <a:p>
-                      <a:r>
-                        <a:rPr sz="1400" b="1">
-                          <a:solidFill>
-                            <a:srgbClr val="FDFBF5"/>
-                          </a:solidFill>
-                          <a:latin typeface="Calibri"/>
-                        </a:rPr>
-                        <a:t>Status</a:t>
-                      </a:r>
-                    </a:p>
-                  </a:txBody>
-                  <a:tcPr>
-                    <a:solidFill>
-                      <a:srgbClr val="0E4D5E"/>
-                    </a:solidFill>
-                  </a:tcPr>
-                </a:tc>
-              </a:tr>
-              <a:tr h="587828">
-                <a:tc>
-                  <a:txBody>
-                    <a:bodyPr/>
-                    <a:lstStyle/>
-                    <a:p>
-                      <a:r>
-                        <a:rPr sz="1400" b="0">
-                          <a:solidFill>
-                            <a:srgbClr val="24262E"/>
-                          </a:solidFill>
-                          <a:latin typeface="Calibri"/>
-                        </a:rPr>
-                        <a:t>WP1 audio on all Dagstuhl pieces</a:t>
-                      </a:r>
-                    </a:p>
-                  </a:txBody>
-                  <a:tcPr>
-                    <a:solidFill>
-                      <a:srgbClr val="FAF6EC"/>
-                    </a:solidFill>
-                  </a:tcPr>
-                </a:tc>
-                <a:tc>
-                  <a:txBody>
-                    <a:bodyPr/>
-                    <a:lstStyle/>
-                    <a:p>
-                      <a:r>
-                        <a:rPr sz="1400" b="0">
-                          <a:solidFill>
-                            <a:srgbClr val="24262E"/>
-                          </a:solidFill>
-                          <a:latin typeface="Calibri"/>
-                        </a:rPr>
-                        <a:t>✓ shipped</a:t>
-                      </a:r>
-                    </a:p>
-                  </a:txBody>
-                  <a:tcPr>
-                    <a:solidFill>
-                      <a:srgbClr val="FAF6EC"/>
-                    </a:solidFill>
-                  </a:tcPr>
-                </a:tc>
-              </a:tr>
-              <a:tr h="587828">
-                <a:tc>
-                  <a:txBody>
-                    <a:bodyPr/>
-                    <a:lstStyle/>
-                    <a:p>
-                      <a:r>
-                        <a:rPr sz="1400" b="0">
-                          <a:solidFill>
-                            <a:srgbClr val="24262E"/>
-                          </a:solidFill>
-                          <a:latin typeface="Calibri"/>
-                        </a:rPr>
-                        <a:t>WP2 pose on 10 Tier-1 videos</a:t>
-                      </a:r>
-                    </a:p>
-                  </a:txBody>
-                  <a:tcPr>
-                    <a:solidFill>
-                      <a:srgbClr val="FDFBF5"/>
-                    </a:solidFill>
-                  </a:tcPr>
-                </a:tc>
-                <a:tc>
-                  <a:txBody>
-                    <a:bodyPr/>
-                    <a:lstStyle/>
-                    <a:p>
-                      <a:r>
-                        <a:rPr sz="1400" b="0">
-                          <a:solidFill>
-                            <a:srgbClr val="24262E"/>
-                          </a:solidFill>
-                          <a:latin typeface="Calibri"/>
-                        </a:rPr>
-                        <a:t>✓ shipped</a:t>
-                      </a:r>
-                    </a:p>
-                  </a:txBody>
-                  <a:tcPr>
-                    <a:solidFill>
-                      <a:srgbClr val="FDFBF5"/>
-                    </a:solidFill>
-                  </a:tcPr>
-                </a:tc>
-              </a:tr>
-              <a:tr h="587828">
-                <a:tc>
-                  <a:txBody>
-                    <a:bodyPr/>
-                    <a:lstStyle/>
-                    <a:p>
-                      <a:r>
-                        <a:rPr sz="1400" b="0">
-                          <a:solidFill>
-                            <a:srgbClr val="24262E"/>
-                          </a:solidFill>
-                          <a:latin typeface="Calibri"/>
-                        </a:rPr>
-                        <a:t>WP3 Granger + COP-GC on 5 pieces</a:t>
-                      </a:r>
-                    </a:p>
-                  </a:txBody>
-                  <a:tcPr>
-                    <a:solidFill>
-                      <a:srgbClr val="FAF6EC"/>
-                    </a:solidFill>
-                  </a:tcPr>
-                </a:tc>
-                <a:tc>
-                  <a:txBody>
-                    <a:bodyPr/>
-                    <a:lstStyle/>
-                    <a:p>
-                      <a:r>
-                        <a:rPr sz="1400" b="0">
-                          <a:solidFill>
-                            <a:srgbClr val="24262E"/>
-                          </a:solidFill>
-                          <a:latin typeface="Calibri"/>
-                        </a:rPr>
-                        <a:t>✓ shipped</a:t>
-                      </a:r>
-                    </a:p>
-                  </a:txBody>
-                  <a:tcPr>
-                    <a:solidFill>
-                      <a:srgbClr val="FAF6EC"/>
-                    </a:solidFill>
-                  </a:tcPr>
-                </a:tc>
-              </a:tr>
-              <a:tr h="587828">
-                <a:tc>
-                  <a:txBody>
-                    <a:bodyPr/>
-                    <a:lstStyle/>
-                    <a:p>
-                      <a:r>
-                        <a:rPr sz="1400" b="0">
-                          <a:solidFill>
-                            <a:srgbClr val="24262E"/>
-                          </a:solidFill>
-                          <a:latin typeface="Calibri"/>
-                        </a:rPr>
-                        <a:t>WP4 dashboard scaffold</a:t>
-                      </a:r>
-                    </a:p>
-                  </a:txBody>
-                  <a:tcPr>
-                    <a:solidFill>
-                      <a:srgbClr val="FDFBF5"/>
-                    </a:solidFill>
-                  </a:tcPr>
-                </a:tc>
-                <a:tc>
-                  <a:txBody>
-                    <a:bodyPr/>
-                    <a:lstStyle/>
-                    <a:p>
-                      <a:r>
-                        <a:rPr sz="1400" b="0">
-                          <a:solidFill>
-                            <a:srgbClr val="24262E"/>
-                          </a:solidFill>
-                          <a:latin typeface="Calibri"/>
-                        </a:rPr>
-                        <a:t>✓ shipped</a:t>
-                      </a:r>
-                    </a:p>
-                  </a:txBody>
-                  <a:tcPr>
-                    <a:solidFill>
-                      <a:srgbClr val="FDFBF5"/>
-                    </a:solidFill>
-                  </a:tcPr>
-                </a:tc>
-              </a:tr>
-              <a:tr h="587828">
-                <a:tc>
-                  <a:txBody>
-                    <a:bodyPr/>
-                    <a:lstStyle/>
-                    <a:p>
-                      <a:r>
-                        <a:rPr sz="1400" b="0">
-                          <a:solidFill>
-                            <a:srgbClr val="24262E"/>
-                          </a:solidFill>
-                          <a:latin typeface="Calibri"/>
-                        </a:rPr>
-                        <a:t>E(t) end-to-end + null (stretch)</a:t>
-                      </a:r>
-                    </a:p>
-                  </a:txBody>
-                  <a:tcPr>
-                    <a:solidFill>
-                      <a:srgbClr val="FAF6EC"/>
-                    </a:solidFill>
-                  </a:tcPr>
-                </a:tc>
-                <a:tc>
-                  <a:txBody>
-                    <a:bodyPr/>
-                    <a:lstStyle/>
-                    <a:p>
-                      <a:r>
-                        <a:rPr sz="1400" b="0">
-                          <a:solidFill>
-                            <a:srgbClr val="24262E"/>
-                          </a:solidFill>
-                          <a:latin typeface="Calibri"/>
-                        </a:rPr>
-                        <a:t>✓ shipped</a:t>
-                      </a:r>
-                    </a:p>
-                  </a:txBody>
-                  <a:tcPr>
-                    <a:solidFill>
-                      <a:srgbClr val="FAF6EC"/>
-                    </a:solidFill>
-                  </a:tcPr>
-                </a:tc>
-              </a:tr>
-              <a:tr h="587832">
-                <a:tc>
-                  <a:txBody>
-                    <a:bodyPr/>
-                    <a:lstStyle/>
-                    <a:p>
-                      <a:r>
-                        <a:rPr sz="1400" b="0">
-                          <a:solidFill>
-                            <a:srgbClr val="24262E"/>
-                          </a:solidFill>
-                          <a:latin typeface="Calibri"/>
-                        </a:rPr>
-                        <a:t>WP3 full-corpus metrics (stretch)</a:t>
-                      </a:r>
-                    </a:p>
-                  </a:txBody>
-                  <a:tcPr>
-                    <a:solidFill>
-                      <a:srgbClr val="FDFBF5"/>
-                    </a:solidFill>
-                  </a:tcPr>
-                </a:tc>
-                <a:tc>
-                  <a:txBody>
-                    <a:bodyPr/>
-                    <a:lstStyle/>
-                    <a:p>
-                      <a:r>
-                        <a:rPr sz="1400" b="0">
-                          <a:solidFill>
-                            <a:srgbClr val="24262E"/>
-                          </a:solidFill>
-                          <a:latin typeface="Calibri"/>
-                        </a:rPr>
-                        <a:t>✓ shipped</a:t>
-                      </a:r>
-                    </a:p>
-                  </a:txBody>
-                  <a:tcPr>
-                    <a:solidFill>
-                      <a:srgbClr val="FDFBF5"/>
-                    </a:solidFill>
-                  </a:tcPr>
-                </a:tc>
-              </a:tr>
-            </a:tbl>
-          </a:graphicData>
-        </a:graphic>
-      </p:graphicFrame>
+            <a:pPr algn="l">
+              <a:lnSpc>
+                <a:spcPct val="100000"/>
+              </a:lnSpc>
+            </a:pPr>
+            <a:r>
+              <a:rPr sz="1500" b="1">
+                <a:solidFill>
+                  <a:srgbClr val="0E4D5E"/>
+                </a:solidFill>
+                <a:latin typeface="Calibri"/>
+              </a:rPr>
+              <a:t>Where we are</a:t>
+            </a:r>
+          </a:p>
+        </p:txBody>
+      </p:sp>
+      <p:sp>
+        <p:nvSpPr>
+          <p:cNvPr id="11" name="Oval 10"/>
+          <p:cNvSpPr/>
+          <p:nvPr/>
+        </p:nvSpPr>
+        <p:spPr>
+          <a:xfrm>
+            <a:off x="6583680" y="1801368"/>
+            <a:ext cx="201168" cy="201168"/>
+          </a:xfrm>
+          <a:prstGeom prst="ellipse">
+            <a:avLst/>
+          </a:prstGeom>
+          <a:solidFill>
+            <a:srgbClr val="4F8E5A"/>
+          </a:solidFill>
+          <a:ln>
+            <a:noFill/>
+          </a:ln>
+        </p:spPr>
+        <p:style>
+          <a:lnRef idx="1">
+            <a:schemeClr val="accent1"/>
+          </a:lnRef>
+          <a:fillRef idx="3">
+            <a:schemeClr val="accent1"/>
+          </a:fillRef>
+          <a:effectRef idx="2">
+            <a:schemeClr val="accent1"/>
+          </a:effectRef>
+          <a:fontRef idx="minor">
+            <a:schemeClr val="lt1"/>
+          </a:fontRef>
+        </p:style>
+        <p:txBody>
+          <a:bodyPr rtlCol="0" anchor="ctr"/>
+          <a:lstStyle/>
+          <a:p>
+            <a:pPr algn="ctr"/>
+          </a:p>
+        </p:txBody>
+      </p:sp>
+      <p:sp>
+        <p:nvSpPr>
+          <p:cNvPr id="12" name="TextBox 11"/>
+          <p:cNvSpPr txBox="1"/>
+          <p:nvPr/>
+        </p:nvSpPr>
+        <p:spPr>
+          <a:xfrm>
+            <a:off x="6931152" y="1737360"/>
+            <a:ext cx="1143000" cy="457200"/>
+          </a:xfrm>
+          <a:prstGeom prst="rect">
+            <a:avLst/>
+          </a:prstGeom>
+          <a:noFill/>
+        </p:spPr>
+        <p:txBody>
+          <a:bodyPr wrap="square" anchor="t" lIns="27432" rIns="27432" tIns="18288" bIns="18288">
+            <a:spAutoFit/>
+          </a:bodyPr>
+          <a:lstStyle/>
+          <a:p>
+            <a:pPr algn="l">
+              <a:lnSpc>
+                <a:spcPct val="100000"/>
+              </a:lnSpc>
+            </a:pPr>
+            <a:r>
+              <a:rPr sz="1150" b="1">
+                <a:solidFill>
+                  <a:srgbClr val="0E4D5E"/>
+                </a:solidFill>
+                <a:latin typeface="Calibri"/>
+              </a:rPr>
+              <a:t>Apr 15-16</a:t>
+            </a:r>
+          </a:p>
+        </p:txBody>
+      </p:sp>
+      <p:sp>
+        <p:nvSpPr>
+          <p:cNvPr id="13" name="TextBox 12"/>
+          <p:cNvSpPr txBox="1"/>
+          <p:nvPr/>
+        </p:nvSpPr>
+        <p:spPr>
+          <a:xfrm>
+            <a:off x="8138160" y="1737360"/>
+            <a:ext cx="3474720" cy="502920"/>
+          </a:xfrm>
+          <a:prstGeom prst="rect">
+            <a:avLst/>
+          </a:prstGeom>
+          <a:noFill/>
+        </p:spPr>
+        <p:txBody>
+          <a:bodyPr wrap="square" anchor="t" lIns="27432" rIns="27432" tIns="18288" bIns="18288">
+            <a:spAutoFit/>
+          </a:bodyPr>
+          <a:lstStyle/>
+          <a:p>
+            <a:pPr algn="l">
+              <a:lnSpc>
+                <a:spcPct val="95000"/>
+              </a:lnSpc>
+            </a:pPr>
+            <a:r>
+              <a:rPr sz="1150" b="0">
+                <a:solidFill>
+                  <a:srgbClr val="24262E"/>
+                </a:solidFill>
+                <a:latin typeface="Calibri"/>
+              </a:rPr>
+              <a:t>Block course + status #1</a:t>
+            </a:r>
+          </a:p>
+        </p:txBody>
+      </p:sp>
+      <p:sp>
+        <p:nvSpPr>
+          <p:cNvPr id="14" name="Oval 13"/>
+          <p:cNvSpPr/>
+          <p:nvPr/>
+        </p:nvSpPr>
+        <p:spPr>
+          <a:xfrm>
+            <a:off x="6583680" y="2368296"/>
+            <a:ext cx="201168" cy="201168"/>
+          </a:xfrm>
+          <a:prstGeom prst="ellipse">
+            <a:avLst/>
+          </a:prstGeom>
+          <a:solidFill>
+            <a:srgbClr val="4F8E5A"/>
+          </a:solidFill>
+          <a:ln>
+            <a:noFill/>
+          </a:ln>
+        </p:spPr>
+        <p:style>
+          <a:lnRef idx="1">
+            <a:schemeClr val="accent1"/>
+          </a:lnRef>
+          <a:fillRef idx="3">
+            <a:schemeClr val="accent1"/>
+          </a:fillRef>
+          <a:effectRef idx="2">
+            <a:schemeClr val="accent1"/>
+          </a:effectRef>
+          <a:fontRef idx="minor">
+            <a:schemeClr val="lt1"/>
+          </a:fontRef>
+        </p:style>
+        <p:txBody>
+          <a:bodyPr rtlCol="0" anchor="ctr"/>
+          <a:lstStyle/>
+          <a:p>
+            <a:pPr algn="ctr"/>
+          </a:p>
+        </p:txBody>
+      </p:sp>
+      <p:sp>
+        <p:nvSpPr>
+          <p:cNvPr id="15" name="TextBox 14"/>
+          <p:cNvSpPr txBox="1"/>
+          <p:nvPr/>
+        </p:nvSpPr>
+        <p:spPr>
+          <a:xfrm>
+            <a:off x="6931152" y="2304288"/>
+            <a:ext cx="1143000" cy="457200"/>
+          </a:xfrm>
+          <a:prstGeom prst="rect">
+            <a:avLst/>
+          </a:prstGeom>
+          <a:noFill/>
+        </p:spPr>
+        <p:txBody>
+          <a:bodyPr wrap="square" anchor="t" lIns="27432" rIns="27432" tIns="18288" bIns="18288">
+            <a:spAutoFit/>
+          </a:bodyPr>
+          <a:lstStyle/>
+          <a:p>
+            <a:pPr algn="l">
+              <a:lnSpc>
+                <a:spcPct val="100000"/>
+              </a:lnSpc>
+            </a:pPr>
+            <a:r>
+              <a:rPr sz="1150" b="1">
+                <a:solidFill>
+                  <a:srgbClr val="0E4D5E"/>
+                </a:solidFill>
+                <a:latin typeface="Calibri"/>
+              </a:rPr>
+              <a:t>Apr 30</a:t>
+            </a:r>
+          </a:p>
+        </p:txBody>
+      </p:sp>
+      <p:sp>
+        <p:nvSpPr>
+          <p:cNvPr id="16" name="TextBox 15"/>
+          <p:cNvSpPr txBox="1"/>
+          <p:nvPr/>
+        </p:nvSpPr>
+        <p:spPr>
+          <a:xfrm>
+            <a:off x="8138160" y="2304288"/>
+            <a:ext cx="3474720" cy="502920"/>
+          </a:xfrm>
+          <a:prstGeom prst="rect">
+            <a:avLst/>
+          </a:prstGeom>
+          <a:noFill/>
+        </p:spPr>
+        <p:txBody>
+          <a:bodyPr wrap="square" anchor="t" lIns="27432" rIns="27432" tIns="18288" bIns="18288">
+            <a:spAutoFit/>
+          </a:bodyPr>
+          <a:lstStyle/>
+          <a:p>
+            <a:pPr algn="l">
+              <a:lnSpc>
+                <a:spcPct val="95000"/>
+              </a:lnSpc>
+            </a:pPr>
+            <a:r>
+              <a:rPr sz="1150" b="0">
+                <a:solidFill>
+                  <a:srgbClr val="24262E"/>
+                </a:solidFill>
+                <a:latin typeface="Calibri"/>
+              </a:rPr>
+              <a:t>Status #2 · goals + plan</a:t>
+            </a:r>
+          </a:p>
+        </p:txBody>
+      </p:sp>
+      <p:sp>
+        <p:nvSpPr>
+          <p:cNvPr id="17" name="Oval 16"/>
+          <p:cNvSpPr/>
+          <p:nvPr/>
+        </p:nvSpPr>
+        <p:spPr>
+          <a:xfrm>
+            <a:off x="6583680" y="2935224"/>
+            <a:ext cx="201168" cy="201168"/>
+          </a:xfrm>
+          <a:prstGeom prst="ellipse">
+            <a:avLst/>
+          </a:prstGeom>
+          <a:solidFill>
+            <a:srgbClr val="4F8E5A"/>
+          </a:solidFill>
+          <a:ln>
+            <a:noFill/>
+          </a:ln>
+        </p:spPr>
+        <p:style>
+          <a:lnRef idx="1">
+            <a:schemeClr val="accent1"/>
+          </a:lnRef>
+          <a:fillRef idx="3">
+            <a:schemeClr val="accent1"/>
+          </a:fillRef>
+          <a:effectRef idx="2">
+            <a:schemeClr val="accent1"/>
+          </a:effectRef>
+          <a:fontRef idx="minor">
+            <a:schemeClr val="lt1"/>
+          </a:fontRef>
+        </p:style>
+        <p:txBody>
+          <a:bodyPr rtlCol="0" anchor="ctr"/>
+          <a:lstStyle/>
+          <a:p>
+            <a:pPr algn="ctr"/>
+          </a:p>
+        </p:txBody>
+      </p:sp>
+      <p:sp>
+        <p:nvSpPr>
+          <p:cNvPr id="18" name="TextBox 17"/>
+          <p:cNvSpPr txBox="1"/>
+          <p:nvPr/>
+        </p:nvSpPr>
+        <p:spPr>
+          <a:xfrm>
+            <a:off x="6931152" y="2871216"/>
+            <a:ext cx="1143000" cy="457200"/>
+          </a:xfrm>
+          <a:prstGeom prst="rect">
+            <a:avLst/>
+          </a:prstGeom>
+          <a:noFill/>
+        </p:spPr>
+        <p:txBody>
+          <a:bodyPr wrap="square" anchor="t" lIns="27432" rIns="27432" tIns="18288" bIns="18288">
+            <a:spAutoFit/>
+          </a:bodyPr>
+          <a:lstStyle/>
+          <a:p>
+            <a:pPr algn="l">
+              <a:lnSpc>
+                <a:spcPct val="100000"/>
+              </a:lnSpc>
+            </a:pPr>
+            <a:r>
+              <a:rPr sz="1150" b="1">
+                <a:solidFill>
+                  <a:srgbClr val="0E4D5E"/>
+                </a:solidFill>
+                <a:latin typeface="Calibri"/>
+              </a:rPr>
+              <a:t>May 21</a:t>
+            </a:r>
+          </a:p>
+        </p:txBody>
+      </p:sp>
+      <p:sp>
+        <p:nvSpPr>
+          <p:cNvPr id="19" name="TextBox 18"/>
+          <p:cNvSpPr txBox="1"/>
+          <p:nvPr/>
+        </p:nvSpPr>
+        <p:spPr>
+          <a:xfrm>
+            <a:off x="8138160" y="2871216"/>
+            <a:ext cx="3474720" cy="502920"/>
+          </a:xfrm>
+          <a:prstGeom prst="rect">
+            <a:avLst/>
+          </a:prstGeom>
+          <a:noFill/>
+        </p:spPr>
+        <p:txBody>
+          <a:bodyPr wrap="square" anchor="t" lIns="27432" rIns="27432" tIns="18288" bIns="18288">
+            <a:spAutoFit/>
+          </a:bodyPr>
+          <a:lstStyle/>
+          <a:p>
+            <a:pPr algn="l">
+              <a:lnSpc>
+                <a:spcPct val="95000"/>
+              </a:lnSpc>
+            </a:pPr>
+            <a:r>
+              <a:rPr sz="1150" b="0">
+                <a:solidFill>
+                  <a:srgbClr val="24262E"/>
+                </a:solidFill>
+                <a:latin typeface="Calibri"/>
+              </a:rPr>
+              <a:t>Status #3 · all 4 WPs running + Virtual Mirror</a:t>
+            </a:r>
+          </a:p>
+        </p:txBody>
+      </p:sp>
+      <p:sp>
+        <p:nvSpPr>
+          <p:cNvPr id="20" name="Oval 19"/>
+          <p:cNvSpPr/>
+          <p:nvPr/>
+        </p:nvSpPr>
+        <p:spPr>
+          <a:xfrm>
+            <a:off x="6583680" y="3502152"/>
+            <a:ext cx="201168" cy="201168"/>
+          </a:xfrm>
+          <a:prstGeom prst="ellipse">
+            <a:avLst/>
+          </a:prstGeom>
+          <a:solidFill>
+            <a:srgbClr val="C4902A"/>
+          </a:solidFill>
+          <a:ln>
+            <a:noFill/>
+          </a:ln>
+        </p:spPr>
+        <p:style>
+          <a:lnRef idx="1">
+            <a:schemeClr val="accent1"/>
+          </a:lnRef>
+          <a:fillRef idx="3">
+            <a:schemeClr val="accent1"/>
+          </a:fillRef>
+          <a:effectRef idx="2">
+            <a:schemeClr val="accent1"/>
+          </a:effectRef>
+          <a:fontRef idx="minor">
+            <a:schemeClr val="lt1"/>
+          </a:fontRef>
+        </p:style>
+        <p:txBody>
+          <a:bodyPr rtlCol="0" anchor="ctr"/>
+          <a:lstStyle/>
+          <a:p>
+            <a:pPr algn="ctr"/>
+          </a:p>
+        </p:txBody>
+      </p:sp>
+      <p:sp>
+        <p:nvSpPr>
+          <p:cNvPr id="21" name="TextBox 20"/>
+          <p:cNvSpPr txBox="1"/>
+          <p:nvPr/>
+        </p:nvSpPr>
+        <p:spPr>
+          <a:xfrm>
+            <a:off x="6931152" y="3438144"/>
+            <a:ext cx="1143000" cy="457200"/>
+          </a:xfrm>
+          <a:prstGeom prst="rect">
+            <a:avLst/>
+          </a:prstGeom>
+          <a:noFill/>
+        </p:spPr>
+        <p:txBody>
+          <a:bodyPr wrap="square" anchor="t" lIns="27432" rIns="27432" tIns="18288" bIns="18288">
+            <a:spAutoFit/>
+          </a:bodyPr>
+          <a:lstStyle/>
+          <a:p>
+            <a:pPr algn="l">
+              <a:lnSpc>
+                <a:spcPct val="100000"/>
+              </a:lnSpc>
+            </a:pPr>
+            <a:r>
+              <a:rPr sz="1150" b="1">
+                <a:solidFill>
+                  <a:srgbClr val="C4902A"/>
+                </a:solidFill>
+                <a:latin typeface="Calibri"/>
+              </a:rPr>
+              <a:t>Jun 11</a:t>
+            </a:r>
+          </a:p>
+        </p:txBody>
+      </p:sp>
+      <p:sp>
+        <p:nvSpPr>
+          <p:cNvPr id="22" name="TextBox 21"/>
+          <p:cNvSpPr txBox="1"/>
+          <p:nvPr/>
+        </p:nvSpPr>
+        <p:spPr>
+          <a:xfrm>
+            <a:off x="8138160" y="3438144"/>
+            <a:ext cx="3474720" cy="502920"/>
+          </a:xfrm>
+          <a:prstGeom prst="rect">
+            <a:avLst/>
+          </a:prstGeom>
+          <a:noFill/>
+        </p:spPr>
+        <p:txBody>
+          <a:bodyPr wrap="square" anchor="t" lIns="27432" rIns="27432" tIns="18288" bIns="18288">
+            <a:spAutoFit/>
+          </a:bodyPr>
+          <a:lstStyle/>
+          <a:p>
+            <a:pPr algn="l">
+              <a:lnSpc>
+                <a:spcPct val="95000"/>
+              </a:lnSpc>
+            </a:pPr>
+            <a:r>
+              <a:rPr sz="1150" b="0">
+                <a:solidFill>
+                  <a:srgbClr val="C4902A"/>
+                </a:solidFill>
+                <a:latin typeface="Calibri"/>
+              </a:rPr>
+              <a:t>Status #4 · TODAY: E(t) operational</a:t>
+            </a:r>
+          </a:p>
+        </p:txBody>
+      </p:sp>
+      <p:sp>
+        <p:nvSpPr>
+          <p:cNvPr id="23" name="Oval 22"/>
+          <p:cNvSpPr/>
+          <p:nvPr/>
+        </p:nvSpPr>
+        <p:spPr>
+          <a:xfrm>
+            <a:off x="6583680" y="4069080"/>
+            <a:ext cx="201168" cy="201168"/>
+          </a:xfrm>
+          <a:prstGeom prst="ellipse">
+            <a:avLst/>
+          </a:prstGeom>
+          <a:solidFill>
+            <a:srgbClr val="CBD9DD"/>
+          </a:solidFill>
+          <a:ln>
+            <a:noFill/>
+          </a:ln>
+        </p:spPr>
+        <p:style>
+          <a:lnRef idx="1">
+            <a:schemeClr val="accent1"/>
+          </a:lnRef>
+          <a:fillRef idx="3">
+            <a:schemeClr val="accent1"/>
+          </a:fillRef>
+          <a:effectRef idx="2">
+            <a:schemeClr val="accent1"/>
+          </a:effectRef>
+          <a:fontRef idx="minor">
+            <a:schemeClr val="lt1"/>
+          </a:fontRef>
+        </p:style>
+        <p:txBody>
+          <a:bodyPr rtlCol="0" anchor="ctr"/>
+          <a:lstStyle/>
+          <a:p>
+            <a:pPr algn="ctr"/>
+          </a:p>
+        </p:txBody>
+      </p:sp>
+      <p:sp>
+        <p:nvSpPr>
+          <p:cNvPr id="24" name="TextBox 23"/>
+          <p:cNvSpPr txBox="1"/>
+          <p:nvPr/>
+        </p:nvSpPr>
+        <p:spPr>
+          <a:xfrm>
+            <a:off x="6931152" y="4005072"/>
+            <a:ext cx="1143000" cy="457200"/>
+          </a:xfrm>
+          <a:prstGeom prst="rect">
+            <a:avLst/>
+          </a:prstGeom>
+          <a:noFill/>
+        </p:spPr>
+        <p:txBody>
+          <a:bodyPr wrap="square" anchor="t" lIns="27432" rIns="27432" tIns="18288" bIns="18288">
+            <a:spAutoFit/>
+          </a:bodyPr>
+          <a:lstStyle/>
+          <a:p>
+            <a:pPr algn="l">
+              <a:lnSpc>
+                <a:spcPct val="100000"/>
+              </a:lnSpc>
+            </a:pPr>
+            <a:r>
+              <a:rPr sz="1150" b="1">
+                <a:solidFill>
+                  <a:srgbClr val="0E4D5E"/>
+                </a:solidFill>
+                <a:latin typeface="Calibri"/>
+              </a:rPr>
+              <a:t>Jun 25</a:t>
+            </a:r>
+          </a:p>
+        </p:txBody>
+      </p:sp>
+      <p:sp>
+        <p:nvSpPr>
+          <p:cNvPr id="25" name="TextBox 24"/>
+          <p:cNvSpPr txBox="1"/>
+          <p:nvPr/>
+        </p:nvSpPr>
+        <p:spPr>
+          <a:xfrm>
+            <a:off x="8138160" y="4005072"/>
+            <a:ext cx="3474720" cy="502920"/>
+          </a:xfrm>
+          <a:prstGeom prst="rect">
+            <a:avLst/>
+          </a:prstGeom>
+          <a:noFill/>
+        </p:spPr>
+        <p:txBody>
+          <a:bodyPr wrap="square" anchor="t" lIns="27432" rIns="27432" tIns="18288" bIns="18288">
+            <a:spAutoFit/>
+          </a:bodyPr>
+          <a:lstStyle/>
+          <a:p>
+            <a:pPr algn="l">
+              <a:lnSpc>
+                <a:spcPct val="95000"/>
+              </a:lnSpc>
+            </a:pPr>
+            <a:r>
+              <a:rPr sz="1150" b="0">
+                <a:solidFill>
+                  <a:srgbClr val="24262E"/>
+                </a:solidFill>
+                <a:latin typeface="Calibri"/>
+              </a:rPr>
+              <a:t>Status #5 · cross-regime results</a:t>
+            </a:r>
+          </a:p>
+        </p:txBody>
+      </p:sp>
+      <p:sp>
+        <p:nvSpPr>
+          <p:cNvPr id="26" name="Oval 25"/>
+          <p:cNvSpPr/>
+          <p:nvPr/>
+        </p:nvSpPr>
+        <p:spPr>
+          <a:xfrm>
+            <a:off x="6583680" y="4636008"/>
+            <a:ext cx="201168" cy="201168"/>
+          </a:xfrm>
+          <a:prstGeom prst="ellipse">
+            <a:avLst/>
+          </a:prstGeom>
+          <a:solidFill>
+            <a:srgbClr val="CBD9DD"/>
+          </a:solidFill>
+          <a:ln>
+            <a:noFill/>
+          </a:ln>
+        </p:spPr>
+        <p:style>
+          <a:lnRef idx="1">
+            <a:schemeClr val="accent1"/>
+          </a:lnRef>
+          <a:fillRef idx="3">
+            <a:schemeClr val="accent1"/>
+          </a:fillRef>
+          <a:effectRef idx="2">
+            <a:schemeClr val="accent1"/>
+          </a:effectRef>
+          <a:fontRef idx="minor">
+            <a:schemeClr val="lt1"/>
+          </a:fontRef>
+        </p:style>
+        <p:txBody>
+          <a:bodyPr rtlCol="0" anchor="ctr"/>
+          <a:lstStyle/>
+          <a:p>
+            <a:pPr algn="ctr"/>
+          </a:p>
+        </p:txBody>
+      </p:sp>
+      <p:sp>
+        <p:nvSpPr>
+          <p:cNvPr id="27" name="TextBox 26"/>
+          <p:cNvSpPr txBox="1"/>
+          <p:nvPr/>
+        </p:nvSpPr>
+        <p:spPr>
+          <a:xfrm>
+            <a:off x="6931152" y="4572000"/>
+            <a:ext cx="1143000" cy="457200"/>
+          </a:xfrm>
+          <a:prstGeom prst="rect">
+            <a:avLst/>
+          </a:prstGeom>
+          <a:noFill/>
+        </p:spPr>
+        <p:txBody>
+          <a:bodyPr wrap="square" anchor="t" lIns="27432" rIns="27432" tIns="18288" bIns="18288">
+            <a:spAutoFit/>
+          </a:bodyPr>
+          <a:lstStyle/>
+          <a:p>
+            <a:pPr algn="l">
+              <a:lnSpc>
+                <a:spcPct val="100000"/>
+              </a:lnSpc>
+            </a:pPr>
+            <a:r>
+              <a:rPr sz="1150" b="1">
+                <a:solidFill>
+                  <a:srgbClr val="0E4D5E"/>
+                </a:solidFill>
+                <a:latin typeface="Calibri"/>
+              </a:rPr>
+              <a:t>Jul 9</a:t>
+            </a:r>
+          </a:p>
+        </p:txBody>
+      </p:sp>
+      <p:sp>
+        <p:nvSpPr>
+          <p:cNvPr id="28" name="TextBox 27"/>
+          <p:cNvSpPr txBox="1"/>
+          <p:nvPr/>
+        </p:nvSpPr>
+        <p:spPr>
+          <a:xfrm>
+            <a:off x="8138160" y="4572000"/>
+            <a:ext cx="3474720" cy="502920"/>
+          </a:xfrm>
+          <a:prstGeom prst="rect">
+            <a:avLst/>
+          </a:prstGeom>
+          <a:noFill/>
+        </p:spPr>
+        <p:txBody>
+          <a:bodyPr wrap="square" anchor="t" lIns="27432" rIns="27432" tIns="18288" bIns="18288">
+            <a:spAutoFit/>
+          </a:bodyPr>
+          <a:lstStyle/>
+          <a:p>
+            <a:pPr algn="l">
+              <a:lnSpc>
+                <a:spcPct val="95000"/>
+              </a:lnSpc>
+            </a:pPr>
+            <a:r>
+              <a:rPr sz="1150" b="0">
+                <a:solidFill>
+                  <a:srgbClr val="24262E"/>
+                </a:solidFill>
+                <a:latin typeface="Calibri"/>
+              </a:rPr>
+              <a:t>Status #6 · paper draft review</a:t>
+            </a:r>
+          </a:p>
+        </p:txBody>
+      </p:sp>
+      <p:sp>
+        <p:nvSpPr>
+          <p:cNvPr id="29" name="Oval 28"/>
+          <p:cNvSpPr/>
+          <p:nvPr/>
+        </p:nvSpPr>
+        <p:spPr>
+          <a:xfrm>
+            <a:off x="6583680" y="5202936"/>
+            <a:ext cx="201168" cy="201168"/>
+          </a:xfrm>
+          <a:prstGeom prst="ellipse">
+            <a:avLst/>
+          </a:prstGeom>
+          <a:solidFill>
+            <a:srgbClr val="CBD9DD"/>
+          </a:solidFill>
+          <a:ln>
+            <a:noFill/>
+          </a:ln>
+        </p:spPr>
+        <p:style>
+          <a:lnRef idx="1">
+            <a:schemeClr val="accent1"/>
+          </a:lnRef>
+          <a:fillRef idx="3">
+            <a:schemeClr val="accent1"/>
+          </a:fillRef>
+          <a:effectRef idx="2">
+            <a:schemeClr val="accent1"/>
+          </a:effectRef>
+          <a:fontRef idx="minor">
+            <a:schemeClr val="lt1"/>
+          </a:fontRef>
+        </p:style>
+        <p:txBody>
+          <a:bodyPr rtlCol="0" anchor="ctr"/>
+          <a:lstStyle/>
+          <a:p>
+            <a:pPr algn="ctr"/>
+          </a:p>
+        </p:txBody>
+      </p:sp>
+      <p:sp>
+        <p:nvSpPr>
+          <p:cNvPr id="30" name="TextBox 29"/>
+          <p:cNvSpPr txBox="1"/>
+          <p:nvPr/>
+        </p:nvSpPr>
+        <p:spPr>
+          <a:xfrm>
+            <a:off x="6931152" y="5138928"/>
+            <a:ext cx="1143000" cy="457200"/>
+          </a:xfrm>
+          <a:prstGeom prst="rect">
+            <a:avLst/>
+          </a:prstGeom>
+          <a:noFill/>
+        </p:spPr>
+        <p:txBody>
+          <a:bodyPr wrap="square" anchor="t" lIns="27432" rIns="27432" tIns="18288" bIns="18288">
+            <a:spAutoFit/>
+          </a:bodyPr>
+          <a:lstStyle/>
+          <a:p>
+            <a:pPr algn="l">
+              <a:lnSpc>
+                <a:spcPct val="100000"/>
+              </a:lnSpc>
+            </a:pPr>
+            <a:r>
+              <a:rPr sz="1150" b="1">
+                <a:solidFill>
+                  <a:srgbClr val="0E4D5E"/>
+                </a:solidFill>
+                <a:latin typeface="Calibri"/>
+              </a:rPr>
+              <a:t>Jul 23 / 31</a:t>
+            </a:r>
+          </a:p>
+        </p:txBody>
+      </p:sp>
+      <p:sp>
+        <p:nvSpPr>
+          <p:cNvPr id="31" name="TextBox 30"/>
+          <p:cNvSpPr txBox="1"/>
+          <p:nvPr/>
+        </p:nvSpPr>
+        <p:spPr>
+          <a:xfrm>
+            <a:off x="8138160" y="5138928"/>
+            <a:ext cx="3474720" cy="502920"/>
+          </a:xfrm>
+          <a:prstGeom prst="rect">
+            <a:avLst/>
+          </a:prstGeom>
+          <a:noFill/>
+        </p:spPr>
+        <p:txBody>
+          <a:bodyPr wrap="square" anchor="t" lIns="27432" rIns="27432" tIns="18288" bIns="18288">
+            <a:spAutoFit/>
+          </a:bodyPr>
+          <a:lstStyle/>
+          <a:p>
+            <a:pPr algn="l">
+              <a:lnSpc>
+                <a:spcPct val="95000"/>
+              </a:lnSpc>
+            </a:pPr>
+            <a:r>
+              <a:rPr sz="1150" b="0">
+                <a:solidFill>
+                  <a:srgbClr val="24262E"/>
+                </a:solidFill>
+                <a:latin typeface="Calibri"/>
+              </a:rPr>
+              <a:t>Final presentation / final paper</a:t>
+            </a:r>
+          </a:p>
+        </p:txBody>
+      </p:sp>
+      <p:sp>
+        <p:nvSpPr>
+          <p:cNvPr id="32" name="Rounded Rectangle 31"/>
+          <p:cNvSpPr/>
+          <p:nvPr/>
+        </p:nvSpPr>
+        <p:spPr>
+          <a:xfrm>
+            <a:off x="502920" y="6144768"/>
+            <a:ext cx="11185855" cy="475488"/>
+          </a:xfrm>
+          <a:prstGeom prst="roundRect">
+            <a:avLst/>
+          </a:prstGeom>
+          <a:solidFill>
+            <a:srgbClr val="0E4D5E"/>
+          </a:solidFill>
+          <a:ln>
+            <a:noFill/>
+          </a:ln>
+        </p:spPr>
+        <p:style>
+          <a:lnRef idx="1">
+            <a:schemeClr val="accent1"/>
+          </a:lnRef>
+          <a:fillRef idx="3">
+            <a:schemeClr val="accent1"/>
+          </a:fillRef>
+          <a:effectRef idx="2">
+            <a:schemeClr val="accent1"/>
+          </a:effectRef>
+          <a:fontRef idx="minor">
+            <a:schemeClr val="lt1"/>
+          </a:fontRef>
+        </p:style>
+        <p:txBody>
+          <a:bodyPr rtlCol="0" anchor="ctr" wrap="square"/>
+          <a:lstStyle/>
+          <a:p>
+            <a:pPr algn="ctr"/>
+            <a:r>
+              <a:rPr sz="1500" b="1">
+                <a:solidFill>
+                  <a:srgbClr val="FDFBF5"/>
+                </a:solidFill>
+                <a:latin typeface="Calibri"/>
+              </a:rPr>
+              <a:t>Same goals as April, no scope drift. This iteration: make E(t) real.</a:t>
+            </a:r>
+          </a:p>
+        </p:txBody>
+      </p:sp>
     </p:spTree>
   </p:cSld>
   <p:clrMapOvr>
@@ -4065,8 +4812,8 @@
         </p:nvSpPr>
         <p:spPr>
           <a:xfrm>
-            <a:off x="502920" y="411480"/>
-            <a:ext cx="11185855" cy="548640"/>
+            <a:off x="502920" y="292608"/>
+            <a:ext cx="5486400" cy="274320"/>
           </a:xfrm>
           <a:prstGeom prst="rect">
             <a:avLst/>
@@ -4074,59 +4821,67 @@
           <a:noFill/>
         </p:spPr>
         <p:txBody>
-          <a:bodyPr wrap="square" lIns="45720" rIns="45720">
+          <a:bodyPr wrap="square" anchor="t" lIns="27432" rIns="27432" tIns="18288" bIns="18288">
             <a:spAutoFit/>
           </a:bodyPr>
           <a:lstStyle/>
           <a:p>
-            <a:pPr algn="l"/>
-            <a:r>
-              <a:rPr sz="2800" b="1">
+            <a:pPr algn="l">
+              <a:lnSpc>
+                <a:spcPct val="100000"/>
+              </a:lnSpc>
+            </a:pPr>
+            <a:r>
+              <a:rPr sz="1200" b="1">
+                <a:solidFill>
+                  <a:srgbClr val="C4902A"/>
+                </a:solidFill>
+                <a:latin typeface="Calibri"/>
+              </a:rPr>
+              <a:t>PROGRESS · LAST ITERATION</a:t>
+            </a:r>
+          </a:p>
+        </p:txBody>
+      </p:sp>
+      <p:sp>
+        <p:nvSpPr>
+          <p:cNvPr id="3" name="TextBox 2"/>
+          <p:cNvSpPr txBox="1"/>
+          <p:nvPr/>
+        </p:nvSpPr>
+        <p:spPr>
+          <a:xfrm>
+            <a:off x="502920" y="530352"/>
+            <a:ext cx="11185855" cy="566928"/>
+          </a:xfrm>
+          <a:prstGeom prst="rect">
+            <a:avLst/>
+          </a:prstGeom>
+          <a:noFill/>
+        </p:spPr>
+        <p:txBody>
+          <a:bodyPr wrap="square" anchor="t" lIns="27432" rIns="27432" tIns="18288" bIns="18288">
+            <a:spAutoFit/>
+          </a:bodyPr>
+          <a:lstStyle/>
+          <a:p>
+            <a:pPr algn="l">
+              <a:lnSpc>
+                <a:spcPct val="100000"/>
+              </a:lnSpc>
+            </a:pPr>
+            <a:r>
+              <a:rPr sz="2700" b="1">
                 <a:solidFill>
                   <a:srgbClr val="0E4D5E"/>
                 </a:solidFill>
                 <a:latin typeface="Calibri"/>
               </a:rPr>
-              <a:t>Headline: E(t) works, 5/5 pieces beat null at p &lt; 0.001</a:t>
-            </a:r>
-          </a:p>
-        </p:txBody>
-      </p:sp>
-      <p:cxnSp>
-        <p:nvCxnSpPr>
-          <p:cNvPr id="3" name="Connector 2"/>
-          <p:cNvCxnSpPr/>
-          <p:nvPr/>
-        </p:nvCxnSpPr>
-        <p:spPr>
-          <a:xfrm>
-            <a:off x="502920" y="960120"/>
-            <a:ext cx="1371600" cy="0"/>
-          </a:xfrm>
-          <a:prstGeom prst="line">
-            <a:avLst/>
-          </a:prstGeom>
-          <a:ln w="31750">
-            <a:solidFill>
-              <a:srgbClr val="C4902A"/>
-            </a:solidFill>
-          </a:ln>
-        </p:spPr>
-        <p:style>
-          <a:lnRef idx="2">
-            <a:schemeClr val="accent1"/>
-          </a:lnRef>
-          <a:fillRef idx="0">
-            <a:schemeClr val="accent1"/>
-          </a:fillRef>
-          <a:effectRef idx="1">
-            <a:schemeClr val="accent1"/>
-          </a:effectRef>
-          <a:fontRef idx="minor">
-            <a:schemeClr val="tx1"/>
-          </a:fontRef>
-        </p:style>
-      </p:cxnSp>
+              <a:t>Headline: E(t) is operational, 5/5 pieces beat chance</a:t>
+            </a:r>
+          </a:p>
+        </p:txBody>
+      </p:sp>
       <p:sp>
         <p:nvSpPr>
           <p:cNvPr id="4" name="TextBox 3"/>
@@ -4135,8 +4890,8 @@
         </p:nvSpPr>
         <p:spPr>
           <a:xfrm>
-            <a:off x="502920" y="1371600"/>
-            <a:ext cx="6949440" cy="457200"/>
+            <a:off x="10637215" y="6510528"/>
+            <a:ext cx="1097280" cy="274320"/>
           </a:xfrm>
           <a:prstGeom prst="rect">
             <a:avLst/>
@@ -4144,27 +4899,70 @@
           <a:noFill/>
         </p:spPr>
         <p:txBody>
-          <a:bodyPr wrap="square" lIns="45720" rIns="45720">
+          <a:bodyPr wrap="square" anchor="t" lIns="27432" rIns="27432" tIns="18288" bIns="18288">
             <a:spAutoFit/>
           </a:bodyPr>
           <a:lstStyle/>
           <a:p>
-            <a:pPr algn="l"/>
-            <a:r>
-              <a:rPr sz="1800" b="1">
-                <a:solidFill>
-                  <a:srgbClr val="4F8E5A"/>
-                </a:solidFill>
-                <a:latin typeface="Calibri"/>
-              </a:rPr>
-              <a:t>The Entanglement Index is operational end-to-end.</a:t>
+            <a:pPr algn="r">
+              <a:lnSpc>
+                <a:spcPct val="100000"/>
+              </a:lnSpc>
+            </a:pPr>
+            <a:r>
+              <a:rPr sz="1000" b="0">
+                <a:solidFill>
+                  <a:srgbClr val="6E6A60"/>
+                </a:solidFill>
+                <a:latin typeface="Calibri"/>
+              </a:rPr>
+              <a:t>3 / 8</a:t>
+            </a:r>
+          </a:p>
+        </p:txBody>
+      </p:sp>
+      <p:sp>
+        <p:nvSpPr>
+          <p:cNvPr id="5" name="TextBox 4"/>
+          <p:cNvSpPr txBox="1"/>
+          <p:nvPr/>
+        </p:nvSpPr>
+        <p:spPr>
+          <a:xfrm>
+            <a:off x="502920" y="6510528"/>
+            <a:ext cx="4572000" cy="274320"/>
+          </a:xfrm>
+          <a:prstGeom prst="rect">
+            <a:avLst/>
+          </a:prstGeom>
+          <a:noFill/>
+        </p:spPr>
+        <p:txBody>
+          <a:bodyPr wrap="square" anchor="t" lIns="27432" rIns="27432" tIns="18288" bIns="18288">
+            <a:spAutoFit/>
+          </a:bodyPr>
+          <a:lstStyle/>
+          <a:p>
+            <a:pPr algn="l">
+              <a:lnSpc>
+                <a:spcPct val="100000"/>
+              </a:lnSpc>
+            </a:pPr>
+            <a:r>
+              <a:rPr sz="1000" b="0">
+                <a:solidFill>
+                  <a:srgbClr val="6E6A60"/>
+                </a:solidFill>
+                <a:latin typeface="Calibri"/>
+              </a:rPr>
+              <a:t>Project 8 · Entanglement in Online Choir</a:t>
             </a:r>
           </a:p>
         </p:txBody>
       </p:sp>
       <p:pic>
         <p:nvPicPr>
-          <p:cNvPr id="5" name="Picture 4" descr="et_corpus_comparison.png"/>
+          <p:cNvPr id="6" name="Picture 5" descr="et_corpus_comparison.png"/>
           <p:cNvPicPr>
             <a:picLocks noChangeAspect="1"/>
           </p:cNvPicPr>
@@ -4178,8 +4976,8 @@
         </p:blipFill>
         <p:spPr>
           <a:xfrm>
-            <a:off x="502920" y="1920240"/>
-            <a:ext cx="7745579" cy="4206240"/>
+            <a:off x="502920" y="1476649"/>
+            <a:ext cx="7863840" cy="4270461"/>
           </a:xfrm>
           <a:prstGeom prst="rect">
             <a:avLst/>
@@ -4188,14 +4986,212 @@
       </p:pic>
       <p:sp>
         <p:nvSpPr>
-          <p:cNvPr id="6" name="TextBox 5"/>
+          <p:cNvPr id="7" name="Rounded Rectangle 6"/>
+          <p:cNvSpPr/>
+          <p:nvPr/>
+        </p:nvSpPr>
+        <p:spPr>
+          <a:xfrm>
+            <a:off x="8686800" y="1371600"/>
+            <a:ext cx="3017520" cy="1078992"/>
+          </a:xfrm>
+          <a:prstGeom prst="roundRect">
+            <a:avLst/>
+          </a:prstGeom>
+          <a:solidFill>
+            <a:srgbClr val="FDFBF5"/>
+          </a:solidFill>
+          <a:ln w="12700">
+            <a:solidFill>
+              <a:srgbClr val="CBD9DD"/>
+            </a:solidFill>
+          </a:ln>
+        </p:spPr>
+        <p:style>
+          <a:lnRef idx="1">
+            <a:schemeClr val="accent1"/>
+          </a:lnRef>
+          <a:fillRef idx="3">
+            <a:schemeClr val="accent1"/>
+          </a:fillRef>
+          <a:effectRef idx="2">
+            <a:schemeClr val="accent1"/>
+          </a:effectRef>
+          <a:fontRef idx="minor">
+            <a:schemeClr val="lt1"/>
+          </a:fontRef>
+        </p:style>
+        <p:txBody>
+          <a:bodyPr rtlCol="0" anchor="ctr" wrap="square"/>
+          <a:lstStyle/>
+          <a:p>
+            <a:pPr algn="ctr"/>
+            <a:r>
+              <a:rPr sz="3000" b="1">
+                <a:solidFill>
+                  <a:srgbClr val="0E4D5E"/>
+                </a:solidFill>
+                <a:latin typeface="Calibri"/>
+              </a:rPr>
+              <a:t>5 / 5</a:t>
+            </a:r>
+          </a:p>
+          <a:p>
+            <a:pPr algn="ctr"/>
+            <a:r>
+              <a:rPr sz="1150">
+                <a:solidFill>
+                  <a:srgbClr val="6E6A60"/>
+                </a:solidFill>
+                <a:latin typeface="Calibri"/>
+              </a:rPr>
+              <a:t>pieces significantly above the null (p &lt; 0.001)</a:t>
+            </a:r>
+          </a:p>
+        </p:txBody>
+      </p:sp>
+      <p:sp>
+        <p:nvSpPr>
+          <p:cNvPr id="8" name="Rounded Rectangle 7"/>
+          <p:cNvSpPr/>
+          <p:nvPr/>
+        </p:nvSpPr>
+        <p:spPr>
+          <a:xfrm>
+            <a:off x="8686800" y="2606040"/>
+            <a:ext cx="3017520" cy="1078992"/>
+          </a:xfrm>
+          <a:prstGeom prst="roundRect">
+            <a:avLst/>
+          </a:prstGeom>
+          <a:solidFill>
+            <a:srgbClr val="FDFBF5"/>
+          </a:solidFill>
+          <a:ln w="12700">
+            <a:solidFill>
+              <a:srgbClr val="CBD9DD"/>
+            </a:solidFill>
+          </a:ln>
+        </p:spPr>
+        <p:style>
+          <a:lnRef idx="1">
+            <a:schemeClr val="accent1"/>
+          </a:lnRef>
+          <a:fillRef idx="3">
+            <a:schemeClr val="accent1"/>
+          </a:fillRef>
+          <a:effectRef idx="2">
+            <a:schemeClr val="accent1"/>
+          </a:effectRef>
+          <a:fontRef idx="minor">
+            <a:schemeClr val="lt1"/>
+          </a:fontRef>
+        </p:style>
+        <p:txBody>
+          <a:bodyPr rtlCol="0" anchor="ctr" wrap="square"/>
+          <a:lstStyle/>
+          <a:p>
+            <a:pPr algn="ctr"/>
+            <a:r>
+              <a:rPr sz="3000" b="1">
+                <a:solidFill>
+                  <a:srgbClr val="0E4D5E"/>
+                </a:solidFill>
+                <a:latin typeface="Calibri"/>
+              </a:rPr>
+              <a:t>200</a:t>
+            </a:r>
+          </a:p>
+          <a:p>
+            <a:pPr algn="ctr"/>
+            <a:r>
+              <a:rPr sz="1150">
+                <a:solidFill>
+                  <a:srgbClr val="6E6A60"/>
+                </a:solidFill>
+                <a:latin typeface="Calibri"/>
+              </a:rPr>
+              <a:t>circular-shift permutations per piece</a:t>
+            </a:r>
+          </a:p>
+        </p:txBody>
+      </p:sp>
+      <p:sp>
+        <p:nvSpPr>
+          <p:cNvPr id="9" name="Rounded Rectangle 8"/>
+          <p:cNvSpPr/>
+          <p:nvPr/>
+        </p:nvSpPr>
+        <p:spPr>
+          <a:xfrm>
+            <a:off x="8686800" y="3840480"/>
+            <a:ext cx="3017520" cy="1078992"/>
+          </a:xfrm>
+          <a:prstGeom prst="roundRect">
+            <a:avLst/>
+          </a:prstGeom>
+          <a:solidFill>
+            <a:srgbClr val="FDFBF5"/>
+          </a:solidFill>
+          <a:ln w="12700">
+            <a:solidFill>
+              <a:srgbClr val="CBD9DD"/>
+            </a:solidFill>
+          </a:ln>
+        </p:spPr>
+        <p:style>
+          <a:lnRef idx="1">
+            <a:schemeClr val="accent1"/>
+          </a:lnRef>
+          <a:fillRef idx="3">
+            <a:schemeClr val="accent1"/>
+          </a:fillRef>
+          <a:effectRef idx="2">
+            <a:schemeClr val="accent1"/>
+          </a:effectRef>
+          <a:fontRef idx="minor">
+            <a:schemeClr val="lt1"/>
+          </a:fontRef>
+        </p:style>
+        <p:txBody>
+          <a:bodyPr rtlCol="0" anchor="ctr" wrap="square"/>
+          <a:lstStyle/>
+          <a:p>
+            <a:pPr algn="ctr"/>
+            <a:r>
+              <a:rPr sz="2400" b="1">
+                <a:solidFill>
+                  <a:srgbClr val="0E4D5E"/>
+                </a:solidFill>
+                <a:latin typeface="Calibri"/>
+              </a:rPr>
+              <a:t>0.57–0.80</a:t>
+            </a:r>
+          </a:p>
+          <a:p>
+            <a:pPr algn="ctr"/>
+            <a:r>
+              <a:rPr sz="1150">
+                <a:solidFill>
+                  <a:srgbClr val="6E6A60"/>
+                </a:solidFill>
+                <a:latin typeface="Calibri"/>
+              </a:rPr>
+              <a:t>observed mean E(t) across pieces</a:t>
+            </a:r>
+          </a:p>
+        </p:txBody>
+      </p:sp>
+      <p:sp>
+        <p:nvSpPr>
+          <p:cNvPr id="10" name="TextBox 9"/>
           <p:cNvSpPr txBox="1"/>
           <p:nvPr/>
         </p:nvSpPr>
         <p:spPr>
           <a:xfrm>
-            <a:off x="7772400" y="1920240"/>
-            <a:ext cx="3931920" cy="4297680"/>
+            <a:off x="8686800" y="5029200"/>
+            <a:ext cx="3017520" cy="1005840"/>
           </a:xfrm>
           <a:prstGeom prst="rect">
             <a:avLst/>
@@ -4203,120 +5199,76 @@
           <a:noFill/>
         </p:spPr>
         <p:txBody>
-          <a:bodyPr wrap="square" lIns="45720">
+          <a:bodyPr wrap="square" anchor="t" lIns="27432" rIns="27432" tIns="18288" bIns="18288">
             <a:spAutoFit/>
           </a:bodyPr>
           <a:lstStyle/>
           <a:p>
             <a:pPr algn="l">
-              <a:spcAft>
-                <a:spcPts val="800"/>
-              </a:spcAft>
+              <a:lnSpc>
+                <a:spcPct val="105000"/>
+              </a:lnSpc>
             </a:pPr>
             <a:r>
-              <a:rPr sz="1400">
-                <a:solidFill>
-                  <a:srgbClr val="24262E"/>
-                </a:solidFill>
-                <a:latin typeface="Calibri"/>
-              </a:rPr>
-              <a:t>•  All 5 Dagstuhl WP3 pieces tested.</a:t>
-            </a:r>
-          </a:p>
-          <a:p>
-            <a:pPr algn="l">
-              <a:spcAft>
-                <a:spcPts val="800"/>
-              </a:spcAft>
-            </a:pPr>
-            <a:r>
-              <a:rPr sz="1400">
-                <a:solidFill>
-                  <a:srgbClr val="24262E"/>
-                </a:solidFill>
-                <a:latin typeface="Calibri"/>
-              </a:rPr>
-              <a:t>•  200-shuffle circular-shift null per piece.</a:t>
-            </a:r>
-          </a:p>
-          <a:p>
-            <a:pPr algn="l">
-              <a:spcAft>
-                <a:spcPts val="800"/>
-              </a:spcAft>
-            </a:pPr>
-            <a:r>
-              <a:rPr sz="1400">
-                <a:solidFill>
-                  <a:srgbClr val="24262E"/>
-                </a:solidFill>
-                <a:latin typeface="Calibri"/>
-              </a:rPr>
-              <a:t>•  Observed mean E(t): 0.57 to 0.80.</a:t>
-            </a:r>
-          </a:p>
-          <a:p>
-            <a:pPr algn="l">
-              <a:spcAft>
-                <a:spcPts val="800"/>
-              </a:spcAft>
-            </a:pPr>
-            <a:r>
-              <a:rPr sz="1400">
-                <a:solidFill>
-                  <a:srgbClr val="24262E"/>
-                </a:solidFill>
-                <a:latin typeface="Calibri"/>
-              </a:rPr>
-              <a:t>•  Null mean: 0.48 to 0.61.</a:t>
-            </a:r>
-          </a:p>
-          <a:p>
-            <a:pPr algn="l">
-              <a:spcAft>
-                <a:spcPts val="800"/>
-              </a:spcAft>
-            </a:pPr>
-            <a:r>
-              <a:rPr sz="1400">
-                <a:solidFill>
-                  <a:srgbClr val="24262E"/>
-                </a:solidFill>
-                <a:latin typeface="Calibri"/>
-              </a:rPr>
-              <a:t>•  Every piece &gt; null by &gt;17 σ.</a:t>
-            </a:r>
-          </a:p>
-          <a:p>
-            <a:pPr algn="l">
-              <a:spcAft>
-                <a:spcPts val="800"/>
-              </a:spcAft>
-            </a:pPr>
-            <a:r>
-              <a:rPr sz="1400">
-                <a:solidFill>
-                  <a:srgbClr val="24262E"/>
-                </a:solidFill>
-                <a:latin typeface="Calibri"/>
-              </a:rPr>
-              <a:t>•  Pattern splits by piece, not size:</a:t>
-            </a:r>
-          </a:p>
-          <a:p>
-            <a:pPr algn="l">
-              <a:spcAft>
-                <a:spcPts val="800"/>
-              </a:spcAft>
-            </a:pPr>
-            <a:r>
-              <a:rPr sz="1400">
-                <a:solidFill>
-                  <a:srgbClr val="24262E"/>
-                </a:solidFill>
-                <a:latin typeface="Calibri"/>
-              </a:rPr>
-              <a:t>•     LI 0.74-0.80, TP 0.57-0.68.</a:t>
+              <a:rPr sz="1200" b="0">
+                <a:solidFill>
+                  <a:srgbClr val="6E6A60"/>
+                </a:solidFill>
+                <a:latin typeface="Calibri"/>
+              </a:rPr>
+              <a:t>Split follows the music: homophonic chant scores high, polyphony lower. The metric reacts to what the choir is doing.</a:t>
+            </a:r>
+          </a:p>
+        </p:txBody>
+      </p:sp>
+      <p:sp>
+        <p:nvSpPr>
+          <p:cNvPr id="11" name="Rounded Rectangle 10"/>
+          <p:cNvSpPr/>
+          <p:nvPr/>
+        </p:nvSpPr>
+        <p:spPr>
+          <a:xfrm>
+            <a:off x="502920" y="6144768"/>
+            <a:ext cx="11185855" cy="475488"/>
+          </a:xfrm>
+          <a:prstGeom prst="roundRect">
+            <a:avLst/>
+          </a:prstGeom>
+          <a:solidFill>
+            <a:srgbClr val="0E4D5E"/>
+          </a:solidFill>
+          <a:ln>
+            <a:noFill/>
+          </a:ln>
+        </p:spPr>
+        <p:style>
+          <a:lnRef idx="1">
+            <a:schemeClr val="accent1"/>
+          </a:lnRef>
+          <a:fillRef idx="3">
+            <a:schemeClr val="accent1"/>
+          </a:fillRef>
+          <a:effectRef idx="2">
+            <a:schemeClr val="accent1"/>
+          </a:effectRef>
+          <a:fontRef idx="minor">
+            <a:schemeClr val="lt1"/>
+          </a:fontRef>
+        </p:style>
+        <p:txBody>
+          <a:bodyPr rtlCol="0" anchor="ctr" wrap="square"/>
+          <a:lstStyle/>
+          <a:p>
+            <a:pPr algn="ctr"/>
+            <a:r>
+              <a:rPr sz="1500" b="1">
+                <a:solidFill>
+                  <a:srgbClr val="FDFBF5"/>
+                </a:solidFill>
+                <a:latin typeface="Calibri"/>
+              </a:rPr>
+              <a:t>The number we promised in April exists, is repeatable, and is statistically defensible.</a:t>
             </a:r>
           </a:p>
         </p:txBody>
@@ -4355,8 +5307,8 @@
         </p:nvSpPr>
         <p:spPr>
           <a:xfrm>
-            <a:off x="502920" y="411480"/>
-            <a:ext cx="11185855" cy="548640"/>
+            <a:off x="502920" y="292608"/>
+            <a:ext cx="5486400" cy="274320"/>
           </a:xfrm>
           <a:prstGeom prst="rect">
             <a:avLst/>
@@ -4364,59 +5316,67 @@
           <a:noFill/>
         </p:spPr>
         <p:txBody>
-          <a:bodyPr wrap="square" lIns="45720" rIns="45720">
+          <a:bodyPr wrap="square" anchor="t" lIns="27432" rIns="27432" tIns="18288" bIns="18288">
             <a:spAutoFit/>
           </a:bodyPr>
           <a:lstStyle/>
           <a:p>
-            <a:pPr algn="l"/>
-            <a:r>
-              <a:rPr sz="2800" b="1">
+            <a:pPr algn="l">
+              <a:lnSpc>
+                <a:spcPct val="100000"/>
+              </a:lnSpc>
+            </a:pPr>
+            <a:r>
+              <a:rPr sz="1200" b="1">
+                <a:solidFill>
+                  <a:srgbClr val="C4902A"/>
+                </a:solidFill>
+                <a:latin typeface="Calibri"/>
+              </a:rPr>
+              <a:t>PROGRESS · LAST ITERATION</a:t>
+            </a:r>
+          </a:p>
+        </p:txBody>
+      </p:sp>
+      <p:sp>
+        <p:nvSpPr>
+          <p:cNvPr id="3" name="TextBox 2"/>
+          <p:cNvSpPr txBox="1"/>
+          <p:nvPr/>
+        </p:nvSpPr>
+        <p:spPr>
+          <a:xfrm>
+            <a:off x="502920" y="530352"/>
+            <a:ext cx="11185855" cy="566928"/>
+          </a:xfrm>
+          <a:prstGeom prst="rect">
+            <a:avLst/>
+          </a:prstGeom>
+          <a:noFill/>
+        </p:spPr>
+        <p:txBody>
+          <a:bodyPr wrap="square" anchor="t" lIns="27432" rIns="27432" tIns="18288" bIns="18288">
+            <a:spAutoFit/>
+          </a:bodyPr>
+          <a:lstStyle/>
+          <a:p>
+            <a:pPr algn="l">
+              <a:lnSpc>
+                <a:spcPct val="100000"/>
+              </a:lnSpc>
+            </a:pPr>
+            <a:r>
+              <a:rPr sz="2700" b="1">
                 <a:solidFill>
                   <a:srgbClr val="0E4D5E"/>
                 </a:solidFill>
                 <a:latin typeface="Calibri"/>
               </a:rPr>
-              <a:t>WP1 audio scale: 25 Dagstuhl musical takes</a:t>
-            </a:r>
-          </a:p>
-        </p:txBody>
-      </p:sp>
-      <p:cxnSp>
-        <p:nvCxnSpPr>
-          <p:cNvPr id="3" name="Connector 2"/>
-          <p:cNvCxnSpPr/>
-          <p:nvPr/>
-        </p:nvCxnSpPr>
-        <p:spPr>
-          <a:xfrm>
-            <a:off x="502920" y="960120"/>
-            <a:ext cx="1371600" cy="0"/>
-          </a:xfrm>
-          <a:prstGeom prst="line">
-            <a:avLst/>
-          </a:prstGeom>
-          <a:ln w="31750">
-            <a:solidFill>
-              <a:srgbClr val="C4902A"/>
-            </a:solidFill>
-          </a:ln>
-        </p:spPr>
-        <p:style>
-          <a:lnRef idx="2">
-            <a:schemeClr val="accent1"/>
-          </a:lnRef>
-          <a:fillRef idx="0">
-            <a:schemeClr val="accent1"/>
-          </a:fillRef>
-          <a:effectRef idx="1">
-            <a:schemeClr val="accent1"/>
-          </a:effectRef>
-          <a:fontRef idx="minor">
-            <a:schemeClr val="tx1"/>
-          </a:fontRef>
-        </p:style>
-      </p:cxnSp>
+              <a:t>The audio + network engine behind E(t)</a:t>
+            </a:r>
+          </a:p>
+        </p:txBody>
+      </p:sp>
       <p:sp>
         <p:nvSpPr>
           <p:cNvPr id="4" name="TextBox 3"/>
@@ -4425,8 +5385,8 @@
         </p:nvSpPr>
         <p:spPr>
           <a:xfrm>
-            <a:off x="502920" y="1371600"/>
-            <a:ext cx="6400800" cy="5029200"/>
+            <a:off x="10637215" y="6510528"/>
+            <a:ext cx="1097280" cy="274320"/>
           </a:xfrm>
           <a:prstGeom prst="rect">
             <a:avLst/>
@@ -4434,143 +5394,70 @@
           <a:noFill/>
         </p:spPr>
         <p:txBody>
-          <a:bodyPr wrap="square" lIns="45720">
+          <a:bodyPr wrap="square" anchor="t" lIns="27432" rIns="27432" tIns="18288" bIns="18288">
             <a:spAutoFit/>
           </a:bodyPr>
           <a:lstStyle/>
           <a:p>
+            <a:pPr algn="r">
+              <a:lnSpc>
+                <a:spcPct val="100000"/>
+              </a:lnSpc>
+            </a:pPr>
+            <a:r>
+              <a:rPr sz="1000" b="0">
+                <a:solidFill>
+                  <a:srgbClr val="6E6A60"/>
+                </a:solidFill>
+                <a:latin typeface="Calibri"/>
+              </a:rPr>
+              <a:t>4 / 8</a:t>
+            </a:r>
+          </a:p>
+        </p:txBody>
+      </p:sp>
+      <p:sp>
+        <p:nvSpPr>
+          <p:cNvPr id="5" name="TextBox 4"/>
+          <p:cNvSpPr txBox="1"/>
+          <p:nvPr/>
+        </p:nvSpPr>
+        <p:spPr>
+          <a:xfrm>
+            <a:off x="502920" y="6510528"/>
+            <a:ext cx="4572000" cy="274320"/>
+          </a:xfrm>
+          <a:prstGeom prst="rect">
+            <a:avLst/>
+          </a:prstGeom>
+          <a:noFill/>
+        </p:spPr>
+        <p:txBody>
+          <a:bodyPr wrap="square" anchor="t" lIns="27432" rIns="27432" tIns="18288" bIns="18288">
+            <a:spAutoFit/>
+          </a:bodyPr>
+          <a:lstStyle/>
+          <a:p>
             <a:pPr algn="l">
-              <a:spcAft>
-                <a:spcPts val="800"/>
-              </a:spcAft>
+              <a:lnSpc>
+                <a:spcPct val="100000"/>
+              </a:lnSpc>
             </a:pPr>
             <a:r>
-              <a:rPr sz="1500">
-                <a:solidFill>
-                  <a:srgbClr val="24262E"/>
-                </a:solidFill>
-                <a:latin typeface="Calibri"/>
-              </a:rPr>
-              <a:t>•  Sprint 2: 1 piece (LI Quartet A Take 02).</a:t>
-            </a:r>
-          </a:p>
-          <a:p>
-            <a:pPr algn="l">
-              <a:spcAft>
-                <a:spcPts val="800"/>
-              </a:spcAft>
-            </a:pPr>
-            <a:r>
-              <a:rPr sz="1500">
-                <a:solidFill>
-                  <a:srgbClr val="24262E"/>
-                </a:solidFill>
-                <a:latin typeface="Calibri"/>
-              </a:rPr>
-              <a:t>•  Sprint 3: all 25 musical takes across Locus Iste + Tu Pauper Es.</a:t>
-            </a:r>
-          </a:p>
-          <a:p>
-            <a:pPr algn="l">
-              <a:spcAft>
-                <a:spcPts val="800"/>
-              </a:spcAft>
-            </a:pPr>
-            <a:r>
-              <a:rPr sz="1500">
-                <a:solidFill>
-                  <a:srgbClr val="24262E"/>
-                </a:solidFill>
-                <a:latin typeface="Calibri"/>
-              </a:rPr>
-              <a:t>•  130 newly extracted singer parquets, 288 pairwise couplings.</a:t>
-            </a:r>
-          </a:p>
-          <a:p>
-            <a:pPr algn="l">
-              <a:spcAft>
-                <a:spcPts val="800"/>
-              </a:spcAft>
-            </a:pPr>
-            <a:r>
-              <a:rPr sz="1500">
-                <a:solidFill>
-                  <a:srgbClr val="24262E"/>
-                </a:solidFill>
-                <a:latin typeface="Calibri"/>
-              </a:rPr>
-              <a:t>•  Total runtime: 78 minutes.</a:t>
-            </a:r>
-          </a:p>
-          <a:p>
-            <a:pPr algn="l">
-              <a:spcAft>
-                <a:spcPts val="800"/>
-              </a:spcAft>
-            </a:pPr>
-            <a:r>
-              <a:rPr sz="1500">
-                <a:solidFill>
-                  <a:srgbClr val="24262E"/>
-                </a:solidFill>
-                <a:latin typeface="Calibri"/>
-              </a:rPr>
-              <a:t>•  Pipeline resumable; prefers DYN &gt; HSM &gt; LRX mic per singer.</a:t>
-            </a:r>
-          </a:p>
-          <a:p>
-            <a:pPr algn="l">
-              <a:spcAft>
-                <a:spcPts val="800"/>
-              </a:spcAft>
-            </a:pPr>
-            <a:r>
-              <a:rPr sz="1500">
-                <a:solidFill>
-                  <a:srgbClr val="24262E"/>
-                </a:solidFill>
-                <a:latin typeface="Calibri"/>
-              </a:rPr>
-              <a:t>•  Pattern matches musical structure:</a:t>
-            </a:r>
-          </a:p>
-          <a:p>
-            <a:pPr algn="l">
-              <a:spcAft>
-                <a:spcPts val="800"/>
-              </a:spcAft>
-            </a:pPr>
-            <a:r>
-              <a:rPr sz="1500">
-                <a:solidFill>
-                  <a:srgbClr val="24262E"/>
-                </a:solidFill>
-                <a:latin typeface="Calibri"/>
-              </a:rPr>
-              <a:t>•     Within-section (LI Basses): 0.78–0.87</a:t>
-            </a:r>
-          </a:p>
-          <a:p>
-            <a:pPr algn="l">
-              <a:spcAft>
-                <a:spcPts val="800"/>
-              </a:spcAft>
-            </a:pPr>
-            <a:r>
-              <a:rPr sz="1500">
-                <a:solidFill>
-                  <a:srgbClr val="24262E"/>
-                </a:solidFill>
-                <a:latin typeface="Calibri"/>
-              </a:rPr>
-              <a:t>•     Full-choir polyphonic (TP): 0.40–0.53</a:t>
+              <a:rPr sz="1000" b="0">
+                <a:solidFill>
+                  <a:srgbClr val="6E6A60"/>
+                </a:solidFill>
+                <a:latin typeface="Calibri"/>
+              </a:rPr>
+              <a:t>Project 8 · Entanglement in Online Choir</a:t>
             </a:r>
           </a:p>
         </p:txBody>
       </p:sp>
       <p:pic>
         <p:nvPicPr>
-          <p:cNvPr id="5" name="Picture 4" descr="wp1_satb_coupling.png"/>
+          <p:cNvPr id="6" name="Picture 5" descr="wp3_influence_graphs_5pieces.png"/>
           <p:cNvPicPr>
             <a:picLocks noChangeAspect="1"/>
           </p:cNvPicPr>
@@ -4584,14 +5471,303 @@
         </p:blipFill>
         <p:spPr>
           <a:xfrm>
-            <a:off x="7315200" y="1463040"/>
-            <a:ext cx="4389120" cy="2768108"/>
+            <a:off x="696500" y="1280160"/>
+            <a:ext cx="7110919" cy="4663440"/>
           </a:xfrm>
           <a:prstGeom prst="rect">
             <a:avLst/>
           </a:prstGeom>
         </p:spPr>
       </p:pic>
+      <p:sp>
+        <p:nvSpPr>
+          <p:cNvPr id="7" name="Rounded Rectangle 6"/>
+          <p:cNvSpPr/>
+          <p:nvPr/>
+        </p:nvSpPr>
+        <p:spPr>
+          <a:xfrm>
+            <a:off x="8321040" y="1325880"/>
+            <a:ext cx="3383280" cy="914400"/>
+          </a:xfrm>
+          <a:prstGeom prst="roundRect">
+            <a:avLst/>
+          </a:prstGeom>
+          <a:solidFill>
+            <a:srgbClr val="FDFBF5"/>
+          </a:solidFill>
+          <a:ln w="12700">
+            <a:solidFill>
+              <a:srgbClr val="CBD9DD"/>
+            </a:solidFill>
+          </a:ln>
+        </p:spPr>
+        <p:style>
+          <a:lnRef idx="1">
+            <a:schemeClr val="accent1"/>
+          </a:lnRef>
+          <a:fillRef idx="3">
+            <a:schemeClr val="accent1"/>
+          </a:fillRef>
+          <a:effectRef idx="2">
+            <a:schemeClr val="accent1"/>
+          </a:effectRef>
+          <a:fontRef idx="minor">
+            <a:schemeClr val="lt1"/>
+          </a:fontRef>
+        </p:style>
+        <p:txBody>
+          <a:bodyPr rtlCol="0" anchor="ctr" wrap="square"/>
+          <a:lstStyle/>
+          <a:p>
+            <a:pPr algn="ctr"/>
+            <a:r>
+              <a:rPr sz="3000" b="1">
+                <a:solidFill>
+                  <a:srgbClr val="0E4D5E"/>
+                </a:solidFill>
+                <a:latin typeface="Calibri"/>
+              </a:rPr>
+              <a:t>25</a:t>
+            </a:r>
+          </a:p>
+          <a:p>
+            <a:pPr algn="ctr"/>
+            <a:r>
+              <a:rPr sz="1150">
+                <a:solidFill>
+                  <a:srgbClr val="6E6A60"/>
+                </a:solidFill>
+                <a:latin typeface="Calibri"/>
+              </a:rPr>
+              <a:t>Dagstuhl takes processed (was 1 last sprint)</a:t>
+            </a:r>
+          </a:p>
+        </p:txBody>
+      </p:sp>
+      <p:sp>
+        <p:nvSpPr>
+          <p:cNvPr id="8" name="Rounded Rectangle 7"/>
+          <p:cNvSpPr/>
+          <p:nvPr/>
+        </p:nvSpPr>
+        <p:spPr>
+          <a:xfrm>
+            <a:off x="8321040" y="2377440"/>
+            <a:ext cx="3383280" cy="914400"/>
+          </a:xfrm>
+          <a:prstGeom prst="roundRect">
+            <a:avLst/>
+          </a:prstGeom>
+          <a:solidFill>
+            <a:srgbClr val="FDFBF5"/>
+          </a:solidFill>
+          <a:ln w="12700">
+            <a:solidFill>
+              <a:srgbClr val="CBD9DD"/>
+            </a:solidFill>
+          </a:ln>
+        </p:spPr>
+        <p:style>
+          <a:lnRef idx="1">
+            <a:schemeClr val="accent1"/>
+          </a:lnRef>
+          <a:fillRef idx="3">
+            <a:schemeClr val="accent1"/>
+          </a:fillRef>
+          <a:effectRef idx="2">
+            <a:schemeClr val="accent1"/>
+          </a:effectRef>
+          <a:fontRef idx="minor">
+            <a:schemeClr val="lt1"/>
+          </a:fontRef>
+        </p:style>
+        <p:txBody>
+          <a:bodyPr rtlCol="0" anchor="ctr" wrap="square"/>
+          <a:lstStyle/>
+          <a:p>
+            <a:pPr algn="ctr"/>
+            <a:r>
+              <a:rPr sz="3000" b="1">
+                <a:solidFill>
+                  <a:srgbClr val="0E4D5E"/>
+                </a:solidFill>
+                <a:latin typeface="Calibri"/>
+              </a:rPr>
+              <a:t>288</a:t>
+            </a:r>
+          </a:p>
+          <a:p>
+            <a:pPr algn="ctr"/>
+            <a:r>
+              <a:rPr sz="1150">
+                <a:solidFill>
+                  <a:srgbClr val="6E6A60"/>
+                </a:solidFill>
+                <a:latin typeface="Calibri"/>
+              </a:rPr>
+              <a:t>pairwise audio couplings computed</a:t>
+            </a:r>
+          </a:p>
+        </p:txBody>
+      </p:sp>
+      <p:sp>
+        <p:nvSpPr>
+          <p:cNvPr id="9" name="Rounded Rectangle 8"/>
+          <p:cNvSpPr/>
+          <p:nvPr/>
+        </p:nvSpPr>
+        <p:spPr>
+          <a:xfrm>
+            <a:off x="8321040" y="3429000"/>
+            <a:ext cx="3383280" cy="914400"/>
+          </a:xfrm>
+          <a:prstGeom prst="roundRect">
+            <a:avLst/>
+          </a:prstGeom>
+          <a:solidFill>
+            <a:srgbClr val="FDFBF5"/>
+          </a:solidFill>
+          <a:ln w="12700">
+            <a:solidFill>
+              <a:srgbClr val="CBD9DD"/>
+            </a:solidFill>
+          </a:ln>
+        </p:spPr>
+        <p:style>
+          <a:lnRef idx="1">
+            <a:schemeClr val="accent1"/>
+          </a:lnRef>
+          <a:fillRef idx="3">
+            <a:schemeClr val="accent1"/>
+          </a:fillRef>
+          <a:effectRef idx="2">
+            <a:schemeClr val="accent1"/>
+          </a:effectRef>
+          <a:fontRef idx="minor">
+            <a:schemeClr val="lt1"/>
+          </a:fontRef>
+        </p:style>
+        <p:txBody>
+          <a:bodyPr rtlCol="0" anchor="ctr" wrap="square"/>
+          <a:lstStyle/>
+          <a:p>
+            <a:pPr algn="ctr"/>
+            <a:r>
+              <a:rPr sz="3000" b="1">
+                <a:solidFill>
+                  <a:srgbClr val="0E4D5E"/>
+                </a:solidFill>
+                <a:latin typeface="Calibri"/>
+              </a:rPr>
+              <a:t>2</a:t>
+            </a:r>
+          </a:p>
+          <a:p>
+            <a:pPr algn="ctr"/>
+            <a:r>
+              <a:rPr sz="1150">
+                <a:solidFill>
+                  <a:srgbClr val="6E6A60"/>
+                </a:solidFill>
+                <a:latin typeface="Calibri"/>
+              </a:rPr>
+              <a:t>causality methods per piece (Granger + COP-GC)</a:t>
+            </a:r>
+          </a:p>
+        </p:txBody>
+      </p:sp>
+      <p:sp>
+        <p:nvSpPr>
+          <p:cNvPr id="10" name="TextBox 9"/>
+          <p:cNvSpPr txBox="1"/>
+          <p:nvPr/>
+        </p:nvSpPr>
+        <p:spPr>
+          <a:xfrm>
+            <a:off x="8321040" y="4526280"/>
+            <a:ext cx="3383280" cy="1463040"/>
+          </a:xfrm>
+          <a:prstGeom prst="rect">
+            <a:avLst/>
+          </a:prstGeom>
+          <a:noFill/>
+        </p:spPr>
+        <p:txBody>
+          <a:bodyPr wrap="square" anchor="t" lIns="27432" rIns="27432" tIns="18288" bIns="18288">
+            <a:spAutoFit/>
+          </a:bodyPr>
+          <a:lstStyle/>
+          <a:p>
+            <a:pPr algn="l">
+              <a:lnSpc>
+                <a:spcPct val="105000"/>
+              </a:lnSpc>
+            </a:pPr>
+            <a:r>
+              <a:rPr sz="1200" b="0">
+                <a:solidFill>
+                  <a:srgbClr val="6E6A60"/>
+                </a:solidFill>
+                <a:latin typeface="Calibri"/>
+              </a:rPr>
+              <a:t>Methods agree on quartets, diverge on full choir (42 vs 25 of 56 edges). That gap is itself a finding: a third of standard edges rely on linear magnitude, not pattern structure.</a:t>
+            </a:r>
+          </a:p>
+        </p:txBody>
+      </p:sp>
+      <p:sp>
+        <p:nvSpPr>
+          <p:cNvPr id="11" name="Rounded Rectangle 10"/>
+          <p:cNvSpPr/>
+          <p:nvPr/>
+        </p:nvSpPr>
+        <p:spPr>
+          <a:xfrm>
+            <a:off x="502920" y="6144768"/>
+            <a:ext cx="11185855" cy="475488"/>
+          </a:xfrm>
+          <a:prstGeom prst="roundRect">
+            <a:avLst/>
+          </a:prstGeom>
+          <a:solidFill>
+            <a:srgbClr val="0E4D5E"/>
+          </a:solidFill>
+          <a:ln>
+            <a:noFill/>
+          </a:ln>
+        </p:spPr>
+        <p:style>
+          <a:lnRef idx="1">
+            <a:schemeClr val="accent1"/>
+          </a:lnRef>
+          <a:fillRef idx="3">
+            <a:schemeClr val="accent1"/>
+          </a:fillRef>
+          <a:effectRef idx="2">
+            <a:schemeClr val="accent1"/>
+          </a:effectRef>
+          <a:fontRef idx="minor">
+            <a:schemeClr val="lt1"/>
+          </a:fontRef>
+        </p:style>
+        <p:txBody>
+          <a:bodyPr rtlCol="0" anchor="ctr" wrap="square"/>
+          <a:lstStyle/>
+          <a:p>
+            <a:pPr algn="ctr"/>
+            <a:r>
+              <a:rPr sz="1500" b="1">
+                <a:solidFill>
+                  <a:srgbClr val="FDFBF5"/>
+                </a:solidFill>
+                <a:latin typeface="Calibri"/>
+              </a:rPr>
+              <a:t>Last sprint's flagship reproduces exactly, and the pipeline now scales.</a:t>
+            </a:r>
+          </a:p>
+        </p:txBody>
+      </p:sp>
     </p:spTree>
   </p:cSld>
   <p:clrMapOvr>
@@ -4626,8 +5802,8 @@
         </p:nvSpPr>
         <p:spPr>
           <a:xfrm>
-            <a:off x="502920" y="411480"/>
-            <a:ext cx="11185855" cy="548640"/>
+            <a:off x="502920" y="292608"/>
+            <a:ext cx="5486400" cy="274320"/>
           </a:xfrm>
           <a:prstGeom prst="rect">
             <a:avLst/>
@@ -4635,62 +5811,148 @@
           <a:noFill/>
         </p:spPr>
         <p:txBody>
-          <a:bodyPr wrap="square" lIns="45720" rIns="45720">
+          <a:bodyPr wrap="square" anchor="t" lIns="27432" rIns="27432" tIns="18288" bIns="18288">
             <a:spAutoFit/>
           </a:bodyPr>
           <a:lstStyle/>
           <a:p>
-            <a:pPr algn="l"/>
-            <a:r>
-              <a:rPr sz="2800" b="1">
+            <a:pPr algn="l">
+              <a:lnSpc>
+                <a:spcPct val="100000"/>
+              </a:lnSpc>
+            </a:pPr>
+            <a:r>
+              <a:rPr sz="1200" b="1">
+                <a:solidFill>
+                  <a:srgbClr val="C4902A"/>
+                </a:solidFill>
+                <a:latin typeface="Calibri"/>
+              </a:rPr>
+              <a:t>PROGRESS · LAST ITERATION</a:t>
+            </a:r>
+          </a:p>
+        </p:txBody>
+      </p:sp>
+      <p:sp>
+        <p:nvSpPr>
+          <p:cNvPr id="3" name="TextBox 2"/>
+          <p:cNvSpPr txBox="1"/>
+          <p:nvPr/>
+        </p:nvSpPr>
+        <p:spPr>
+          <a:xfrm>
+            <a:off x="502920" y="530352"/>
+            <a:ext cx="11185855" cy="566928"/>
+          </a:xfrm>
+          <a:prstGeom prst="rect">
+            <a:avLst/>
+          </a:prstGeom>
+          <a:noFill/>
+        </p:spPr>
+        <p:txBody>
+          <a:bodyPr wrap="square" anchor="t" lIns="27432" rIns="27432" tIns="18288" bIns="18288">
+            <a:spAutoFit/>
+          </a:bodyPr>
+          <a:lstStyle/>
+          <a:p>
+            <a:pPr algn="l">
+              <a:lnSpc>
+                <a:spcPct val="100000"/>
+              </a:lnSpc>
+            </a:pPr>
+            <a:r>
+              <a:rPr sz="2700" b="1">
                 <a:solidFill>
                   <a:srgbClr val="0E4D5E"/>
                 </a:solidFill>
                 <a:latin typeface="Calibri"/>
               </a:rPr>
-              <a:t>WP3 influence graph + COP-GC: Hacker flagship v2</a:t>
-            </a:r>
-          </a:p>
-        </p:txBody>
-      </p:sp>
-      <p:cxnSp>
-        <p:nvCxnSpPr>
-          <p:cNvPr id="3" name="Connector 2"/>
-          <p:cNvCxnSpPr/>
-          <p:nvPr/>
-        </p:nvCxnSpPr>
-        <p:spPr>
-          <a:xfrm>
-            <a:off x="502920" y="960120"/>
-            <a:ext cx="1371600" cy="0"/>
-          </a:xfrm>
-          <a:prstGeom prst="line">
-            <a:avLst/>
-          </a:prstGeom>
-          <a:ln w="31750">
-            <a:solidFill>
-              <a:srgbClr val="C4902A"/>
-            </a:solidFill>
-          </a:ln>
-        </p:spPr>
-        <p:style>
-          <a:lnRef idx="2">
-            <a:schemeClr val="accent1"/>
-          </a:lnRef>
-          <a:fillRef idx="0">
-            <a:schemeClr val="accent1"/>
-          </a:fillRef>
-          <a:effectRef idx="1">
-            <a:schemeClr val="accent1"/>
-          </a:effectRef>
-          <a:fontRef idx="minor">
-            <a:schemeClr val="tx1"/>
-          </a:fontRef>
-        </p:style>
-      </p:cxnSp>
+              <a:t>Video features + the dashboard taking shape</a:t>
+            </a:r>
+          </a:p>
+        </p:txBody>
+      </p:sp>
+      <p:sp>
+        <p:nvSpPr>
+          <p:cNvPr id="4" name="TextBox 3"/>
+          <p:cNvSpPr txBox="1"/>
+          <p:nvPr/>
+        </p:nvSpPr>
+        <p:spPr>
+          <a:xfrm>
+            <a:off x="10637215" y="6510528"/>
+            <a:ext cx="1097280" cy="274320"/>
+          </a:xfrm>
+          <a:prstGeom prst="rect">
+            <a:avLst/>
+          </a:prstGeom>
+          <a:noFill/>
+        </p:spPr>
+        <p:txBody>
+          <a:bodyPr wrap="square" anchor="t" lIns="27432" rIns="27432" tIns="18288" bIns="18288">
+            <a:spAutoFit/>
+          </a:bodyPr>
+          <a:lstStyle/>
+          <a:p>
+            <a:pPr algn="r">
+              <a:lnSpc>
+                <a:spcPct val="100000"/>
+              </a:lnSpc>
+            </a:pPr>
+            <a:r>
+              <a:rPr sz="1000" b="0">
+                <a:solidFill>
+                  <a:srgbClr val="6E6A60"/>
+                </a:solidFill>
+                <a:latin typeface="Calibri"/>
+              </a:rPr>
+              <a:t>5 / 8</a:t>
+            </a:r>
+          </a:p>
+        </p:txBody>
+      </p:sp>
+      <p:sp>
+        <p:nvSpPr>
+          <p:cNvPr id="5" name="TextBox 4"/>
+          <p:cNvSpPr txBox="1"/>
+          <p:nvPr/>
+        </p:nvSpPr>
+        <p:spPr>
+          <a:xfrm>
+            <a:off x="502920" y="6510528"/>
+            <a:ext cx="4572000" cy="274320"/>
+          </a:xfrm>
+          <a:prstGeom prst="rect">
+            <a:avLst/>
+          </a:prstGeom>
+          <a:noFill/>
+        </p:spPr>
+        <p:txBody>
+          <a:bodyPr wrap="square" anchor="t" lIns="27432" rIns="27432" tIns="18288" bIns="18288">
+            <a:spAutoFit/>
+          </a:bodyPr>
+          <a:lstStyle/>
+          <a:p>
+            <a:pPr algn="l">
+              <a:lnSpc>
+                <a:spcPct val="100000"/>
+              </a:lnSpc>
+            </a:pPr>
+            <a:r>
+              <a:rPr sz="1000" b="0">
+                <a:solidFill>
+                  <a:srgbClr val="6E6A60"/>
+                </a:solidFill>
+                <a:latin typeface="Calibri"/>
+              </a:rPr>
+              <a:t>Project 8 · Entanglement in Online Choir</a:t>
+            </a:r>
+          </a:p>
+        </p:txBody>
+      </p:sp>
       <p:pic>
         <p:nvPicPr>
-          <p:cNvPr id="4" name="Picture 3" descr="wp3_influence_graphs_5pieces.png"/>
+          <p:cNvPr id="6" name="Picture 5" descr="wp4_dashboard_scaffold.png"/>
           <p:cNvPicPr>
             <a:picLocks noChangeAspect="1"/>
           </p:cNvPicPr>
@@ -4704,24 +5966,246 @@
         </p:blipFill>
         <p:spPr>
           <a:xfrm>
-            <a:off x="502920" y="1371600"/>
-            <a:ext cx="7315200" cy="4797410"/>
+            <a:off x="924760" y="1280160"/>
+            <a:ext cx="5008480" cy="4663440"/>
           </a:xfrm>
           <a:prstGeom prst="rect">
             <a:avLst/>
           </a:prstGeom>
         </p:spPr>
       </p:pic>
-      <p:sp>
-        <p:nvSpPr>
-          <p:cNvPr id="5" name="TextBox 4"/>
+      <p:pic>
+        <p:nvPicPr>
+          <p:cNvPr id="7" name="Picture 6" descr="wp2_visual_features_v2.png"/>
+          <p:cNvPicPr>
+            <a:picLocks noChangeAspect="1"/>
+          </p:cNvPicPr>
+          <p:nvPr/>
+        </p:nvPicPr>
+        <p:blipFill>
+          <a:blip r:embed="rId3"/>
+          <a:stretch>
+            <a:fillRect/>
+          </a:stretch>
+        </p:blipFill>
+        <p:spPr>
+          <a:xfrm>
+            <a:off x="6537960" y="1308382"/>
+            <a:ext cx="3108960" cy="1955236"/>
+          </a:xfrm>
+          <a:prstGeom prst="rect">
+            <a:avLst/>
+          </a:prstGeom>
+        </p:spPr>
+      </p:pic>
+      <p:sp>
+        <p:nvSpPr>
+          <p:cNvPr id="8" name="Rounded Rectangle 7"/>
+          <p:cNvSpPr/>
+          <p:nvPr/>
+        </p:nvSpPr>
+        <p:spPr>
+          <a:xfrm>
+            <a:off x="9829800" y="1325880"/>
+            <a:ext cx="1874519" cy="914400"/>
+          </a:xfrm>
+          <a:prstGeom prst="roundRect">
+            <a:avLst/>
+          </a:prstGeom>
+          <a:solidFill>
+            <a:srgbClr val="FDFBF5"/>
+          </a:solidFill>
+          <a:ln w="12700">
+            <a:solidFill>
+              <a:srgbClr val="CBD9DD"/>
+            </a:solidFill>
+          </a:ln>
+        </p:spPr>
+        <p:style>
+          <a:lnRef idx="1">
+            <a:schemeClr val="accent1"/>
+          </a:lnRef>
+          <a:fillRef idx="3">
+            <a:schemeClr val="accent1"/>
+          </a:fillRef>
+          <a:effectRef idx="2">
+            <a:schemeClr val="accent1"/>
+          </a:effectRef>
+          <a:fontRef idx="minor">
+            <a:schemeClr val="lt1"/>
+          </a:fontRef>
+        </p:style>
+        <p:txBody>
+          <a:bodyPr rtlCol="0" anchor="ctr" wrap="square"/>
+          <a:lstStyle/>
+          <a:p>
+            <a:pPr algn="ctr"/>
+            <a:r>
+              <a:rPr sz="2600" b="1">
+                <a:solidFill>
+                  <a:srgbClr val="0E4D5E"/>
+                </a:solidFill>
+                <a:latin typeface="Calibri"/>
+              </a:rPr>
+              <a:t>10</a:t>
+            </a:r>
+          </a:p>
+          <a:p>
+            <a:pPr algn="ctr"/>
+            <a:r>
+              <a:rPr sz="1150">
+                <a:solidFill>
+                  <a:srgbClr val="6E6A60"/>
+                </a:solidFill>
+                <a:latin typeface="Calibri"/>
+              </a:rPr>
+              <a:t>Tier-1 videos pose-processed</a:t>
+            </a:r>
+          </a:p>
+        </p:txBody>
+      </p:sp>
+      <p:sp>
+        <p:nvSpPr>
+          <p:cNvPr id="9" name="Rounded Rectangle 8"/>
+          <p:cNvSpPr/>
+          <p:nvPr/>
+        </p:nvSpPr>
+        <p:spPr>
+          <a:xfrm>
+            <a:off x="9829800" y="2377440"/>
+            <a:ext cx="1874519" cy="914400"/>
+          </a:xfrm>
+          <a:prstGeom prst="roundRect">
+            <a:avLst/>
+          </a:prstGeom>
+          <a:solidFill>
+            <a:srgbClr val="FDFBF5"/>
+          </a:solidFill>
+          <a:ln w="12700">
+            <a:solidFill>
+              <a:srgbClr val="CBD9DD"/>
+            </a:solidFill>
+          </a:ln>
+        </p:spPr>
+        <p:style>
+          <a:lnRef idx="1">
+            <a:schemeClr val="accent1"/>
+          </a:lnRef>
+          <a:fillRef idx="3">
+            <a:schemeClr val="accent1"/>
+          </a:fillRef>
+          <a:effectRef idx="2">
+            <a:schemeClr val="accent1"/>
+          </a:effectRef>
+          <a:fontRef idx="minor">
+            <a:schemeClr val="lt1"/>
+          </a:fontRef>
+        </p:style>
+        <p:txBody>
+          <a:bodyPr rtlCol="0" anchor="ctr" wrap="square"/>
+          <a:lstStyle/>
+          <a:p>
+            <a:pPr algn="ctr"/>
+            <a:r>
+              <a:rPr sz="2600" b="1">
+                <a:solidFill>
+                  <a:srgbClr val="0E4D5E"/>
+                </a:solidFill>
+                <a:latin typeface="Calibri"/>
+              </a:rPr>
+              <a:t>5/10</a:t>
+            </a:r>
+          </a:p>
+          <a:p>
+            <a:pPr algn="ctr"/>
+            <a:r>
+              <a:rPr sz="1150">
+                <a:solidFill>
+                  <a:srgbClr val="6E6A60"/>
+                </a:solidFill>
+                <a:latin typeface="Calibri"/>
+              </a:rPr>
+              <a:t>pass 50% detection floor</a:t>
+            </a:r>
+          </a:p>
+        </p:txBody>
+      </p:sp>
+      <p:sp>
+        <p:nvSpPr>
+          <p:cNvPr id="10" name="Rounded Rectangle 9"/>
+          <p:cNvSpPr/>
+          <p:nvPr/>
+        </p:nvSpPr>
+        <p:spPr>
+          <a:xfrm>
+            <a:off x="9829800" y="3429000"/>
+            <a:ext cx="1874519" cy="914400"/>
+          </a:xfrm>
+          <a:prstGeom prst="roundRect">
+            <a:avLst/>
+          </a:prstGeom>
+          <a:solidFill>
+            <a:srgbClr val="FDFBF5"/>
+          </a:solidFill>
+          <a:ln w="12700">
+            <a:solidFill>
+              <a:srgbClr val="CBD9DD"/>
+            </a:solidFill>
+          </a:ln>
+        </p:spPr>
+        <p:style>
+          <a:lnRef idx="1">
+            <a:schemeClr val="accent1"/>
+          </a:lnRef>
+          <a:fillRef idx="3">
+            <a:schemeClr val="accent1"/>
+          </a:fillRef>
+          <a:effectRef idx="2">
+            <a:schemeClr val="accent1"/>
+          </a:effectRef>
+          <a:fontRef idx="minor">
+            <a:schemeClr val="lt1"/>
+          </a:fontRef>
+        </p:style>
+        <p:txBody>
+          <a:bodyPr rtlCol="0" anchor="ctr" wrap="square"/>
+          <a:lstStyle/>
+          <a:p>
+            <a:pPr algn="ctr"/>
+            <a:r>
+              <a:rPr sz="2600" b="1">
+                <a:solidFill>
+                  <a:srgbClr val="0E4D5E"/>
+                </a:solidFill>
+                <a:latin typeface="Calibri"/>
+              </a:rPr>
+              <a:t>23/23</a:t>
+            </a:r>
+          </a:p>
+          <a:p>
+            <a:pPr algn="ctr"/>
+            <a:r>
+              <a:rPr sz="1150">
+                <a:solidFill>
+                  <a:srgbClr val="6E6A60"/>
+                </a:solidFill>
+                <a:latin typeface="Calibri"/>
+              </a:rPr>
+              <a:t>tests green</a:t>
+            </a:r>
+          </a:p>
+        </p:txBody>
+      </p:sp>
+      <p:sp>
+        <p:nvSpPr>
+          <p:cNvPr id="11" name="TextBox 10"/>
           <p:cNvSpPr txBox="1"/>
           <p:nvPr/>
         </p:nvSpPr>
         <p:spPr>
           <a:xfrm>
-            <a:off x="8046720" y="1371600"/>
-            <a:ext cx="3657600" cy="5029200"/>
+            <a:off x="6537960" y="3520440"/>
+            <a:ext cx="5120640" cy="2377440"/>
           </a:xfrm>
           <a:prstGeom prst="rect">
             <a:avLst/>
@@ -4729,136 +6213,77 @@
           <a:noFill/>
         </p:spPr>
         <p:txBody>
-          <a:bodyPr wrap="square" lIns="45720">
+          <a:bodyPr wrap="square" anchor="t" lIns="27432" rIns="27432" tIns="18288" bIns="18288">
             <a:spAutoFit/>
           </a:bodyPr>
           <a:lstStyle/>
           <a:p>
             <a:pPr algn="l">
-              <a:spcAft>
-                <a:spcPts val="800"/>
-              </a:spcAft>
+              <a:lnSpc>
+                <a:spcPct val="108000"/>
+              </a:lnSpc>
             </a:pPr>
             <a:r>
-              <a:rPr sz="1300">
+              <a:rPr sz="1200" b="0">
                 <a:solidFill>
                   <a:srgbClr val="24262E"/>
                 </a:solidFill>
                 <a:latin typeface="Calibri"/>
               </a:rPr>
-              <a:t>•  5 pieces × 2 methods.</a:t>
-            </a:r>
-          </a:p>
-          <a:p>
-            <a:pPr algn="l">
-              <a:spcAft>
-                <a:spcPts val="800"/>
-              </a:spcAft>
-            </a:pPr>
-            <a:r>
-              <a:rPr sz="1300">
-                <a:solidFill>
-                  <a:srgbClr val="24262E"/>
-                </a:solidFill>
-                <a:latin typeface="Calibri"/>
-              </a:rPr>
-              <a:t>•  Standard Granger + COP-GC (Zanin 2021).</a:t>
-            </a:r>
-          </a:p>
-          <a:p>
-            <a:pPr algn="l">
-              <a:spcAft>
-                <a:spcPts val="800"/>
-              </a:spcAft>
-            </a:pPr>
-            <a:r>
-              <a:rPr sz="1300">
-                <a:solidFill>
-                  <a:srgbClr val="24262E"/>
-                </a:solidFill>
-                <a:latin typeface="Calibri"/>
-              </a:rPr>
-              <a:t>•  Sprint-2 reference reproduces:</a:t>
-            </a:r>
-          </a:p>
-          <a:p>
-            <a:pPr algn="l">
-              <a:spcAft>
-                <a:spcPts val="800"/>
-              </a:spcAft>
-            </a:pPr>
-            <a:r>
-              <a:rPr sz="1300">
-                <a:solidFill>
-                  <a:srgbClr val="24262E"/>
-                </a:solidFill>
-                <a:latin typeface="Calibri"/>
-              </a:rPr>
-              <a:t>•     11/12 edges, density 0.917, S leads.</a:t>
-            </a:r>
-          </a:p>
-          <a:p>
-            <a:pPr algn="l">
-              <a:spcAft>
-                <a:spcPts val="800"/>
-              </a:spcAft>
-            </a:pPr>
-            <a:r>
-              <a:rPr sz="1300">
-                <a:solidFill>
-                  <a:srgbClr val="24262E"/>
-                </a:solidFill>
-                <a:latin typeface="Calibri"/>
-              </a:rPr>
-              <a:t>•  Method divergence,TP_FullChoir:</a:t>
-            </a:r>
-          </a:p>
-          <a:p>
-            <a:pPr algn="l">
-              <a:spcAft>
-                <a:spcPts val="800"/>
-              </a:spcAft>
-            </a:pPr>
-            <a:r>
-              <a:rPr sz="1300">
-                <a:solidFill>
-                  <a:srgbClr val="24262E"/>
-                </a:solidFill>
-                <a:latin typeface="Calibri"/>
-              </a:rPr>
-              <a:t>•     Standard: 42/56 edges significant</a:t>
-            </a:r>
-          </a:p>
-          <a:p>
-            <a:pPr algn="l">
-              <a:spcAft>
-                <a:spcPts val="800"/>
-              </a:spcAft>
-            </a:pPr>
-            <a:r>
-              <a:rPr sz="1300">
-                <a:solidFill>
-                  <a:srgbClr val="24262E"/>
-                </a:solidFill>
-                <a:latin typeface="Calibri"/>
-              </a:rPr>
-              <a:t>•     COP-GC:   25/56 edges significant</a:t>
-            </a:r>
-          </a:p>
-          <a:p>
-            <a:pPr algn="l">
-              <a:spcAft>
-                <a:spcPts val="800"/>
-              </a:spcAft>
-            </a:pPr>
-            <a:r>
-              <a:rPr sz="1300">
-                <a:solidFill>
-                  <a:srgbClr val="24262E"/>
-                </a:solidFill>
-                <a:latin typeface="Calibri"/>
-              </a:rPr>
-              <a:t>•  Both methods carried forward.</a:t>
+              <a:t>WP2: half the YouTube corpus has detectable singers (best video: 98.5% detection); the other half are software-UI captures with no body in frame. Per last meeting's "try and iterate" decision, the 5 passing videos are the working set.
+WP4: React + FastAPI scaffold renders all four panels end-to-end (screenshot left is the app running locally). Real-data wiring is next iteration.</a:t>
+            </a:r>
+          </a:p>
+        </p:txBody>
+      </p:sp>
+      <p:sp>
+        <p:nvSpPr>
+          <p:cNvPr id="12" name="Rounded Rectangle 11"/>
+          <p:cNvSpPr/>
+          <p:nvPr/>
+        </p:nvSpPr>
+        <p:spPr>
+          <a:xfrm>
+            <a:off x="502920" y="6144768"/>
+            <a:ext cx="11185855" cy="475488"/>
+          </a:xfrm>
+          <a:prstGeom prst="roundRect">
+            <a:avLst/>
+          </a:prstGeom>
+          <a:solidFill>
+            <a:srgbClr val="0E4D5E"/>
+          </a:solidFill>
+          <a:ln>
+            <a:noFill/>
+          </a:ln>
+        </p:spPr>
+        <p:style>
+          <a:lnRef idx="1">
+            <a:schemeClr val="accent1"/>
+          </a:lnRef>
+          <a:fillRef idx="3">
+            <a:schemeClr val="accent1"/>
+          </a:fillRef>
+          <a:effectRef idx="2">
+            <a:schemeClr val="accent1"/>
+          </a:effectRef>
+          <a:fontRef idx="minor">
+            <a:schemeClr val="lt1"/>
+          </a:fontRef>
+        </p:style>
+        <p:txBody>
+          <a:bodyPr rtlCol="0" anchor="ctr" wrap="square"/>
+          <a:lstStyle/>
+          <a:p>
+            <a:pPr algn="ctr"/>
+            <a:r>
+              <a:rPr sz="1500" b="1">
+                <a:solidFill>
+                  <a:srgbClr val="FDFBF5"/>
+                </a:solidFill>
+                <a:latin typeface="Calibri"/>
+              </a:rPr>
+              <a:t>Every work package moved. Nothing is blocked.</a:t>
             </a:r>
           </a:p>
         </p:txBody>
@@ -4897,8 +6322,8 @@
         </p:nvSpPr>
         <p:spPr>
           <a:xfrm>
-            <a:off x="502920" y="411480"/>
-            <a:ext cx="11185855" cy="548640"/>
+            <a:off x="502920" y="292608"/>
+            <a:ext cx="5486400" cy="274320"/>
           </a:xfrm>
           <a:prstGeom prst="rect">
             <a:avLst/>
@@ -4906,59 +6331,67 @@
           <a:noFill/>
         </p:spPr>
         <p:txBody>
-          <a:bodyPr wrap="square" lIns="45720" rIns="45720">
+          <a:bodyPr wrap="square" anchor="t" lIns="27432" rIns="27432" tIns="18288" bIns="18288">
             <a:spAutoFit/>
           </a:bodyPr>
           <a:lstStyle/>
           <a:p>
-            <a:pPr algn="l"/>
-            <a:r>
-              <a:rPr sz="2800" b="1">
+            <a:pPr algn="l">
+              <a:lnSpc>
+                <a:spcPct val="100000"/>
+              </a:lnSpc>
+            </a:pPr>
+            <a:r>
+              <a:rPr sz="1200" b="1">
+                <a:solidFill>
+                  <a:srgbClr val="C4902A"/>
+                </a:solidFill>
+                <a:latin typeface="Calibri"/>
+              </a:rPr>
+              <a:t>NEXT ITERATION</a:t>
+            </a:r>
+          </a:p>
+        </p:txBody>
+      </p:sp>
+      <p:sp>
+        <p:nvSpPr>
+          <p:cNvPr id="3" name="TextBox 2"/>
+          <p:cNvSpPr txBox="1"/>
+          <p:nvPr/>
+        </p:nvSpPr>
+        <p:spPr>
+          <a:xfrm>
+            <a:off x="502920" y="530352"/>
+            <a:ext cx="11185855" cy="566928"/>
+          </a:xfrm>
+          <a:prstGeom prst="rect">
+            <a:avLst/>
+          </a:prstGeom>
+          <a:noFill/>
+        </p:spPr>
+        <p:txBody>
+          <a:bodyPr wrap="square" anchor="t" lIns="27432" rIns="27432" tIns="18288" bIns="18288">
+            <a:spAutoFit/>
+          </a:bodyPr>
+          <a:lstStyle/>
+          <a:p>
+            <a:pPr algn="l">
+              <a:lnSpc>
+                <a:spcPct val="100000"/>
+              </a:lnSpc>
+            </a:pPr>
+            <a:r>
+              <a:rPr sz="2700" b="1">
                 <a:solidFill>
                   <a:srgbClr val="0E4D5E"/>
                 </a:solidFill>
                 <a:latin typeface="Calibri"/>
               </a:rPr>
-              <a:t>WP2 pose on 10 Tier-1 videos: 5/10 pass detection floor</a:t>
-            </a:r>
-          </a:p>
-        </p:txBody>
-      </p:sp>
-      <p:cxnSp>
-        <p:nvCxnSpPr>
-          <p:cNvPr id="3" name="Connector 2"/>
-          <p:cNvCxnSpPr/>
-          <p:nvPr/>
-        </p:nvCxnSpPr>
-        <p:spPr>
-          <a:xfrm>
-            <a:off x="502920" y="960120"/>
-            <a:ext cx="1371600" cy="0"/>
-          </a:xfrm>
-          <a:prstGeom prst="line">
-            <a:avLst/>
-          </a:prstGeom>
-          <a:ln w="31750">
-            <a:solidFill>
-              <a:srgbClr val="C4902A"/>
-            </a:solidFill>
-          </a:ln>
-        </p:spPr>
-        <p:style>
-          <a:lnRef idx="2">
-            <a:schemeClr val="accent1"/>
-          </a:lnRef>
-          <a:fillRef idx="0">
-            <a:schemeClr val="accent1"/>
-          </a:fillRef>
-          <a:effectRef idx="1">
-            <a:schemeClr val="accent1"/>
-          </a:effectRef>
-          <a:fontRef idx="minor">
-            <a:schemeClr val="tx1"/>
-          </a:fontRef>
-        </p:style>
-      </p:cxnSp>
+              <a:t>Plan: Jun 12 → Jun 25</a:t>
+            </a:r>
+          </a:p>
+        </p:txBody>
+      </p:sp>
       <p:sp>
         <p:nvSpPr>
           <p:cNvPr id="4" name="TextBox 3"/>
@@ -4967,8 +6400,8 @@
         </p:nvSpPr>
         <p:spPr>
           <a:xfrm>
-            <a:off x="502920" y="1371600"/>
-            <a:ext cx="5943600" cy="5029200"/>
+            <a:off x="10637215" y="6510528"/>
+            <a:ext cx="1097280" cy="274320"/>
           </a:xfrm>
           <a:prstGeom prst="rect">
             <a:avLst/>
@@ -4976,558 +6409,78 @@
           <a:noFill/>
         </p:spPr>
         <p:txBody>
-          <a:bodyPr wrap="square" lIns="45720">
+          <a:bodyPr wrap="square" anchor="t" lIns="27432" rIns="27432" tIns="18288" bIns="18288">
             <a:spAutoFit/>
           </a:bodyPr>
           <a:lstStyle/>
           <a:p>
-            <a:pPr algn="l">
-              <a:spcAft>
-                <a:spcPts val="800"/>
-              </a:spcAft>
+            <a:pPr algn="r">
+              <a:lnSpc>
+                <a:spcPct val="100000"/>
+              </a:lnSpc>
             </a:pPr>
             <a:r>
-              <a:rPr sz="1400">
-                <a:solidFill>
-                  <a:srgbClr val="24262E"/>
-                </a:solidFill>
-                <a:latin typeface="Calibri"/>
-              </a:rPr>
-              <a:t>•  Sprint 2: 1 video. Sprint 3: 10, stratified by NMP regime.</a:t>
-            </a:r>
-          </a:p>
-          <a:p>
-            <a:pPr algn="l">
-              <a:spcAft>
-                <a:spcPts val="800"/>
-              </a:spcAft>
-            </a:pPr>
-            <a:r>
-              <a:rPr sz="1400">
-                <a:solidFill>
-                  <a:srgbClr val="24262E"/>
-                </a:solidFill>
-                <a:latin typeface="Calibri"/>
-              </a:rPr>
-              <a:t>•  Total runtime: 2.3 minutes.</a:t>
-            </a:r>
-          </a:p>
-          <a:p>
-            <a:pPr algn="l">
-              <a:spcAft>
-                <a:spcPts val="800"/>
-              </a:spcAft>
-            </a:pPr>
-            <a:r>
-              <a:rPr sz="1400">
-                <a:solidFill>
-                  <a:srgbClr val="24262E"/>
-                </a:solidFill>
-                <a:latin typeface="Calibri"/>
-              </a:rPr>
-              <a:t>•  5/10 pass 50% detection: ZKthfLPWBCQ 98.5%, Z-cH7j5iB3k 94.0%,</a:t>
-            </a:r>
-          </a:p>
-          <a:p>
-            <a:pPr algn="l">
-              <a:spcAft>
-                <a:spcPts val="800"/>
-              </a:spcAft>
-            </a:pPr>
-            <a:r>
-              <a:rPr sz="1400">
-                <a:solidFill>
-                  <a:srgbClr val="24262E"/>
-                </a:solidFill>
-                <a:latin typeface="Calibri"/>
-              </a:rPr>
-              <a:t>•     ouFyQKszE_Y 79.5%, w0ywMP8mOc4 78.2%, VsnvueTan4I 66.7%.</a:t>
-            </a:r>
-          </a:p>
-          <a:p>
-            <a:pPr algn="l">
-              <a:spcAft>
-                <a:spcPts val="800"/>
-              </a:spcAft>
-            </a:pPr>
-            <a:r>
-              <a:rPr sz="1400">
-                <a:solidFill>
-                  <a:srgbClr val="24262E"/>
-                </a:solidFill>
-                <a:latin typeface="Calibri"/>
-              </a:rPr>
-              <a:t>•  5/10 fail: software-UI captures or dense low-res tile grids</a:t>
-            </a:r>
-          </a:p>
-          <a:p>
-            <a:pPr algn="l">
-              <a:spcAft>
-                <a:spcPts val="800"/>
-              </a:spcAft>
-            </a:pPr>
-            <a:r>
-              <a:rPr sz="1400">
-                <a:solidFill>
-                  <a:srgbClr val="24262E"/>
-                </a:solidFill>
-                <a:latin typeface="Calibri"/>
-              </a:rPr>
-              <a:t>•     (no body for MediaPipe to find).</a:t>
-            </a:r>
-          </a:p>
-          <a:p>
-            <a:pPr algn="l">
-              <a:spcAft>
-                <a:spcPts val="800"/>
-              </a:spcAft>
-            </a:pPr>
-            <a:r>
-              <a:rPr sz="1400">
-                <a:solidFill>
-                  <a:srgbClr val="24262E"/>
-                </a:solidFill>
-                <a:latin typeface="Calibri"/>
-              </a:rPr>
-              <a:t>•  Matches Status Meeting III "try and iterate" decision.</a:t>
-            </a:r>
-          </a:p>
-          <a:p>
-            <a:pPr algn="l">
-              <a:spcAft>
-                <a:spcPts val="800"/>
-              </a:spcAft>
-            </a:pPr>
-            <a:r>
-              <a:rPr sz="1400">
-                <a:solidFill>
-                  <a:srgbClr val="24262E"/>
-                </a:solidFill>
-                <a:latin typeface="Calibri"/>
-              </a:rPr>
-              <a:t>•  5 passing videos define WP2 inclusion set for H1.</a:t>
-            </a:r>
-          </a:p>
-        </p:txBody>
-      </p:sp>
-      <p:pic>
-        <p:nvPicPr>
-          <p:cNvPr id="5" name="Picture 4" descr="wp2_visual_features_v2.png"/>
-          <p:cNvPicPr>
-            <a:picLocks noChangeAspect="1"/>
-          </p:cNvPicPr>
-          <p:nvPr/>
-        </p:nvPicPr>
-        <p:blipFill>
-          <a:blip r:embed="rId2"/>
-          <a:stretch>
-            <a:fillRect/>
-          </a:stretch>
-        </p:blipFill>
-        <p:spPr>
-          <a:xfrm>
-            <a:off x="6858000" y="2286000"/>
-            <a:ext cx="4937760" cy="3105376"/>
+              <a:rPr sz="1000" b="0">
+                <a:solidFill>
+                  <a:srgbClr val="6E6A60"/>
+                </a:solidFill>
+                <a:latin typeface="Calibri"/>
+              </a:rPr>
+              <a:t>6 / 8</a:t>
+            </a:r>
+          </a:p>
+        </p:txBody>
+      </p:sp>
+      <p:sp>
+        <p:nvSpPr>
+          <p:cNvPr id="5" name="TextBox 4"/>
+          <p:cNvSpPr txBox="1"/>
+          <p:nvPr/>
+        </p:nvSpPr>
+        <p:spPr>
+          <a:xfrm>
+            <a:off x="502920" y="6510528"/>
+            <a:ext cx="4572000" cy="274320"/>
           </a:xfrm>
           <a:prstGeom prst="rect">
             <a:avLst/>
           </a:prstGeom>
-        </p:spPr>
-      </p:pic>
-    </p:spTree>
-  </p:cSld>
-  <p:clrMapOvr>
-    <a:masterClrMapping/>
-  </p:clrMapOvr>
-</p:sld>
-</file>
-
-<file path=ppt/slides/slide7.xml><?xml version="1.0" encoding="utf-8"?>
-<p:sld xmlns:a="http://schemas.openxmlformats.org/drawingml/2006/main" xmlns:p="http://schemas.openxmlformats.org/presentationml/2006/main" xmlns:r="http://schemas.openxmlformats.org/officeDocument/2006/relationships">
-  <p:cSld>
-    <p:bg>
-      <p:bgPr>
-        <a:solidFill>
-          <a:srgbClr val="FAF6EC"/>
-        </a:solidFill>
-        <a:effectLst/>
-      </p:bgPr>
-    </p:bg>
-    <p:spTree>
-      <p:nvGrpSpPr>
-        <p:cNvPr id="1" name=""/>
-        <p:cNvGrpSpPr/>
-        <p:nvPr/>
-      </p:nvGrpSpPr>
-      <p:grpSpPr/>
-      <p:sp>
-        <p:nvSpPr>
-          <p:cNvPr id="2" name="TextBox 1"/>
-          <p:cNvSpPr txBox="1"/>
-          <p:nvPr/>
-        </p:nvSpPr>
-        <p:spPr>
-          <a:xfrm>
-            <a:off x="502920" y="411480"/>
-            <a:ext cx="11185855" cy="548640"/>
-          </a:xfrm>
-          <a:prstGeom prst="rect">
-            <a:avLst/>
-          </a:prstGeom>
           <a:noFill/>
         </p:spPr>
         <p:txBody>
-          <a:bodyPr wrap="square" lIns="45720" rIns="45720">
+          <a:bodyPr wrap="square" anchor="t" lIns="27432" rIns="27432" tIns="18288" bIns="18288">
             <a:spAutoFit/>
           </a:bodyPr>
           <a:lstStyle/>
           <a:p>
-            <a:pPr algn="l"/>
-            <a:r>
-              <a:rPr sz="2800" b="1">
-                <a:solidFill>
-                  <a:srgbClr val="0E4D5E"/>
-                </a:solidFill>
-                <a:latin typeface="Calibri"/>
-              </a:rPr>
-              <a:t>WP4 dashboard scaffold + E(t) integration</a:t>
-            </a:r>
-          </a:p>
-        </p:txBody>
-      </p:sp>
-      <p:cxnSp>
-        <p:nvCxnSpPr>
-          <p:cNvPr id="3" name="Connector 2"/>
-          <p:cNvCxnSpPr/>
-          <p:nvPr/>
-        </p:nvCxnSpPr>
-        <p:spPr>
-          <a:xfrm>
-            <a:off x="502920" y="960120"/>
-            <a:ext cx="1371600" cy="0"/>
-          </a:xfrm>
-          <a:prstGeom prst="line">
-            <a:avLst/>
-          </a:prstGeom>
-          <a:ln w="31750">
-            <a:solidFill>
-              <a:srgbClr val="C4902A"/>
-            </a:solidFill>
-          </a:ln>
-        </p:spPr>
-        <p:style>
-          <a:lnRef idx="2">
-            <a:schemeClr val="accent1"/>
-          </a:lnRef>
-          <a:fillRef idx="0">
-            <a:schemeClr val="accent1"/>
-          </a:fillRef>
-          <a:effectRef idx="1">
-            <a:schemeClr val="accent1"/>
-          </a:effectRef>
-          <a:fontRef idx="minor">
-            <a:schemeClr val="tx1"/>
-          </a:fontRef>
-        </p:style>
-      </p:cxnSp>
-      <p:pic>
-        <p:nvPicPr>
-          <p:cNvPr id="4" name="Picture 3" descr="wp4_dashboard_scaffold.png"/>
-          <p:cNvPicPr>
-            <a:picLocks noChangeAspect="1"/>
-          </p:cNvPicPr>
-          <p:nvPr/>
-        </p:nvPicPr>
-        <p:blipFill>
-          <a:blip r:embed="rId2"/>
-          <a:stretch>
-            <a:fillRect/>
-          </a:stretch>
-        </p:blipFill>
-        <p:spPr>
-          <a:xfrm>
-            <a:off x="502920" y="1371600"/>
-            <a:ext cx="4910275" cy="4572000"/>
-          </a:xfrm>
-          <a:prstGeom prst="rect">
-            <a:avLst/>
-          </a:prstGeom>
-        </p:spPr>
-      </p:pic>
-      <p:sp>
-        <p:nvSpPr>
-          <p:cNvPr id="5" name="TextBox 4"/>
-          <p:cNvSpPr txBox="1"/>
-          <p:nvPr/>
-        </p:nvSpPr>
-        <p:spPr>
-          <a:xfrm>
-            <a:off x="6400800" y="1371600"/>
-            <a:ext cx="5303520" cy="5029200"/>
-          </a:xfrm>
-          <a:prstGeom prst="rect">
-            <a:avLst/>
-          </a:prstGeom>
-          <a:noFill/>
-        </p:spPr>
-        <p:txBody>
-          <a:bodyPr wrap="square" lIns="45720">
-            <a:spAutoFit/>
-          </a:bodyPr>
-          <a:lstStyle/>
-          <a:p>
             <a:pPr algn="l">
-              <a:spcAft>
-                <a:spcPts val="800"/>
-              </a:spcAft>
+              <a:lnSpc>
+                <a:spcPct val="100000"/>
+              </a:lnSpc>
             </a:pPr>
             <a:r>
-              <a:rPr sz="1300">
-                <a:solidFill>
-                  <a:srgbClr val="24262E"/>
-                </a:solidFill>
-                <a:latin typeface="Calibri"/>
-              </a:rPr>
-              <a:t>•  Dashboard: React 18 + Vite 5 + TS strict + D3 + Plotly.</a:t>
-            </a:r>
-          </a:p>
-          <a:p>
-            <a:pPr algn="l">
-              <a:spcAft>
-                <a:spcPts val="800"/>
-              </a:spcAft>
-            </a:pPr>
-            <a:r>
-              <a:rPr sz="1300">
-                <a:solidFill>
-                  <a:srgbClr val="24262E"/>
-                </a:solidFill>
-                <a:latin typeface="Calibri"/>
-              </a:rPr>
-              <a:t>•  Backend: FastAPI 0.111, 3 mock endpoints.</a:t>
-            </a:r>
-          </a:p>
-          <a:p>
-            <a:pPr algn="l">
-              <a:spcAft>
-                <a:spcPts val="800"/>
-              </a:spcAft>
-            </a:pPr>
-            <a:r>
-              <a:rPr sz="1300">
-                <a:solidFill>
-                  <a:srgbClr val="24262E"/>
-                </a:solidFill>
-                <a:latin typeface="Calibri"/>
-              </a:rPr>
-              <a:t>•  4 panels render end-to-end (Playwright-verified).</a:t>
-            </a:r>
-          </a:p>
-          <a:p>
-            <a:pPr algn="l">
-              <a:spcAft>
-                <a:spcPts val="800"/>
-              </a:spcAft>
-            </a:pPr>
-            <a:r>
-              <a:rPr sz="1300">
-                <a:solidFill>
-                  <a:srgbClr val="24262E"/>
-                </a:solidFill>
-                <a:latin typeface="Calibri"/>
-              </a:rPr>
-              <a:t>•  Real-data wiring is the WP4 sub-plan (Jun 21).</a:t>
-            </a:r>
-          </a:p>
-          <a:p>
-            <a:pPr algn="l">
-              <a:spcAft>
-                <a:spcPts val="800"/>
-              </a:spcAft>
-            </a:pPr>
-            <a:r>
-              <a:rPr sz="1300">
-                <a:solidFill>
-                  <a:srgbClr val="24262E"/>
-                </a:solidFill>
-                <a:latin typeface="Calibri"/>
-              </a:rPr>
-              <a:t>•  </a:t>
-            </a:r>
-          </a:p>
-          <a:p>
-            <a:pPr algn="l">
-              <a:spcAft>
-                <a:spcPts val="800"/>
-              </a:spcAft>
-            </a:pPr>
-            <a:r>
-              <a:rPr sz="1300">
-                <a:solidFill>
-                  <a:srgbClr val="24262E"/>
-                </a:solidFill>
-                <a:latin typeface="Calibri"/>
-              </a:rPr>
-              <a:t>•  E(t) integration module:</a:t>
-            </a:r>
-          </a:p>
-          <a:p>
-            <a:pPr algn="l">
-              <a:spcAft>
-                <a:spcPts val="800"/>
-              </a:spcAft>
-            </a:pPr>
-            <a:r>
-              <a:rPr sz="1300">
-                <a:solidFill>
-                  <a:srgbClr val="24262E"/>
-                </a:solidFill>
-                <a:latin typeface="Calibri"/>
-              </a:rPr>
-              <a:t>•     compute_entanglement() with NaN-safe weight reallocation.</a:t>
-            </a:r>
-          </a:p>
-          <a:p>
-            <a:pPr algn="l">
-              <a:spcAft>
-                <a:spcPts val="800"/>
-              </a:spcAft>
-            </a:pPr>
-            <a:r>
-              <a:rPr sz="1300">
-                <a:solidFill>
-                  <a:srgbClr val="24262E"/>
-                </a:solidFill>
-                <a:latin typeface="Calibri"/>
-              </a:rPr>
-              <a:t>•     200-shuffle circular-shift null at composite level.</a:t>
-            </a:r>
-          </a:p>
-          <a:p>
-            <a:pPr algn="l">
-              <a:spcAft>
-                <a:spcPts val="800"/>
-              </a:spcAft>
-            </a:pPr>
-            <a:r>
-              <a:rPr sz="1300">
-                <a:solidFill>
-                  <a:srgbClr val="24262E"/>
-                </a:solidFill>
-                <a:latin typeface="Calibri"/>
-              </a:rPr>
-              <a:t>•     Tests: 23/23 pass.</a:t>
-            </a:r>
-          </a:p>
-        </p:txBody>
-      </p:sp>
-    </p:spTree>
-  </p:cSld>
-  <p:clrMapOvr>
-    <a:masterClrMapping/>
-  </p:clrMapOvr>
-</p:sld>
-</file>
-
-<file path=ppt/slides/slide8.xml><?xml version="1.0" encoding="utf-8"?>
-<p:sld xmlns:a="http://schemas.openxmlformats.org/drawingml/2006/main" xmlns:p="http://schemas.openxmlformats.org/presentationml/2006/main" xmlns:r="http://schemas.openxmlformats.org/officeDocument/2006/relationships">
-  <p:cSld>
-    <p:bg>
-      <p:bgPr>
-        <a:solidFill>
-          <a:srgbClr val="FAF6EC"/>
-        </a:solidFill>
-        <a:effectLst/>
-      </p:bgPr>
-    </p:bg>
-    <p:spTree>
-      <p:nvGrpSpPr>
-        <p:cNvPr id="1" name=""/>
-        <p:cNvGrpSpPr/>
-        <p:nvPr/>
-      </p:nvGrpSpPr>
-      <p:grpSpPr/>
-      <p:sp>
-        <p:nvSpPr>
-          <p:cNvPr id="2" name="TextBox 1"/>
-          <p:cNvSpPr txBox="1"/>
-          <p:nvPr/>
-        </p:nvSpPr>
-        <p:spPr>
-          <a:xfrm>
-            <a:off x="502920" y="411480"/>
-            <a:ext cx="11185855" cy="548640"/>
-          </a:xfrm>
-          <a:prstGeom prst="rect">
-            <a:avLst/>
-          </a:prstGeom>
-          <a:noFill/>
-        </p:spPr>
-        <p:txBody>
-          <a:bodyPr wrap="square" lIns="45720" rIns="45720">
-            <a:spAutoFit/>
-          </a:bodyPr>
-          <a:lstStyle/>
-          <a:p>
-            <a:pPr algn="l"/>
-            <a:r>
-              <a:rPr sz="2800" b="1">
-                <a:solidFill>
-                  <a:srgbClr val="0E4D5E"/>
-                </a:solidFill>
-                <a:latin typeface="Calibri"/>
-              </a:rPr>
-              <a:t>Sprint 4 plan: Jun 12 to Jun 25</a:t>
-            </a:r>
-          </a:p>
-        </p:txBody>
-      </p:sp>
-      <p:cxnSp>
-        <p:nvCxnSpPr>
-          <p:cNvPr id="3" name="Connector 2"/>
-          <p:cNvCxnSpPr/>
-          <p:nvPr/>
-        </p:nvCxnSpPr>
-        <p:spPr>
-          <a:xfrm>
-            <a:off x="502920" y="960120"/>
-            <a:ext cx="1371600" cy="0"/>
-          </a:xfrm>
-          <a:prstGeom prst="line">
-            <a:avLst/>
-          </a:prstGeom>
-          <a:ln w="31750">
-            <a:solidFill>
-              <a:srgbClr val="C4902A"/>
-            </a:solidFill>
-          </a:ln>
-        </p:spPr>
-        <p:style>
-          <a:lnRef idx="2">
-            <a:schemeClr val="accent1"/>
-          </a:lnRef>
-          <a:fillRef idx="0">
-            <a:schemeClr val="accent1"/>
-          </a:fillRef>
-          <a:effectRef idx="1">
-            <a:schemeClr val="accent1"/>
-          </a:effectRef>
-          <a:fontRef idx="minor">
-            <a:schemeClr val="tx1"/>
-          </a:fontRef>
-        </p:style>
-      </p:cxnSp>
+              <a:rPr sz="1000" b="0">
+                <a:solidFill>
+                  <a:srgbClr val="6E6A60"/>
+                </a:solidFill>
+                <a:latin typeface="Calibri"/>
+              </a:rPr>
+              <a:t>Project 8 · Entanglement in Online Choir</a:t>
+            </a:r>
+          </a:p>
+        </p:txBody>
+      </p:sp>
       <p:graphicFrame>
         <p:nvGraphicFramePr>
-          <p:cNvPr id="4" name="Table 3"/>
+          <p:cNvPr id="6" name="Table 5"/>
           <p:cNvGraphicFramePr>
             <a:graphicFrameLocks noGrp="1"/>
           </p:cNvGraphicFramePr>
           <p:nvPr/>
         </p:nvGraphicFramePr>
         <p:xfrm>
-          <a:off x="502920" y="1645920"/>
-          <a:ext cx="10972800" cy="3657600"/>
+          <a:off x="502920" y="1371600"/>
+          <a:ext cx="11155680" cy="3931920"/>
         </p:xfrm>
         <a:graphic>
           <a:graphicData uri="http://schemas.openxmlformats.org/drawingml/2006/table">
@@ -5536,10 +6489,10 @@
                 <a:tableStyleId>{5C22544A-7EE6-4342-B048-85BDC9FD1C3A}</a:tableStyleId>
               </a:tblPr>
               <a:tblGrid>
-                <a:gridCol w="2286000"/>
-                <a:gridCol w="8686800"/>
+                <a:gridCol w="2377440"/>
+                <a:gridCol w="8778240"/>
               </a:tblGrid>
-              <a:tr h="609600">
+              <a:tr h="655320">
                 <a:tc>
                   <a:txBody>
                     <a:bodyPr/>
@@ -5574,7 +6527,7 @@
                           </a:solidFill>
                           <a:latin typeface="Calibri"/>
                         </a:rPr>
-                        <a:t>Sprint 4 work</a:t>
+                        <a:t>What ships</a:t>
                       </a:r>
                     </a:p>
                   </a:txBody>
@@ -5585,20 +6538,66 @@
                   </a:tcPr>
                 </a:tc>
               </a:tr>
-              <a:tr h="609600">
+              <a:tr h="655320">
                 <a:tc>
                   <a:txBody>
                     <a:bodyPr/>
                     <a:lstStyle/>
                     <a:p>
                       <a:r>
-                        <a:rPr sz="1400" b="0">
+                        <a:rPr sz="1350" b="1">
+                          <a:solidFill>
+                            <a:srgbClr val="0E4D5E"/>
+                          </a:solidFill>
+                          <a:latin typeface="Calibri"/>
+                        </a:rPr>
+                        <a:t>WP1 audio</a:t>
+                      </a:r>
+                    </a:p>
+                  </a:txBody>
+                  <a:tcPr>
+                    <a:solidFill>
+                      <a:srgbClr val="FDFBF5"/>
+                    </a:solidFill>
+                  </a:tcPr>
+                </a:tc>
+                <a:tc>
+                  <a:txBody>
+                    <a:bodyPr/>
+                    <a:lstStyle/>
+                    <a:p>
+                      <a:r>
+                        <a:rPr sz="1350" b="0">
                           <a:solidFill>
                             <a:srgbClr val="24262E"/>
                           </a:solidFill>
                           <a:latin typeface="Calibri"/>
                         </a:rPr>
-                        <a:t>WP1 audio</a:t>
+                        <a:t>Per-window Granger → time-varying N(t) for the dashboard timeline</a:t>
+                      </a:r>
+                    </a:p>
+                  </a:txBody>
+                  <a:tcPr>
+                    <a:solidFill>
+                      <a:srgbClr val="FDFBF5"/>
+                    </a:solidFill>
+                  </a:tcPr>
+                </a:tc>
+              </a:tr>
+              <a:tr h="655320">
+                <a:tc>
+                  <a:txBody>
+                    <a:bodyPr/>
+                    <a:lstStyle/>
+                    <a:p>
+                      <a:r>
+                        <a:rPr sz="1350" b="1">
+                          <a:solidFill>
+                            <a:srgbClr val="0E4D5E"/>
+                          </a:solidFill>
+                          <a:latin typeface="Calibri"/>
+                        </a:rPr>
+                        <a:t>WP2 video</a:t>
                       </a:r>
                     </a:p>
                   </a:txBody>
@@ -5614,13 +6613,13 @@
                     <a:lstStyle/>
                     <a:p>
                       <a:r>
-                        <a:rPr sz="1400" b="0">
+                        <a:rPr sz="1350" b="0">
                           <a:solidFill>
                             <a:srgbClr val="24262E"/>
                           </a:solidFill>
                           <a:latin typeface="Calibri"/>
                         </a:rPr>
-                        <a:t>Per-window Granger → time-varying N(t)</a:t>
+                        <a:t>Pose on remaining Tier-1 videos, quality-first triage</a:t>
                       </a:r>
                     </a:p>
                   </a:txBody>
@@ -5631,20 +6630,20 @@
                   </a:tcPr>
                 </a:tc>
               </a:tr>
-              <a:tr h="609600">
+              <a:tr h="655320">
                 <a:tc>
                   <a:txBody>
                     <a:bodyPr/>
                     <a:lstStyle/>
                     <a:p>
                       <a:r>
-                        <a:rPr sz="1400" b="0">
+                        <a:rPr sz="1350" b="1">
                           <a:solidFill>
-                            <a:srgbClr val="24262E"/>
+                            <a:srgbClr val="0E4D5E"/>
                           </a:solidFill>
                           <a:latin typeface="Calibri"/>
                         </a:rPr>
-                        <a:t>WP2 video</a:t>
+                        <a:t>WP3 network</a:t>
                       </a:r>
                     </a:p>
                   </a:txBody>
@@ -5660,13 +6659,13 @@
                     <a:lstStyle/>
                     <a:p>
                       <a:r>
-                        <a:rPr sz="1400" b="0">
+                        <a:rPr sz="1350" b="0">
                           <a:solidFill>
                             <a:srgbClr val="24262E"/>
                           </a:solidFill>
                           <a:latin typeface="Calibri"/>
                         </a:rPr>
-                        <a:t>Pose on remaining Tier-1 videos (quality-first triage)</a:t>
+                        <a:t>Tier-3 latency injection: synthetic jitter at 4 regime levels, E(t) per level. First cross-regime test of H1 + H2.</a:t>
                       </a:r>
                     </a:p>
                   </a:txBody>
@@ -5677,20 +6676,20 @@
                   </a:tcPr>
                 </a:tc>
               </a:tr>
-              <a:tr h="609600">
+              <a:tr h="655320">
                 <a:tc>
                   <a:txBody>
                     <a:bodyPr/>
                     <a:lstStyle/>
                     <a:p>
                       <a:r>
-                        <a:rPr sz="1400" b="0">
+                        <a:rPr sz="1350" b="1">
                           <a:solidFill>
-                            <a:srgbClr val="24262E"/>
+                            <a:srgbClr val="0E4D5E"/>
                           </a:solidFill>
                           <a:latin typeface="Calibri"/>
                         </a:rPr>
-                        <a:t>WP3 network</a:t>
+                        <a:t>WP4 dashboard</a:t>
                       </a:r>
                     </a:p>
                   </a:txBody>
@@ -5706,13 +6705,13 @@
                     <a:lstStyle/>
                     <a:p>
                       <a:r>
-                        <a:rPr sz="1400" b="0">
+                        <a:rPr sz="1350" b="0">
                           <a:solidFill>
                             <a:srgbClr val="24262E"/>
                           </a:solidFill>
                           <a:latin typeface="Calibri"/>
                         </a:rPr>
-                        <a:t>Tier-3 latency injection: synthetic jitter on Dagstuhl audio</a:t>
+                        <a:t>Swap mock JSON for real parquet readers + pose overlay</a:t>
                       </a:r>
                     </a:p>
                   </a:txBody>
@@ -5723,20 +6722,20 @@
                   </a:tcPr>
                 </a:tc>
               </a:tr>
-              <a:tr h="609600">
+              <a:tr h="655320">
                 <a:tc>
                   <a:txBody>
                     <a:bodyPr/>
                     <a:lstStyle/>
                     <a:p>
                       <a:r>
-                        <a:rPr sz="1400" b="0">
+                        <a:rPr sz="1350" b="1">
                           <a:solidFill>
-                            <a:srgbClr val="24262E"/>
+                            <a:srgbClr val="0E4D5E"/>
                           </a:solidFill>
                           <a:latin typeface="Calibri"/>
                         </a:rPr>
-                        <a:t>WP4 dashboard</a:t>
+                        <a:t>Data</a:t>
                       </a:r>
                     </a:p>
                   </a:txBody>
@@ -5752,13 +6751,13 @@
                     <a:lstStyle/>
                     <a:p>
                       <a:r>
-                        <a:rPr sz="1400" b="0">
+                        <a:rPr sz="1350" b="0">
                           <a:solidFill>
                             <a:srgbClr val="24262E"/>
                           </a:solidFill>
                           <a:latin typeface="Calibri"/>
                         </a:rPr>
-                        <a:t>Swap mock JSON → real parquet readers + pose overlay</a:t>
+                        <a:t>Download ChoralSynth (open license, Zenodo) · follow up ESMUC</a:t>
                       </a:r>
                     </a:p>
                   </a:txBody>
@@ -5769,65 +6768,19 @@
                   </a:tcPr>
                 </a:tc>
               </a:tr>
-              <a:tr h="609600">
-                <a:tc>
-                  <a:txBody>
-                    <a:bodyPr/>
-                    <a:lstStyle/>
-                    <a:p>
-                      <a:r>
-                        <a:rPr sz="1400" b="0">
-                          <a:solidFill>
-                            <a:srgbClr val="24262E"/>
-                          </a:solidFill>
-                          <a:latin typeface="Calibri"/>
-                        </a:rPr>
-                        <a:t>Data</a:t>
-                      </a:r>
-                    </a:p>
-                  </a:txBody>
-                  <a:tcPr>
-                    <a:solidFill>
-                      <a:srgbClr val="FAF6EC"/>
-                    </a:solidFill>
-                  </a:tcPr>
-                </a:tc>
-                <a:tc>
-                  <a:txBody>
-                    <a:bodyPr/>
-                    <a:lstStyle/>
-                    <a:p>
-                      <a:r>
-                        <a:rPr sz="1400" b="0">
-                          <a:solidFill>
-                            <a:srgbClr val="24262E"/>
-                          </a:solidFill>
-                          <a:latin typeface="Calibri"/>
-                        </a:rPr>
-                        <a:t>Acquire ChoralSynth from Zenodo; pursue ESMUC if Hacker confirms a path</a:t>
-                      </a:r>
-                    </a:p>
-                  </a:txBody>
-                  <a:tcPr>
-                    <a:solidFill>
-                      <a:srgbClr val="FAF6EC"/>
-                    </a:solidFill>
-                  </a:tcPr>
-                </a:tc>
-              </a:tr>
             </a:tbl>
           </a:graphicData>
         </a:graphic>
       </p:graphicFrame>
       <p:sp>
         <p:nvSpPr>
-          <p:cNvPr id="5" name="TextBox 4"/>
+          <p:cNvPr id="7" name="TextBox 6"/>
           <p:cNvSpPr txBox="1"/>
           <p:nvPr/>
         </p:nvSpPr>
         <p:spPr>
           <a:xfrm>
-            <a:off x="502920" y="5577840"/>
+            <a:off x="502920" y="5486400"/>
             <a:ext cx="11185855" cy="457200"/>
           </a:xfrm>
           <a:prstGeom prst="rect">
@@ -5836,20 +6789,76 @@
           <a:noFill/>
         </p:spPr>
         <p:txBody>
-          <a:bodyPr wrap="square" lIns="45720" rIns="45720">
+          <a:bodyPr wrap="square" anchor="t" lIns="27432" rIns="27432" tIns="18288" bIns="18288">
             <a:spAutoFit/>
           </a:bodyPr>
           <a:lstStyle/>
           <a:p>
-            <a:pPr algn="l"/>
-            <a:r>
-              <a:rPr sz="1800" b="1">
+            <a:pPr algn="l">
+              <a:lnSpc>
+                <a:spcPct val="100000"/>
+              </a:lnSpc>
+            </a:pPr>
+            <a:r>
+              <a:rPr sz="1500" b="1">
                 <a:solidFill>
                   <a:srgbClr val="C4902A"/>
                 </a:solidFill>
                 <a:latin typeface="Calibri"/>
               </a:rPr>
-              <a:t>Hard milestone: dashboard alpha runs on real data + first Tier-3 cross-regime result.</a:t>
+              <a:t>Hard milestone before status #5: dashboard alpha on real data + first Tier-3 cross-regime result.</a:t>
+            </a:r>
+          </a:p>
+        </p:txBody>
+      </p:sp>
+      <p:sp>
+        <p:nvSpPr>
+          <p:cNvPr id="8" name="Rounded Rectangle 7"/>
+          <p:cNvSpPr/>
+          <p:nvPr/>
+        </p:nvSpPr>
+        <p:spPr>
+          <a:xfrm>
+            <a:off x="502920" y="6144768"/>
+            <a:ext cx="11185855" cy="475488"/>
+          </a:xfrm>
+          <a:prstGeom prst="roundRect">
+            <a:avLst/>
+          </a:prstGeom>
+          <a:solidFill>
+            <a:srgbClr val="0E4D5E"/>
+          </a:solidFill>
+          <a:ln>
+            <a:noFill/>
+          </a:ln>
+        </p:spPr>
+        <p:style>
+          <a:lnRef idx="1">
+            <a:schemeClr val="accent1"/>
+          </a:lnRef>
+          <a:fillRef idx="3">
+            <a:schemeClr val="accent1"/>
+          </a:fillRef>
+          <a:effectRef idx="2">
+            <a:schemeClr val="accent1"/>
+          </a:effectRef>
+          <a:fontRef idx="minor">
+            <a:schemeClr val="lt1"/>
+          </a:fontRef>
+        </p:style>
+        <p:txBody>
+          <a:bodyPr rtlCol="0" anchor="ctr" wrap="square"/>
+          <a:lstStyle/>
+          <a:p>
+            <a:pPr algn="ctr"/>
+            <a:r>
+              <a:rPr sz="1500" b="1">
+                <a:solidFill>
+                  <a:srgbClr val="FDFBF5"/>
+                </a:solidFill>
+                <a:latin typeface="Calibri"/>
+              </a:rPr>
+              <a:t>This iteration made E(t) real. The next makes it discriminate between regimes.</a:t>
             </a:r>
           </a:p>
         </p:txBody>
@@ -5862,7 +6871,7 @@
 </p:sld>
 </file>
 
-<file path=ppt/slides/slide9.xml><?xml version="1.0" encoding="utf-8"?>
+<file path=ppt/slides/slide7.xml><?xml version="1.0" encoding="utf-8"?>
 <p:sld xmlns:a="http://schemas.openxmlformats.org/drawingml/2006/main" xmlns:p="http://schemas.openxmlformats.org/presentationml/2006/main" xmlns:r="http://schemas.openxmlformats.org/officeDocument/2006/relationships">
   <p:cSld>
     <p:bg>
@@ -5888,8 +6897,8 @@
         </p:nvSpPr>
         <p:spPr>
           <a:xfrm>
-            <a:off x="502920" y="411480"/>
-            <a:ext cx="11185855" cy="548640"/>
+            <a:off x="502920" y="292608"/>
+            <a:ext cx="5486400" cy="274320"/>
           </a:xfrm>
           <a:prstGeom prst="rect">
             <a:avLst/>
@@ -5897,59 +6906,651 @@
           <a:noFill/>
         </p:spPr>
         <p:txBody>
-          <a:bodyPr wrap="square" lIns="45720" rIns="45720">
+          <a:bodyPr wrap="square" anchor="t" lIns="27432" rIns="27432" tIns="18288" bIns="18288">
             <a:spAutoFit/>
           </a:bodyPr>
           <a:lstStyle/>
           <a:p>
-            <a:pPr algn="l"/>
-            <a:r>
-              <a:rPr sz="2800" b="1">
+            <a:pPr algn="l">
+              <a:lnSpc>
+                <a:spcPct val="100000"/>
+              </a:lnSpc>
+            </a:pPr>
+            <a:r>
+              <a:rPr sz="1200" b="1">
+                <a:solidFill>
+                  <a:srgbClr val="C4902A"/>
+                </a:solidFill>
+                <a:latin typeface="Calibri"/>
+              </a:rPr>
+              <a:t>RETROSPECTIVE</a:t>
+            </a:r>
+          </a:p>
+        </p:txBody>
+      </p:sp>
+      <p:sp>
+        <p:nvSpPr>
+          <p:cNvPr id="3" name="TextBox 2"/>
+          <p:cNvSpPr txBox="1"/>
+          <p:nvPr/>
+        </p:nvSpPr>
+        <p:spPr>
+          <a:xfrm>
+            <a:off x="502920" y="530352"/>
+            <a:ext cx="11185855" cy="566928"/>
+          </a:xfrm>
+          <a:prstGeom prst="rect">
+            <a:avLst/>
+          </a:prstGeom>
+          <a:noFill/>
+        </p:spPr>
+        <p:txBody>
+          <a:bodyPr wrap="square" anchor="t" lIns="27432" rIns="27432" tIns="18288" bIns="18288">
+            <a:spAutoFit/>
+          </a:bodyPr>
+          <a:lstStyle/>
+          <a:p>
+            <a:pPr algn="l">
+              <a:lnSpc>
+                <a:spcPct val="100000"/>
+              </a:lnSpc>
+            </a:pPr>
+            <a:r>
+              <a:rPr sz="2700" b="1">
                 <a:solidFill>
                   <a:srgbClr val="0E4D5E"/>
                 </a:solidFill>
                 <a:latin typeface="Calibri"/>
               </a:rPr>
-              <a:t>Retrospective and four honest limitations</a:t>
-            </a:r>
-          </a:p>
-        </p:txBody>
-      </p:sp>
-      <p:cxnSp>
-        <p:nvCxnSpPr>
-          <p:cNvPr id="3" name="Connector 2"/>
-          <p:cNvCxnSpPr/>
-          <p:nvPr/>
-        </p:nvCxnSpPr>
-        <p:spPr>
-          <a:xfrm>
-            <a:off x="502920" y="960120"/>
-            <a:ext cx="1371600" cy="0"/>
-          </a:xfrm>
-          <a:prstGeom prst="line">
-            <a:avLst/>
-          </a:prstGeom>
-          <a:ln w="31750">
+              <a:t>What we keep, what we fix, what to watch</a:t>
+            </a:r>
+          </a:p>
+        </p:txBody>
+      </p:sp>
+      <p:sp>
+        <p:nvSpPr>
+          <p:cNvPr id="4" name="TextBox 3"/>
+          <p:cNvSpPr txBox="1"/>
+          <p:nvPr/>
+        </p:nvSpPr>
+        <p:spPr>
+          <a:xfrm>
+            <a:off x="10637215" y="6510528"/>
+            <a:ext cx="1097280" cy="274320"/>
+          </a:xfrm>
+          <a:prstGeom prst="rect">
+            <a:avLst/>
+          </a:prstGeom>
+          <a:noFill/>
+        </p:spPr>
+        <p:txBody>
+          <a:bodyPr wrap="square" anchor="t" lIns="27432" rIns="27432" tIns="18288" bIns="18288">
+            <a:spAutoFit/>
+          </a:bodyPr>
+          <a:lstStyle/>
+          <a:p>
+            <a:pPr algn="r">
+              <a:lnSpc>
+                <a:spcPct val="100000"/>
+              </a:lnSpc>
+            </a:pPr>
+            <a:r>
+              <a:rPr sz="1000" b="0">
+                <a:solidFill>
+                  <a:srgbClr val="6E6A60"/>
+                </a:solidFill>
+                <a:latin typeface="Calibri"/>
+              </a:rPr>
+              <a:t>7 / 8</a:t>
+            </a:r>
+          </a:p>
+        </p:txBody>
+      </p:sp>
+      <p:sp>
+        <p:nvSpPr>
+          <p:cNvPr id="5" name="TextBox 4"/>
+          <p:cNvSpPr txBox="1"/>
+          <p:nvPr/>
+        </p:nvSpPr>
+        <p:spPr>
+          <a:xfrm>
+            <a:off x="502920" y="6510528"/>
+            <a:ext cx="4572000" cy="274320"/>
+          </a:xfrm>
+          <a:prstGeom prst="rect">
+            <a:avLst/>
+          </a:prstGeom>
+          <a:noFill/>
+        </p:spPr>
+        <p:txBody>
+          <a:bodyPr wrap="square" anchor="t" lIns="27432" rIns="27432" tIns="18288" bIns="18288">
+            <a:spAutoFit/>
+          </a:bodyPr>
+          <a:lstStyle/>
+          <a:p>
+            <a:pPr algn="l">
+              <a:lnSpc>
+                <a:spcPct val="100000"/>
+              </a:lnSpc>
+            </a:pPr>
+            <a:r>
+              <a:rPr sz="1000" b="0">
+                <a:solidFill>
+                  <a:srgbClr val="6E6A60"/>
+                </a:solidFill>
+                <a:latin typeface="Calibri"/>
+              </a:rPr>
+              <a:t>Project 8 · Entanglement in Online Choir</a:t>
+            </a:r>
+          </a:p>
+        </p:txBody>
+      </p:sp>
+      <p:sp>
+        <p:nvSpPr>
+          <p:cNvPr id="6" name="Rounded Rectangle 5"/>
+          <p:cNvSpPr/>
+          <p:nvPr/>
+        </p:nvSpPr>
+        <p:spPr>
+          <a:xfrm>
+            <a:off x="502920" y="1371600"/>
+            <a:ext cx="3611880" cy="4480560"/>
+          </a:xfrm>
+          <a:prstGeom prst="roundRect">
+            <a:avLst/>
+          </a:prstGeom>
+          <a:solidFill>
+            <a:srgbClr val="FDFBF5"/>
+          </a:solidFill>
+          <a:ln w="12700">
             <a:solidFill>
-              <a:srgbClr val="C4902A"/>
+              <a:srgbClr val="CBD9DD"/>
             </a:solidFill>
           </a:ln>
         </p:spPr>
         <p:style>
-          <a:lnRef idx="2">
+          <a:lnRef idx="1">
             <a:schemeClr val="accent1"/>
           </a:lnRef>
-          <a:fillRef idx="0">
+          <a:fillRef idx="3">
             <a:schemeClr val="accent1"/>
           </a:fillRef>
-          <a:effectRef idx="1">
+          <a:effectRef idx="2">
             <a:schemeClr val="accent1"/>
           </a:effectRef>
           <a:fontRef idx="minor">
-            <a:schemeClr val="tx1"/>
+            <a:schemeClr val="lt1"/>
           </a:fontRef>
         </p:style>
-      </p:cxnSp>
+        <p:txBody>
+          <a:bodyPr rtlCol="0" anchor="ctr" wrap="square" lIns="128016" rIns="128016" tIns="91440"/>
+          <a:lstStyle/>
+          <a:p>
+            <a:pPr algn="ctr">
+              <a:spcAft>
+                <a:spcPts val="500"/>
+              </a:spcAft>
+            </a:pPr>
+            <a:r>
+              <a:rPr sz="1350" b="1">
+                <a:solidFill>
+                  <a:srgbClr val="4F8E5A"/>
+                </a:solidFill>
+                <a:latin typeface="Calibri"/>
+              </a:rPr>
+              <a:t>KEPT DOING · it works</a:t>
+            </a:r>
+          </a:p>
+          <a:p>
+            <a:pPr>
+              <a:spcAft>
+                <a:spcPts val="400"/>
+              </a:spcAft>
+            </a:pPr>
+            <a:r>
+              <a:rPr sz="1250">
+                <a:solidFill>
+                  <a:srgbClr val="24262E"/>
+                </a:solidFill>
+                <a:latin typeface="Calibri"/>
+              </a:rPr>
+              <a:t>One named, reviewable artefact per work package per iteration.</a:t>
+            </a:r>
+          </a:p>
+          <a:p>
+            <a:pPr>
+              <a:spcAft>
+                <a:spcPts val="400"/>
+              </a:spcAft>
+            </a:pPr>
+            <a:r>
+              <a:rPr sz="1250">
+                <a:solidFill>
+                  <a:srgbClr val="24262E"/>
+                </a:solidFill>
+                <a:latin typeface="Calibri"/>
+              </a:rPr>
+              <a:t/>
+            </a:r>
+          </a:p>
+          <a:p>
+            <a:pPr>
+              <a:spcAft>
+                <a:spcPts val="400"/>
+              </a:spcAft>
+            </a:pPr>
+            <a:r>
+              <a:rPr sz="1250">
+                <a:solidFill>
+                  <a:srgbClr val="24262E"/>
+                </a:solidFill>
+                <a:latin typeface="Calibri"/>
+              </a:rPr>
+              <a:t>Docs synced after every milestone: anyone can read three files and be fully current.</a:t>
+            </a:r>
+          </a:p>
+        </p:txBody>
+      </p:sp>
+      <p:sp>
+        <p:nvSpPr>
+          <p:cNvPr id="7" name="Rounded Rectangle 6"/>
+          <p:cNvSpPr/>
+          <p:nvPr/>
+        </p:nvSpPr>
+        <p:spPr>
+          <a:xfrm>
+            <a:off x="4279392" y="1371600"/>
+            <a:ext cx="3611880" cy="4480560"/>
+          </a:xfrm>
+          <a:prstGeom prst="roundRect">
+            <a:avLst/>
+          </a:prstGeom>
+          <a:solidFill>
+            <a:srgbClr val="FDFBF5"/>
+          </a:solidFill>
+          <a:ln w="12700">
+            <a:solidFill>
+              <a:srgbClr val="CBD9DD"/>
+            </a:solidFill>
+          </a:ln>
+        </p:spPr>
+        <p:style>
+          <a:lnRef idx="1">
+            <a:schemeClr val="accent1"/>
+          </a:lnRef>
+          <a:fillRef idx="3">
+            <a:schemeClr val="accent1"/>
+          </a:fillRef>
+          <a:effectRef idx="2">
+            <a:schemeClr val="accent1"/>
+          </a:effectRef>
+          <a:fontRef idx="minor">
+            <a:schemeClr val="lt1"/>
+          </a:fontRef>
+        </p:style>
+        <p:txBody>
+          <a:bodyPr rtlCol="0" anchor="ctr" wrap="square" lIns="128016" rIns="128016" tIns="91440"/>
+          <a:lstStyle/>
+          <a:p>
+            <a:pPr algn="ctr">
+              <a:spcAft>
+                <a:spcPts val="500"/>
+              </a:spcAft>
+            </a:pPr>
+            <a:r>
+              <a:rPr sz="1350" b="1">
+                <a:solidFill>
+                  <a:srgbClr val="B55A44"/>
+                </a:solidFill>
+                <a:latin typeface="Calibri"/>
+              </a:rPr>
+              <a:t>WENT WRONG · and the fix</a:t>
+            </a:r>
+          </a:p>
+          <a:p>
+            <a:pPr>
+              <a:spcAft>
+                <a:spcPts val="400"/>
+              </a:spcAft>
+            </a:pPr>
+            <a:r>
+              <a:rPr sz="1250">
+                <a:solidFill>
+                  <a:srgbClr val="24262E"/>
+                </a:solidFill>
+                <a:latin typeface="Calibri"/>
+              </a:rPr>
+              <a:t>ESMUC + ChoralSynth not pulled into Tier-2 yet. Fix: ChoralSynth is an open Zenodo download, scheduled next iteration. ESMUC needs a license: question for the room.</a:t>
+            </a:r>
+          </a:p>
+          <a:p>
+            <a:pPr>
+              <a:spcAft>
+                <a:spcPts val="400"/>
+              </a:spcAft>
+            </a:pPr>
+            <a:r>
+              <a:rPr sz="1250">
+                <a:solidFill>
+                  <a:srgbClr val="24262E"/>
+                </a:solidFill>
+                <a:latin typeface="Calibri"/>
+              </a:rPr>
+              <a:t/>
+            </a:r>
+          </a:p>
+          <a:p>
+            <a:pPr>
+              <a:spcAft>
+                <a:spcPts val="400"/>
+              </a:spcAft>
+            </a:pPr>
+            <a:r>
+              <a:rPr sz="1250">
+                <a:solidFill>
+                  <a:srgbClr val="24262E"/>
+                </a:solidFill>
+                <a:latin typeface="Calibri"/>
+              </a:rPr>
+              <a:t>Half the Tier-1 videos are screen captures with no detectable body. Fix: future curation stratifies on "singers visible", not just NMP regime.</a:t>
+            </a:r>
+          </a:p>
+        </p:txBody>
+      </p:sp>
+      <p:sp>
+        <p:nvSpPr>
+          <p:cNvPr id="8" name="Rounded Rectangle 7"/>
+          <p:cNvSpPr/>
+          <p:nvPr/>
+        </p:nvSpPr>
+        <p:spPr>
+          <a:xfrm>
+            <a:off x="8055864" y="1371600"/>
+            <a:ext cx="3611880" cy="4480560"/>
+          </a:xfrm>
+          <a:prstGeom prst="roundRect">
+            <a:avLst/>
+          </a:prstGeom>
+          <a:solidFill>
+            <a:srgbClr val="FDFBF5"/>
+          </a:solidFill>
+          <a:ln w="12700">
+            <a:solidFill>
+              <a:srgbClr val="CBD9DD"/>
+            </a:solidFill>
+          </a:ln>
+        </p:spPr>
+        <p:style>
+          <a:lnRef idx="1">
+            <a:schemeClr val="accent1"/>
+          </a:lnRef>
+          <a:fillRef idx="3">
+            <a:schemeClr val="accent1"/>
+          </a:fillRef>
+          <a:effectRef idx="2">
+            <a:schemeClr val="accent1"/>
+          </a:effectRef>
+          <a:fontRef idx="minor">
+            <a:schemeClr val="lt1"/>
+          </a:fontRef>
+        </p:style>
+        <p:txBody>
+          <a:bodyPr rtlCol="0" anchor="ctr" wrap="square" lIns="128016" rIns="128016" tIns="91440"/>
+          <a:lstStyle/>
+          <a:p>
+            <a:pPr algn="ctr">
+              <a:spcAft>
+                <a:spcPts val="500"/>
+              </a:spcAft>
+            </a:pPr>
+            <a:r>
+              <a:rPr sz="1350" b="1">
+                <a:solidFill>
+                  <a:srgbClr val="C4902A"/>
+                </a:solidFill>
+                <a:latin typeface="Calibri"/>
+              </a:rPr>
+              <a:t>WATCH LIST · before you ask</a:t>
+            </a:r>
+          </a:p>
+          <a:p>
+            <a:pPr>
+              <a:spcAft>
+                <a:spcPts val="400"/>
+              </a:spcAft>
+            </a:pPr>
+            <a:r>
+              <a:rPr sz="1250">
+                <a:solidFill>
+                  <a:srgbClr val="24262E"/>
+                </a:solidFill>
+                <a:latin typeface="Calibri"/>
+              </a:rPr>
+              <a:t>V(t) absent from all current E(t): Dagstuhl has no video. Weight reallocates; code is ready when multimodal data exists.</a:t>
+            </a:r>
+          </a:p>
+          <a:p>
+            <a:pPr>
+              <a:spcAft>
+                <a:spcPts val="400"/>
+              </a:spcAft>
+            </a:pPr>
+            <a:r>
+              <a:rPr sz="1250">
+                <a:solidFill>
+                  <a:srgbClr val="24262E"/>
+                </a:solidFill>
+                <a:latin typeface="Calibri"/>
+              </a:rPr>
+              <a:t/>
+            </a:r>
+          </a:p>
+          <a:p>
+            <a:pPr>
+              <a:spcAft>
+                <a:spcPts val="400"/>
+              </a:spcAft>
+            </a:pPr>
+            <a:r>
+              <a:rPr sz="1250">
+                <a:solidFill>
+                  <a:srgbClr val="24262E"/>
+                </a:solidFill>
+                <a:latin typeface="Calibri"/>
+              </a:rPr>
+              <a:t>All 5 E(t) pieces are zero-latency studio takes. Cross-regime variation arrives with Tier-3 next iteration.</a:t>
+            </a:r>
+          </a:p>
+          <a:p>
+            <a:pPr>
+              <a:spcAft>
+                <a:spcPts val="400"/>
+              </a:spcAft>
+            </a:pPr>
+            <a:r>
+              <a:rPr sz="1250">
+                <a:solidFill>
+                  <a:srgbClr val="24262E"/>
+                </a:solidFill>
+                <a:latin typeface="Calibri"/>
+              </a:rPr>
+              <a:t/>
+            </a:r>
+          </a:p>
+          <a:p>
+            <a:pPr>
+              <a:spcAft>
+                <a:spcPts val="400"/>
+              </a:spcAft>
+            </a:pPr>
+            <a:r>
+              <a:rPr sz="1250">
+                <a:solidFill>
+                  <a:srgbClr val="24262E"/>
+                </a:solidFill>
+                <a:latin typeface="Calibri"/>
+              </a:rPr>
+              <a:t>"p &lt; 0.001" means 0 of 200 shuffles beat observed, not literal zero.</a:t>
+            </a:r>
+          </a:p>
+        </p:txBody>
+      </p:sp>
+      <p:sp>
+        <p:nvSpPr>
+          <p:cNvPr id="9" name="Rounded Rectangle 8"/>
+          <p:cNvSpPr/>
+          <p:nvPr/>
+        </p:nvSpPr>
+        <p:spPr>
+          <a:xfrm>
+            <a:off x="502920" y="6144768"/>
+            <a:ext cx="11185855" cy="475488"/>
+          </a:xfrm>
+          <a:prstGeom prst="roundRect">
+            <a:avLst/>
+          </a:prstGeom>
+          <a:solidFill>
+            <a:srgbClr val="0E4D5E"/>
+          </a:solidFill>
+          <a:ln>
+            <a:noFill/>
+          </a:ln>
+        </p:spPr>
+        <p:style>
+          <a:lnRef idx="1">
+            <a:schemeClr val="accent1"/>
+          </a:lnRef>
+          <a:fillRef idx="3">
+            <a:schemeClr val="accent1"/>
+          </a:fillRef>
+          <a:effectRef idx="2">
+            <a:schemeClr val="accent1"/>
+          </a:effectRef>
+          <a:fontRef idx="minor">
+            <a:schemeClr val="lt1"/>
+          </a:fontRef>
+        </p:style>
+        <p:txBody>
+          <a:bodyPr rtlCol="0" anchor="ctr" wrap="square"/>
+          <a:lstStyle/>
+          <a:p>
+            <a:pPr algn="ctr"/>
+            <a:r>
+              <a:rPr sz="1500" b="1">
+                <a:solidFill>
+                  <a:srgbClr val="FDFBF5"/>
+                </a:solidFill>
+                <a:latin typeface="Calibri"/>
+              </a:rPr>
+              <a:t>No surprises buried. Everything here is also in the written results doc.</a:t>
+            </a:r>
+          </a:p>
+        </p:txBody>
+      </p:sp>
+    </p:spTree>
+  </p:cSld>
+  <p:clrMapOvr>
+    <a:masterClrMapping/>
+  </p:clrMapOvr>
+</p:sld>
+</file>
+
+<file path=ppt/slides/slide8.xml><?xml version="1.0" encoding="utf-8"?>
+<p:sld xmlns:a="http://schemas.openxmlformats.org/drawingml/2006/main" xmlns:p="http://schemas.openxmlformats.org/presentationml/2006/main" xmlns:r="http://schemas.openxmlformats.org/officeDocument/2006/relationships">
+  <p:cSld>
+    <p:bg>
+      <p:bgPr>
+        <a:solidFill>
+          <a:srgbClr val="FAF6EC"/>
+        </a:solidFill>
+        <a:effectLst/>
+      </p:bgPr>
+    </p:bg>
+    <p:spTree>
+      <p:nvGrpSpPr>
+        <p:cNvPr id="1" name=""/>
+        <p:cNvGrpSpPr/>
+        <p:nvPr/>
+      </p:nvGrpSpPr>
+      <p:grpSpPr/>
+      <p:sp>
+        <p:nvSpPr>
+          <p:cNvPr id="2" name="TextBox 1"/>
+          <p:cNvSpPr txBox="1"/>
+          <p:nvPr/>
+        </p:nvSpPr>
+        <p:spPr>
+          <a:xfrm>
+            <a:off x="502920" y="292608"/>
+            <a:ext cx="5486400" cy="274320"/>
+          </a:xfrm>
+          <a:prstGeom prst="rect">
+            <a:avLst/>
+          </a:prstGeom>
+          <a:noFill/>
+        </p:spPr>
+        <p:txBody>
+          <a:bodyPr wrap="square" anchor="t" lIns="27432" rIns="27432" tIns="18288" bIns="18288">
+            <a:spAutoFit/>
+          </a:bodyPr>
+          <a:lstStyle/>
+          <a:p>
+            <a:pPr algn="l">
+              <a:lnSpc>
+                <a:spcPct val="100000"/>
+              </a:lnSpc>
+            </a:pPr>
+            <a:r>
+              <a:rPr sz="1200" b="1">
+                <a:solidFill>
+                  <a:srgbClr val="C4902A"/>
+                </a:solidFill>
+                <a:latin typeface="Calibri"/>
+              </a:rPr>
+              <a:t>PROBLEMS / QUESTIONS</a:t>
+            </a:r>
+          </a:p>
+        </p:txBody>
+      </p:sp>
+      <p:sp>
+        <p:nvSpPr>
+          <p:cNvPr id="3" name="TextBox 2"/>
+          <p:cNvSpPr txBox="1"/>
+          <p:nvPr/>
+        </p:nvSpPr>
+        <p:spPr>
+          <a:xfrm>
+            <a:off x="502920" y="530352"/>
+            <a:ext cx="11185855" cy="566928"/>
+          </a:xfrm>
+          <a:prstGeom prst="rect">
+            <a:avLst/>
+          </a:prstGeom>
+          <a:noFill/>
+        </p:spPr>
+        <p:txBody>
+          <a:bodyPr wrap="square" anchor="t" lIns="27432" rIns="27432" tIns="18288" bIns="18288">
+            <a:spAutoFit/>
+          </a:bodyPr>
+          <a:lstStyle/>
+          <a:p>
+            <a:pPr algn="l">
+              <a:lnSpc>
+                <a:spcPct val="100000"/>
+              </a:lnSpc>
+            </a:pPr>
+            <a:r>
+              <a:rPr sz="2700" b="1">
+                <a:solidFill>
+                  <a:srgbClr val="0E4D5E"/>
+                </a:solidFill>
+                <a:latin typeface="Calibri"/>
+              </a:rPr>
+              <a:t>Three things we need from the room</a:t>
+            </a:r>
+          </a:p>
+        </p:txBody>
+      </p:sp>
       <p:sp>
         <p:nvSpPr>
           <p:cNvPr id="4" name="TextBox 3"/>
@@ -5958,8 +7559,8 @@
         </p:nvSpPr>
         <p:spPr>
           <a:xfrm>
-            <a:off x="502920" y="1371600"/>
-            <a:ext cx="5669280" cy="457200"/>
+            <a:off x="10637215" y="6510528"/>
+            <a:ext cx="1097280" cy="274320"/>
           </a:xfrm>
           <a:prstGeom prst="rect">
             <a:avLst/>
@@ -5967,20 +7568,24 @@
           <a:noFill/>
         </p:spPr>
         <p:txBody>
-          <a:bodyPr wrap="square" lIns="45720" rIns="45720">
+          <a:bodyPr wrap="square" anchor="t" lIns="27432" rIns="27432" tIns="18288" bIns="18288">
             <a:spAutoFit/>
           </a:bodyPr>
           <a:lstStyle/>
           <a:p>
-            <a:pPr algn="l"/>
-            <a:r>
-              <a:rPr sz="1800" b="1">
-                <a:solidFill>
-                  <a:srgbClr val="4F8E5A"/>
-                </a:solidFill>
-                <a:latin typeface="Calibri"/>
-              </a:rPr>
-              <a:t>What worked</a:t>
+            <a:pPr algn="r">
+              <a:lnSpc>
+                <a:spcPct val="100000"/>
+              </a:lnSpc>
+            </a:pPr>
+            <a:r>
+              <a:rPr sz="1000" b="0">
+                <a:solidFill>
+                  <a:srgbClr val="6E6A60"/>
+                </a:solidFill>
+                <a:latin typeface="Calibri"/>
+              </a:rPr>
+              <a:t>8 / 8</a:t>
             </a:r>
           </a:p>
         </p:txBody>
@@ -5993,8 +7598,8 @@
         </p:nvSpPr>
         <p:spPr>
           <a:xfrm>
-            <a:off x="502920" y="1828800"/>
-            <a:ext cx="5669280" cy="2286000"/>
+            <a:off x="502920" y="6510528"/>
+            <a:ext cx="4572000" cy="274320"/>
           </a:xfrm>
           <a:prstGeom prst="rect">
             <a:avLst/>
@@ -6002,70 +7607,260 @@
           <a:noFill/>
         </p:spPr>
         <p:txBody>
-          <a:bodyPr wrap="square" lIns="45720">
+          <a:bodyPr wrap="square" anchor="t" lIns="27432" rIns="27432" tIns="18288" bIns="18288">
             <a:spAutoFit/>
           </a:bodyPr>
           <a:lstStyle/>
           <a:p>
             <a:pPr algn="l">
+              <a:lnSpc>
+                <a:spcPct val="100000"/>
+              </a:lnSpc>
+            </a:pPr>
+            <a:r>
+              <a:rPr sz="1000" b="0">
+                <a:solidFill>
+                  <a:srgbClr val="6E6A60"/>
+                </a:solidFill>
+                <a:latin typeface="Calibri"/>
+              </a:rPr>
+              <a:t>Project 8 · Entanglement in Online Choir</a:t>
+            </a:r>
+          </a:p>
+        </p:txBody>
+      </p:sp>
+      <p:sp>
+        <p:nvSpPr>
+          <p:cNvPr id="6" name="Rounded Rectangle 5"/>
+          <p:cNvSpPr/>
+          <p:nvPr/>
+        </p:nvSpPr>
+        <p:spPr>
+          <a:xfrm>
+            <a:off x="502920" y="1463040"/>
+            <a:ext cx="11185855" cy="1325880"/>
+          </a:xfrm>
+          <a:prstGeom prst="roundRect">
+            <a:avLst/>
+          </a:prstGeom>
+          <a:solidFill>
+            <a:srgbClr val="FDFBF5"/>
+          </a:solidFill>
+          <a:ln w="12700">
+            <a:solidFill>
+              <a:srgbClr val="CBD9DD"/>
+            </a:solidFill>
+          </a:ln>
+        </p:spPr>
+        <p:style>
+          <a:lnRef idx="1">
+            <a:schemeClr val="accent1"/>
+          </a:lnRef>
+          <a:fillRef idx="3">
+            <a:schemeClr val="accent1"/>
+          </a:fillRef>
+          <a:effectRef idx="2">
+            <a:schemeClr val="accent1"/>
+          </a:effectRef>
+          <a:fontRef idx="minor">
+            <a:schemeClr val="lt1"/>
+          </a:fontRef>
+        </p:style>
+        <p:txBody>
+          <a:bodyPr rtlCol="0" anchor="ctr" wrap="square" lIns="128016" rIns="128016" tIns="91440"/>
+          <a:lstStyle/>
+          <a:p>
+            <a:pPr algn="ctr">
               <a:spcAft>
-                <a:spcPts val="800"/>
+                <a:spcPts val="500"/>
               </a:spcAft>
             </a:pPr>
             <a:r>
-              <a:rPr sz="1400">
-                <a:solidFill>
-                  <a:srgbClr val="24262E"/>
-                </a:solidFill>
-                <a:latin typeface="Calibri"/>
-              </a:rPr>
-              <a:t>•  6/6 Sprint-3 deliverables shipped.</a:t>
-            </a:r>
-          </a:p>
-          <a:p>
-            <a:pPr algn="l">
+              <a:rPr sz="1350" b="1">
+                <a:solidFill>
+                  <a:srgbClr val="0E4D5E"/>
+                </a:solidFill>
+                <a:latin typeface="Calibri"/>
+              </a:rPr>
+              <a:t>1 · Prof. Hacker</a:t>
+            </a:r>
+          </a:p>
+          <a:p>
+            <a:pPr>
               <a:spcAft>
-                <a:spcPts val="800"/>
+                <a:spcPts val="400"/>
               </a:spcAft>
             </a:pPr>
             <a:r>
-              <a:rPr sz="1400">
+              <a:rPr sz="1500">
                 <a:solidFill>
                   <a:srgbClr val="24262E"/>
                 </a:solidFill>
                 <a:latin typeface="Calibri"/>
               </a:rPr>
-              <a:t>•  2 stretch items 23 days early.</a:t>
-            </a:r>
-          </a:p>
-          <a:p>
-            <a:pPr algn="l">
+              <a:t>Do you have institutional access to the ESMUC multitrack dataset? (ChoralSynth we can download ourselves: open license on Zenodo.)</a:t>
+            </a:r>
+          </a:p>
+        </p:txBody>
+      </p:sp>
+      <p:sp>
+        <p:nvSpPr>
+          <p:cNvPr id="7" name="Rounded Rectangle 6"/>
+          <p:cNvSpPr/>
+          <p:nvPr/>
+        </p:nvSpPr>
+        <p:spPr>
+          <a:xfrm>
+            <a:off x="502920" y="2990088"/>
+            <a:ext cx="11185855" cy="1325880"/>
+          </a:xfrm>
+          <a:prstGeom prst="roundRect">
+            <a:avLst/>
+          </a:prstGeom>
+          <a:solidFill>
+            <a:srgbClr val="FDFBF5"/>
+          </a:solidFill>
+          <a:ln w="12700">
+            <a:solidFill>
+              <a:srgbClr val="CBD9DD"/>
+            </a:solidFill>
+          </a:ln>
+        </p:spPr>
+        <p:style>
+          <a:lnRef idx="1">
+            <a:schemeClr val="accent1"/>
+          </a:lnRef>
+          <a:fillRef idx="3">
+            <a:schemeClr val="accent1"/>
+          </a:fillRef>
+          <a:effectRef idx="2">
+            <a:schemeClr val="accent1"/>
+          </a:effectRef>
+          <a:fontRef idx="minor">
+            <a:schemeClr val="lt1"/>
+          </a:fontRef>
+        </p:style>
+        <p:txBody>
+          <a:bodyPr rtlCol="0" anchor="ctr" wrap="square" lIns="128016" rIns="128016" tIns="91440"/>
+          <a:lstStyle/>
+          <a:p>
+            <a:pPr algn="ctr">
               <a:spcAft>
-                <a:spcPts val="800"/>
+                <a:spcPts val="500"/>
               </a:spcAft>
             </a:pPr>
             <a:r>
-              <a:rPr sz="1400">
+              <a:rPr sz="1350" b="1">
+                <a:solidFill>
+                  <a:srgbClr val="0E4D5E"/>
+                </a:solidFill>
+                <a:latin typeface="Calibri"/>
+              </a:rPr>
+              <a:t>2 · Prof. Gloor</a:t>
+            </a:r>
+          </a:p>
+          <a:p>
+            <a:pPr>
+              <a:spcAft>
+                <a:spcPts val="400"/>
+              </a:spcAft>
+            </a:pPr>
+            <a:r>
+              <a:rPr sz="1500">
                 <a:solidFill>
                   <a:srgbClr val="24262E"/>
                 </a:solidFill>
                 <a:latin typeface="Calibri"/>
               </a:rPr>
-              <a:t>•  Doc-update discipline kept brief + guide + vault in sync after every phase.</a:t>
-            </a:r>
-          </a:p>
-        </p:txBody>
-      </p:sp>
-      <p:sp>
-        <p:nvSpPr>
-          <p:cNvPr id="6" name="TextBox 5"/>
+              <a:t>For the final paper figures: matplotlib-clean, or Gephi/Cytoscape-polished SVG?</a:t>
+            </a:r>
+          </a:p>
+        </p:txBody>
+      </p:sp>
+      <p:sp>
+        <p:nvSpPr>
+          <p:cNvPr id="8" name="Rounded Rectangle 7"/>
+          <p:cNvSpPr/>
+          <p:nvPr/>
+        </p:nvSpPr>
+        <p:spPr>
+          <a:xfrm>
+            <a:off x="502920" y="4517136"/>
+            <a:ext cx="11185855" cy="1325880"/>
+          </a:xfrm>
+          <a:prstGeom prst="roundRect">
+            <a:avLst/>
+          </a:prstGeom>
+          <a:solidFill>
+            <a:srgbClr val="FDFBF5"/>
+          </a:solidFill>
+          <a:ln w="12700">
+            <a:solidFill>
+              <a:srgbClr val="CBD9DD"/>
+            </a:solidFill>
+          </a:ln>
+        </p:spPr>
+        <p:style>
+          <a:lnRef idx="1">
+            <a:schemeClr val="accent1"/>
+          </a:lnRef>
+          <a:fillRef idx="3">
+            <a:schemeClr val="accent1"/>
+          </a:fillRef>
+          <a:effectRef idx="2">
+            <a:schemeClr val="accent1"/>
+          </a:effectRef>
+          <a:fontRef idx="minor">
+            <a:schemeClr val="lt1"/>
+          </a:fontRef>
+        </p:style>
+        <p:txBody>
+          <a:bodyPr rtlCol="0" anchor="ctr" wrap="square" lIns="128016" rIns="128016" tIns="91440"/>
+          <a:lstStyle/>
+          <a:p>
+            <a:pPr algn="ctr">
+              <a:spcAft>
+                <a:spcPts val="500"/>
+              </a:spcAft>
+            </a:pPr>
+            <a:r>
+              <a:rPr sz="1350" b="1">
+                <a:solidFill>
+                  <a:srgbClr val="0E4D5E"/>
+                </a:solidFill>
+                <a:latin typeface="Calibri"/>
+              </a:rPr>
+              <a:t>3 · Coordinators</a:t>
+            </a:r>
+          </a:p>
+          <a:p>
+            <a:pPr>
+              <a:spcAft>
+                <a:spcPts val="400"/>
+              </a:spcAft>
+            </a:pPr>
+            <a:r>
+              <a:rPr sz="1500">
+                <a:solidFill>
+                  <a:srgbClr val="24262E"/>
+                </a:solidFill>
+                <a:latin typeface="Calibri"/>
+              </a:rPr>
+              <a:t>Is there a path to CPU time on a Bamberg or HSLU cluster? Per-window Granger is our compute bottleneck: hundreds of laptop-hours, or about a day on a 32-64 core node.</a:t>
+            </a:r>
+          </a:p>
+        </p:txBody>
+      </p:sp>
+      <p:sp>
+        <p:nvSpPr>
+          <p:cNvPr id="9" name="TextBox 8"/>
           <p:cNvSpPr txBox="1"/>
           <p:nvPr/>
         </p:nvSpPr>
         <p:spPr>
           <a:xfrm>
-            <a:off x="502920" y="4114800"/>
-            <a:ext cx="5669280" cy="457200"/>
+            <a:off x="502920" y="6080760"/>
+            <a:ext cx="11185855" cy="457200"/>
           </a:xfrm>
           <a:prstGeom prst="rect">
             <a:avLst/>
@@ -6073,213 +7868,24 @@
           <a:noFill/>
         </p:spPr>
         <p:txBody>
-          <a:bodyPr wrap="square" lIns="45720" rIns="45720">
+          <a:bodyPr wrap="square" anchor="t" lIns="27432" rIns="27432" tIns="18288" bIns="18288">
             <a:spAutoFit/>
           </a:bodyPr>
           <a:lstStyle/>
           <a:p>
-            <a:pPr algn="l"/>
-            <a:r>
-              <a:rPr sz="1800" b="1">
-                <a:solidFill>
-                  <a:srgbClr val="C4902A"/>
-                </a:solidFill>
-                <a:latin typeface="Calibri"/>
-              </a:rPr>
-              <a:t>What slipped</a:t>
-            </a:r>
-          </a:p>
-        </p:txBody>
-      </p:sp>
-      <p:sp>
-        <p:nvSpPr>
-          <p:cNvPr id="7" name="TextBox 6"/>
-          <p:cNvSpPr txBox="1"/>
-          <p:nvPr/>
-        </p:nvSpPr>
-        <p:spPr>
-          <a:xfrm>
-            <a:off x="502920" y="4572000"/>
-            <a:ext cx="5669280" cy="1828800"/>
-          </a:xfrm>
-          <a:prstGeom prst="rect">
-            <a:avLst/>
-          </a:prstGeom>
-          <a:noFill/>
-        </p:spPr>
-        <p:txBody>
-          <a:bodyPr wrap="square" lIns="45720">
-            <a:spAutoFit/>
-          </a:bodyPr>
-          <a:lstStyle/>
-          <a:p>
-            <a:pPr algn="l">
-              <a:spcAft>
-                <a:spcPts val="800"/>
-              </a:spcAft>
+            <a:pPr algn="ctr">
+              <a:lnSpc>
+                <a:spcPct val="100000"/>
+              </a:lnSpc>
             </a:pPr>
             <a:r>
-              <a:rPr sz="1400">
-                <a:solidFill>
-                  <a:srgbClr val="24262E"/>
-                </a:solidFill>
-                <a:latin typeface="Calibri"/>
-              </a:rPr>
-              <a:t>•  ESMUC + ChoralSynth not yet pulled into Tier-2.</a:t>
-            </a:r>
-          </a:p>
-          <a:p>
-            <a:pPr algn="l">
-              <a:spcAft>
-                <a:spcPts val="800"/>
-              </a:spcAft>
-            </a:pPr>
-            <a:r>
-              <a:rPr sz="1400">
-                <a:solidFill>
-                  <a:srgbClr val="24262E"/>
-                </a:solidFill>
-                <a:latin typeface="Calibri"/>
-              </a:rPr>
-              <a:t>•  ChoralSynth: openly licensed on Zenodo, Sprint-4 download.</a:t>
-            </a:r>
-          </a:p>
-          <a:p>
-            <a:pPr algn="l">
-              <a:spcAft>
-                <a:spcPts val="800"/>
-              </a:spcAft>
-            </a:pPr>
-            <a:r>
-              <a:rPr sz="1400">
-                <a:solidFill>
-                  <a:srgbClr val="24262E"/>
-                </a:solidFill>
-                <a:latin typeface="Calibri"/>
-              </a:rPr>
-              <a:t>•  ESMUC: needs UPF license; asking Hacker on next slide.</a:t>
-            </a:r>
-          </a:p>
-        </p:txBody>
-      </p:sp>
-      <p:sp>
-        <p:nvSpPr>
-          <p:cNvPr id="8" name="TextBox 7"/>
-          <p:cNvSpPr txBox="1"/>
-          <p:nvPr/>
-        </p:nvSpPr>
-        <p:spPr>
-          <a:xfrm>
-            <a:off x="6400800" y="1371600"/>
-            <a:ext cx="5303520" cy="457200"/>
-          </a:xfrm>
-          <a:prstGeom prst="rect">
-            <a:avLst/>
-          </a:prstGeom>
-          <a:noFill/>
-        </p:spPr>
-        <p:txBody>
-          <a:bodyPr wrap="square" lIns="45720" rIns="45720">
-            <a:spAutoFit/>
-          </a:bodyPr>
-          <a:lstStyle/>
-          <a:p>
-            <a:pPr algn="l"/>
-            <a:r>
-              <a:rPr sz="1800" b="1">
+              <a:rPr sz="2200" b="1">
                 <a:solidFill>
                   <a:srgbClr val="0E4D5E"/>
                 </a:solidFill>
                 <a:latin typeface="Calibri"/>
               </a:rPr>
-              <a:t>Four honest limitations</a:t>
-            </a:r>
-          </a:p>
-        </p:txBody>
-      </p:sp>
-      <p:sp>
-        <p:nvSpPr>
-          <p:cNvPr id="9" name="TextBox 8"/>
-          <p:cNvSpPr txBox="1"/>
-          <p:nvPr/>
-        </p:nvSpPr>
-        <p:spPr>
-          <a:xfrm>
-            <a:off x="6400800" y="1828800"/>
-            <a:ext cx="5303520" cy="4572000"/>
-          </a:xfrm>
-          <a:prstGeom prst="rect">
-            <a:avLst/>
-          </a:prstGeom>
-          <a:noFill/>
-        </p:spPr>
-        <p:txBody>
-          <a:bodyPr wrap="square" lIns="45720">
-            <a:spAutoFit/>
-          </a:bodyPr>
-          <a:lstStyle/>
-          <a:p>
-            <a:pPr algn="l">
-              <a:spcAft>
-                <a:spcPts val="800"/>
-              </a:spcAft>
-            </a:pPr>
-            <a:r>
-              <a:rPr sz="1400">
-                <a:solidFill>
-                  <a:srgbClr val="24262E"/>
-                </a:solidFill>
-                <a:latin typeface="Calibri"/>
-              </a:rPr>
-              <a:t>•  V(t) is NaN across all current E(t) (Dagstuhl is audio-only).</a:t>
-            </a:r>
-          </a:p>
-          <a:p>
-            <a:pPr algn="l">
-              <a:spcAft>
-                <a:spcPts val="800"/>
-              </a:spcAft>
-            </a:pPr>
-            <a:r>
-              <a:rPr sz="1400">
-                <a:solidFill>
-                  <a:srgbClr val="24262E"/>
-                </a:solidFill>
-                <a:latin typeface="Calibri"/>
-              </a:rPr>
-              <a:t>•  WP3 corpus is all Dagstuhl studio,no NMP-regime variation yet.</a:t>
-            </a:r>
-          </a:p>
-          <a:p>
-            <a:pPr algn="l">
-              <a:spcAft>
-                <a:spcPts val="800"/>
-              </a:spcAft>
-            </a:pPr>
-            <a:r>
-              <a:rPr sz="1400">
-                <a:solidFill>
-                  <a:srgbClr val="24262E"/>
-                </a:solidFill>
-                <a:latin typeface="Calibri"/>
-              </a:rPr>
-              <a:t>•  WP2 detection is 50%,the 5/10 pass rate defines our inclusion set.</a:t>
-            </a:r>
-          </a:p>
-          <a:p>
-            <a:pPr algn="l">
-              <a:spcAft>
-                <a:spcPts val="800"/>
-              </a:spcAft>
-            </a:pPr>
-            <a:r>
-              <a:rPr sz="1400">
-                <a:solidFill>
-                  <a:srgbClr val="24262E"/>
-                </a:solidFill>
-                <a:latin typeface="Calibri"/>
-              </a:rPr>
-              <a:t>•  p_null reports as 0.0000,correct read is "p &lt; 1/200", not literal zero.</a:t>
+              <a:t>Thank you. Questions.</a:t>
             </a:r>
           </a:p>
         </p:txBody>

--- a/output/jun11_status_meeting_iv.pptx
+++ b/output/jun11_status_meeting_iv.pptx
@@ -3471,7 +3471,7 @@
                 </a:solidFill>
                 <a:latin typeface="Calibri"/>
               </a:rPr>
-              <a:t>Our goals and plan, in 60 seconds</a:t>
+              <a:t>Goals and plan</a:t>
             </a:r>
           </a:p>
         </p:txBody>
@@ -3613,7 +3613,7 @@
                 </a:solidFill>
                 <a:latin typeface="Calibri"/>
               </a:rPr>
-              <a:t>one number per moment: how well is this choir coordinating?</a:t>
+              <a:t>a single coordination score per time window</a:t>
             </a:r>
           </a:p>
         </p:txBody>
@@ -3630,7 +3630,9 @@
             <a:ext cx="5577840" cy="1033271"/>
           </a:xfrm>
           <a:prstGeom prst="roundRect">
-            <a:avLst/>
+            <a:avLst>
+              <a:gd name="adj" fmla="val 4000"/>
+            </a:avLst>
           </a:prstGeom>
           <a:solidFill>
             <a:srgbClr val="FDFBF5"/>
@@ -3656,7 +3658,7 @@
           </a:fontRef>
         </p:style>
         <p:txBody>
-          <a:bodyPr rtlCol="0" anchor="ctr" wrap="square" lIns="128016" rIns="128016" tIns="91440"/>
+          <a:bodyPr rtlCol="0" anchor="t" wrap="square" lIns="182880" rIns="182880" tIns="146304"/>
           <a:lstStyle/>
           <a:p>
             <a:pPr algn="ctr">
@@ -3704,7 +3706,9 @@
             <a:ext cx="5577840" cy="1033271"/>
           </a:xfrm>
           <a:prstGeom prst="roundRect">
-            <a:avLst/>
+            <a:avLst>
+              <a:gd name="adj" fmla="val 4000"/>
+            </a:avLst>
           </a:prstGeom>
           <a:solidFill>
             <a:srgbClr val="FDFBF5"/>
@@ -3730,7 +3734,7 @@
           </a:fontRef>
         </p:style>
         <p:txBody>
-          <a:bodyPr rtlCol="0" anchor="ctr" wrap="square" lIns="128016" rIns="128016" tIns="91440"/>
+          <a:bodyPr rtlCol="0" anchor="t" wrap="square" lIns="182880" rIns="182880" tIns="146304"/>
           <a:lstStyle/>
           <a:p>
             <a:pPr algn="ctr">
@@ -3778,7 +3782,9 @@
             <a:ext cx="5577840" cy="1033271"/>
           </a:xfrm>
           <a:prstGeom prst="roundRect">
-            <a:avLst/>
+            <a:avLst>
+              <a:gd name="adj" fmla="val 4000"/>
+            </a:avLst>
           </a:prstGeom>
           <a:solidFill>
             <a:srgbClr val="FDFBF5"/>
@@ -3804,7 +3810,7 @@
           </a:fontRef>
         </p:style>
         <p:txBody>
-          <a:bodyPr rtlCol="0" anchor="ctr" wrap="square" lIns="128016" rIns="128016" tIns="91440"/>
+          <a:bodyPr rtlCol="0" anchor="t" wrap="square" lIns="182880" rIns="182880" tIns="146304"/>
           <a:lstStyle/>
           <a:p>
             <a:pPr algn="ctr">
@@ -4738,7 +4744,9 @@
             <a:ext cx="11185855" cy="475488"/>
           </a:xfrm>
           <a:prstGeom prst="roundRect">
-            <a:avLst/>
+            <a:avLst>
+              <a:gd name="adj" fmla="val 12000"/>
+            </a:avLst>
           </a:prstGeom>
           <a:solidFill>
             <a:srgbClr val="0E4D5E"/>
@@ -4773,7 +4781,7 @@
                 </a:solidFill>
                 <a:latin typeface="Calibri"/>
               </a:rPr>
-              <a:t>Same goals as April, no scope drift. This iteration: make E(t) real.</a:t>
+              <a:t>Goals unchanged since April. This iteration delivered the first end-to-end E(t).</a:t>
             </a:r>
           </a:p>
         </p:txBody>
@@ -4877,7 +4885,7 @@
                 </a:solidFill>
                 <a:latin typeface="Calibri"/>
               </a:rPr>
-              <a:t>Headline: E(t) is operational, 5/5 pieces beat chance</a:t>
+              <a:t>E(t) is operational: all 5 pieces significant above the null</a:t>
             </a:r>
           </a:p>
         </p:txBody>
@@ -4996,7 +5004,9 @@
             <a:ext cx="3017520" cy="1078992"/>
           </a:xfrm>
           <a:prstGeom prst="roundRect">
-            <a:avLst/>
+            <a:avLst>
+              <a:gd name="adj" fmla="val 6000"/>
+            </a:avLst>
           </a:prstGeom>
           <a:solidFill>
             <a:srgbClr val="FDFBF5"/>
@@ -5062,7 +5072,9 @@
             <a:ext cx="3017520" cy="1078992"/>
           </a:xfrm>
           <a:prstGeom prst="roundRect">
-            <a:avLst/>
+            <a:avLst>
+              <a:gd name="adj" fmla="val 6000"/>
+            </a:avLst>
           </a:prstGeom>
           <a:solidFill>
             <a:srgbClr val="FDFBF5"/>
@@ -5128,7 +5140,9 @@
             <a:ext cx="3017520" cy="1078992"/>
           </a:xfrm>
           <a:prstGeom prst="roundRect">
-            <a:avLst/>
+            <a:avLst>
+              <a:gd name="adj" fmla="val 6000"/>
+            </a:avLst>
           </a:prstGeom>
           <a:solidFill>
             <a:srgbClr val="FDFBF5"/>
@@ -5233,7 +5247,9 @@
             <a:ext cx="11185855" cy="475488"/>
           </a:xfrm>
           <a:prstGeom prst="roundRect">
-            <a:avLst/>
+            <a:avLst>
+              <a:gd name="adj" fmla="val 12000"/>
+            </a:avLst>
           </a:prstGeom>
           <a:solidFill>
             <a:srgbClr val="0E4D5E"/>
@@ -5268,7 +5284,7 @@
                 </a:solidFill>
                 <a:latin typeface="Calibri"/>
               </a:rPr>
-              <a:t>The number we promised in April exists, is repeatable, and is statistically defensible.</a:t>
+              <a:t>E(t) is implemented, reproducible, and significant against the null on all five pieces.</a:t>
             </a:r>
           </a:p>
         </p:txBody>
@@ -5372,7 +5388,7 @@
                 </a:solidFill>
                 <a:latin typeface="Calibri"/>
               </a:rPr>
-              <a:t>The audio + network engine behind E(t)</a:t>
+              <a:t>Audio and network pipelines behind E(t)</a:t>
             </a:r>
           </a:p>
         </p:txBody>
@@ -5491,7 +5507,9 @@
             <a:ext cx="3383280" cy="914400"/>
           </a:xfrm>
           <a:prstGeom prst="roundRect">
-            <a:avLst/>
+            <a:avLst>
+              <a:gd name="adj" fmla="val 6000"/>
+            </a:avLst>
           </a:prstGeom>
           <a:solidFill>
             <a:srgbClr val="FDFBF5"/>
@@ -5557,7 +5575,9 @@
             <a:ext cx="3383280" cy="914400"/>
           </a:xfrm>
           <a:prstGeom prst="roundRect">
-            <a:avLst/>
+            <a:avLst>
+              <a:gd name="adj" fmla="val 6000"/>
+            </a:avLst>
           </a:prstGeom>
           <a:solidFill>
             <a:srgbClr val="FDFBF5"/>
@@ -5623,7 +5643,9 @@
             <a:ext cx="3383280" cy="914400"/>
           </a:xfrm>
           <a:prstGeom prst="roundRect">
-            <a:avLst/>
+            <a:avLst>
+              <a:gd name="adj" fmla="val 6000"/>
+            </a:avLst>
           </a:prstGeom>
           <a:solidFill>
             <a:srgbClr val="FDFBF5"/>
@@ -5728,7 +5750,9 @@
             <a:ext cx="11185855" cy="475488"/>
           </a:xfrm>
           <a:prstGeom prst="roundRect">
-            <a:avLst/>
+            <a:avLst>
+              <a:gd name="adj" fmla="val 12000"/>
+            </a:avLst>
           </a:prstGeom>
           <a:solidFill>
             <a:srgbClr val="0E4D5E"/>
@@ -5763,7 +5787,7 @@
                 </a:solidFill>
                 <a:latin typeface="Calibri"/>
               </a:rPr>
-              <a:t>Last sprint's flagship reproduces exactly, and the pipeline now scales.</a:t>
+              <a:t>The Sprint-2 reference result reproduces exactly; the pipeline now scales to the corpus.</a:t>
             </a:r>
           </a:p>
         </p:txBody>
@@ -5867,7 +5891,7 @@
                 </a:solidFill>
                 <a:latin typeface="Calibri"/>
               </a:rPr>
-              <a:t>Video features + the dashboard taking shape</a:t>
+              <a:t>Video features and dashboard scaffold</a:t>
             </a:r>
           </a:p>
         </p:txBody>
@@ -6010,7 +6034,9 @@
             <a:ext cx="1874519" cy="914400"/>
           </a:xfrm>
           <a:prstGeom prst="roundRect">
-            <a:avLst/>
+            <a:avLst>
+              <a:gd name="adj" fmla="val 6000"/>
+            </a:avLst>
           </a:prstGeom>
           <a:solidFill>
             <a:srgbClr val="FDFBF5"/>
@@ -6076,7 +6102,9 @@
             <a:ext cx="1874519" cy="914400"/>
           </a:xfrm>
           <a:prstGeom prst="roundRect">
-            <a:avLst/>
+            <a:avLst>
+              <a:gd name="adj" fmla="val 6000"/>
+            </a:avLst>
           </a:prstGeom>
           <a:solidFill>
             <a:srgbClr val="FDFBF5"/>
@@ -6142,7 +6170,9 @@
             <a:ext cx="1874519" cy="914400"/>
           </a:xfrm>
           <a:prstGeom prst="roundRect">
-            <a:avLst/>
+            <a:avLst>
+              <a:gd name="adj" fmla="val 6000"/>
+            </a:avLst>
           </a:prstGeom>
           <a:solidFill>
             <a:srgbClr val="FDFBF5"/>
@@ -6248,7 +6278,9 @@
             <a:ext cx="11185855" cy="475488"/>
           </a:xfrm>
           <a:prstGeom prst="roundRect">
-            <a:avLst/>
+            <a:avLst>
+              <a:gd name="adj" fmla="val 12000"/>
+            </a:avLst>
           </a:prstGeom>
           <a:solidFill>
             <a:srgbClr val="0E4D5E"/>
@@ -6283,7 +6315,7 @@
                 </a:solidFill>
                 <a:latin typeface="Calibri"/>
               </a:rPr>
-              <a:t>Every work package moved. Nothing is blocked.</a:t>
+              <a:t>All four work packages advanced; no blockers.</a:t>
             </a:r>
           </a:p>
         </p:txBody>
@@ -6823,7 +6855,9 @@
             <a:ext cx="11185855" cy="475488"/>
           </a:xfrm>
           <a:prstGeom prst="roundRect">
-            <a:avLst/>
+            <a:avLst>
+              <a:gd name="adj" fmla="val 12000"/>
+            </a:avLst>
           </a:prstGeom>
           <a:solidFill>
             <a:srgbClr val="0E4D5E"/>
@@ -6858,7 +6892,7 @@
                 </a:solidFill>
                 <a:latin typeface="Calibri"/>
               </a:rPr>
-              <a:t>This iteration made E(t) real. The next makes it discriminate between regimes.</a:t>
+              <a:t>Next iteration: from measuring coordination to comparing latency regimes.</a:t>
             </a:r>
           </a:p>
         </p:txBody>
@@ -6962,7 +6996,7 @@
                 </a:solidFill>
                 <a:latin typeface="Calibri"/>
               </a:rPr>
-              <a:t>What we keep, what we fix, what to watch</a:t>
+              <a:t>Sprint 3 retrospective</a:t>
             </a:r>
           </a:p>
         </p:txBody>
@@ -7057,7 +7091,9 @@
             <a:ext cx="3611880" cy="4480560"/>
           </a:xfrm>
           <a:prstGeom prst="roundRect">
-            <a:avLst/>
+            <a:avLst>
+              <a:gd name="adj" fmla="val 4000"/>
+            </a:avLst>
           </a:prstGeom>
           <a:solidFill>
             <a:srgbClr val="FDFBF5"/>
@@ -7083,7 +7119,7 @@
           </a:fontRef>
         </p:style>
         <p:txBody>
-          <a:bodyPr rtlCol="0" anchor="ctr" wrap="square" lIns="128016" rIns="128016" tIns="91440"/>
+          <a:bodyPr rtlCol="0" anchor="t" wrap="square" lIns="182880" rIns="182880" tIns="146304"/>
           <a:lstStyle/>
           <a:p>
             <a:pPr algn="ctr">
@@ -7098,7 +7134,7 @@
                 </a:solidFill>
                 <a:latin typeface="Calibri"/>
               </a:rPr>
-              <a:t>KEPT DOING · it works</a:t>
+              <a:t>What worked</a:t>
             </a:r>
           </a:p>
           <a:p>
@@ -7108,13 +7144,13 @@
               </a:spcAft>
             </a:pPr>
             <a:r>
-              <a:rPr sz="1250">
+              <a:rPr sz="1350">
                 <a:solidFill>
                   <a:srgbClr val="24262E"/>
                 </a:solidFill>
                 <a:latin typeface="Calibri"/>
               </a:rPr>
-              <a:t>One named, reviewable artefact per work package per iteration.</a:t>
+              <a:t>One reviewable artefact per work package per iteration.</a:t>
             </a:r>
           </a:p>
           <a:p>
@@ -7124,7 +7160,7 @@
               </a:spcAft>
             </a:pPr>
             <a:r>
-              <a:rPr sz="1250">
+              <a:rPr sz="1350">
                 <a:solidFill>
                   <a:srgbClr val="24262E"/>
                 </a:solidFill>
@@ -7140,13 +7176,13 @@
               </a:spcAft>
             </a:pPr>
             <a:r>
-              <a:rPr sz="1250">
+              <a:rPr sz="1350">
                 <a:solidFill>
                   <a:srgbClr val="24262E"/>
                 </a:solidFill>
                 <a:latin typeface="Calibri"/>
               </a:rPr>
-              <a:t>Docs synced after every milestone: anyone can read three files and be fully current.</a:t>
+              <a:t>Documentation updated at every milestone; project state is readable from three files.</a:t>
             </a:r>
           </a:p>
         </p:txBody>
@@ -7163,7 +7199,9 @@
             <a:ext cx="3611880" cy="4480560"/>
           </a:xfrm>
           <a:prstGeom prst="roundRect">
-            <a:avLst/>
+            <a:avLst>
+              <a:gd name="adj" fmla="val 4000"/>
+            </a:avLst>
           </a:prstGeom>
           <a:solidFill>
             <a:srgbClr val="FDFBF5"/>
@@ -7189,7 +7227,7 @@
           </a:fontRef>
         </p:style>
         <p:txBody>
-          <a:bodyPr rtlCol="0" anchor="ctr" wrap="square" lIns="128016" rIns="128016" tIns="91440"/>
+          <a:bodyPr rtlCol="0" anchor="t" wrap="square" lIns="182880" rIns="182880" tIns="146304"/>
           <a:lstStyle/>
           <a:p>
             <a:pPr algn="ctr">
@@ -7204,7 +7242,7 @@
                 </a:solidFill>
                 <a:latin typeface="Calibri"/>
               </a:rPr>
-              <a:t>WENT WRONG · and the fix</a:t>
+              <a:t>What went wrong</a:t>
             </a:r>
           </a:p>
           <a:p>
@@ -7214,13 +7252,13 @@
               </a:spcAft>
             </a:pPr>
             <a:r>
-              <a:rPr sz="1250">
+              <a:rPr sz="1350">
                 <a:solidFill>
                   <a:srgbClr val="24262E"/>
                 </a:solidFill>
                 <a:latin typeface="Calibri"/>
               </a:rPr>
-              <a:t>ESMUC + ChoralSynth not pulled into Tier-2 yet. Fix: ChoralSynth is an open Zenodo download, scheduled next iteration. ESMUC needs a license: question for the room.</a:t>
+              <a:t>ESMUC and ChoralSynth not yet in Tier‑2. ChoralSynth is openly licensed on Zenodo and scheduled for next iteration; ESMUC requires a license (open question).</a:t>
             </a:r>
           </a:p>
           <a:p>
@@ -7230,7 +7268,7 @@
               </a:spcAft>
             </a:pPr>
             <a:r>
-              <a:rPr sz="1250">
+              <a:rPr sz="1350">
                 <a:solidFill>
                   <a:srgbClr val="24262E"/>
                 </a:solidFill>
@@ -7246,13 +7284,13 @@
               </a:spcAft>
             </a:pPr>
             <a:r>
-              <a:rPr sz="1250">
+              <a:rPr sz="1350">
                 <a:solidFill>
                   <a:srgbClr val="24262E"/>
                 </a:solidFill>
                 <a:latin typeface="Calibri"/>
               </a:rPr>
-              <a:t>Half the Tier-1 videos are screen captures with no detectable body. Fix: future curation stratifies on "singers visible", not just NMP regime.</a:t>
+              <a:t>Half of the Tier‑1 videos are screen captures without visible singers. Future curation will filter on singer visibility, not only NMP regime.</a:t>
             </a:r>
           </a:p>
         </p:txBody>
@@ -7269,7 +7307,9 @@
             <a:ext cx="3611880" cy="4480560"/>
           </a:xfrm>
           <a:prstGeom prst="roundRect">
-            <a:avLst/>
+            <a:avLst>
+              <a:gd name="adj" fmla="val 4000"/>
+            </a:avLst>
           </a:prstGeom>
           <a:solidFill>
             <a:srgbClr val="FDFBF5"/>
@@ -7295,7 +7335,7 @@
           </a:fontRef>
         </p:style>
         <p:txBody>
-          <a:bodyPr rtlCol="0" anchor="ctr" wrap="square" lIns="128016" rIns="128016" tIns="91440"/>
+          <a:bodyPr rtlCol="0" anchor="t" wrap="square" lIns="182880" rIns="182880" tIns="146304"/>
           <a:lstStyle/>
           <a:p>
             <a:pPr algn="ctr">
@@ -7310,7 +7350,7 @@
                 </a:solidFill>
                 <a:latin typeface="Calibri"/>
               </a:rPr>
-              <a:t>WATCH LIST · before you ask</a:t>
+              <a:t>Known limitations</a:t>
             </a:r>
           </a:p>
           <a:p>
@@ -7320,13 +7360,13 @@
               </a:spcAft>
             </a:pPr>
             <a:r>
-              <a:rPr sz="1250">
+              <a:rPr sz="1350">
                 <a:solidFill>
                   <a:srgbClr val="24262E"/>
                 </a:solidFill>
                 <a:latin typeface="Calibri"/>
               </a:rPr>
-              <a:t>V(t) absent from all current E(t): Dagstuhl has no video. Weight reallocates; code is ready when multimodal data exists.</a:t>
+              <a:t>V(t) is absent from current E(t) values; Dagstuhl has no video. The composite reallocates weight until multimodal data exists.</a:t>
             </a:r>
           </a:p>
           <a:p>
@@ -7336,7 +7376,7 @@
               </a:spcAft>
             </a:pPr>
             <a:r>
-              <a:rPr sz="1250">
+              <a:rPr sz="1350">
                 <a:solidFill>
                   <a:srgbClr val="24262E"/>
                 </a:solidFill>
@@ -7352,13 +7392,13 @@
               </a:spcAft>
             </a:pPr>
             <a:r>
-              <a:rPr sz="1250">
+              <a:rPr sz="1350">
                 <a:solidFill>
                   <a:srgbClr val="24262E"/>
                 </a:solidFill>
                 <a:latin typeface="Calibri"/>
               </a:rPr>
-              <a:t>All 5 E(t) pieces are zero-latency studio takes. Cross-regime variation arrives with Tier-3 next iteration.</a:t>
+              <a:t>All five E(t) pieces are zero‑latency studio recordings. Cross‑regime variation arrives with Tier‑3.</a:t>
             </a:r>
           </a:p>
           <a:p>
@@ -7368,7 +7408,7 @@
               </a:spcAft>
             </a:pPr>
             <a:r>
-              <a:rPr sz="1250">
+              <a:rPr sz="1350">
                 <a:solidFill>
                   <a:srgbClr val="24262E"/>
                 </a:solidFill>
@@ -7384,13 +7424,13 @@
               </a:spcAft>
             </a:pPr>
             <a:r>
-              <a:rPr sz="1250">
+              <a:rPr sz="1350">
                 <a:solidFill>
                   <a:srgbClr val="24262E"/>
                 </a:solidFill>
                 <a:latin typeface="Calibri"/>
               </a:rPr>
-              <a:t>"p &lt; 0.001" means 0 of 200 shuffles beat observed, not literal zero.</a:t>
+              <a:t>p &lt; 0.001 means 0 of 200 permutations exceeded the observed value.</a:t>
             </a:r>
           </a:p>
         </p:txBody>
@@ -7407,7 +7447,9 @@
             <a:ext cx="11185855" cy="475488"/>
           </a:xfrm>
           <a:prstGeom prst="roundRect">
-            <a:avLst/>
+            <a:avLst>
+              <a:gd name="adj" fmla="val 12000"/>
+            </a:avLst>
           </a:prstGeom>
           <a:solidFill>
             <a:srgbClr val="0E4D5E"/>
@@ -7442,7 +7484,7 @@
                 </a:solidFill>
                 <a:latin typeface="Calibri"/>
               </a:rPr>
-              <a:t>No surprises buried. Everything here is also in the written results doc.</a:t>
+              <a:t>All retrospective items are documented in sprint3_results.md.</a:t>
             </a:r>
           </a:p>
         </p:txBody>
@@ -7546,7 +7588,7 @@
                 </a:solidFill>
                 <a:latin typeface="Calibri"/>
               </a:rPr>
-              <a:t>Three things we need from the room</a:t>
+              <a:t>Open questions</a:t>
             </a:r>
           </a:p>
         </p:txBody>
@@ -7637,11 +7679,13 @@
         </p:nvSpPr>
         <p:spPr>
           <a:xfrm>
-            <a:off x="502920" y="1463040"/>
-            <a:ext cx="11185855" cy="1325880"/>
+            <a:off x="502920" y="1645920"/>
+            <a:ext cx="11185855" cy="1554480"/>
           </a:xfrm>
           <a:prstGeom prst="roundRect">
-            <a:avLst/>
+            <a:avLst>
+              <a:gd name="adj" fmla="val 4000"/>
+            </a:avLst>
           </a:prstGeom>
           <a:solidFill>
             <a:srgbClr val="FDFBF5"/>
@@ -7667,7 +7711,7 @@
           </a:fontRef>
         </p:style>
         <p:txBody>
-          <a:bodyPr rtlCol="0" anchor="ctr" wrap="square" lIns="128016" rIns="128016" tIns="91440"/>
+          <a:bodyPr rtlCol="0" anchor="t" wrap="square" lIns="182880" rIns="182880" tIns="146304"/>
           <a:lstStyle/>
           <a:p>
             <a:pPr algn="ctr">
@@ -7682,7 +7726,7 @@
                 </a:solidFill>
                 <a:latin typeface="Calibri"/>
               </a:rPr>
-              <a:t>1 · Prof. Hacker</a:t>
+              <a:t>1 · Prof. Hacker: ESMUC dataset access</a:t>
             </a:r>
           </a:p>
           <a:p>
@@ -7698,7 +7742,7 @@
                 </a:solidFill>
                 <a:latin typeface="Calibri"/>
               </a:rPr>
-              <a:t>Do you have institutional access to the ESMUC multitrack dataset? (ChoralSynth we can download ourselves: open license on Zenodo.)</a:t>
+              <a:t>Do you have institutional access to the ESMUC multitrack dataset? ChoralSynth is openly licensed on Zenodo and we will download it ourselves; ESMUC is the only dataset where we need support.</a:t>
             </a:r>
           </a:p>
         </p:txBody>
@@ -7711,11 +7755,13 @@
         </p:nvSpPr>
         <p:spPr>
           <a:xfrm>
-            <a:off x="502920" y="2990088"/>
-            <a:ext cx="11185855" cy="1325880"/>
+            <a:off x="502920" y="3520440"/>
+            <a:ext cx="11185855" cy="1554480"/>
           </a:xfrm>
           <a:prstGeom prst="roundRect">
-            <a:avLst/>
+            <a:avLst>
+              <a:gd name="adj" fmla="val 4000"/>
+            </a:avLst>
           </a:prstGeom>
           <a:solidFill>
             <a:srgbClr val="FDFBF5"/>
@@ -7741,7 +7787,7 @@
           </a:fontRef>
         </p:style>
         <p:txBody>
-          <a:bodyPr rtlCol="0" anchor="ctr" wrap="square" lIns="128016" rIns="128016" tIns="91440"/>
+          <a:bodyPr rtlCol="0" anchor="t" wrap="square" lIns="182880" rIns="182880" tIns="146304"/>
           <a:lstStyle/>
           <a:p>
             <a:pPr algn="ctr">
@@ -7756,7 +7802,7 @@
                 </a:solidFill>
                 <a:latin typeface="Calibri"/>
               </a:rPr>
-              <a:t>2 · Prof. Gloor</a:t>
+              <a:t>2 · Coordinators: compute for the next iteration</a:t>
             </a:r>
           </a:p>
           <a:p>
@@ -7772,94 +7818,20 @@
                 </a:solidFill>
                 <a:latin typeface="Calibri"/>
               </a:rPr>
-              <a:t>For the final paper figures: matplotlib-clean, or Gephi/Cytoscape-polished SVG?</a:t>
-            </a:r>
-          </a:p>
-        </p:txBody>
-      </p:sp>
-      <p:sp>
-        <p:nvSpPr>
-          <p:cNvPr id="8" name="Rounded Rectangle 7"/>
-          <p:cNvSpPr/>
-          <p:nvPr/>
-        </p:nvSpPr>
-        <p:spPr>
-          <a:xfrm>
-            <a:off x="502920" y="4517136"/>
-            <a:ext cx="11185855" cy="1325880"/>
-          </a:xfrm>
-          <a:prstGeom prst="roundRect">
-            <a:avLst/>
-          </a:prstGeom>
-          <a:solidFill>
-            <a:srgbClr val="FDFBF5"/>
-          </a:solidFill>
-          <a:ln w="12700">
-            <a:solidFill>
-              <a:srgbClr val="CBD9DD"/>
-            </a:solidFill>
-          </a:ln>
-        </p:spPr>
-        <p:style>
-          <a:lnRef idx="1">
-            <a:schemeClr val="accent1"/>
-          </a:lnRef>
-          <a:fillRef idx="3">
-            <a:schemeClr val="accent1"/>
-          </a:fillRef>
-          <a:effectRef idx="2">
-            <a:schemeClr val="accent1"/>
-          </a:effectRef>
-          <a:fontRef idx="minor">
-            <a:schemeClr val="lt1"/>
-          </a:fontRef>
-        </p:style>
-        <p:txBody>
-          <a:bodyPr rtlCol="0" anchor="ctr" wrap="square" lIns="128016" rIns="128016" tIns="91440"/>
-          <a:lstStyle/>
-          <a:p>
-            <a:pPr algn="ctr">
-              <a:spcAft>
-                <a:spcPts val="500"/>
-              </a:spcAft>
-            </a:pPr>
-            <a:r>
-              <a:rPr sz="1350" b="1">
-                <a:solidFill>
-                  <a:srgbClr val="0E4D5E"/>
-                </a:solidFill>
-                <a:latin typeface="Calibri"/>
-              </a:rPr>
-              <a:t>3 · Coordinators</a:t>
-            </a:r>
-          </a:p>
-          <a:p>
-            <a:pPr>
-              <a:spcAft>
-                <a:spcPts val="400"/>
-              </a:spcAft>
-            </a:pPr>
-            <a:r>
-              <a:rPr sz="1500">
-                <a:solidFill>
-                  <a:srgbClr val="24262E"/>
-                </a:solidFill>
-                <a:latin typeface="Calibri"/>
-              </a:rPr>
-              <a:t>Is there a path to CPU time on a Bamberg or HSLU cluster? Per-window Granger is our compute bottleneck: hundreds of laptop-hours, or about a day on a 32-64 core node.</a:t>
-            </a:r>
-          </a:p>
-        </p:txBody>
-      </p:sp>
-      <p:sp>
-        <p:nvSpPr>
-          <p:cNvPr id="9" name="TextBox 8"/>
+              <a:t>Is there a path to CPU time on a Bamberg or HSLU cluster? Per-window Granger across the corpus is the compute bottleneck for the latency-injection runs: hundreds of hours on our laptops, roughly one day on a 32-64 core node.</a:t>
+            </a:r>
+          </a:p>
+        </p:txBody>
+      </p:sp>
+      <p:sp>
+        <p:nvSpPr>
+          <p:cNvPr id="8" name="TextBox 7"/>
           <p:cNvSpPr txBox="1"/>
           <p:nvPr/>
         </p:nvSpPr>
         <p:spPr>
           <a:xfrm>
-            <a:off x="502920" y="6080760"/>
+            <a:off x="502920" y="5852160"/>
             <a:ext cx="11185855" cy="457200"/>
           </a:xfrm>
           <a:prstGeom prst="rect">
@@ -7885,7 +7857,7 @@
                 </a:solidFill>
                 <a:latin typeface="Calibri"/>
               </a:rPr>
-              <a:t>Thank you. Questions.</a:t>
+              <a:t>Thank you.</a:t>
             </a:r>
           </a:p>
         </p:txBody>

--- a/output/jun11_status_meeting_iv.pptx
+++ b/output/jun11_status_meeting_iv.pptx
@@ -3125,7 +3125,7 @@
           </a:bodyPr>
           <a:lstStyle/>
           <a:p>
-            <a:pPr algn="ctr">
+            <a:pPr algn="ctr" latinLnBrk="0">
               <a:lnSpc>
                 <a:spcPct val="100000"/>
               </a:lnSpc>
@@ -3135,7 +3135,7 @@
                 <a:solidFill>
                   <a:srgbClr val="FDFBF5"/>
                 </a:solidFill>
-                <a:latin typeface="Calibri"/>
+                <a:latin typeface="Segoe UI"/>
               </a:rPr>
               <a:t>Status Meeting IV</a:t>
             </a:r>
@@ -3164,7 +3164,7 @@
           </a:bodyPr>
           <a:lstStyle/>
           <a:p>
-            <a:pPr algn="ctr">
+            <a:pPr algn="ctr" latinLnBrk="0">
               <a:lnSpc>
                 <a:spcPct val="100000"/>
               </a:lnSpc>
@@ -3174,7 +3174,7 @@
                 <a:solidFill>
                   <a:srgbClr val="E6C670"/>
                 </a:solidFill>
-                <a:latin typeface="Calibri"/>
+                <a:latin typeface="Segoe UI"/>
               </a:rPr>
               <a:t>Project 8: Entanglement in Online Choir</a:t>
             </a:r>
@@ -3238,7 +3238,7 @@
           </a:bodyPr>
           <a:lstStyle/>
           <a:p>
-            <a:pPr algn="ctr">
+            <a:pPr algn="ctr" latinLnBrk="0">
               <a:lnSpc>
                 <a:spcPct val="100000"/>
               </a:lnSpc>
@@ -3248,7 +3248,7 @@
                 <a:solidFill>
                   <a:srgbClr val="CBD9DD"/>
                 </a:solidFill>
-                <a:latin typeface="Calibri"/>
+                <a:latin typeface="Segoe UI"/>
               </a:rPr>
               <a:t>SNA-OSN-M Summer 2026  ·  Uni Bamberg × Uni Köln × HSLU</a:t>
             </a:r>
@@ -3277,7 +3277,7 @@
           </a:bodyPr>
           <a:lstStyle/>
           <a:p>
-            <a:pPr algn="ctr">
+            <a:pPr algn="ctr" latinLnBrk="0">
               <a:lnSpc>
                 <a:spcPct val="100000"/>
               </a:lnSpc>
@@ -3287,7 +3287,7 @@
                 <a:solidFill>
                   <a:srgbClr val="FDFBF5"/>
                 </a:solidFill>
-                <a:latin typeface="Calibri"/>
+                <a:latin typeface="Segoe UI"/>
               </a:rPr>
               <a:t>Presented by Hassan Ahmed, on behalf of the team</a:t>
             </a:r>
@@ -3316,7 +3316,7 @@
           </a:bodyPr>
           <a:lstStyle/>
           <a:p>
-            <a:pPr algn="ctr">
+            <a:pPr algn="ctr" latinLnBrk="0">
               <a:lnSpc>
                 <a:spcPct val="100000"/>
               </a:lnSpc>
@@ -3326,7 +3326,7 @@
                 <a:solidFill>
                   <a:srgbClr val="CBD9DD"/>
                 </a:solidFill>
-                <a:latin typeface="Calibri"/>
+                <a:latin typeface="Segoe UI"/>
               </a:rPr>
               <a:t>Supervisors: Prof. Janine Hacker (Uni Bamberg) · Prof. Peter Gloor (MIT/Köln)</a:t>
             </a:r>
@@ -3355,7 +3355,7 @@
           </a:bodyPr>
           <a:lstStyle/>
           <a:p>
-            <a:pPr algn="ctr">
+            <a:pPr algn="ctr" latinLnBrk="0">
               <a:lnSpc>
                 <a:spcPct val="100000"/>
               </a:lnSpc>
@@ -3365,7 +3365,7 @@
                 <a:solidFill>
                   <a:srgbClr val="E6C670"/>
                 </a:solidFill>
-                <a:latin typeface="Calibri"/>
+                <a:latin typeface="Segoe UI"/>
               </a:rPr>
               <a:t>2026-06-11 · 14:00 CET</a:t>
             </a:r>
@@ -3420,7 +3420,7 @@
           </a:bodyPr>
           <a:lstStyle/>
           <a:p>
-            <a:pPr algn="l">
+            <a:pPr algn="l" latinLnBrk="0">
               <a:lnSpc>
                 <a:spcPct val="100000"/>
               </a:lnSpc>
@@ -3430,7 +3430,7 @@
                 <a:solidFill>
                   <a:srgbClr val="C4902A"/>
                 </a:solidFill>
-                <a:latin typeface="Calibri"/>
+                <a:latin typeface="Segoe UI Semibold"/>
               </a:rPr>
               <a:t>RECAP</a:t>
             </a:r>
@@ -3459,7 +3459,7 @@
           </a:bodyPr>
           <a:lstStyle/>
           <a:p>
-            <a:pPr algn="l">
+            <a:pPr algn="l" latinLnBrk="0">
               <a:lnSpc>
                 <a:spcPct val="100000"/>
               </a:lnSpc>
@@ -3469,7 +3469,7 @@
                 <a:solidFill>
                   <a:srgbClr val="0E4D5E"/>
                 </a:solidFill>
-                <a:latin typeface="Calibri"/>
+                <a:latin typeface="Segoe UI Semibold"/>
               </a:rPr>
               <a:t>Goals and plan</a:t>
             </a:r>
@@ -3498,7 +3498,7 @@
           </a:bodyPr>
           <a:lstStyle/>
           <a:p>
-            <a:pPr algn="r">
+            <a:pPr algn="r" latinLnBrk="0">
               <a:lnSpc>
                 <a:spcPct val="100000"/>
               </a:lnSpc>
@@ -3508,7 +3508,7 @@
                 <a:solidFill>
                   <a:srgbClr val="6E6A60"/>
                 </a:solidFill>
-                <a:latin typeface="Calibri"/>
+                <a:latin typeface="Segoe UI"/>
               </a:rPr>
               <a:t>2 / 8</a:t>
             </a:r>
@@ -3537,7 +3537,7 @@
           </a:bodyPr>
           <a:lstStyle/>
           <a:p>
-            <a:pPr algn="l">
+            <a:pPr algn="l" latinLnBrk="0">
               <a:lnSpc>
                 <a:spcPct val="100000"/>
               </a:lnSpc>
@@ -3547,7 +3547,7 @@
                 <a:solidFill>
                   <a:srgbClr val="6E6A60"/>
                 </a:solidFill>
-                <a:latin typeface="Calibri"/>
+                <a:latin typeface="Segoe UI"/>
               </a:rPr>
               <a:t>Project 8 · Entanglement in Online Choir</a:t>
             </a:r>
@@ -3566,7 +3566,9 @@
             <a:ext cx="5577840" cy="960120"/>
           </a:xfrm>
           <a:prstGeom prst="roundRect">
-            <a:avLst/>
+            <a:avLst>
+              <a:gd name="adj" fmla="val 8000"/>
+            </a:avLst>
           </a:prstGeom>
           <a:solidFill>
             <a:srgbClr val="0E4D5E"/>
@@ -3593,25 +3595,25 @@
           <a:bodyPr rtlCol="0" anchor="ctr"/>
           <a:lstStyle/>
           <a:p>
-            <a:pPr algn="ctr"/>
+            <a:pPr algn="ctr" latinLnBrk="0"/>
             <a:r>
               <a:rPr sz="1900" b="1">
                 <a:solidFill>
                   <a:srgbClr val="FDFBF5"/>
                 </a:solidFill>
-                <a:latin typeface="Calibri"/>
+                <a:latin typeface="Segoe UI Semibold"/>
               </a:rPr>
               <a:t>E(t)  =  mean(  A(t) audio,  V(t) visual,  N(t) network  )</a:t>
             </a:r>
           </a:p>
           <a:p>
-            <a:pPr algn="ctr"/>
-            <a:r>
-              <a:rPr sz="1200">
+            <a:pPr algn="ctr" latinLnBrk="0"/>
+            <a:r>
+              <a:rPr sz="1200" b="0">
                 <a:solidFill>
                   <a:srgbClr val="CBD9DD"/>
                 </a:solidFill>
-                <a:latin typeface="Calibri"/>
+                <a:latin typeface="Segoe UI"/>
               </a:rPr>
               <a:t>a single coordination score per time window</a:t>
             </a:r>
@@ -3627,7 +3629,7 @@
         <p:spPr>
           <a:xfrm>
             <a:off x="502920" y="2514600"/>
-            <a:ext cx="5577840" cy="1033271"/>
+            <a:ext cx="5577840" cy="896112"/>
           </a:xfrm>
           <a:prstGeom prst="roundRect">
             <a:avLst>
@@ -3658,36 +3660,36 @@
           </a:fontRef>
         </p:style>
         <p:txBody>
-          <a:bodyPr rtlCol="0" anchor="t" wrap="square" lIns="182880" rIns="182880" tIns="146304"/>
-          <a:lstStyle/>
-          <a:p>
-            <a:pPr algn="ctr">
+          <a:bodyPr rtlCol="0" anchor="t" wrap="square" lIns="201168" rIns="201168" tIns="146304"/>
+          <a:lstStyle/>
+          <a:p>
+            <a:pPr algn="l" latinLnBrk="0">
               <a:spcAft>
-                <a:spcPts val="500"/>
+                <a:spcPts val="600"/>
               </a:spcAft>
             </a:pPr>
             <a:r>
-              <a:rPr sz="1350" b="1">
+              <a:rPr sz="1400" b="1">
                 <a:solidFill>
                   <a:srgbClr val="0E4D5E"/>
                 </a:solidFill>
-                <a:latin typeface="Calibri"/>
+                <a:latin typeface="Segoe UI Semibold"/>
               </a:rPr>
               <a:t>H1 · Latency regimes</a:t>
             </a:r>
           </a:p>
           <a:p>
-            <a:pPr>
+            <a:pPr algn="l" latinLnBrk="0">
               <a:spcAft>
                 <a:spcPts val="400"/>
               </a:spcAft>
             </a:pPr>
             <a:r>
-              <a:rPr sz="1250">
+              <a:rPr sz="1250" b="0">
                 <a:solidFill>
                   <a:srgbClr val="24262E"/>
                 </a:solidFill>
-                <a:latin typeface="Calibri"/>
+                <a:latin typeface="Segoe UI"/>
               </a:rPr>
               <a:t>Low-latency tools (Jamulus, SoundJack) score higher E(t) than Zoom.</a:t>
             </a:r>
@@ -3702,8 +3704,8 @@
         </p:nvSpPr>
         <p:spPr>
           <a:xfrm>
-            <a:off x="502920" y="3657599"/>
-            <a:ext cx="5577840" cy="1033271"/>
+            <a:off x="502920" y="3520440"/>
+            <a:ext cx="5577840" cy="896112"/>
           </a:xfrm>
           <a:prstGeom prst="roundRect">
             <a:avLst>
@@ -3734,36 +3736,36 @@
           </a:fontRef>
         </p:style>
         <p:txBody>
-          <a:bodyPr rtlCol="0" anchor="t" wrap="square" lIns="182880" rIns="182880" tIns="146304"/>
-          <a:lstStyle/>
-          <a:p>
-            <a:pPr algn="ctr">
+          <a:bodyPr rtlCol="0" anchor="t" wrap="square" lIns="201168" rIns="201168" tIns="146304"/>
+          <a:lstStyle/>
+          <a:p>
+            <a:pPr algn="l" latinLnBrk="0">
               <a:spcAft>
-                <a:spcPts val="500"/>
+                <a:spcPts val="600"/>
               </a:spcAft>
             </a:pPr>
             <a:r>
-              <a:rPr sz="1350" b="1">
+              <a:rPr sz="1400" b="1">
                 <a:solidFill>
                   <a:srgbClr val="0E4D5E"/>
                 </a:solidFill>
-                <a:latin typeface="Calibri"/>
+                <a:latin typeface="Segoe UI Semibold"/>
               </a:rPr>
               <a:t>H2 · Network topology</a:t>
             </a:r>
           </a:p>
           <a:p>
-            <a:pPr>
+            <a:pPr algn="l" latinLnBrk="0">
               <a:spcAft>
                 <a:spcPts val="400"/>
               </a:spcAft>
             </a:pPr>
             <a:r>
-              <a:rPr sz="1250">
+              <a:rPr sz="1250" b="0">
                 <a:solidFill>
                   <a:srgbClr val="24262E"/>
                 </a:solidFill>
-                <a:latin typeface="Calibri"/>
+                <a:latin typeface="Segoe UI"/>
               </a:rPr>
               <a:t>Influence network shifts democratic → leader-dominated as latency rises.</a:t>
             </a:r>
@@ -3778,8 +3780,8 @@
         </p:nvSpPr>
         <p:spPr>
           <a:xfrm>
-            <a:off x="502920" y="4800598"/>
-            <a:ext cx="5577840" cy="1033271"/>
+            <a:off x="502920" y="4526280"/>
+            <a:ext cx="5577840" cy="896112"/>
           </a:xfrm>
           <a:prstGeom prst="roundRect">
             <a:avLst>
@@ -3810,36 +3812,36 @@
           </a:fontRef>
         </p:style>
         <p:txBody>
-          <a:bodyPr rtlCol="0" anchor="t" wrap="square" lIns="182880" rIns="182880" tIns="146304"/>
-          <a:lstStyle/>
-          <a:p>
-            <a:pPr algn="ctr">
+          <a:bodyPr rtlCol="0" anchor="t" wrap="square" lIns="201168" rIns="201168" tIns="146304"/>
+          <a:lstStyle/>
+          <a:p>
+            <a:pPr algn="l" latinLnBrk="0">
               <a:spcAft>
-                <a:spcPts val="500"/>
+                <a:spcPts val="600"/>
               </a:spcAft>
             </a:pPr>
             <a:r>
-              <a:rPr sz="1350" b="1">
+              <a:rPr sz="1400" b="1">
                 <a:solidFill>
                   <a:srgbClr val="0E4D5E"/>
                 </a:solidFill>
-                <a:latin typeface="Calibri"/>
+                <a:latin typeface="Segoe UI Semibold"/>
               </a:rPr>
               <a:t>H3 · Honest signals</a:t>
             </a:r>
           </a:p>
           <a:p>
-            <a:pPr>
+            <a:pPr algn="l" latinLnBrk="0">
               <a:spcAft>
                 <a:spcPts val="400"/>
               </a:spcAft>
             </a:pPr>
             <a:r>
-              <a:rPr sz="1250">
+              <a:rPr sz="1250" b="0">
                 <a:solidFill>
                   <a:srgbClr val="24262E"/>
                 </a:solidFill>
-                <a:latin typeface="Calibri"/>
+                <a:latin typeface="Segoe UI"/>
               </a:rPr>
               <a:t>Body sway + breathing add ≥ 10 points of explained variance over audio.</a:t>
             </a:r>
@@ -3868,7 +3870,7 @@
           </a:bodyPr>
           <a:lstStyle/>
           <a:p>
-            <a:pPr algn="l">
+            <a:pPr algn="l" latinLnBrk="0">
               <a:lnSpc>
                 <a:spcPct val="100000"/>
               </a:lnSpc>
@@ -3878,7 +3880,7 @@
                 <a:solidFill>
                   <a:srgbClr val="0E4D5E"/>
                 </a:solidFill>
-                <a:latin typeface="Calibri"/>
+                <a:latin typeface="Segoe UI"/>
               </a:rPr>
               <a:t>Where we are</a:t>
             </a:r>
@@ -3950,7 +3952,7 @@
           </a:bodyPr>
           <a:lstStyle/>
           <a:p>
-            <a:pPr algn="l">
+            <a:pPr algn="l" latinLnBrk="0">
               <a:lnSpc>
                 <a:spcPct val="100000"/>
               </a:lnSpc>
@@ -3960,7 +3962,7 @@
                 <a:solidFill>
                   <a:srgbClr val="0E4D5E"/>
                 </a:solidFill>
-                <a:latin typeface="Calibri"/>
+                <a:latin typeface="Segoe UI"/>
               </a:rPr>
               <a:t>Apr 15-16</a:t>
             </a:r>
@@ -3989,7 +3991,7 @@
           </a:bodyPr>
           <a:lstStyle/>
           <a:p>
-            <a:pPr algn="l">
+            <a:pPr algn="l" latinLnBrk="0">
               <a:lnSpc>
                 <a:spcPct val="95000"/>
               </a:lnSpc>
@@ -3999,7 +4001,7 @@
                 <a:solidFill>
                   <a:srgbClr val="24262E"/>
                 </a:solidFill>
-                <a:latin typeface="Calibri"/>
+                <a:latin typeface="Segoe UI"/>
               </a:rPr>
               <a:t>Block course + status #1</a:t>
             </a:r>
@@ -4071,7 +4073,7 @@
           </a:bodyPr>
           <a:lstStyle/>
           <a:p>
-            <a:pPr algn="l">
+            <a:pPr algn="l" latinLnBrk="0">
               <a:lnSpc>
                 <a:spcPct val="100000"/>
               </a:lnSpc>
@@ -4081,7 +4083,7 @@
                 <a:solidFill>
                   <a:srgbClr val="0E4D5E"/>
                 </a:solidFill>
-                <a:latin typeface="Calibri"/>
+                <a:latin typeface="Segoe UI"/>
               </a:rPr>
               <a:t>Apr 30</a:t>
             </a:r>
@@ -4110,7 +4112,7 @@
           </a:bodyPr>
           <a:lstStyle/>
           <a:p>
-            <a:pPr algn="l">
+            <a:pPr algn="l" latinLnBrk="0">
               <a:lnSpc>
                 <a:spcPct val="95000"/>
               </a:lnSpc>
@@ -4120,7 +4122,7 @@
                 <a:solidFill>
                   <a:srgbClr val="24262E"/>
                 </a:solidFill>
-                <a:latin typeface="Calibri"/>
+                <a:latin typeface="Segoe UI"/>
               </a:rPr>
               <a:t>Status #2 · goals + plan</a:t>
             </a:r>
@@ -4192,7 +4194,7 @@
           </a:bodyPr>
           <a:lstStyle/>
           <a:p>
-            <a:pPr algn="l">
+            <a:pPr algn="l" latinLnBrk="0">
               <a:lnSpc>
                 <a:spcPct val="100000"/>
               </a:lnSpc>
@@ -4202,7 +4204,7 @@
                 <a:solidFill>
                   <a:srgbClr val="0E4D5E"/>
                 </a:solidFill>
-                <a:latin typeface="Calibri"/>
+                <a:latin typeface="Segoe UI"/>
               </a:rPr>
               <a:t>May 21</a:t>
             </a:r>
@@ -4231,7 +4233,7 @@
           </a:bodyPr>
           <a:lstStyle/>
           <a:p>
-            <a:pPr algn="l">
+            <a:pPr algn="l" latinLnBrk="0">
               <a:lnSpc>
                 <a:spcPct val="95000"/>
               </a:lnSpc>
@@ -4241,7 +4243,7 @@
                 <a:solidFill>
                   <a:srgbClr val="24262E"/>
                 </a:solidFill>
-                <a:latin typeface="Calibri"/>
+                <a:latin typeface="Segoe UI"/>
               </a:rPr>
               <a:t>Status #3 · all 4 WPs running + Virtual Mirror</a:t>
             </a:r>
@@ -4313,7 +4315,7 @@
           </a:bodyPr>
           <a:lstStyle/>
           <a:p>
-            <a:pPr algn="l">
+            <a:pPr algn="l" latinLnBrk="0">
               <a:lnSpc>
                 <a:spcPct val="100000"/>
               </a:lnSpc>
@@ -4323,7 +4325,7 @@
                 <a:solidFill>
                   <a:srgbClr val="C4902A"/>
                 </a:solidFill>
-                <a:latin typeface="Calibri"/>
+                <a:latin typeface="Segoe UI"/>
               </a:rPr>
               <a:t>Jun 11</a:t>
             </a:r>
@@ -4352,7 +4354,7 @@
           </a:bodyPr>
           <a:lstStyle/>
           <a:p>
-            <a:pPr algn="l">
+            <a:pPr algn="l" latinLnBrk="0">
               <a:lnSpc>
                 <a:spcPct val="95000"/>
               </a:lnSpc>
@@ -4362,7 +4364,7 @@
                 <a:solidFill>
                   <a:srgbClr val="C4902A"/>
                 </a:solidFill>
-                <a:latin typeface="Calibri"/>
+                <a:latin typeface="Segoe UI"/>
               </a:rPr>
               <a:t>Status #4 · TODAY: E(t) operational</a:t>
             </a:r>
@@ -4434,7 +4436,7 @@
           </a:bodyPr>
           <a:lstStyle/>
           <a:p>
-            <a:pPr algn="l">
+            <a:pPr algn="l" latinLnBrk="0">
               <a:lnSpc>
                 <a:spcPct val="100000"/>
               </a:lnSpc>
@@ -4444,7 +4446,7 @@
                 <a:solidFill>
                   <a:srgbClr val="0E4D5E"/>
                 </a:solidFill>
-                <a:latin typeface="Calibri"/>
+                <a:latin typeface="Segoe UI"/>
               </a:rPr>
               <a:t>Jun 25</a:t>
             </a:r>
@@ -4473,7 +4475,7 @@
           </a:bodyPr>
           <a:lstStyle/>
           <a:p>
-            <a:pPr algn="l">
+            <a:pPr algn="l" latinLnBrk="0">
               <a:lnSpc>
                 <a:spcPct val="95000"/>
               </a:lnSpc>
@@ -4483,7 +4485,7 @@
                 <a:solidFill>
                   <a:srgbClr val="24262E"/>
                 </a:solidFill>
-                <a:latin typeface="Calibri"/>
+                <a:latin typeface="Segoe UI"/>
               </a:rPr>
               <a:t>Status #5 · cross-regime results</a:t>
             </a:r>
@@ -4555,7 +4557,7 @@
           </a:bodyPr>
           <a:lstStyle/>
           <a:p>
-            <a:pPr algn="l">
+            <a:pPr algn="l" latinLnBrk="0">
               <a:lnSpc>
                 <a:spcPct val="100000"/>
               </a:lnSpc>
@@ -4565,7 +4567,7 @@
                 <a:solidFill>
                   <a:srgbClr val="0E4D5E"/>
                 </a:solidFill>
-                <a:latin typeface="Calibri"/>
+                <a:latin typeface="Segoe UI"/>
               </a:rPr>
               <a:t>Jul 9</a:t>
             </a:r>
@@ -4594,7 +4596,7 @@
           </a:bodyPr>
           <a:lstStyle/>
           <a:p>
-            <a:pPr algn="l">
+            <a:pPr algn="l" latinLnBrk="0">
               <a:lnSpc>
                 <a:spcPct val="95000"/>
               </a:lnSpc>
@@ -4604,7 +4606,7 @@
                 <a:solidFill>
                   <a:srgbClr val="24262E"/>
                 </a:solidFill>
-                <a:latin typeface="Calibri"/>
+                <a:latin typeface="Segoe UI"/>
               </a:rPr>
               <a:t>Status #6 · paper draft review</a:t>
             </a:r>
@@ -4676,7 +4678,7 @@
           </a:bodyPr>
           <a:lstStyle/>
           <a:p>
-            <a:pPr algn="l">
+            <a:pPr algn="l" latinLnBrk="0">
               <a:lnSpc>
                 <a:spcPct val="100000"/>
               </a:lnSpc>
@@ -4686,7 +4688,7 @@
                 <a:solidFill>
                   <a:srgbClr val="0E4D5E"/>
                 </a:solidFill>
-                <a:latin typeface="Calibri"/>
+                <a:latin typeface="Segoe UI"/>
               </a:rPr>
               <a:t>Jul 23 / 31</a:t>
             </a:r>
@@ -4715,7 +4717,7 @@
           </a:bodyPr>
           <a:lstStyle/>
           <a:p>
-            <a:pPr algn="l">
+            <a:pPr algn="l" latinLnBrk="0">
               <a:lnSpc>
                 <a:spcPct val="95000"/>
               </a:lnSpc>
@@ -4725,7 +4727,7 @@
                 <a:solidFill>
                   <a:srgbClr val="24262E"/>
                 </a:solidFill>
-                <a:latin typeface="Calibri"/>
+                <a:latin typeface="Segoe UI"/>
               </a:rPr>
               <a:t>Final presentation / final paper</a:t>
             </a:r>
@@ -4745,7 +4747,7 @@
           </a:xfrm>
           <a:prstGeom prst="roundRect">
             <a:avLst>
-              <a:gd name="adj" fmla="val 12000"/>
+              <a:gd name="adj" fmla="val 6000"/>
             </a:avLst>
           </a:prstGeom>
           <a:solidFill>
@@ -4773,13 +4775,13 @@
           <a:bodyPr rtlCol="0" anchor="ctr" wrap="square"/>
           <a:lstStyle/>
           <a:p>
-            <a:pPr algn="ctr"/>
-            <a:r>
-              <a:rPr sz="1500" b="1">
+            <a:pPr algn="ctr" latinLnBrk="0"/>
+            <a:r>
+              <a:rPr sz="1400" b="1">
                 <a:solidFill>
                   <a:srgbClr val="FDFBF5"/>
                 </a:solidFill>
-                <a:latin typeface="Calibri"/>
+                <a:latin typeface="Segoe UI Semibold"/>
               </a:rPr>
               <a:t>Goals unchanged since April. This iteration delivered the first end-to-end E(t).</a:t>
             </a:r>
@@ -4834,7 +4836,7 @@
           </a:bodyPr>
           <a:lstStyle/>
           <a:p>
-            <a:pPr algn="l">
+            <a:pPr algn="l" latinLnBrk="0">
               <a:lnSpc>
                 <a:spcPct val="100000"/>
               </a:lnSpc>
@@ -4844,7 +4846,7 @@
                 <a:solidFill>
                   <a:srgbClr val="C4902A"/>
                 </a:solidFill>
-                <a:latin typeface="Calibri"/>
+                <a:latin typeface="Segoe UI Semibold"/>
               </a:rPr>
               <a:t>PROGRESS · LAST ITERATION</a:t>
             </a:r>
@@ -4873,7 +4875,7 @@
           </a:bodyPr>
           <a:lstStyle/>
           <a:p>
-            <a:pPr algn="l">
+            <a:pPr algn="l" latinLnBrk="0">
               <a:lnSpc>
                 <a:spcPct val="100000"/>
               </a:lnSpc>
@@ -4883,7 +4885,7 @@
                 <a:solidFill>
                   <a:srgbClr val="0E4D5E"/>
                 </a:solidFill>
-                <a:latin typeface="Calibri"/>
+                <a:latin typeface="Segoe UI Semibold"/>
               </a:rPr>
               <a:t>E(t) is operational: all 5 pieces significant above the null</a:t>
             </a:r>
@@ -4912,7 +4914,7 @@
           </a:bodyPr>
           <a:lstStyle/>
           <a:p>
-            <a:pPr algn="r">
+            <a:pPr algn="r" latinLnBrk="0">
               <a:lnSpc>
                 <a:spcPct val="100000"/>
               </a:lnSpc>
@@ -4922,7 +4924,7 @@
                 <a:solidFill>
                   <a:srgbClr val="6E6A60"/>
                 </a:solidFill>
-                <a:latin typeface="Calibri"/>
+                <a:latin typeface="Segoe UI"/>
               </a:rPr>
               <a:t>3 / 8</a:t>
             </a:r>
@@ -4951,7 +4953,7 @@
           </a:bodyPr>
           <a:lstStyle/>
           <a:p>
-            <a:pPr algn="l">
+            <a:pPr algn="l" latinLnBrk="0">
               <a:lnSpc>
                 <a:spcPct val="100000"/>
               </a:lnSpc>
@@ -4961,7 +4963,7 @@
                 <a:solidFill>
                   <a:srgbClr val="6E6A60"/>
                 </a:solidFill>
-                <a:latin typeface="Calibri"/>
+                <a:latin typeface="Segoe UI"/>
               </a:rPr>
               <a:t>Project 8 · Entanglement in Online Choir</a:t>
             </a:r>
@@ -5035,25 +5037,25 @@
           <a:bodyPr rtlCol="0" anchor="ctr" wrap="square"/>
           <a:lstStyle/>
           <a:p>
-            <a:pPr algn="ctr"/>
+            <a:pPr algn="ctr" latinLnBrk="0"/>
             <a:r>
               <a:rPr sz="3000" b="1">
                 <a:solidFill>
                   <a:srgbClr val="0E4D5E"/>
                 </a:solidFill>
-                <a:latin typeface="Calibri"/>
+                <a:latin typeface="Segoe UI Semibold"/>
               </a:rPr>
               <a:t>5 / 5</a:t>
             </a:r>
           </a:p>
           <a:p>
-            <a:pPr algn="ctr"/>
-            <a:r>
-              <a:rPr sz="1150">
+            <a:pPr algn="ctr" latinLnBrk="0"/>
+            <a:r>
+              <a:rPr sz="1150" b="0">
                 <a:solidFill>
                   <a:srgbClr val="6E6A60"/>
                 </a:solidFill>
-                <a:latin typeface="Calibri"/>
+                <a:latin typeface="Segoe UI"/>
               </a:rPr>
               <a:t>pieces significantly above the null (p &lt; 0.001)</a:t>
             </a:r>
@@ -5103,25 +5105,25 @@
           <a:bodyPr rtlCol="0" anchor="ctr" wrap="square"/>
           <a:lstStyle/>
           <a:p>
-            <a:pPr algn="ctr"/>
+            <a:pPr algn="ctr" latinLnBrk="0"/>
             <a:r>
               <a:rPr sz="3000" b="1">
                 <a:solidFill>
                   <a:srgbClr val="0E4D5E"/>
                 </a:solidFill>
-                <a:latin typeface="Calibri"/>
+                <a:latin typeface="Segoe UI Semibold"/>
               </a:rPr>
               <a:t>200</a:t>
             </a:r>
           </a:p>
           <a:p>
-            <a:pPr algn="ctr"/>
-            <a:r>
-              <a:rPr sz="1150">
+            <a:pPr algn="ctr" latinLnBrk="0"/>
+            <a:r>
+              <a:rPr sz="1150" b="0">
                 <a:solidFill>
                   <a:srgbClr val="6E6A60"/>
                 </a:solidFill>
-                <a:latin typeface="Calibri"/>
+                <a:latin typeface="Segoe UI"/>
               </a:rPr>
               <a:t>circular-shift permutations per piece</a:t>
             </a:r>
@@ -5171,25 +5173,25 @@
           <a:bodyPr rtlCol="0" anchor="ctr" wrap="square"/>
           <a:lstStyle/>
           <a:p>
-            <a:pPr algn="ctr"/>
+            <a:pPr algn="ctr" latinLnBrk="0"/>
             <a:r>
               <a:rPr sz="2400" b="1">
                 <a:solidFill>
                   <a:srgbClr val="0E4D5E"/>
                 </a:solidFill>
-                <a:latin typeface="Calibri"/>
+                <a:latin typeface="Segoe UI Semibold"/>
               </a:rPr>
               <a:t>0.57–0.80</a:t>
             </a:r>
           </a:p>
           <a:p>
-            <a:pPr algn="ctr"/>
-            <a:r>
-              <a:rPr sz="1150">
+            <a:pPr algn="ctr" latinLnBrk="0"/>
+            <a:r>
+              <a:rPr sz="1150" b="0">
                 <a:solidFill>
                   <a:srgbClr val="6E6A60"/>
                 </a:solidFill>
-                <a:latin typeface="Calibri"/>
+                <a:latin typeface="Segoe UI"/>
               </a:rPr>
               <a:t>observed mean E(t) across pieces</a:t>
             </a:r>
@@ -5218,7 +5220,7 @@
           </a:bodyPr>
           <a:lstStyle/>
           <a:p>
-            <a:pPr algn="l">
+            <a:pPr algn="l" latinLnBrk="0">
               <a:lnSpc>
                 <a:spcPct val="105000"/>
               </a:lnSpc>
@@ -5228,7 +5230,7 @@
                 <a:solidFill>
                   <a:srgbClr val="6E6A60"/>
                 </a:solidFill>
-                <a:latin typeface="Calibri"/>
+                <a:latin typeface="Segoe UI"/>
               </a:rPr>
               <a:t>Split follows the music: homophonic chant scores high, polyphony lower. The metric reacts to what the choir is doing.</a:t>
             </a:r>
@@ -5248,7 +5250,7 @@
           </a:xfrm>
           <a:prstGeom prst="roundRect">
             <a:avLst>
-              <a:gd name="adj" fmla="val 12000"/>
+              <a:gd name="adj" fmla="val 6000"/>
             </a:avLst>
           </a:prstGeom>
           <a:solidFill>
@@ -5276,13 +5278,13 @@
           <a:bodyPr rtlCol="0" anchor="ctr" wrap="square"/>
           <a:lstStyle/>
           <a:p>
-            <a:pPr algn="ctr"/>
-            <a:r>
-              <a:rPr sz="1500" b="1">
+            <a:pPr algn="ctr" latinLnBrk="0"/>
+            <a:r>
+              <a:rPr sz="1400" b="1">
                 <a:solidFill>
                   <a:srgbClr val="FDFBF5"/>
                 </a:solidFill>
-                <a:latin typeface="Calibri"/>
+                <a:latin typeface="Segoe UI Semibold"/>
               </a:rPr>
               <a:t>E(t) is implemented, reproducible, and significant against the null on all five pieces.</a:t>
             </a:r>
@@ -5337,7 +5339,7 @@
           </a:bodyPr>
           <a:lstStyle/>
           <a:p>
-            <a:pPr algn="l">
+            <a:pPr algn="l" latinLnBrk="0">
               <a:lnSpc>
                 <a:spcPct val="100000"/>
               </a:lnSpc>
@@ -5347,7 +5349,7 @@
                 <a:solidFill>
                   <a:srgbClr val="C4902A"/>
                 </a:solidFill>
-                <a:latin typeface="Calibri"/>
+                <a:latin typeface="Segoe UI Semibold"/>
               </a:rPr>
               <a:t>PROGRESS · LAST ITERATION</a:t>
             </a:r>
@@ -5376,7 +5378,7 @@
           </a:bodyPr>
           <a:lstStyle/>
           <a:p>
-            <a:pPr algn="l">
+            <a:pPr algn="l" latinLnBrk="0">
               <a:lnSpc>
                 <a:spcPct val="100000"/>
               </a:lnSpc>
@@ -5386,7 +5388,7 @@
                 <a:solidFill>
                   <a:srgbClr val="0E4D5E"/>
                 </a:solidFill>
-                <a:latin typeface="Calibri"/>
+                <a:latin typeface="Segoe UI Semibold"/>
               </a:rPr>
               <a:t>Audio and network pipelines behind E(t)</a:t>
             </a:r>
@@ -5415,7 +5417,7 @@
           </a:bodyPr>
           <a:lstStyle/>
           <a:p>
-            <a:pPr algn="r">
+            <a:pPr algn="r" latinLnBrk="0">
               <a:lnSpc>
                 <a:spcPct val="100000"/>
               </a:lnSpc>
@@ -5425,7 +5427,7 @@
                 <a:solidFill>
                   <a:srgbClr val="6E6A60"/>
                 </a:solidFill>
-                <a:latin typeface="Calibri"/>
+                <a:latin typeface="Segoe UI"/>
               </a:rPr>
               <a:t>4 / 8</a:t>
             </a:r>
@@ -5454,7 +5456,7 @@
           </a:bodyPr>
           <a:lstStyle/>
           <a:p>
-            <a:pPr algn="l">
+            <a:pPr algn="l" latinLnBrk="0">
               <a:lnSpc>
                 <a:spcPct val="100000"/>
               </a:lnSpc>
@@ -5464,7 +5466,7 @@
                 <a:solidFill>
                   <a:srgbClr val="6E6A60"/>
                 </a:solidFill>
-                <a:latin typeface="Calibri"/>
+                <a:latin typeface="Segoe UI"/>
               </a:rPr>
               <a:t>Project 8 · Entanglement in Online Choir</a:t>
             </a:r>
@@ -5538,25 +5540,25 @@
           <a:bodyPr rtlCol="0" anchor="ctr" wrap="square"/>
           <a:lstStyle/>
           <a:p>
-            <a:pPr algn="ctr"/>
+            <a:pPr algn="ctr" latinLnBrk="0"/>
             <a:r>
               <a:rPr sz="3000" b="1">
                 <a:solidFill>
                   <a:srgbClr val="0E4D5E"/>
                 </a:solidFill>
-                <a:latin typeface="Calibri"/>
+                <a:latin typeface="Segoe UI Semibold"/>
               </a:rPr>
               <a:t>25</a:t>
             </a:r>
           </a:p>
           <a:p>
-            <a:pPr algn="ctr"/>
-            <a:r>
-              <a:rPr sz="1150">
+            <a:pPr algn="ctr" latinLnBrk="0"/>
+            <a:r>
+              <a:rPr sz="1150" b="0">
                 <a:solidFill>
                   <a:srgbClr val="6E6A60"/>
                 </a:solidFill>
-                <a:latin typeface="Calibri"/>
+                <a:latin typeface="Segoe UI"/>
               </a:rPr>
               <a:t>Dagstuhl takes processed (was 1 last sprint)</a:t>
             </a:r>
@@ -5606,25 +5608,25 @@
           <a:bodyPr rtlCol="0" anchor="ctr" wrap="square"/>
           <a:lstStyle/>
           <a:p>
-            <a:pPr algn="ctr"/>
+            <a:pPr algn="ctr" latinLnBrk="0"/>
             <a:r>
               <a:rPr sz="3000" b="1">
                 <a:solidFill>
                   <a:srgbClr val="0E4D5E"/>
                 </a:solidFill>
-                <a:latin typeface="Calibri"/>
+                <a:latin typeface="Segoe UI Semibold"/>
               </a:rPr>
               <a:t>288</a:t>
             </a:r>
           </a:p>
           <a:p>
-            <a:pPr algn="ctr"/>
-            <a:r>
-              <a:rPr sz="1150">
+            <a:pPr algn="ctr" latinLnBrk="0"/>
+            <a:r>
+              <a:rPr sz="1150" b="0">
                 <a:solidFill>
                   <a:srgbClr val="6E6A60"/>
                 </a:solidFill>
-                <a:latin typeface="Calibri"/>
+                <a:latin typeface="Segoe UI"/>
               </a:rPr>
               <a:t>pairwise audio couplings computed</a:t>
             </a:r>
@@ -5674,25 +5676,25 @@
           <a:bodyPr rtlCol="0" anchor="ctr" wrap="square"/>
           <a:lstStyle/>
           <a:p>
-            <a:pPr algn="ctr"/>
+            <a:pPr algn="ctr" latinLnBrk="0"/>
             <a:r>
               <a:rPr sz="3000" b="1">
                 <a:solidFill>
                   <a:srgbClr val="0E4D5E"/>
                 </a:solidFill>
-                <a:latin typeface="Calibri"/>
+                <a:latin typeface="Segoe UI Semibold"/>
               </a:rPr>
               <a:t>2</a:t>
             </a:r>
           </a:p>
           <a:p>
-            <a:pPr algn="ctr"/>
-            <a:r>
-              <a:rPr sz="1150">
+            <a:pPr algn="ctr" latinLnBrk="0"/>
+            <a:r>
+              <a:rPr sz="1150" b="0">
                 <a:solidFill>
                   <a:srgbClr val="6E6A60"/>
                 </a:solidFill>
-                <a:latin typeface="Calibri"/>
+                <a:latin typeface="Segoe UI"/>
               </a:rPr>
               <a:t>causality methods per piece (Granger + COP-GC)</a:t>
             </a:r>
@@ -5721,7 +5723,7 @@
           </a:bodyPr>
           <a:lstStyle/>
           <a:p>
-            <a:pPr algn="l">
+            <a:pPr algn="l" latinLnBrk="0">
               <a:lnSpc>
                 <a:spcPct val="105000"/>
               </a:lnSpc>
@@ -5731,7 +5733,7 @@
                 <a:solidFill>
                   <a:srgbClr val="6E6A60"/>
                 </a:solidFill>
-                <a:latin typeface="Calibri"/>
+                <a:latin typeface="Segoe UI"/>
               </a:rPr>
               <a:t>Methods agree on quartets, diverge on full choir (42 vs 25 of 56 edges). That gap is itself a finding: a third of standard edges rely on linear magnitude, not pattern structure.</a:t>
             </a:r>
@@ -5751,7 +5753,7 @@
           </a:xfrm>
           <a:prstGeom prst="roundRect">
             <a:avLst>
-              <a:gd name="adj" fmla="val 12000"/>
+              <a:gd name="adj" fmla="val 6000"/>
             </a:avLst>
           </a:prstGeom>
           <a:solidFill>
@@ -5779,13 +5781,13 @@
           <a:bodyPr rtlCol="0" anchor="ctr" wrap="square"/>
           <a:lstStyle/>
           <a:p>
-            <a:pPr algn="ctr"/>
-            <a:r>
-              <a:rPr sz="1500" b="1">
+            <a:pPr algn="ctr" latinLnBrk="0"/>
+            <a:r>
+              <a:rPr sz="1400" b="1">
                 <a:solidFill>
                   <a:srgbClr val="FDFBF5"/>
                 </a:solidFill>
-                <a:latin typeface="Calibri"/>
+                <a:latin typeface="Segoe UI Semibold"/>
               </a:rPr>
               <a:t>The Sprint-2 reference result reproduces exactly; the pipeline now scales to the corpus.</a:t>
             </a:r>
@@ -5840,7 +5842,7 @@
           </a:bodyPr>
           <a:lstStyle/>
           <a:p>
-            <a:pPr algn="l">
+            <a:pPr algn="l" latinLnBrk="0">
               <a:lnSpc>
                 <a:spcPct val="100000"/>
               </a:lnSpc>
@@ -5850,7 +5852,7 @@
                 <a:solidFill>
                   <a:srgbClr val="C4902A"/>
                 </a:solidFill>
-                <a:latin typeface="Calibri"/>
+                <a:latin typeface="Segoe UI Semibold"/>
               </a:rPr>
               <a:t>PROGRESS · LAST ITERATION</a:t>
             </a:r>
@@ -5879,7 +5881,7 @@
           </a:bodyPr>
           <a:lstStyle/>
           <a:p>
-            <a:pPr algn="l">
+            <a:pPr algn="l" latinLnBrk="0">
               <a:lnSpc>
                 <a:spcPct val="100000"/>
               </a:lnSpc>
@@ -5889,7 +5891,7 @@
                 <a:solidFill>
                   <a:srgbClr val="0E4D5E"/>
                 </a:solidFill>
-                <a:latin typeface="Calibri"/>
+                <a:latin typeface="Segoe UI Semibold"/>
               </a:rPr>
               <a:t>Video features and dashboard scaffold</a:t>
             </a:r>
@@ -5918,7 +5920,7 @@
           </a:bodyPr>
           <a:lstStyle/>
           <a:p>
-            <a:pPr algn="r">
+            <a:pPr algn="r" latinLnBrk="0">
               <a:lnSpc>
                 <a:spcPct val="100000"/>
               </a:lnSpc>
@@ -5928,7 +5930,7 @@
                 <a:solidFill>
                   <a:srgbClr val="6E6A60"/>
                 </a:solidFill>
-                <a:latin typeface="Calibri"/>
+                <a:latin typeface="Segoe UI"/>
               </a:rPr>
               <a:t>5 / 8</a:t>
             </a:r>
@@ -5957,7 +5959,7 @@
           </a:bodyPr>
           <a:lstStyle/>
           <a:p>
-            <a:pPr algn="l">
+            <a:pPr algn="l" latinLnBrk="0">
               <a:lnSpc>
                 <a:spcPct val="100000"/>
               </a:lnSpc>
@@ -5967,7 +5969,7 @@
                 <a:solidFill>
                   <a:srgbClr val="6E6A60"/>
                 </a:solidFill>
-                <a:latin typeface="Calibri"/>
+                <a:latin typeface="Segoe UI"/>
               </a:rPr>
               <a:t>Project 8 · Entanglement in Online Choir</a:t>
             </a:r>
@@ -6014,8 +6016,8 @@
         </p:blipFill>
         <p:spPr>
           <a:xfrm>
-            <a:off x="6537960" y="1308382"/>
-            <a:ext cx="3108960" cy="1955236"/>
+            <a:off x="7462577" y="1280160"/>
+            <a:ext cx="3271406" cy="2057400"/>
           </a:xfrm>
           <a:prstGeom prst="rect">
             <a:avLst/>
@@ -6030,8 +6032,8 @@
         </p:nvSpPr>
         <p:spPr>
           <a:xfrm>
-            <a:off x="9829800" y="1325880"/>
-            <a:ext cx="1874519" cy="914400"/>
+            <a:off x="6537960" y="3520440"/>
+            <a:ext cx="1627632" cy="914400"/>
           </a:xfrm>
           <a:prstGeom prst="roundRect">
             <a:avLst>
@@ -6065,27 +6067,27 @@
           <a:bodyPr rtlCol="0" anchor="ctr" wrap="square"/>
           <a:lstStyle/>
           <a:p>
-            <a:pPr algn="ctr"/>
-            <a:r>
-              <a:rPr sz="2600" b="1">
+            <a:pPr algn="ctr" latinLnBrk="0"/>
+            <a:r>
+              <a:rPr sz="2400" b="1">
                 <a:solidFill>
                   <a:srgbClr val="0E4D5E"/>
                 </a:solidFill>
-                <a:latin typeface="Calibri"/>
+                <a:latin typeface="Segoe UI Semibold"/>
               </a:rPr>
               <a:t>10</a:t>
             </a:r>
           </a:p>
           <a:p>
-            <a:pPr algn="ctr"/>
-            <a:r>
-              <a:rPr sz="1150">
+            <a:pPr algn="ctr" latinLnBrk="0"/>
+            <a:r>
+              <a:rPr sz="1150" b="0">
                 <a:solidFill>
                   <a:srgbClr val="6E6A60"/>
                 </a:solidFill>
-                <a:latin typeface="Calibri"/>
-              </a:rPr>
-              <a:t>Tier-1 videos pose-processed</a:t>
+                <a:latin typeface="Segoe UI"/>
+              </a:rPr>
+              <a:t>videos pose-processed</a:t>
             </a:r>
           </a:p>
         </p:txBody>
@@ -6098,8 +6100,8 @@
         </p:nvSpPr>
         <p:spPr>
           <a:xfrm>
-            <a:off x="9829800" y="2377440"/>
-            <a:ext cx="1874519" cy="914400"/>
+            <a:off x="8284464" y="3520440"/>
+            <a:ext cx="1627632" cy="914400"/>
           </a:xfrm>
           <a:prstGeom prst="roundRect">
             <a:avLst>
@@ -6133,27 +6135,27 @@
           <a:bodyPr rtlCol="0" anchor="ctr" wrap="square"/>
           <a:lstStyle/>
           <a:p>
-            <a:pPr algn="ctr"/>
-            <a:r>
-              <a:rPr sz="2600" b="1">
+            <a:pPr algn="ctr" latinLnBrk="0"/>
+            <a:r>
+              <a:rPr sz="2400" b="1">
                 <a:solidFill>
                   <a:srgbClr val="0E4D5E"/>
                 </a:solidFill>
-                <a:latin typeface="Calibri"/>
+                <a:latin typeface="Segoe UI Semibold"/>
               </a:rPr>
               <a:t>5/10</a:t>
             </a:r>
           </a:p>
           <a:p>
-            <a:pPr algn="ctr"/>
-            <a:r>
-              <a:rPr sz="1150">
+            <a:pPr algn="ctr" latinLnBrk="0"/>
+            <a:r>
+              <a:rPr sz="1150" b="0">
                 <a:solidFill>
                   <a:srgbClr val="6E6A60"/>
                 </a:solidFill>
-                <a:latin typeface="Calibri"/>
-              </a:rPr>
-              <a:t>pass 50% detection floor</a:t>
+                <a:latin typeface="Segoe UI"/>
+              </a:rPr>
+              <a:t>pass 50% detection</a:t>
             </a:r>
           </a:p>
         </p:txBody>
@@ -6166,8 +6168,8 @@
         </p:nvSpPr>
         <p:spPr>
           <a:xfrm>
-            <a:off x="9829800" y="3429000"/>
-            <a:ext cx="1874519" cy="914400"/>
+            <a:off x="10030968" y="3520440"/>
+            <a:ext cx="1627632" cy="914400"/>
           </a:xfrm>
           <a:prstGeom prst="roundRect">
             <a:avLst>
@@ -6201,25 +6203,25 @@
           <a:bodyPr rtlCol="0" anchor="ctr" wrap="square"/>
           <a:lstStyle/>
           <a:p>
-            <a:pPr algn="ctr"/>
-            <a:r>
-              <a:rPr sz="2600" b="1">
+            <a:pPr algn="ctr" latinLnBrk="0"/>
+            <a:r>
+              <a:rPr sz="2400" b="1">
                 <a:solidFill>
                   <a:srgbClr val="0E4D5E"/>
                 </a:solidFill>
-                <a:latin typeface="Calibri"/>
+                <a:latin typeface="Segoe UI Semibold"/>
               </a:rPr>
               <a:t>23/23</a:t>
             </a:r>
           </a:p>
           <a:p>
-            <a:pPr algn="ctr"/>
-            <a:r>
-              <a:rPr sz="1150">
+            <a:pPr algn="ctr" latinLnBrk="0"/>
+            <a:r>
+              <a:rPr sz="1150" b="0">
                 <a:solidFill>
                   <a:srgbClr val="6E6A60"/>
                 </a:solidFill>
-                <a:latin typeface="Calibri"/>
+                <a:latin typeface="Segoe UI"/>
               </a:rPr>
               <a:t>tests green</a:t>
             </a:r>
@@ -6234,8 +6236,8 @@
         </p:nvSpPr>
         <p:spPr>
           <a:xfrm>
-            <a:off x="6537960" y="3520440"/>
-            <a:ext cx="5120640" cy="2377440"/>
+            <a:off x="6537960" y="4617720"/>
+            <a:ext cx="5120640" cy="1417320"/>
           </a:xfrm>
           <a:prstGeom prst="rect">
             <a:avLst/>
@@ -6243,25 +6245,40 @@
           <a:noFill/>
         </p:spPr>
         <p:txBody>
-          <a:bodyPr wrap="square" anchor="t" lIns="27432" rIns="27432" tIns="18288" bIns="18288">
+          <a:bodyPr wrap="square" lIns="27432">
             <a:spAutoFit/>
           </a:bodyPr>
           <a:lstStyle/>
           <a:p>
-            <a:pPr algn="l">
-              <a:lnSpc>
-                <a:spcPct val="108000"/>
-              </a:lnSpc>
+            <a:pPr algn="l" latinLnBrk="0">
+              <a:spcAft>
+                <a:spcPts val="500"/>
+              </a:spcAft>
             </a:pPr>
             <a:r>
               <a:rPr sz="1200" b="0">
                 <a:solidFill>
                   <a:srgbClr val="24262E"/>
                 </a:solidFill>
-                <a:latin typeface="Calibri"/>
-              </a:rPr>
-              <a:t>WP2: half the YouTube corpus has detectable singers (best video: 98.5% detection); the other half are software-UI captures with no body in frame. Per last meeting's "try and iterate" decision, the 5 passing videos are the working set.
-WP4: React + FastAPI scaffold renders all four panels end-to-end (screenshot left is the app running locally). Real-data wiring is next iteration.</a:t>
+                <a:latin typeface="Segoe UI"/>
+              </a:rPr>
+              <a:t>WP2: 5 of 10 stratified videos have usable pose tracks (best 98.5% detection); the rest are UI screen captures. The five passing videos form the working set.</a:t>
+            </a:r>
+          </a:p>
+          <a:p>
+            <a:pPr algn="l" latinLnBrk="0">
+              <a:spcAft>
+                <a:spcPts val="500"/>
+              </a:spcAft>
+            </a:pPr>
+            <a:r>
+              <a:rPr sz="1200" b="0">
+                <a:solidFill>
+                  <a:srgbClr val="24262E"/>
+                </a:solidFill>
+                <a:latin typeface="Segoe UI"/>
+              </a:rPr>
+              <a:t>WP4: the scaffold renders all four panels end-to-end; real-data wiring follows next iteration.</a:t>
             </a:r>
           </a:p>
         </p:txBody>
@@ -6279,7 +6296,7 @@
           </a:xfrm>
           <a:prstGeom prst="roundRect">
             <a:avLst>
-              <a:gd name="adj" fmla="val 12000"/>
+              <a:gd name="adj" fmla="val 6000"/>
             </a:avLst>
           </a:prstGeom>
           <a:solidFill>
@@ -6307,13 +6324,13 @@
           <a:bodyPr rtlCol="0" anchor="ctr" wrap="square"/>
           <a:lstStyle/>
           <a:p>
-            <a:pPr algn="ctr"/>
-            <a:r>
-              <a:rPr sz="1500" b="1">
+            <a:pPr algn="ctr" latinLnBrk="0"/>
+            <a:r>
+              <a:rPr sz="1400" b="1">
                 <a:solidFill>
                   <a:srgbClr val="FDFBF5"/>
                 </a:solidFill>
-                <a:latin typeface="Calibri"/>
+                <a:latin typeface="Segoe UI Semibold"/>
               </a:rPr>
               <a:t>All four work packages advanced; no blockers.</a:t>
             </a:r>
@@ -6368,7 +6385,7 @@
           </a:bodyPr>
           <a:lstStyle/>
           <a:p>
-            <a:pPr algn="l">
+            <a:pPr algn="l" latinLnBrk="0">
               <a:lnSpc>
                 <a:spcPct val="100000"/>
               </a:lnSpc>
@@ -6378,7 +6395,7 @@
                 <a:solidFill>
                   <a:srgbClr val="C4902A"/>
                 </a:solidFill>
-                <a:latin typeface="Calibri"/>
+                <a:latin typeface="Segoe UI Semibold"/>
               </a:rPr>
               <a:t>NEXT ITERATION</a:t>
             </a:r>
@@ -6407,7 +6424,7 @@
           </a:bodyPr>
           <a:lstStyle/>
           <a:p>
-            <a:pPr algn="l">
+            <a:pPr algn="l" latinLnBrk="0">
               <a:lnSpc>
                 <a:spcPct val="100000"/>
               </a:lnSpc>
@@ -6417,7 +6434,7 @@
                 <a:solidFill>
                   <a:srgbClr val="0E4D5E"/>
                 </a:solidFill>
-                <a:latin typeface="Calibri"/>
+                <a:latin typeface="Segoe UI Semibold"/>
               </a:rPr>
               <a:t>Plan: Jun 12 → Jun 25</a:t>
             </a:r>
@@ -6446,7 +6463,7 @@
           </a:bodyPr>
           <a:lstStyle/>
           <a:p>
-            <a:pPr algn="r">
+            <a:pPr algn="r" latinLnBrk="0">
               <a:lnSpc>
                 <a:spcPct val="100000"/>
               </a:lnSpc>
@@ -6456,7 +6473,7 @@
                 <a:solidFill>
                   <a:srgbClr val="6E6A60"/>
                 </a:solidFill>
-                <a:latin typeface="Calibri"/>
+                <a:latin typeface="Segoe UI"/>
               </a:rPr>
               <a:t>6 / 8</a:t>
             </a:r>
@@ -6485,7 +6502,7 @@
           </a:bodyPr>
           <a:lstStyle/>
           <a:p>
-            <a:pPr algn="l">
+            <a:pPr algn="l" latinLnBrk="0">
               <a:lnSpc>
                 <a:spcPct val="100000"/>
               </a:lnSpc>
@@ -6495,7 +6512,7 @@
                 <a:solidFill>
                   <a:srgbClr val="6E6A60"/>
                 </a:solidFill>
-                <a:latin typeface="Calibri"/>
+                <a:latin typeface="Segoe UI"/>
               </a:rPr>
               <a:t>Project 8 · Entanglement in Online Choir</a:t>
             </a:r>
@@ -6530,12 +6547,13 @@
                     <a:bodyPr/>
                     <a:lstStyle/>
                     <a:p>
+                      <a:pPr latinLnBrk="0"/>
                       <a:r>
                         <a:rPr sz="1400" b="1">
                           <a:solidFill>
                             <a:srgbClr val="FDFBF5"/>
                           </a:solidFill>
-                          <a:latin typeface="Calibri"/>
+                          <a:latin typeface="Segoe UI Semibold"/>
                         </a:rPr>
                         <a:t>Track</a:t>
                       </a:r>
@@ -6552,12 +6570,13 @@
                     <a:bodyPr/>
                     <a:lstStyle/>
                     <a:p>
+                      <a:pPr latinLnBrk="0"/>
                       <a:r>
                         <a:rPr sz="1400" b="1">
                           <a:solidFill>
                             <a:srgbClr val="FDFBF5"/>
                           </a:solidFill>
-                          <a:latin typeface="Calibri"/>
+                          <a:latin typeface="Segoe UI Semibold"/>
                         </a:rPr>
                         <a:t>What ships</a:t>
                       </a:r>
@@ -6576,12 +6595,13 @@
                     <a:bodyPr/>
                     <a:lstStyle/>
                     <a:p>
+                      <a:pPr latinLnBrk="0"/>
                       <a:r>
                         <a:rPr sz="1350" b="1">
                           <a:solidFill>
                             <a:srgbClr val="0E4D5E"/>
                           </a:solidFill>
-                          <a:latin typeface="Calibri"/>
+                          <a:latin typeface="Segoe UI Semibold"/>
                         </a:rPr>
                         <a:t>WP1 audio</a:t>
                       </a:r>
@@ -6598,12 +6618,13 @@
                     <a:bodyPr/>
                     <a:lstStyle/>
                     <a:p>
+                      <a:pPr latinLnBrk="0"/>
                       <a:r>
                         <a:rPr sz="1350" b="0">
                           <a:solidFill>
                             <a:srgbClr val="24262E"/>
                           </a:solidFill>
-                          <a:latin typeface="Calibri"/>
+                          <a:latin typeface="Segoe UI"/>
                         </a:rPr>
                         <a:t>Per-window Granger → time-varying N(t) for the dashboard timeline</a:t>
                       </a:r>
@@ -6622,12 +6643,13 @@
                     <a:bodyPr/>
                     <a:lstStyle/>
                     <a:p>
+                      <a:pPr latinLnBrk="0"/>
                       <a:r>
                         <a:rPr sz="1350" b="1">
                           <a:solidFill>
                             <a:srgbClr val="0E4D5E"/>
                           </a:solidFill>
-                          <a:latin typeface="Calibri"/>
+                          <a:latin typeface="Segoe UI Semibold"/>
                         </a:rPr>
                         <a:t>WP2 video</a:t>
                       </a:r>
@@ -6644,12 +6666,13 @@
                     <a:bodyPr/>
                     <a:lstStyle/>
                     <a:p>
+                      <a:pPr latinLnBrk="0"/>
                       <a:r>
                         <a:rPr sz="1350" b="0">
                           <a:solidFill>
                             <a:srgbClr val="24262E"/>
                           </a:solidFill>
-                          <a:latin typeface="Calibri"/>
+                          <a:latin typeface="Segoe UI"/>
                         </a:rPr>
                         <a:t>Pose on remaining Tier-1 videos, quality-first triage</a:t>
                       </a:r>
@@ -6668,12 +6691,13 @@
                     <a:bodyPr/>
                     <a:lstStyle/>
                     <a:p>
+                      <a:pPr latinLnBrk="0"/>
                       <a:r>
                         <a:rPr sz="1350" b="1">
                           <a:solidFill>
                             <a:srgbClr val="0E4D5E"/>
                           </a:solidFill>
-                          <a:latin typeface="Calibri"/>
+                          <a:latin typeface="Segoe UI Semibold"/>
                         </a:rPr>
                         <a:t>WP3 network</a:t>
                       </a:r>
@@ -6690,12 +6714,13 @@
                     <a:bodyPr/>
                     <a:lstStyle/>
                     <a:p>
+                      <a:pPr latinLnBrk="0"/>
                       <a:r>
                         <a:rPr sz="1350" b="0">
                           <a:solidFill>
                             <a:srgbClr val="24262E"/>
                           </a:solidFill>
-                          <a:latin typeface="Calibri"/>
+                          <a:latin typeface="Segoe UI"/>
                         </a:rPr>
                         <a:t>Tier-3 latency injection: synthetic jitter at 4 regime levels, E(t) per level. First cross-regime test of H1 + H2.</a:t>
                       </a:r>
@@ -6714,12 +6739,13 @@
                     <a:bodyPr/>
                     <a:lstStyle/>
                     <a:p>
+                      <a:pPr latinLnBrk="0"/>
                       <a:r>
                         <a:rPr sz="1350" b="1">
                           <a:solidFill>
                             <a:srgbClr val="0E4D5E"/>
                           </a:solidFill>
-                          <a:latin typeface="Calibri"/>
+                          <a:latin typeface="Segoe UI Semibold"/>
                         </a:rPr>
                         <a:t>WP4 dashboard</a:t>
                       </a:r>
@@ -6736,12 +6762,13 @@
                     <a:bodyPr/>
                     <a:lstStyle/>
                     <a:p>
+                      <a:pPr latinLnBrk="0"/>
                       <a:r>
                         <a:rPr sz="1350" b="0">
                           <a:solidFill>
                             <a:srgbClr val="24262E"/>
                           </a:solidFill>
-                          <a:latin typeface="Calibri"/>
+                          <a:latin typeface="Segoe UI"/>
                         </a:rPr>
                         <a:t>Swap mock JSON for real parquet readers + pose overlay</a:t>
                       </a:r>
@@ -6760,12 +6787,13 @@
                     <a:bodyPr/>
                     <a:lstStyle/>
                     <a:p>
+                      <a:pPr latinLnBrk="0"/>
                       <a:r>
                         <a:rPr sz="1350" b="1">
                           <a:solidFill>
                             <a:srgbClr val="0E4D5E"/>
                           </a:solidFill>
-                          <a:latin typeface="Calibri"/>
+                          <a:latin typeface="Segoe UI Semibold"/>
                         </a:rPr>
                         <a:t>Data</a:t>
                       </a:r>
@@ -6782,12 +6810,13 @@
                     <a:bodyPr/>
                     <a:lstStyle/>
                     <a:p>
+                      <a:pPr latinLnBrk="0"/>
                       <a:r>
                         <a:rPr sz="1350" b="0">
                           <a:solidFill>
                             <a:srgbClr val="24262E"/>
                           </a:solidFill>
-                          <a:latin typeface="Calibri"/>
+                          <a:latin typeface="Segoe UI"/>
                         </a:rPr>
                         <a:t>Download ChoralSynth (open license, Zenodo) · follow up ESMUC</a:t>
                       </a:r>
@@ -6826,7 +6855,7 @@
           </a:bodyPr>
           <a:lstStyle/>
           <a:p>
-            <a:pPr algn="l">
+            <a:pPr algn="l" latinLnBrk="0">
               <a:lnSpc>
                 <a:spcPct val="100000"/>
               </a:lnSpc>
@@ -6836,7 +6865,7 @@
                 <a:solidFill>
                   <a:srgbClr val="C4902A"/>
                 </a:solidFill>
-                <a:latin typeface="Calibri"/>
+                <a:latin typeface="Segoe UI"/>
               </a:rPr>
               <a:t>Hard milestone before status #5: dashboard alpha on real data + first Tier-3 cross-regime result.</a:t>
             </a:r>
@@ -6856,7 +6885,7 @@
           </a:xfrm>
           <a:prstGeom prst="roundRect">
             <a:avLst>
-              <a:gd name="adj" fmla="val 12000"/>
+              <a:gd name="adj" fmla="val 6000"/>
             </a:avLst>
           </a:prstGeom>
           <a:solidFill>
@@ -6884,13 +6913,13 @@
           <a:bodyPr rtlCol="0" anchor="ctr" wrap="square"/>
           <a:lstStyle/>
           <a:p>
-            <a:pPr algn="ctr"/>
-            <a:r>
-              <a:rPr sz="1500" b="1">
+            <a:pPr algn="ctr" latinLnBrk="0"/>
+            <a:r>
+              <a:rPr sz="1400" b="1">
                 <a:solidFill>
                   <a:srgbClr val="FDFBF5"/>
                 </a:solidFill>
-                <a:latin typeface="Calibri"/>
+                <a:latin typeface="Segoe UI Semibold"/>
               </a:rPr>
               <a:t>Next iteration: from measuring coordination to comparing latency regimes.</a:t>
             </a:r>
@@ -6945,7 +6974,7 @@
           </a:bodyPr>
           <a:lstStyle/>
           <a:p>
-            <a:pPr algn="l">
+            <a:pPr algn="l" latinLnBrk="0">
               <a:lnSpc>
                 <a:spcPct val="100000"/>
               </a:lnSpc>
@@ -6955,7 +6984,7 @@
                 <a:solidFill>
                   <a:srgbClr val="C4902A"/>
                 </a:solidFill>
-                <a:latin typeface="Calibri"/>
+                <a:latin typeface="Segoe UI Semibold"/>
               </a:rPr>
               <a:t>RETROSPECTIVE</a:t>
             </a:r>
@@ -6984,7 +7013,7 @@
           </a:bodyPr>
           <a:lstStyle/>
           <a:p>
-            <a:pPr algn="l">
+            <a:pPr algn="l" latinLnBrk="0">
               <a:lnSpc>
                 <a:spcPct val="100000"/>
               </a:lnSpc>
@@ -6994,7 +7023,7 @@
                 <a:solidFill>
                   <a:srgbClr val="0E4D5E"/>
                 </a:solidFill>
-                <a:latin typeface="Calibri"/>
+                <a:latin typeface="Segoe UI Semibold"/>
               </a:rPr>
               <a:t>Sprint 3 retrospective</a:t>
             </a:r>
@@ -7023,7 +7052,7 @@
           </a:bodyPr>
           <a:lstStyle/>
           <a:p>
-            <a:pPr algn="r">
+            <a:pPr algn="r" latinLnBrk="0">
               <a:lnSpc>
                 <a:spcPct val="100000"/>
               </a:lnSpc>
@@ -7033,7 +7062,7 @@
                 <a:solidFill>
                   <a:srgbClr val="6E6A60"/>
                 </a:solidFill>
-                <a:latin typeface="Calibri"/>
+                <a:latin typeface="Segoe UI"/>
               </a:rPr>
               <a:t>7 / 8</a:t>
             </a:r>
@@ -7062,7 +7091,7 @@
           </a:bodyPr>
           <a:lstStyle/>
           <a:p>
-            <a:pPr algn="l">
+            <a:pPr algn="l" latinLnBrk="0">
               <a:lnSpc>
                 <a:spcPct val="100000"/>
               </a:lnSpc>
@@ -7072,7 +7101,7 @@
                 <a:solidFill>
                   <a:srgbClr val="6E6A60"/>
                 </a:solidFill>
-                <a:latin typeface="Calibri"/>
+                <a:latin typeface="Segoe UI"/>
               </a:rPr>
               <a:t>Project 8 · Entanglement in Online Choir</a:t>
             </a:r>
@@ -7088,7 +7117,7 @@
         <p:spPr>
           <a:xfrm>
             <a:off x="502920" y="1371600"/>
-            <a:ext cx="3611880" cy="4480560"/>
+            <a:ext cx="3611880" cy="3977639"/>
           </a:xfrm>
           <a:prstGeom prst="roundRect">
             <a:avLst>
@@ -7119,68 +7148,68 @@
           </a:fontRef>
         </p:style>
         <p:txBody>
-          <a:bodyPr rtlCol="0" anchor="t" wrap="square" lIns="182880" rIns="182880" tIns="146304"/>
-          <a:lstStyle/>
-          <a:p>
-            <a:pPr algn="ctr">
+          <a:bodyPr rtlCol="0" anchor="t" wrap="square" lIns="201168" rIns="201168" tIns="146304"/>
+          <a:lstStyle/>
+          <a:p>
+            <a:pPr algn="l" latinLnBrk="0">
               <a:spcAft>
-                <a:spcPts val="500"/>
+                <a:spcPts val="600"/>
               </a:spcAft>
             </a:pPr>
             <a:r>
-              <a:rPr sz="1350" b="1">
+              <a:rPr sz="1400" b="1">
                 <a:solidFill>
                   <a:srgbClr val="4F8E5A"/>
                 </a:solidFill>
-                <a:latin typeface="Calibri"/>
+                <a:latin typeface="Segoe UI Semibold"/>
               </a:rPr>
               <a:t>What worked</a:t>
             </a:r>
           </a:p>
           <a:p>
-            <a:pPr>
+            <a:pPr algn="l" latinLnBrk="0">
               <a:spcAft>
                 <a:spcPts val="400"/>
               </a:spcAft>
             </a:pPr>
             <a:r>
-              <a:rPr sz="1350">
+              <a:rPr sz="1350" b="0">
                 <a:solidFill>
                   <a:srgbClr val="24262E"/>
                 </a:solidFill>
-                <a:latin typeface="Calibri"/>
+                <a:latin typeface="Segoe UI"/>
               </a:rPr>
               <a:t>One reviewable artefact per work package per iteration.</a:t>
             </a:r>
           </a:p>
           <a:p>
-            <a:pPr>
+            <a:pPr algn="l" latinLnBrk="0">
               <a:spcAft>
                 <a:spcPts val="400"/>
               </a:spcAft>
             </a:pPr>
             <a:r>
-              <a:rPr sz="1350">
+              <a:rPr sz="1350" b="0">
                 <a:solidFill>
                   <a:srgbClr val="24262E"/>
                 </a:solidFill>
-                <a:latin typeface="Calibri"/>
+                <a:latin typeface="Segoe UI"/>
               </a:rPr>
               <a:t/>
             </a:r>
           </a:p>
           <a:p>
-            <a:pPr>
+            <a:pPr algn="l" latinLnBrk="0">
               <a:spcAft>
                 <a:spcPts val="400"/>
               </a:spcAft>
             </a:pPr>
             <a:r>
-              <a:rPr sz="1350">
+              <a:rPr sz="1350" b="0">
                 <a:solidFill>
                   <a:srgbClr val="24262E"/>
                 </a:solidFill>
-                <a:latin typeface="Calibri"/>
+                <a:latin typeface="Segoe UI"/>
               </a:rPr>
               <a:t>Documentation updated at every milestone; project state is readable from three files.</a:t>
             </a:r>
@@ -7196,7 +7225,7 @@
         <p:spPr>
           <a:xfrm>
             <a:off x="4279392" y="1371600"/>
-            <a:ext cx="3611880" cy="4480560"/>
+            <a:ext cx="3611880" cy="3977639"/>
           </a:xfrm>
           <a:prstGeom prst="roundRect">
             <a:avLst>
@@ -7227,68 +7256,68 @@
           </a:fontRef>
         </p:style>
         <p:txBody>
-          <a:bodyPr rtlCol="0" anchor="t" wrap="square" lIns="182880" rIns="182880" tIns="146304"/>
-          <a:lstStyle/>
-          <a:p>
-            <a:pPr algn="ctr">
+          <a:bodyPr rtlCol="0" anchor="t" wrap="square" lIns="201168" rIns="201168" tIns="146304"/>
+          <a:lstStyle/>
+          <a:p>
+            <a:pPr algn="l" latinLnBrk="0">
               <a:spcAft>
-                <a:spcPts val="500"/>
+                <a:spcPts val="600"/>
               </a:spcAft>
             </a:pPr>
             <a:r>
-              <a:rPr sz="1350" b="1">
+              <a:rPr sz="1400" b="1">
                 <a:solidFill>
                   <a:srgbClr val="B55A44"/>
                 </a:solidFill>
-                <a:latin typeface="Calibri"/>
+                <a:latin typeface="Segoe UI Semibold"/>
               </a:rPr>
               <a:t>What went wrong</a:t>
             </a:r>
           </a:p>
           <a:p>
-            <a:pPr>
+            <a:pPr algn="l" latinLnBrk="0">
               <a:spcAft>
                 <a:spcPts val="400"/>
               </a:spcAft>
             </a:pPr>
             <a:r>
-              <a:rPr sz="1350">
+              <a:rPr sz="1350" b="0">
                 <a:solidFill>
                   <a:srgbClr val="24262E"/>
                 </a:solidFill>
-                <a:latin typeface="Calibri"/>
+                <a:latin typeface="Segoe UI"/>
               </a:rPr>
               <a:t>ESMUC and ChoralSynth not yet in Tier‑2. ChoralSynth is openly licensed on Zenodo and scheduled for next iteration; ESMUC requires a license (open question).</a:t>
             </a:r>
           </a:p>
           <a:p>
-            <a:pPr>
+            <a:pPr algn="l" latinLnBrk="0">
               <a:spcAft>
                 <a:spcPts val="400"/>
               </a:spcAft>
             </a:pPr>
             <a:r>
-              <a:rPr sz="1350">
+              <a:rPr sz="1350" b="0">
                 <a:solidFill>
                   <a:srgbClr val="24262E"/>
                 </a:solidFill>
-                <a:latin typeface="Calibri"/>
+                <a:latin typeface="Segoe UI"/>
               </a:rPr>
               <a:t/>
             </a:r>
           </a:p>
           <a:p>
-            <a:pPr>
+            <a:pPr algn="l" latinLnBrk="0">
               <a:spcAft>
                 <a:spcPts val="400"/>
               </a:spcAft>
             </a:pPr>
             <a:r>
-              <a:rPr sz="1350">
+              <a:rPr sz="1350" b="0">
                 <a:solidFill>
                   <a:srgbClr val="24262E"/>
                 </a:solidFill>
-                <a:latin typeface="Calibri"/>
+                <a:latin typeface="Segoe UI"/>
               </a:rPr>
               <a:t>Half of the Tier‑1 videos are screen captures without visible singers. Future curation will filter on singer visibility, not only NMP regime.</a:t>
             </a:r>
@@ -7304,7 +7333,7 @@
         <p:spPr>
           <a:xfrm>
             <a:off x="8055864" y="1371600"/>
-            <a:ext cx="3611880" cy="4480560"/>
+            <a:ext cx="3611880" cy="3977639"/>
           </a:xfrm>
           <a:prstGeom prst="roundRect">
             <a:avLst>
@@ -7335,100 +7364,100 @@
           </a:fontRef>
         </p:style>
         <p:txBody>
-          <a:bodyPr rtlCol="0" anchor="t" wrap="square" lIns="182880" rIns="182880" tIns="146304"/>
-          <a:lstStyle/>
-          <a:p>
-            <a:pPr algn="ctr">
+          <a:bodyPr rtlCol="0" anchor="t" wrap="square" lIns="201168" rIns="201168" tIns="146304"/>
+          <a:lstStyle/>
+          <a:p>
+            <a:pPr algn="l" latinLnBrk="0">
               <a:spcAft>
-                <a:spcPts val="500"/>
+                <a:spcPts val="600"/>
               </a:spcAft>
             </a:pPr>
             <a:r>
-              <a:rPr sz="1350" b="1">
+              <a:rPr sz="1400" b="1">
                 <a:solidFill>
                   <a:srgbClr val="C4902A"/>
                 </a:solidFill>
-                <a:latin typeface="Calibri"/>
+                <a:latin typeface="Segoe UI Semibold"/>
               </a:rPr>
               <a:t>Known limitations</a:t>
             </a:r>
           </a:p>
           <a:p>
-            <a:pPr>
+            <a:pPr algn="l" latinLnBrk="0">
               <a:spcAft>
                 <a:spcPts val="400"/>
               </a:spcAft>
             </a:pPr>
             <a:r>
-              <a:rPr sz="1350">
+              <a:rPr sz="1350" b="0">
                 <a:solidFill>
                   <a:srgbClr val="24262E"/>
                 </a:solidFill>
-                <a:latin typeface="Calibri"/>
+                <a:latin typeface="Segoe UI"/>
               </a:rPr>
               <a:t>V(t) is absent from current E(t) values; Dagstuhl has no video. The composite reallocates weight until multimodal data exists.</a:t>
             </a:r>
           </a:p>
           <a:p>
-            <a:pPr>
+            <a:pPr algn="l" latinLnBrk="0">
               <a:spcAft>
                 <a:spcPts val="400"/>
               </a:spcAft>
             </a:pPr>
             <a:r>
-              <a:rPr sz="1350">
+              <a:rPr sz="1350" b="0">
                 <a:solidFill>
                   <a:srgbClr val="24262E"/>
                 </a:solidFill>
-                <a:latin typeface="Calibri"/>
+                <a:latin typeface="Segoe UI"/>
               </a:rPr>
               <a:t/>
             </a:r>
           </a:p>
           <a:p>
-            <a:pPr>
+            <a:pPr algn="l" latinLnBrk="0">
               <a:spcAft>
                 <a:spcPts val="400"/>
               </a:spcAft>
             </a:pPr>
             <a:r>
-              <a:rPr sz="1350">
+              <a:rPr sz="1350" b="0">
                 <a:solidFill>
                   <a:srgbClr val="24262E"/>
                 </a:solidFill>
-                <a:latin typeface="Calibri"/>
+                <a:latin typeface="Segoe UI"/>
               </a:rPr>
               <a:t>All five E(t) pieces are zero‑latency studio recordings. Cross‑regime variation arrives with Tier‑3.</a:t>
             </a:r>
           </a:p>
           <a:p>
-            <a:pPr>
+            <a:pPr algn="l" latinLnBrk="0">
               <a:spcAft>
                 <a:spcPts val="400"/>
               </a:spcAft>
             </a:pPr>
             <a:r>
-              <a:rPr sz="1350">
+              <a:rPr sz="1350" b="0">
                 <a:solidFill>
                   <a:srgbClr val="24262E"/>
                 </a:solidFill>
-                <a:latin typeface="Calibri"/>
+                <a:latin typeface="Segoe UI"/>
               </a:rPr>
               <a:t/>
             </a:r>
           </a:p>
           <a:p>
-            <a:pPr>
+            <a:pPr algn="l" latinLnBrk="0">
               <a:spcAft>
                 <a:spcPts val="400"/>
               </a:spcAft>
             </a:pPr>
             <a:r>
-              <a:rPr sz="1350">
+              <a:rPr sz="1350" b="0">
                 <a:solidFill>
                   <a:srgbClr val="24262E"/>
                 </a:solidFill>
-                <a:latin typeface="Calibri"/>
+                <a:latin typeface="Segoe UI"/>
               </a:rPr>
               <a:t>p &lt; 0.001 means 0 of 200 permutations exceeded the observed value.</a:t>
             </a:r>
@@ -7448,7 +7477,7 @@
           </a:xfrm>
           <a:prstGeom prst="roundRect">
             <a:avLst>
-              <a:gd name="adj" fmla="val 12000"/>
+              <a:gd name="adj" fmla="val 6000"/>
             </a:avLst>
           </a:prstGeom>
           <a:solidFill>
@@ -7476,13 +7505,13 @@
           <a:bodyPr rtlCol="0" anchor="ctr" wrap="square"/>
           <a:lstStyle/>
           <a:p>
-            <a:pPr algn="ctr"/>
-            <a:r>
-              <a:rPr sz="1500" b="1">
+            <a:pPr algn="ctr" latinLnBrk="0"/>
+            <a:r>
+              <a:rPr sz="1400" b="1">
                 <a:solidFill>
                   <a:srgbClr val="FDFBF5"/>
                 </a:solidFill>
-                <a:latin typeface="Calibri"/>
+                <a:latin typeface="Segoe UI Semibold"/>
               </a:rPr>
               <a:t>All retrospective items are documented in sprint3_results.md.</a:t>
             </a:r>
@@ -7537,7 +7566,7 @@
           </a:bodyPr>
           <a:lstStyle/>
           <a:p>
-            <a:pPr algn="l">
+            <a:pPr algn="l" latinLnBrk="0">
               <a:lnSpc>
                 <a:spcPct val="100000"/>
               </a:lnSpc>
@@ -7547,7 +7576,7 @@
                 <a:solidFill>
                   <a:srgbClr val="C4902A"/>
                 </a:solidFill>
-                <a:latin typeface="Calibri"/>
+                <a:latin typeface="Segoe UI Semibold"/>
               </a:rPr>
               <a:t>PROBLEMS / QUESTIONS</a:t>
             </a:r>
@@ -7576,7 +7605,7 @@
           </a:bodyPr>
           <a:lstStyle/>
           <a:p>
-            <a:pPr algn="l">
+            <a:pPr algn="l" latinLnBrk="0">
               <a:lnSpc>
                 <a:spcPct val="100000"/>
               </a:lnSpc>
@@ -7586,7 +7615,7 @@
                 <a:solidFill>
                   <a:srgbClr val="0E4D5E"/>
                 </a:solidFill>
-                <a:latin typeface="Calibri"/>
+                <a:latin typeface="Segoe UI Semibold"/>
               </a:rPr>
               <a:t>Open questions</a:t>
             </a:r>
@@ -7615,7 +7644,7 @@
           </a:bodyPr>
           <a:lstStyle/>
           <a:p>
-            <a:pPr algn="r">
+            <a:pPr algn="r" latinLnBrk="0">
               <a:lnSpc>
                 <a:spcPct val="100000"/>
               </a:lnSpc>
@@ -7625,7 +7654,7 @@
                 <a:solidFill>
                   <a:srgbClr val="6E6A60"/>
                 </a:solidFill>
-                <a:latin typeface="Calibri"/>
+                <a:latin typeface="Segoe UI"/>
               </a:rPr>
               <a:t>8 / 8</a:t>
             </a:r>
@@ -7654,7 +7683,7 @@
           </a:bodyPr>
           <a:lstStyle/>
           <a:p>
-            <a:pPr algn="l">
+            <a:pPr algn="l" latinLnBrk="0">
               <a:lnSpc>
                 <a:spcPct val="100000"/>
               </a:lnSpc>
@@ -7664,7 +7693,7 @@
                 <a:solidFill>
                   <a:srgbClr val="6E6A60"/>
                 </a:solidFill>
-                <a:latin typeface="Calibri"/>
+                <a:latin typeface="Segoe UI"/>
               </a:rPr>
               <a:t>Project 8 · Entanglement in Online Choir</a:t>
             </a:r>
@@ -7711,36 +7740,36 @@
           </a:fontRef>
         </p:style>
         <p:txBody>
-          <a:bodyPr rtlCol="0" anchor="t" wrap="square" lIns="182880" rIns="182880" tIns="146304"/>
-          <a:lstStyle/>
-          <a:p>
-            <a:pPr algn="ctr">
+          <a:bodyPr rtlCol="0" anchor="t" wrap="square" lIns="201168" rIns="201168" tIns="146304"/>
+          <a:lstStyle/>
+          <a:p>
+            <a:pPr algn="l" latinLnBrk="0">
               <a:spcAft>
-                <a:spcPts val="500"/>
+                <a:spcPts val="600"/>
               </a:spcAft>
             </a:pPr>
             <a:r>
-              <a:rPr sz="1350" b="1">
+              <a:rPr sz="1400" b="1">
                 <a:solidFill>
                   <a:srgbClr val="0E4D5E"/>
                 </a:solidFill>
-                <a:latin typeface="Calibri"/>
+                <a:latin typeface="Segoe UI Semibold"/>
               </a:rPr>
               <a:t>1 · Prof. Hacker: ESMUC dataset access</a:t>
             </a:r>
           </a:p>
           <a:p>
-            <a:pPr>
+            <a:pPr algn="l" latinLnBrk="0">
               <a:spcAft>
                 <a:spcPts val="400"/>
               </a:spcAft>
             </a:pPr>
             <a:r>
-              <a:rPr sz="1500">
+              <a:rPr sz="1500" b="0">
                 <a:solidFill>
                   <a:srgbClr val="24262E"/>
                 </a:solidFill>
-                <a:latin typeface="Calibri"/>
+                <a:latin typeface="Segoe UI"/>
               </a:rPr>
               <a:t>Do you have institutional access to the ESMUC multitrack dataset? ChoralSynth is openly licensed on Zenodo and we will download it ourselves; ESMUC is the only dataset where we need support.</a:t>
             </a:r>
@@ -7787,36 +7816,36 @@
           </a:fontRef>
         </p:style>
         <p:txBody>
-          <a:bodyPr rtlCol="0" anchor="t" wrap="square" lIns="182880" rIns="182880" tIns="146304"/>
-          <a:lstStyle/>
-          <a:p>
-            <a:pPr algn="ctr">
+          <a:bodyPr rtlCol="0" anchor="t" wrap="square" lIns="201168" rIns="201168" tIns="146304"/>
+          <a:lstStyle/>
+          <a:p>
+            <a:pPr algn="l" latinLnBrk="0">
               <a:spcAft>
-                <a:spcPts val="500"/>
+                <a:spcPts val="600"/>
               </a:spcAft>
             </a:pPr>
             <a:r>
-              <a:rPr sz="1350" b="1">
+              <a:rPr sz="1400" b="1">
                 <a:solidFill>
                   <a:srgbClr val="0E4D5E"/>
                 </a:solidFill>
-                <a:latin typeface="Calibri"/>
+                <a:latin typeface="Segoe UI Semibold"/>
               </a:rPr>
               <a:t>2 · Coordinators: compute for the next iteration</a:t>
             </a:r>
           </a:p>
           <a:p>
-            <a:pPr>
+            <a:pPr algn="l" latinLnBrk="0">
               <a:spcAft>
                 <a:spcPts val="400"/>
               </a:spcAft>
             </a:pPr>
             <a:r>
-              <a:rPr sz="1500">
+              <a:rPr sz="1500" b="0">
                 <a:solidFill>
                   <a:srgbClr val="24262E"/>
                 </a:solidFill>
-                <a:latin typeface="Calibri"/>
+                <a:latin typeface="Segoe UI"/>
               </a:rPr>
               <a:t>Is there a path to CPU time on a Bamberg or HSLU cluster? Per-window Granger across the corpus is the compute bottleneck for the latency-injection runs: hundreds of hours on our laptops, roughly one day on a 32-64 core node.</a:t>
             </a:r>
@@ -7845,7 +7874,7 @@
           </a:bodyPr>
           <a:lstStyle/>
           <a:p>
-            <a:pPr algn="ctr">
+            <a:pPr algn="ctr" latinLnBrk="0">
               <a:lnSpc>
                 <a:spcPct val="100000"/>
               </a:lnSpc>
@@ -7855,7 +7884,7 @@
                 <a:solidFill>
                   <a:srgbClr val="0E4D5E"/>
                 </a:solidFill>
-                <a:latin typeface="Calibri"/>
+                <a:latin typeface="Segoe UI"/>
               </a:rPr>
               <a:t>Thank you.</a:t>
             </a:r>

--- a/output/jun11_status_meeting_iv.pptx
+++ b/output/jun11_status_meeting_iv.pptx
@@ -7831,7 +7831,7 @@
                 </a:solidFill>
                 <a:latin typeface="Segoe UI Semibold"/>
               </a:rPr>
-              <a:t>2 · Coordinators: compute for the next iteration</a:t>
+              <a:t>2 · Coordinators: cluster access (nice-to-have, not a blocker)</a:t>
             </a:r>
           </a:p>
           <a:p>
@@ -7847,7 +7847,7 @@
                 </a:solidFill>
                 <a:latin typeface="Segoe UI"/>
               </a:rPr>
-              <a:t>Is there a path to CPU time on a Bamberg or HSLU cluster? Per-window Granger across the corpus is the compute bottleneck for the latency-injection runs: hundreds of hours on our laptops, roughly one day on a 32-64 core node.</a:t>
+              <a:t>Is CPU time available on a Bamberg or HSLU cluster? The planned next-iteration scope runs overnight on our laptops. Cluster access would let us run denser jitter grids and finer analysis windows, which strengthens the H1 robustness checks.</a:t>
             </a:r>
           </a:p>
         </p:txBody>

--- a/output/jun11_status_meeting_iv.pptx
+++ b/output/jun11_status_meeting_iv.pptx
@@ -4608,7 +4608,7 @@
                 </a:solidFill>
                 <a:latin typeface="Segoe UI"/>
               </a:rPr>
-              <a:t>Status #6 · paper draft review</a:t>
+              <a:t>Status #6 · last check-in before final</a:t>
             </a:r>
           </a:p>
         </p:txBody>

--- a/output/jun11_status_meeting_iv.pptx
+++ b/output/jun11_status_meeting_iv.pptx
@@ -5057,7 +5057,7 @@
                 </a:solidFill>
                 <a:latin typeface="Segoe UI"/>
               </a:rPr>
-              <a:t>pieces significantly above the null (p &lt; 0.001)</a:t>
+              <a:t>pieces significantly above the null (p &lt; 0.005)</a:t>
             </a:r>
           </a:p>
         </p:txBody>
@@ -5735,7 +5735,7 @@
                 </a:solidFill>
                 <a:latin typeface="Segoe UI"/>
               </a:rPr>
-              <a:t>Methods agree on quartets, diverge on full choir (42 vs 25 of 56 edges). That gap is itself a finding: a third of standard edges rely on linear magnitude, not pattern structure.</a:t>
+              <a:t>Methods agree on quartets, diverge on full choir (42 vs 25 of 56 edges). That gap is itself a finding: about 40% of standard edges (17 of 42) rely on linear magnitude, not pattern structure.</a:t>
             </a:r>
           </a:p>
         </p:txBody>
@@ -5789,7 +5789,7 @@
                 </a:solidFill>
                 <a:latin typeface="Segoe UI Semibold"/>
               </a:rPr>
-              <a:t>The Sprint-2 reference result reproduces exactly; the pipeline now scales to the corpus.</a:t>
+              <a:t>Sprint-2 reference reproduces (11/12 edges, density 0.917); the pipeline now scales to the corpus.</a:t>
             </a:r>
           </a:p>
         </p:txBody>
@@ -6262,7 +6262,7 @@
                 </a:solidFill>
                 <a:latin typeface="Segoe UI"/>
               </a:rPr>
-              <a:t>WP2: 5 of 10 stratified videos have usable pose tracks (best 98.5% detection); the rest are UI screen captures. The five passing videos form the working set.</a:t>
+              <a:t>WP2: 5 of 10 stratified videos have usable pose tracks (best 98.5% detection); the rest are UI captures or low-res tile grids. The five passing videos form the working set.</a:t>
             </a:r>
           </a:p>
           <a:p>
@@ -6818,7 +6818,7 @@
                           </a:solidFill>
                           <a:latin typeface="Segoe UI"/>
                         </a:rPr>
-                        <a:t>Download ChoralSynth (open license, Zenodo) · follow up ESMUC</a:t>
+                        <a:t>Download ChoralSynth (Zenodo, research licence) · follow up ESMUC</a:t>
                       </a:r>
                     </a:p>
                   </a:txBody>
@@ -7287,7 +7287,7 @@
                 </a:solidFill>
                 <a:latin typeface="Segoe UI"/>
               </a:rPr>
-              <a:t>ESMUC and ChoralSynth not yet in Tier‑2. ChoralSynth is openly licensed on Zenodo and scheduled for next iteration; ESMUC requires a license (open question).</a:t>
+              <a:t>ESMUC and ChoralSynth not yet in Tier‑2. ChoralSynth is freely available on Zenodo for research and scheduled for next iteration; ESMUC requires a license (open question).</a:t>
             </a:r>
           </a:p>
           <a:p>
@@ -7459,7 +7459,7 @@
                 </a:solidFill>
                 <a:latin typeface="Segoe UI"/>
               </a:rPr>
-              <a:t>p &lt; 0.001 means 0 of 200 permutations exceeded the observed value.</a:t>
+              <a:t>p &lt; 0.005 means 0 of 200 permutations exceeded the observed value.</a:t>
             </a:r>
           </a:p>
         </p:txBody>
@@ -7771,7 +7771,7 @@
                 </a:solidFill>
                 <a:latin typeface="Segoe UI"/>
               </a:rPr>
-              <a:t>Do you have institutional access to the ESMUC multitrack dataset? ChoralSynth is openly licensed on Zenodo and we will download it ourselves; ESMUC is the only dataset where we need support.</a:t>
+              <a:t>Do you have institutional access to the ESMUC multitrack dataset? ChoralSynth is freely available on Zenodo for research and we will download it ourselves; ESMUC is the only dataset where we need support.</a:t>
             </a:r>
           </a:p>
         </p:txBody>

--- a/output/jun11_status_meeting_iv.pptx
+++ b/output/jun11_status_meeting_iv.pptx
@@ -5,16 +5,16 @@
     <p:sldMasterId id="2147483648" r:id="rId1"/>
   </p:sldMasterIdLst>
   <p:sldIdLst>
-    <p:sldId id="256" r:id="rId7"/>
-    <p:sldId id="257" r:id="rId8"/>
-    <p:sldId id="258" r:id="rId9"/>
-    <p:sldId id="259" r:id="rId10"/>
-    <p:sldId id="260" r:id="rId11"/>
-    <p:sldId id="261" r:id="rId12"/>
-    <p:sldId id="262" r:id="rId13"/>
-    <p:sldId id="263" r:id="rId14"/>
+    <p:sldId id="256" r:id="rId2"/>
+    <p:sldId id="257" r:id="rId3"/>
+    <p:sldId id="258" r:id="rId4"/>
+    <p:sldId id="259" r:id="rId5"/>
+    <p:sldId id="260" r:id="rId6"/>
+    <p:sldId id="261" r:id="rId7"/>
+    <p:sldId id="262" r:id="rId8"/>
+    <p:sldId id="263" r:id="rId9"/>
   </p:sldIdLst>
-  <p:sldSz cx="12191695" cy="6858000" type="screen4x3"/>
+  <p:sldSz cx="12192000" cy="6858000"/>
   <p:notesSz cx="6858000" cy="9144000"/>
   <p:defaultTextStyle>
     <a:defPPr>
@@ -111,6 +111,22 @@
       </a:defRPr>
     </a:lvl9pPr>
   </p:defaultTextStyle>
+  <p:extLst>
+    <p:ext uri="{EFAFB233-063F-42B5-8137-9DF3F51BA10A}">
+      <p15:sldGuideLst xmlns:p15="http://schemas.microsoft.com/office/powerpoint/2012/main">
+        <p15:guide id="1" orient="horz" pos="2160">
+          <p15:clr>
+            <a:srgbClr val="A4A3A4"/>
+          </p15:clr>
+        </p15:guide>
+        <p15:guide id="2" pos="2880">
+          <p15:clr>
+            <a:srgbClr val="A4A3A4"/>
+          </p15:clr>
+        </p15:guide>
+      </p15:sldGuideLst>
+    </p:ext>
+  </p:extLst>
 </p:presentation>
 </file>
 
@@ -152,10 +168,9 @@
           <a:lstStyle/>
           <a:p>
             <a:r>
-              <a:rPr lang="en-US" smtClean="0"/>
+              <a:rPr lang="en-US"/>
               <a:t>Click to edit Master title style</a:t>
             </a:r>
-            <a:endParaRPr lang="en-US"/>
           </a:p>
         </p:txBody>
       </p:sp>
@@ -271,10 +286,9 @@
           </a:lstStyle>
           <a:p>
             <a:r>
-              <a:rPr lang="en-US" smtClean="0"/>
+              <a:rPr lang="en-US"/>
               <a:t>Click to edit Master subtitle style</a:t>
             </a:r>
-            <a:endParaRPr lang="en-US"/>
           </a:p>
         </p:txBody>
       </p:sp>
@@ -295,7 +309,7 @@
           <a:p>
             <a:fld id="{5BCAD085-E8A6-8845-BD4E-CB4CCA059FC4}" type="datetimeFigureOut">
               <a:rPr lang="en-US" smtClean="0"/>
-              <a:t>1/27/13</a:t>
+              <a:t>6/11/2026</a:t>
             </a:fld>
             <a:endParaRPr lang="en-US"/>
           </a:p>
@@ -389,10 +403,9 @@
           <a:lstStyle/>
           <a:p>
             <a:r>
-              <a:rPr lang="en-US" smtClean="0"/>
+              <a:rPr lang="en-US"/>
               <a:t>Click to edit Master title style</a:t>
             </a:r>
-            <a:endParaRPr lang="en-US"/>
           </a:p>
         </p:txBody>
       </p:sp>
@@ -413,38 +426,37 @@
           <a:p>
             <a:pPr lvl="0"/>
             <a:r>
-              <a:rPr lang="en-US" smtClean="0"/>
+              <a:rPr lang="en-US"/>
               <a:t>Click to edit Master text styles</a:t>
             </a:r>
           </a:p>
           <a:p>
             <a:pPr lvl="1"/>
             <a:r>
-              <a:rPr lang="en-US" smtClean="0"/>
+              <a:rPr lang="en-US"/>
               <a:t>Second level</a:t>
             </a:r>
           </a:p>
           <a:p>
             <a:pPr lvl="2"/>
             <a:r>
-              <a:rPr lang="en-US" smtClean="0"/>
+              <a:rPr lang="en-US"/>
               <a:t>Third level</a:t>
             </a:r>
           </a:p>
           <a:p>
             <a:pPr lvl="3"/>
             <a:r>
-              <a:rPr lang="en-US" smtClean="0"/>
+              <a:rPr lang="en-US"/>
               <a:t>Fourth level</a:t>
             </a:r>
           </a:p>
           <a:p>
             <a:pPr lvl="4"/>
             <a:r>
-              <a:rPr lang="en-US" smtClean="0"/>
+              <a:rPr lang="en-US"/>
               <a:t>Fifth level</a:t>
             </a:r>
-            <a:endParaRPr lang="en-US"/>
           </a:p>
         </p:txBody>
       </p:sp>
@@ -465,7 +477,7 @@
           <a:p>
             <a:fld id="{5BCAD085-E8A6-8845-BD4E-CB4CCA059FC4}" type="datetimeFigureOut">
               <a:rPr lang="en-US" smtClean="0"/>
-              <a:t>1/27/13</a:t>
+              <a:t>6/11/2026</a:t>
             </a:fld>
             <a:endParaRPr lang="en-US"/>
           </a:p>
@@ -564,10 +576,9 @@
           <a:lstStyle/>
           <a:p>
             <a:r>
-              <a:rPr lang="en-US" smtClean="0"/>
+              <a:rPr lang="en-US"/>
               <a:t>Click to edit Master title style</a:t>
             </a:r>
-            <a:endParaRPr lang="en-US"/>
           </a:p>
         </p:txBody>
       </p:sp>
@@ -593,38 +604,37 @@
           <a:p>
             <a:pPr lvl="0"/>
             <a:r>
-              <a:rPr lang="en-US" smtClean="0"/>
+              <a:rPr lang="en-US"/>
               <a:t>Click to edit Master text styles</a:t>
             </a:r>
           </a:p>
           <a:p>
             <a:pPr lvl="1"/>
             <a:r>
-              <a:rPr lang="en-US" smtClean="0"/>
+              <a:rPr lang="en-US"/>
               <a:t>Second level</a:t>
             </a:r>
           </a:p>
           <a:p>
             <a:pPr lvl="2"/>
             <a:r>
-              <a:rPr lang="en-US" smtClean="0"/>
+              <a:rPr lang="en-US"/>
               <a:t>Third level</a:t>
             </a:r>
           </a:p>
           <a:p>
             <a:pPr lvl="3"/>
             <a:r>
-              <a:rPr lang="en-US" smtClean="0"/>
+              <a:rPr lang="en-US"/>
               <a:t>Fourth level</a:t>
             </a:r>
           </a:p>
           <a:p>
             <a:pPr lvl="4"/>
             <a:r>
-              <a:rPr lang="en-US" smtClean="0"/>
+              <a:rPr lang="en-US"/>
               <a:t>Fifth level</a:t>
             </a:r>
-            <a:endParaRPr lang="en-US"/>
           </a:p>
         </p:txBody>
       </p:sp>
@@ -645,7 +655,7 @@
           <a:p>
             <a:fld id="{5BCAD085-E8A6-8845-BD4E-CB4CCA059FC4}" type="datetimeFigureOut">
               <a:rPr lang="en-US" smtClean="0"/>
-              <a:t>1/27/13</a:t>
+              <a:t>6/11/2026</a:t>
             </a:fld>
             <a:endParaRPr lang="en-US"/>
           </a:p>
@@ -739,10 +749,9 @@
           <a:lstStyle/>
           <a:p>
             <a:r>
-              <a:rPr lang="en-US" smtClean="0"/>
+              <a:rPr lang="en-US"/>
               <a:t>Click to edit Master title style</a:t>
             </a:r>
-            <a:endParaRPr lang="en-US"/>
           </a:p>
         </p:txBody>
       </p:sp>
@@ -763,38 +772,37 @@
           <a:p>
             <a:pPr lvl="0"/>
             <a:r>
-              <a:rPr lang="en-US" smtClean="0"/>
+              <a:rPr lang="en-US"/>
               <a:t>Click to edit Master text styles</a:t>
             </a:r>
           </a:p>
           <a:p>
             <a:pPr lvl="1"/>
             <a:r>
-              <a:rPr lang="en-US" smtClean="0"/>
+              <a:rPr lang="en-US"/>
               <a:t>Second level</a:t>
             </a:r>
           </a:p>
           <a:p>
             <a:pPr lvl="2"/>
             <a:r>
-              <a:rPr lang="en-US" smtClean="0"/>
+              <a:rPr lang="en-US"/>
               <a:t>Third level</a:t>
             </a:r>
           </a:p>
           <a:p>
             <a:pPr lvl="3"/>
             <a:r>
-              <a:rPr lang="en-US" smtClean="0"/>
+              <a:rPr lang="en-US"/>
               <a:t>Fourth level</a:t>
             </a:r>
           </a:p>
           <a:p>
             <a:pPr lvl="4"/>
             <a:r>
-              <a:rPr lang="en-US" smtClean="0"/>
+              <a:rPr lang="en-US"/>
               <a:t>Fifth level</a:t>
             </a:r>
-            <a:endParaRPr lang="en-US"/>
           </a:p>
         </p:txBody>
       </p:sp>
@@ -815,7 +823,7 @@
           <a:p>
             <a:fld id="{5BCAD085-E8A6-8845-BD4E-CB4CCA059FC4}" type="datetimeFigureOut">
               <a:rPr lang="en-US" smtClean="0"/>
-              <a:t>1/27/13</a:t>
+              <a:t>6/11/2026</a:t>
             </a:fld>
             <a:endParaRPr lang="en-US"/>
           </a:p>
@@ -918,10 +926,9 @@
           </a:lstStyle>
           <a:p>
             <a:r>
-              <a:rPr lang="en-US" smtClean="0"/>
+              <a:rPr lang="en-US"/>
               <a:t>Click to edit Master title style</a:t>
             </a:r>
-            <a:endParaRPr lang="en-US"/>
           </a:p>
         </p:txBody>
       </p:sp>
@@ -1038,7 +1045,7 @@
           <a:p>
             <a:pPr lvl="0"/>
             <a:r>
-              <a:rPr lang="en-US" smtClean="0"/>
+              <a:rPr lang="en-US"/>
               <a:t>Click to edit Master text styles</a:t>
             </a:r>
           </a:p>
@@ -1061,7 +1068,7 @@
           <a:p>
             <a:fld id="{5BCAD085-E8A6-8845-BD4E-CB4CCA059FC4}" type="datetimeFigureOut">
               <a:rPr lang="en-US" smtClean="0"/>
-              <a:t>1/27/13</a:t>
+              <a:t>6/11/2026</a:t>
             </a:fld>
             <a:endParaRPr lang="en-US"/>
           </a:p>
@@ -1155,10 +1162,9 @@
           <a:lstStyle/>
           <a:p>
             <a:r>
-              <a:rPr lang="en-US" smtClean="0"/>
+              <a:rPr lang="en-US"/>
               <a:t>Click to edit Master title style</a:t>
             </a:r>
-            <a:endParaRPr lang="en-US"/>
           </a:p>
         </p:txBody>
       </p:sp>
@@ -1212,38 +1218,37 @@
           <a:p>
             <a:pPr lvl="0"/>
             <a:r>
-              <a:rPr lang="en-US" smtClean="0"/>
+              <a:rPr lang="en-US"/>
               <a:t>Click to edit Master text styles</a:t>
             </a:r>
           </a:p>
           <a:p>
             <a:pPr lvl="1"/>
             <a:r>
-              <a:rPr lang="en-US" smtClean="0"/>
+              <a:rPr lang="en-US"/>
               <a:t>Second level</a:t>
             </a:r>
           </a:p>
           <a:p>
             <a:pPr lvl="2"/>
             <a:r>
-              <a:rPr lang="en-US" smtClean="0"/>
+              <a:rPr lang="en-US"/>
               <a:t>Third level</a:t>
             </a:r>
           </a:p>
           <a:p>
             <a:pPr lvl="3"/>
             <a:r>
-              <a:rPr lang="en-US" smtClean="0"/>
+              <a:rPr lang="en-US"/>
               <a:t>Fourth level</a:t>
             </a:r>
           </a:p>
           <a:p>
             <a:pPr lvl="4"/>
             <a:r>
-              <a:rPr lang="en-US" smtClean="0"/>
+              <a:rPr lang="en-US"/>
               <a:t>Fifth level</a:t>
             </a:r>
-            <a:endParaRPr lang="en-US"/>
           </a:p>
         </p:txBody>
       </p:sp>
@@ -1297,38 +1302,37 @@
           <a:p>
             <a:pPr lvl="0"/>
             <a:r>
-              <a:rPr lang="en-US" smtClean="0"/>
+              <a:rPr lang="en-US"/>
               <a:t>Click to edit Master text styles</a:t>
             </a:r>
           </a:p>
           <a:p>
             <a:pPr lvl="1"/>
             <a:r>
-              <a:rPr lang="en-US" smtClean="0"/>
+              <a:rPr lang="en-US"/>
               <a:t>Second level</a:t>
             </a:r>
           </a:p>
           <a:p>
             <a:pPr lvl="2"/>
             <a:r>
-              <a:rPr lang="en-US" smtClean="0"/>
+              <a:rPr lang="en-US"/>
               <a:t>Third level</a:t>
             </a:r>
           </a:p>
           <a:p>
             <a:pPr lvl="3"/>
             <a:r>
-              <a:rPr lang="en-US" smtClean="0"/>
+              <a:rPr lang="en-US"/>
               <a:t>Fourth level</a:t>
             </a:r>
           </a:p>
           <a:p>
             <a:pPr lvl="4"/>
             <a:r>
-              <a:rPr lang="en-US" smtClean="0"/>
+              <a:rPr lang="en-US"/>
               <a:t>Fifth level</a:t>
             </a:r>
-            <a:endParaRPr lang="en-US"/>
           </a:p>
         </p:txBody>
       </p:sp>
@@ -1349,7 +1353,7 @@
           <a:p>
             <a:fld id="{5BCAD085-E8A6-8845-BD4E-CB4CCA059FC4}" type="datetimeFigureOut">
               <a:rPr lang="en-US" smtClean="0"/>
-              <a:t>1/27/13</a:t>
+              <a:t>6/11/2026</a:t>
             </a:fld>
             <a:endParaRPr lang="en-US"/>
           </a:p>
@@ -1447,10 +1451,9 @@
           </a:lstStyle>
           <a:p>
             <a:r>
-              <a:rPr lang="en-US" smtClean="0"/>
+              <a:rPr lang="en-US"/>
               <a:t>Click to edit Master title style</a:t>
             </a:r>
-            <a:endParaRPr lang="en-US"/>
           </a:p>
         </p:txBody>
       </p:sp>
@@ -1513,7 +1516,7 @@
           <a:p>
             <a:pPr lvl="0"/>
             <a:r>
-              <a:rPr lang="en-US" smtClean="0"/>
+              <a:rPr lang="en-US"/>
               <a:t>Click to edit Master text styles</a:t>
             </a:r>
           </a:p>
@@ -1569,38 +1572,37 @@
           <a:p>
             <a:pPr lvl="0"/>
             <a:r>
-              <a:rPr lang="en-US" smtClean="0"/>
+              <a:rPr lang="en-US"/>
               <a:t>Click to edit Master text styles</a:t>
             </a:r>
           </a:p>
           <a:p>
             <a:pPr lvl="1"/>
             <a:r>
-              <a:rPr lang="en-US" smtClean="0"/>
+              <a:rPr lang="en-US"/>
               <a:t>Second level</a:t>
             </a:r>
           </a:p>
           <a:p>
             <a:pPr lvl="2"/>
             <a:r>
-              <a:rPr lang="en-US" smtClean="0"/>
+              <a:rPr lang="en-US"/>
               <a:t>Third level</a:t>
             </a:r>
           </a:p>
           <a:p>
             <a:pPr lvl="3"/>
             <a:r>
-              <a:rPr lang="en-US" smtClean="0"/>
+              <a:rPr lang="en-US"/>
               <a:t>Fourth level</a:t>
             </a:r>
           </a:p>
           <a:p>
             <a:pPr lvl="4"/>
             <a:r>
-              <a:rPr lang="en-US" smtClean="0"/>
+              <a:rPr lang="en-US"/>
               <a:t>Fifth level</a:t>
             </a:r>
-            <a:endParaRPr lang="en-US"/>
           </a:p>
         </p:txBody>
       </p:sp>
@@ -1663,7 +1665,7 @@
           <a:p>
             <a:pPr lvl="0"/>
             <a:r>
-              <a:rPr lang="en-US" smtClean="0"/>
+              <a:rPr lang="en-US"/>
               <a:t>Click to edit Master text styles</a:t>
             </a:r>
           </a:p>
@@ -1719,38 +1721,37 @@
           <a:p>
             <a:pPr lvl="0"/>
             <a:r>
-              <a:rPr lang="en-US" smtClean="0"/>
+              <a:rPr lang="en-US"/>
               <a:t>Click to edit Master text styles</a:t>
             </a:r>
           </a:p>
           <a:p>
             <a:pPr lvl="1"/>
             <a:r>
-              <a:rPr lang="en-US" smtClean="0"/>
+              <a:rPr lang="en-US"/>
               <a:t>Second level</a:t>
             </a:r>
           </a:p>
           <a:p>
             <a:pPr lvl="2"/>
             <a:r>
-              <a:rPr lang="en-US" smtClean="0"/>
+              <a:rPr lang="en-US"/>
               <a:t>Third level</a:t>
             </a:r>
           </a:p>
           <a:p>
             <a:pPr lvl="3"/>
             <a:r>
-              <a:rPr lang="en-US" smtClean="0"/>
+              <a:rPr lang="en-US"/>
               <a:t>Fourth level</a:t>
             </a:r>
           </a:p>
           <a:p>
             <a:pPr lvl="4"/>
             <a:r>
-              <a:rPr lang="en-US" smtClean="0"/>
+              <a:rPr lang="en-US"/>
               <a:t>Fifth level</a:t>
             </a:r>
-            <a:endParaRPr lang="en-US"/>
           </a:p>
         </p:txBody>
       </p:sp>
@@ -1771,7 +1772,7 @@
           <a:p>
             <a:fld id="{5BCAD085-E8A6-8845-BD4E-CB4CCA059FC4}" type="datetimeFigureOut">
               <a:rPr lang="en-US" smtClean="0"/>
-              <a:t>1/27/13</a:t>
+              <a:t>6/11/2026</a:t>
             </a:fld>
             <a:endParaRPr lang="en-US"/>
           </a:p>
@@ -1865,10 +1866,9 @@
           <a:lstStyle/>
           <a:p>
             <a:r>
-              <a:rPr lang="en-US" smtClean="0"/>
+              <a:rPr lang="en-US"/>
               <a:t>Click to edit Master title style</a:t>
             </a:r>
-            <a:endParaRPr lang="en-US"/>
           </a:p>
         </p:txBody>
       </p:sp>
@@ -1889,7 +1889,7 @@
           <a:p>
             <a:fld id="{5BCAD085-E8A6-8845-BD4E-CB4CCA059FC4}" type="datetimeFigureOut">
               <a:rPr lang="en-US" smtClean="0"/>
-              <a:t>1/27/13</a:t>
+              <a:t>6/11/2026</a:t>
             </a:fld>
             <a:endParaRPr lang="en-US"/>
           </a:p>
@@ -1984,7 +1984,7 @@
           <a:p>
             <a:fld id="{5BCAD085-E8A6-8845-BD4E-CB4CCA059FC4}" type="datetimeFigureOut">
               <a:rPr lang="en-US" smtClean="0"/>
-              <a:t>1/27/13</a:t>
+              <a:t>6/11/2026</a:t>
             </a:fld>
             <a:endParaRPr lang="en-US"/>
           </a:p>
@@ -2087,10 +2087,9 @@
           </a:lstStyle>
           <a:p>
             <a:r>
-              <a:rPr lang="en-US" smtClean="0"/>
+              <a:rPr lang="en-US"/>
               <a:t>Click to edit Master title style</a:t>
             </a:r>
-            <a:endParaRPr lang="en-US"/>
           </a:p>
         </p:txBody>
       </p:sp>
@@ -2144,38 +2143,37 @@
           <a:p>
             <a:pPr lvl="0"/>
             <a:r>
-              <a:rPr lang="en-US" smtClean="0"/>
+              <a:rPr lang="en-US"/>
               <a:t>Click to edit Master text styles</a:t>
             </a:r>
           </a:p>
           <a:p>
             <a:pPr lvl="1"/>
             <a:r>
-              <a:rPr lang="en-US" smtClean="0"/>
+              <a:rPr lang="en-US"/>
               <a:t>Second level</a:t>
             </a:r>
           </a:p>
           <a:p>
             <a:pPr lvl="2"/>
             <a:r>
-              <a:rPr lang="en-US" smtClean="0"/>
+              <a:rPr lang="en-US"/>
               <a:t>Third level</a:t>
             </a:r>
           </a:p>
           <a:p>
             <a:pPr lvl="3"/>
             <a:r>
-              <a:rPr lang="en-US" smtClean="0"/>
+              <a:rPr lang="en-US"/>
               <a:t>Fourth level</a:t>
             </a:r>
           </a:p>
           <a:p>
             <a:pPr lvl="4"/>
             <a:r>
-              <a:rPr lang="en-US" smtClean="0"/>
+              <a:rPr lang="en-US"/>
               <a:t>Fifth level</a:t>
             </a:r>
-            <a:endParaRPr lang="en-US"/>
           </a:p>
         </p:txBody>
       </p:sp>
@@ -2238,7 +2236,7 @@
           <a:p>
             <a:pPr lvl="0"/>
             <a:r>
-              <a:rPr lang="en-US" smtClean="0"/>
+              <a:rPr lang="en-US"/>
               <a:t>Click to edit Master text styles</a:t>
             </a:r>
           </a:p>
@@ -2261,7 +2259,7 @@
           <a:p>
             <a:fld id="{5BCAD085-E8A6-8845-BD4E-CB4CCA059FC4}" type="datetimeFigureOut">
               <a:rPr lang="en-US" smtClean="0"/>
-              <a:t>1/27/13</a:t>
+              <a:t>6/11/2026</a:t>
             </a:fld>
             <a:endParaRPr lang="en-US"/>
           </a:p>
@@ -2364,10 +2362,9 @@
           </a:lstStyle>
           <a:p>
             <a:r>
-              <a:rPr lang="en-US" smtClean="0"/>
+              <a:rPr lang="en-US"/>
               <a:t>Click to edit Master title style</a:t>
             </a:r>
-            <a:endParaRPr lang="en-US"/>
           </a:p>
         </p:txBody>
       </p:sp>
@@ -2491,7 +2488,7 @@
           <a:p>
             <a:pPr lvl="0"/>
             <a:r>
-              <a:rPr lang="en-US" smtClean="0"/>
+              <a:rPr lang="en-US"/>
               <a:t>Click to edit Master text styles</a:t>
             </a:r>
           </a:p>
@@ -2514,7 +2511,7 @@
           <a:p>
             <a:fld id="{5BCAD085-E8A6-8845-BD4E-CB4CCA059FC4}" type="datetimeFigureOut">
               <a:rPr lang="en-US" smtClean="0"/>
-              <a:t>1/27/13</a:t>
+              <a:t>6/11/2026</a:t>
             </a:fld>
             <a:endParaRPr lang="en-US"/>
           </a:p>
@@ -2623,10 +2620,9 @@
           <a:lstStyle/>
           <a:p>
             <a:r>
-              <a:rPr lang="en-US" smtClean="0"/>
+              <a:rPr lang="en-US"/>
               <a:t>Click to edit Master title style</a:t>
             </a:r>
-            <a:endParaRPr lang="en-US"/>
           </a:p>
         </p:txBody>
       </p:sp>
@@ -2657,38 +2653,37 @@
           <a:p>
             <a:pPr lvl="0"/>
             <a:r>
-              <a:rPr lang="en-US" smtClean="0"/>
+              <a:rPr lang="en-US"/>
               <a:t>Click to edit Master text styles</a:t>
             </a:r>
           </a:p>
           <a:p>
             <a:pPr lvl="1"/>
             <a:r>
-              <a:rPr lang="en-US" smtClean="0"/>
+              <a:rPr lang="en-US"/>
               <a:t>Second level</a:t>
             </a:r>
           </a:p>
           <a:p>
             <a:pPr lvl="2"/>
             <a:r>
-              <a:rPr lang="en-US" smtClean="0"/>
+              <a:rPr lang="en-US"/>
               <a:t>Third level</a:t>
             </a:r>
           </a:p>
           <a:p>
             <a:pPr lvl="3"/>
             <a:r>
-              <a:rPr lang="en-US" smtClean="0"/>
+              <a:rPr lang="en-US"/>
               <a:t>Fourth level</a:t>
             </a:r>
           </a:p>
           <a:p>
             <a:pPr lvl="4"/>
             <a:r>
-              <a:rPr lang="en-US" smtClean="0"/>
+              <a:rPr lang="en-US"/>
               <a:t>Fifth level</a:t>
             </a:r>
-            <a:endParaRPr lang="en-US"/>
           </a:p>
         </p:txBody>
       </p:sp>
@@ -2727,7 +2722,7 @@
           <a:p>
             <a:fld id="{5BCAD085-E8A6-8845-BD4E-CB4CCA059FC4}" type="datetimeFigureOut">
               <a:rPr lang="en-US" smtClean="0"/>
-              <a:t>1/27/13</a:t>
+              <a:t>6/11/2026</a:t>
             </a:fld>
             <a:endParaRPr lang="en-US"/>
           </a:p>
@@ -3086,7 +3081,7 @@
 </file>
 
 <file path=ppt/slides/slide1.xml><?xml version="1.0" encoding="utf-8"?>
-<p:sld xmlns:a="http://schemas.openxmlformats.org/drawingml/2006/main" xmlns:p="http://schemas.openxmlformats.org/presentationml/2006/main" xmlns:r="http://schemas.openxmlformats.org/officeDocument/2006/relationships">
+<p:sld xmlns:a="http://schemas.openxmlformats.org/drawingml/2006/main" xmlns:r="http://schemas.openxmlformats.org/officeDocument/2006/relationships" xmlns:p="http://schemas.openxmlformats.org/presentationml/2006/main">
   <p:cSld>
     <p:bg>
       <p:bgPr>
@@ -3102,7 +3097,14 @@
         <p:cNvGrpSpPr/>
         <p:nvPr/>
       </p:nvGrpSpPr>
-      <p:grpSpPr/>
+      <p:grpSpPr>
+        <a:xfrm>
+          <a:off x="0" y="0"/>
+          <a:ext cx="0" cy="0"/>
+          <a:chOff x="0" y="0"/>
+          <a:chExt cx="0" cy="0"/>
+        </a:xfrm>
+      </p:grpSpPr>
       <p:sp>
         <p:nvSpPr>
           <p:cNvPr id="2" name="TextBox 1"/>
@@ -3120,7 +3122,7 @@
           <a:noFill/>
         </p:spPr>
         <p:txBody>
-          <a:bodyPr wrap="square" anchor="t" lIns="27432" rIns="27432" tIns="18288" bIns="18288">
+          <a:bodyPr wrap="square" lIns="27432" tIns="18288" rIns="27432" bIns="18288" anchor="t">
             <a:spAutoFit/>
           </a:bodyPr>
           <a:lstStyle/>
@@ -3159,7 +3161,7 @@
           <a:noFill/>
         </p:spPr>
         <p:txBody>
-          <a:bodyPr wrap="square" anchor="t" lIns="27432" rIns="27432" tIns="18288" bIns="18288">
+          <a:bodyPr wrap="square" lIns="27432" tIns="18288" rIns="27432" bIns="18288" anchor="t">
             <a:spAutoFit/>
           </a:bodyPr>
           <a:lstStyle/>
@@ -3233,7 +3235,7 @@
           <a:noFill/>
         </p:spPr>
         <p:txBody>
-          <a:bodyPr wrap="square" anchor="t" lIns="27432" rIns="27432" tIns="18288" bIns="18288">
+          <a:bodyPr wrap="square" lIns="27432" tIns="18288" rIns="27432" bIns="18288" anchor="t">
             <a:spAutoFit/>
           </a:bodyPr>
           <a:lstStyle/>
@@ -3272,7 +3274,7 @@
           <a:noFill/>
         </p:spPr>
         <p:txBody>
-          <a:bodyPr wrap="square" anchor="t" lIns="27432" rIns="27432" tIns="18288" bIns="18288">
+          <a:bodyPr wrap="square" lIns="27432" tIns="18288" rIns="27432" bIns="18288" anchor="t">
             <a:spAutoFit/>
           </a:bodyPr>
           <a:lstStyle/>
@@ -3311,7 +3313,7 @@
           <a:noFill/>
         </p:spPr>
         <p:txBody>
-          <a:bodyPr wrap="square" anchor="t" lIns="27432" rIns="27432" tIns="18288" bIns="18288">
+          <a:bodyPr wrap="square" lIns="27432" tIns="18288" rIns="27432" bIns="18288" anchor="t">
             <a:spAutoFit/>
           </a:bodyPr>
           <a:lstStyle/>
@@ -3350,7 +3352,7 @@
           <a:noFill/>
         </p:spPr>
         <p:txBody>
-          <a:bodyPr wrap="square" anchor="t" lIns="27432" rIns="27432" tIns="18288" bIns="18288">
+          <a:bodyPr wrap="square" lIns="27432" tIns="18288" rIns="27432" bIns="18288" anchor="t">
             <a:spAutoFit/>
           </a:bodyPr>
           <a:lstStyle/>
@@ -3381,7 +3383,7 @@
 </file>
 
 <file path=ppt/slides/slide2.xml><?xml version="1.0" encoding="utf-8"?>
-<p:sld xmlns:a="http://schemas.openxmlformats.org/drawingml/2006/main" xmlns:p="http://schemas.openxmlformats.org/presentationml/2006/main" xmlns:r="http://schemas.openxmlformats.org/officeDocument/2006/relationships">
+<p:sld xmlns:a="http://schemas.openxmlformats.org/drawingml/2006/main" xmlns:r="http://schemas.openxmlformats.org/officeDocument/2006/relationships" xmlns:p="http://schemas.openxmlformats.org/presentationml/2006/main">
   <p:cSld>
     <p:bg>
       <p:bgPr>
@@ -3397,7 +3399,14 @@
         <p:cNvGrpSpPr/>
         <p:nvPr/>
       </p:nvGrpSpPr>
-      <p:grpSpPr/>
+      <p:grpSpPr>
+        <a:xfrm>
+          <a:off x="0" y="0"/>
+          <a:ext cx="0" cy="0"/>
+          <a:chOff x="0" y="0"/>
+          <a:chExt cx="0" cy="0"/>
+        </a:xfrm>
+      </p:grpSpPr>
       <p:sp>
         <p:nvSpPr>
           <p:cNvPr id="2" name="TextBox 1"/>
@@ -3415,7 +3424,7 @@
           <a:noFill/>
         </p:spPr>
         <p:txBody>
-          <a:bodyPr wrap="square" anchor="t" lIns="27432" rIns="27432" tIns="18288" bIns="18288">
+          <a:bodyPr wrap="square" lIns="27432" tIns="18288" rIns="27432" bIns="18288" anchor="t">
             <a:spAutoFit/>
           </a:bodyPr>
           <a:lstStyle/>
@@ -3454,7 +3463,7 @@
           <a:noFill/>
         </p:spPr>
         <p:txBody>
-          <a:bodyPr wrap="square" anchor="t" lIns="27432" rIns="27432" tIns="18288" bIns="18288">
+          <a:bodyPr wrap="square" lIns="27432" tIns="18288" rIns="27432" bIns="18288" anchor="t">
             <a:spAutoFit/>
           </a:bodyPr>
           <a:lstStyle/>
@@ -3493,7 +3502,7 @@
           <a:noFill/>
         </p:spPr>
         <p:txBody>
-          <a:bodyPr wrap="square" anchor="t" lIns="27432" rIns="27432" tIns="18288" bIns="18288">
+          <a:bodyPr wrap="square" lIns="27432" tIns="18288" rIns="27432" bIns="18288" anchor="t">
             <a:spAutoFit/>
           </a:bodyPr>
           <a:lstStyle/>
@@ -3523,7 +3532,7 @@
         </p:nvSpPr>
         <p:spPr>
           <a:xfrm>
-            <a:off x="502920" y="6510528"/>
+            <a:off x="502920" y="6629400"/>
             <a:ext cx="4572000" cy="274320"/>
           </a:xfrm>
           <a:prstGeom prst="rect">
@@ -3532,7 +3541,7 @@
           <a:noFill/>
         </p:spPr>
         <p:txBody>
-          <a:bodyPr wrap="square" anchor="t" lIns="27432" rIns="27432" tIns="18288" bIns="18288">
+          <a:bodyPr wrap="square" lIns="27432" tIns="18288" rIns="27432" bIns="18288" anchor="t">
             <a:spAutoFit/>
           </a:bodyPr>
           <a:lstStyle/>
@@ -3543,7 +3552,7 @@
               </a:lnSpc>
             </a:pPr>
             <a:r>
-              <a:rPr sz="1000" b="0">
+              <a:rPr sz="1000" b="0" dirty="0">
                 <a:solidFill>
                   <a:srgbClr val="6E6A60"/>
                 </a:solidFill>
@@ -3597,19 +3606,34 @@
           <a:p>
             <a:pPr algn="ctr" latinLnBrk="0"/>
             <a:r>
-              <a:rPr sz="1900" b="1">
+              <a:rPr sz="1900" b="1" dirty="0">
                 <a:solidFill>
                   <a:srgbClr val="FDFBF5"/>
                 </a:solidFill>
                 <a:latin typeface="Segoe UI Semibold"/>
               </a:rPr>
-              <a:t>E(t)  =  mean(  A(t) audio,  V(t) visual,  N(t) network  )</a:t>
-            </a:r>
+              <a:t>E(t) = mean(A(t) audio, V(t) visual, N(t) network)</a:t>
+            </a:r>
+            <a:endParaRPr lang="en-GB" sz="1900" b="1" dirty="0">
+              <a:solidFill>
+                <a:srgbClr val="FDFBF5"/>
+              </a:solidFill>
+              <a:latin typeface="Segoe UI Semibold"/>
+            </a:endParaRPr>
           </a:p>
           <a:p>
             <a:pPr algn="ctr" latinLnBrk="0"/>
-            <a:r>
-              <a:rPr sz="1200" b="0">
+            <a:endParaRPr sz="1900" b="1" dirty="0">
+              <a:solidFill>
+                <a:srgbClr val="FDFBF5"/>
+              </a:solidFill>
+              <a:latin typeface="Segoe UI Semibold"/>
+            </a:endParaRPr>
+          </a:p>
+          <a:p>
+            <a:pPr algn="ctr" latinLnBrk="0"/>
+            <a:r>
+              <a:rPr sz="1200" b="0" dirty="0">
                 <a:solidFill>
                   <a:srgbClr val="CBD9DD"/>
                 </a:solidFill>
@@ -3660,7 +3684,7 @@
           </a:fontRef>
         </p:style>
         <p:txBody>
-          <a:bodyPr rtlCol="0" anchor="t" wrap="square" lIns="201168" rIns="201168" tIns="146304"/>
+          <a:bodyPr wrap="square" lIns="201168" tIns="146304" rIns="201168" rtlCol="0" anchor="t"/>
           <a:lstStyle/>
           <a:p>
             <a:pPr algn="l" latinLnBrk="0">
@@ -3736,7 +3760,7 @@
           </a:fontRef>
         </p:style>
         <p:txBody>
-          <a:bodyPr rtlCol="0" anchor="t" wrap="square" lIns="201168" rIns="201168" tIns="146304"/>
+          <a:bodyPr wrap="square" lIns="201168" tIns="146304" rIns="201168" rtlCol="0" anchor="t"/>
           <a:lstStyle/>
           <a:p>
             <a:pPr algn="l" latinLnBrk="0">
@@ -3812,7 +3836,7 @@
           </a:fontRef>
         </p:style>
         <p:txBody>
-          <a:bodyPr rtlCol="0" anchor="t" wrap="square" lIns="201168" rIns="201168" tIns="146304"/>
+          <a:bodyPr wrap="square" lIns="201168" tIns="146304" rIns="201168" rtlCol="0" anchor="t"/>
           <a:lstStyle/>
           <a:p>
             <a:pPr algn="l" latinLnBrk="0">
@@ -3865,7 +3889,7 @@
           <a:noFill/>
         </p:spPr>
         <p:txBody>
-          <a:bodyPr wrap="square" anchor="t" lIns="27432" rIns="27432" tIns="18288" bIns="18288">
+          <a:bodyPr wrap="square" lIns="27432" tIns="18288" rIns="27432" bIns="18288" anchor="t">
             <a:spAutoFit/>
           </a:bodyPr>
           <a:lstStyle/>
@@ -3927,6 +3951,7 @@
           <a:lstStyle/>
           <a:p>
             <a:pPr algn="ctr"/>
+            <a:endParaRPr/>
           </a:p>
         </p:txBody>
       </p:sp>
@@ -3947,7 +3972,7 @@
           <a:noFill/>
         </p:spPr>
         <p:txBody>
-          <a:bodyPr wrap="square" anchor="t" lIns="27432" rIns="27432" tIns="18288" bIns="18288">
+          <a:bodyPr wrap="square" lIns="27432" tIns="18288" rIns="27432" bIns="18288" anchor="t">
             <a:spAutoFit/>
           </a:bodyPr>
           <a:lstStyle/>
@@ -3986,7 +4011,7 @@
           <a:noFill/>
         </p:spPr>
         <p:txBody>
-          <a:bodyPr wrap="square" anchor="t" lIns="27432" rIns="27432" tIns="18288" bIns="18288">
+          <a:bodyPr wrap="square" lIns="27432" tIns="18288" rIns="27432" bIns="18288" anchor="t">
             <a:spAutoFit/>
           </a:bodyPr>
           <a:lstStyle/>
@@ -4048,6 +4073,7 @@
           <a:lstStyle/>
           <a:p>
             <a:pPr algn="ctr"/>
+            <a:endParaRPr/>
           </a:p>
         </p:txBody>
       </p:sp>
@@ -4068,7 +4094,7 @@
           <a:noFill/>
         </p:spPr>
         <p:txBody>
-          <a:bodyPr wrap="square" anchor="t" lIns="27432" rIns="27432" tIns="18288" bIns="18288">
+          <a:bodyPr wrap="square" lIns="27432" tIns="18288" rIns="27432" bIns="18288" anchor="t">
             <a:spAutoFit/>
           </a:bodyPr>
           <a:lstStyle/>
@@ -4107,7 +4133,7 @@
           <a:noFill/>
         </p:spPr>
         <p:txBody>
-          <a:bodyPr wrap="square" anchor="t" lIns="27432" rIns="27432" tIns="18288" bIns="18288">
+          <a:bodyPr wrap="square" lIns="27432" tIns="18288" rIns="27432" bIns="18288" anchor="t">
             <a:spAutoFit/>
           </a:bodyPr>
           <a:lstStyle/>
@@ -4169,6 +4195,7 @@
           <a:lstStyle/>
           <a:p>
             <a:pPr algn="ctr"/>
+            <a:endParaRPr/>
           </a:p>
         </p:txBody>
       </p:sp>
@@ -4189,7 +4216,7 @@
           <a:noFill/>
         </p:spPr>
         <p:txBody>
-          <a:bodyPr wrap="square" anchor="t" lIns="27432" rIns="27432" tIns="18288" bIns="18288">
+          <a:bodyPr wrap="square" lIns="27432" tIns="18288" rIns="27432" bIns="18288" anchor="t">
             <a:spAutoFit/>
           </a:bodyPr>
           <a:lstStyle/>
@@ -4228,7 +4255,7 @@
           <a:noFill/>
         </p:spPr>
         <p:txBody>
-          <a:bodyPr wrap="square" anchor="t" lIns="27432" rIns="27432" tIns="18288" bIns="18288">
+          <a:bodyPr wrap="square" lIns="27432" tIns="18288" rIns="27432" bIns="18288" anchor="t">
             <a:spAutoFit/>
           </a:bodyPr>
           <a:lstStyle/>
@@ -4290,6 +4317,7 @@
           <a:lstStyle/>
           <a:p>
             <a:pPr algn="ctr"/>
+            <a:endParaRPr/>
           </a:p>
         </p:txBody>
       </p:sp>
@@ -4310,7 +4338,7 @@
           <a:noFill/>
         </p:spPr>
         <p:txBody>
-          <a:bodyPr wrap="square" anchor="t" lIns="27432" rIns="27432" tIns="18288" bIns="18288">
+          <a:bodyPr wrap="square" lIns="27432" tIns="18288" rIns="27432" bIns="18288" anchor="t">
             <a:spAutoFit/>
           </a:bodyPr>
           <a:lstStyle/>
@@ -4349,7 +4377,7 @@
           <a:noFill/>
         </p:spPr>
         <p:txBody>
-          <a:bodyPr wrap="square" anchor="t" lIns="27432" rIns="27432" tIns="18288" bIns="18288">
+          <a:bodyPr wrap="square" lIns="27432" tIns="18288" rIns="27432" bIns="18288" anchor="t">
             <a:spAutoFit/>
           </a:bodyPr>
           <a:lstStyle/>
@@ -4411,6 +4439,7 @@
           <a:lstStyle/>
           <a:p>
             <a:pPr algn="ctr"/>
+            <a:endParaRPr/>
           </a:p>
         </p:txBody>
       </p:sp>
@@ -4431,7 +4460,7 @@
           <a:noFill/>
         </p:spPr>
         <p:txBody>
-          <a:bodyPr wrap="square" anchor="t" lIns="27432" rIns="27432" tIns="18288" bIns="18288">
+          <a:bodyPr wrap="square" lIns="27432" tIns="18288" rIns="27432" bIns="18288" anchor="t">
             <a:spAutoFit/>
           </a:bodyPr>
           <a:lstStyle/>
@@ -4470,7 +4499,7 @@
           <a:noFill/>
         </p:spPr>
         <p:txBody>
-          <a:bodyPr wrap="square" anchor="t" lIns="27432" rIns="27432" tIns="18288" bIns="18288">
+          <a:bodyPr wrap="square" lIns="27432" tIns="18288" rIns="27432" bIns="18288" anchor="t">
             <a:spAutoFit/>
           </a:bodyPr>
           <a:lstStyle/>
@@ -4532,6 +4561,7 @@
           <a:lstStyle/>
           <a:p>
             <a:pPr algn="ctr"/>
+            <a:endParaRPr/>
           </a:p>
         </p:txBody>
       </p:sp>
@@ -4552,7 +4582,7 @@
           <a:noFill/>
         </p:spPr>
         <p:txBody>
-          <a:bodyPr wrap="square" anchor="t" lIns="27432" rIns="27432" tIns="18288" bIns="18288">
+          <a:bodyPr wrap="square" lIns="27432" tIns="18288" rIns="27432" bIns="18288" anchor="t">
             <a:spAutoFit/>
           </a:bodyPr>
           <a:lstStyle/>
@@ -4591,7 +4621,7 @@
           <a:noFill/>
         </p:spPr>
         <p:txBody>
-          <a:bodyPr wrap="square" anchor="t" lIns="27432" rIns="27432" tIns="18288" bIns="18288">
+          <a:bodyPr wrap="square" lIns="27432" tIns="18288" rIns="27432" bIns="18288" anchor="t">
             <a:spAutoFit/>
           </a:bodyPr>
           <a:lstStyle/>
@@ -4653,6 +4683,7 @@
           <a:lstStyle/>
           <a:p>
             <a:pPr algn="ctr"/>
+            <a:endParaRPr/>
           </a:p>
         </p:txBody>
       </p:sp>
@@ -4673,7 +4704,7 @@
           <a:noFill/>
         </p:spPr>
         <p:txBody>
-          <a:bodyPr wrap="square" anchor="t" lIns="27432" rIns="27432" tIns="18288" bIns="18288">
+          <a:bodyPr wrap="square" lIns="27432" tIns="18288" rIns="27432" bIns="18288" anchor="t">
             <a:spAutoFit/>
           </a:bodyPr>
           <a:lstStyle/>
@@ -4712,7 +4743,7 @@
           <a:noFill/>
         </p:spPr>
         <p:txBody>
-          <a:bodyPr wrap="square" anchor="t" lIns="27432" rIns="27432" tIns="18288" bIns="18288">
+          <a:bodyPr wrap="square" lIns="27432" tIns="18288" rIns="27432" bIns="18288" anchor="t">
             <a:spAutoFit/>
           </a:bodyPr>
           <a:lstStyle/>
@@ -4772,7 +4803,7 @@
           </a:fontRef>
         </p:style>
         <p:txBody>
-          <a:bodyPr rtlCol="0" anchor="ctr" wrap="square"/>
+          <a:bodyPr wrap="square" rtlCol="0" anchor="ctr"/>
           <a:lstStyle/>
           <a:p>
             <a:pPr algn="ctr" latinLnBrk="0"/>
@@ -4797,7 +4828,7 @@
 </file>
 
 <file path=ppt/slides/slide3.xml><?xml version="1.0" encoding="utf-8"?>
-<p:sld xmlns:a="http://schemas.openxmlformats.org/drawingml/2006/main" xmlns:p="http://schemas.openxmlformats.org/presentationml/2006/main" xmlns:r="http://schemas.openxmlformats.org/officeDocument/2006/relationships">
+<p:sld xmlns:a="http://schemas.openxmlformats.org/drawingml/2006/main" xmlns:r="http://schemas.openxmlformats.org/officeDocument/2006/relationships" xmlns:p="http://schemas.openxmlformats.org/presentationml/2006/main">
   <p:cSld>
     <p:bg>
       <p:bgPr>
@@ -4813,7 +4844,14 @@
         <p:cNvGrpSpPr/>
         <p:nvPr/>
       </p:nvGrpSpPr>
-      <p:grpSpPr/>
+      <p:grpSpPr>
+        <a:xfrm>
+          <a:off x="0" y="0"/>
+          <a:ext cx="0" cy="0"/>
+          <a:chOff x="0" y="0"/>
+          <a:chExt cx="0" cy="0"/>
+        </a:xfrm>
+      </p:grpSpPr>
       <p:sp>
         <p:nvSpPr>
           <p:cNvPr id="2" name="TextBox 1"/>
@@ -4831,7 +4869,7 @@
           <a:noFill/>
         </p:spPr>
         <p:txBody>
-          <a:bodyPr wrap="square" anchor="t" lIns="27432" rIns="27432" tIns="18288" bIns="18288">
+          <a:bodyPr wrap="square" lIns="27432" tIns="18288" rIns="27432" bIns="18288" anchor="t">
             <a:spAutoFit/>
           </a:bodyPr>
           <a:lstStyle/>
@@ -4870,7 +4908,7 @@
           <a:noFill/>
         </p:spPr>
         <p:txBody>
-          <a:bodyPr wrap="square" anchor="t" lIns="27432" rIns="27432" tIns="18288" bIns="18288">
+          <a:bodyPr wrap="square" lIns="27432" tIns="18288" rIns="27432" bIns="18288" anchor="t">
             <a:spAutoFit/>
           </a:bodyPr>
           <a:lstStyle/>
@@ -4909,7 +4947,7 @@
           <a:noFill/>
         </p:spPr>
         <p:txBody>
-          <a:bodyPr wrap="square" anchor="t" lIns="27432" rIns="27432" tIns="18288" bIns="18288">
+          <a:bodyPr wrap="square" lIns="27432" tIns="18288" rIns="27432" bIns="18288" anchor="t">
             <a:spAutoFit/>
           </a:bodyPr>
           <a:lstStyle/>
@@ -4939,7 +4977,7 @@
         </p:nvSpPr>
         <p:spPr>
           <a:xfrm>
-            <a:off x="502920" y="6510528"/>
+            <a:off x="502920" y="6629400"/>
             <a:ext cx="4572000" cy="274320"/>
           </a:xfrm>
           <a:prstGeom prst="rect">
@@ -4948,7 +4986,7 @@
           <a:noFill/>
         </p:spPr>
         <p:txBody>
-          <a:bodyPr wrap="square" anchor="t" lIns="27432" rIns="27432" tIns="18288" bIns="18288">
+          <a:bodyPr wrap="square" lIns="27432" tIns="18288" rIns="27432" bIns="18288" anchor="t">
             <a:spAutoFit/>
           </a:bodyPr>
           <a:lstStyle/>
@@ -4959,7 +4997,7 @@
               </a:lnSpc>
             </a:pPr>
             <a:r>
-              <a:rPr sz="1000" b="0">
+              <a:rPr sz="1000" b="0" dirty="0">
                 <a:solidFill>
                   <a:srgbClr val="6E6A60"/>
                 </a:solidFill>
@@ -5034,7 +5072,7 @@
           </a:fontRef>
         </p:style>
         <p:txBody>
-          <a:bodyPr rtlCol="0" anchor="ctr" wrap="square"/>
+          <a:bodyPr wrap="square" rtlCol="0" anchor="ctr"/>
           <a:lstStyle/>
           <a:p>
             <a:pPr algn="ctr" latinLnBrk="0"/>
@@ -5102,7 +5140,7 @@
           </a:fontRef>
         </p:style>
         <p:txBody>
-          <a:bodyPr rtlCol="0" anchor="ctr" wrap="square"/>
+          <a:bodyPr wrap="square" rtlCol="0" anchor="ctr"/>
           <a:lstStyle/>
           <a:p>
             <a:pPr algn="ctr" latinLnBrk="0"/>
@@ -5170,7 +5208,7 @@
           </a:fontRef>
         </p:style>
         <p:txBody>
-          <a:bodyPr rtlCol="0" anchor="ctr" wrap="square"/>
+          <a:bodyPr wrap="square" rtlCol="0" anchor="ctr"/>
           <a:lstStyle/>
           <a:p>
             <a:pPr algn="ctr" latinLnBrk="0"/>
@@ -5215,7 +5253,7 @@
           <a:noFill/>
         </p:spPr>
         <p:txBody>
-          <a:bodyPr wrap="square" anchor="t" lIns="27432" rIns="27432" tIns="18288" bIns="18288">
+          <a:bodyPr wrap="square" lIns="27432" tIns="18288" rIns="27432" bIns="18288" anchor="t">
             <a:spAutoFit/>
           </a:bodyPr>
           <a:lstStyle/>
@@ -5275,7 +5313,7 @@
           </a:fontRef>
         </p:style>
         <p:txBody>
-          <a:bodyPr rtlCol="0" anchor="ctr" wrap="square"/>
+          <a:bodyPr wrap="square" rtlCol="0" anchor="ctr"/>
           <a:lstStyle/>
           <a:p>
             <a:pPr algn="ctr" latinLnBrk="0"/>
@@ -5300,7 +5338,7 @@
 </file>
 
 <file path=ppt/slides/slide4.xml><?xml version="1.0" encoding="utf-8"?>
-<p:sld xmlns:a="http://schemas.openxmlformats.org/drawingml/2006/main" xmlns:p="http://schemas.openxmlformats.org/presentationml/2006/main" xmlns:r="http://schemas.openxmlformats.org/officeDocument/2006/relationships">
+<p:sld xmlns:a="http://schemas.openxmlformats.org/drawingml/2006/main" xmlns:r="http://schemas.openxmlformats.org/officeDocument/2006/relationships" xmlns:p="http://schemas.openxmlformats.org/presentationml/2006/main">
   <p:cSld>
     <p:bg>
       <p:bgPr>
@@ -5316,7 +5354,14 @@
         <p:cNvGrpSpPr/>
         <p:nvPr/>
       </p:nvGrpSpPr>
-      <p:grpSpPr/>
+      <p:grpSpPr>
+        <a:xfrm>
+          <a:off x="0" y="0"/>
+          <a:ext cx="0" cy="0"/>
+          <a:chOff x="0" y="0"/>
+          <a:chExt cx="0" cy="0"/>
+        </a:xfrm>
+      </p:grpSpPr>
       <p:sp>
         <p:nvSpPr>
           <p:cNvPr id="2" name="TextBox 1"/>
@@ -5334,7 +5379,7 @@
           <a:noFill/>
         </p:spPr>
         <p:txBody>
-          <a:bodyPr wrap="square" anchor="t" lIns="27432" rIns="27432" tIns="18288" bIns="18288">
+          <a:bodyPr wrap="square" lIns="27432" tIns="18288" rIns="27432" bIns="18288" anchor="t">
             <a:spAutoFit/>
           </a:bodyPr>
           <a:lstStyle/>
@@ -5373,7 +5418,7 @@
           <a:noFill/>
         </p:spPr>
         <p:txBody>
-          <a:bodyPr wrap="square" anchor="t" lIns="27432" rIns="27432" tIns="18288" bIns="18288">
+          <a:bodyPr wrap="square" lIns="27432" tIns="18288" rIns="27432" bIns="18288" anchor="t">
             <a:spAutoFit/>
           </a:bodyPr>
           <a:lstStyle/>
@@ -5412,7 +5457,7 @@
           <a:noFill/>
         </p:spPr>
         <p:txBody>
-          <a:bodyPr wrap="square" anchor="t" lIns="27432" rIns="27432" tIns="18288" bIns="18288">
+          <a:bodyPr wrap="square" lIns="27432" tIns="18288" rIns="27432" bIns="18288" anchor="t">
             <a:spAutoFit/>
           </a:bodyPr>
           <a:lstStyle/>
@@ -5442,7 +5487,7 @@
         </p:nvSpPr>
         <p:spPr>
           <a:xfrm>
-            <a:off x="502920" y="6510528"/>
+            <a:off x="502920" y="6620256"/>
             <a:ext cx="4572000" cy="274320"/>
           </a:xfrm>
           <a:prstGeom prst="rect">
@@ -5451,7 +5496,7 @@
           <a:noFill/>
         </p:spPr>
         <p:txBody>
-          <a:bodyPr wrap="square" anchor="t" lIns="27432" rIns="27432" tIns="18288" bIns="18288">
+          <a:bodyPr wrap="square" lIns="27432" tIns="18288" rIns="27432" bIns="18288" anchor="t">
             <a:spAutoFit/>
           </a:bodyPr>
           <a:lstStyle/>
@@ -5537,7 +5582,7 @@
           </a:fontRef>
         </p:style>
         <p:txBody>
-          <a:bodyPr rtlCol="0" anchor="ctr" wrap="square"/>
+          <a:bodyPr wrap="square" rtlCol="0" anchor="ctr"/>
           <a:lstStyle/>
           <a:p>
             <a:pPr algn="ctr" latinLnBrk="0"/>
@@ -5605,7 +5650,7 @@
           </a:fontRef>
         </p:style>
         <p:txBody>
-          <a:bodyPr rtlCol="0" anchor="ctr" wrap="square"/>
+          <a:bodyPr wrap="square" rtlCol="0" anchor="ctr"/>
           <a:lstStyle/>
           <a:p>
             <a:pPr algn="ctr" latinLnBrk="0"/>
@@ -5673,7 +5718,7 @@
           </a:fontRef>
         </p:style>
         <p:txBody>
-          <a:bodyPr rtlCol="0" anchor="ctr" wrap="square"/>
+          <a:bodyPr wrap="square" rtlCol="0" anchor="ctr"/>
           <a:lstStyle/>
           <a:p>
             <a:pPr algn="ctr" latinLnBrk="0"/>
@@ -5718,7 +5763,7 @@
           <a:noFill/>
         </p:spPr>
         <p:txBody>
-          <a:bodyPr wrap="square" anchor="t" lIns="27432" rIns="27432" tIns="18288" bIns="18288">
+          <a:bodyPr wrap="square" lIns="27432" tIns="18288" rIns="27432" bIns="18288" anchor="t">
             <a:spAutoFit/>
           </a:bodyPr>
           <a:lstStyle/>
@@ -5778,7 +5823,7 @@
           </a:fontRef>
         </p:style>
         <p:txBody>
-          <a:bodyPr rtlCol="0" anchor="ctr" wrap="square"/>
+          <a:bodyPr wrap="square" rtlCol="0" anchor="ctr"/>
           <a:lstStyle/>
           <a:p>
             <a:pPr algn="ctr" latinLnBrk="0"/>
@@ -5803,7 +5848,7 @@
 </file>
 
 <file path=ppt/slides/slide5.xml><?xml version="1.0" encoding="utf-8"?>
-<p:sld xmlns:a="http://schemas.openxmlformats.org/drawingml/2006/main" xmlns:p="http://schemas.openxmlformats.org/presentationml/2006/main" xmlns:r="http://schemas.openxmlformats.org/officeDocument/2006/relationships">
+<p:sld xmlns:a="http://schemas.openxmlformats.org/drawingml/2006/main" xmlns:r="http://schemas.openxmlformats.org/officeDocument/2006/relationships" xmlns:p="http://schemas.openxmlformats.org/presentationml/2006/main">
   <p:cSld>
     <p:bg>
       <p:bgPr>
@@ -5819,7 +5864,14 @@
         <p:cNvGrpSpPr/>
         <p:nvPr/>
       </p:nvGrpSpPr>
-      <p:grpSpPr/>
+      <p:grpSpPr>
+        <a:xfrm>
+          <a:off x="0" y="0"/>
+          <a:ext cx="0" cy="0"/>
+          <a:chOff x="0" y="0"/>
+          <a:chExt cx="0" cy="0"/>
+        </a:xfrm>
+      </p:grpSpPr>
       <p:sp>
         <p:nvSpPr>
           <p:cNvPr id="2" name="TextBox 1"/>
@@ -5837,7 +5889,7 @@
           <a:noFill/>
         </p:spPr>
         <p:txBody>
-          <a:bodyPr wrap="square" anchor="t" lIns="27432" rIns="27432" tIns="18288" bIns="18288">
+          <a:bodyPr wrap="square" lIns="27432" tIns="18288" rIns="27432" bIns="18288" anchor="t">
             <a:spAutoFit/>
           </a:bodyPr>
           <a:lstStyle/>
@@ -5876,7 +5928,7 @@
           <a:noFill/>
         </p:spPr>
         <p:txBody>
-          <a:bodyPr wrap="square" anchor="t" lIns="27432" rIns="27432" tIns="18288" bIns="18288">
+          <a:bodyPr wrap="square" lIns="27432" tIns="18288" rIns="27432" bIns="18288" anchor="t">
             <a:spAutoFit/>
           </a:bodyPr>
           <a:lstStyle/>
@@ -5915,7 +5967,7 @@
           <a:noFill/>
         </p:spPr>
         <p:txBody>
-          <a:bodyPr wrap="square" anchor="t" lIns="27432" rIns="27432" tIns="18288" bIns="18288">
+          <a:bodyPr wrap="square" lIns="27432" tIns="18288" rIns="27432" bIns="18288" anchor="t">
             <a:spAutoFit/>
           </a:bodyPr>
           <a:lstStyle/>
@@ -5945,7 +5997,7 @@
         </p:nvSpPr>
         <p:spPr>
           <a:xfrm>
-            <a:off x="502920" y="6510528"/>
+            <a:off x="502920" y="6638544"/>
             <a:ext cx="4572000" cy="274320"/>
           </a:xfrm>
           <a:prstGeom prst="rect">
@@ -5954,7 +6006,7 @@
           <a:noFill/>
         </p:spPr>
         <p:txBody>
-          <a:bodyPr wrap="square" anchor="t" lIns="27432" rIns="27432" tIns="18288" bIns="18288">
+          <a:bodyPr wrap="square" lIns="27432" tIns="18288" rIns="27432" bIns="18288" anchor="t">
             <a:spAutoFit/>
           </a:bodyPr>
           <a:lstStyle/>
@@ -5965,7 +6017,7 @@
               </a:lnSpc>
             </a:pPr>
             <a:r>
-              <a:rPr sz="1000" b="0">
+              <a:rPr sz="1000" b="0" dirty="0">
                 <a:solidFill>
                   <a:srgbClr val="6E6A60"/>
                 </a:solidFill>
@@ -6064,7 +6116,7 @@
           </a:fontRef>
         </p:style>
         <p:txBody>
-          <a:bodyPr rtlCol="0" anchor="ctr" wrap="square"/>
+          <a:bodyPr wrap="square" rtlCol="0" anchor="ctr"/>
           <a:lstStyle/>
           <a:p>
             <a:pPr algn="ctr" latinLnBrk="0"/>
@@ -6132,7 +6184,7 @@
           </a:fontRef>
         </p:style>
         <p:txBody>
-          <a:bodyPr rtlCol="0" anchor="ctr" wrap="square"/>
+          <a:bodyPr wrap="square" rtlCol="0" anchor="ctr"/>
           <a:lstStyle/>
           <a:p>
             <a:pPr algn="ctr" latinLnBrk="0"/>
@@ -6200,7 +6252,7 @@
           </a:fontRef>
         </p:style>
         <p:txBody>
-          <a:bodyPr rtlCol="0" anchor="ctr" wrap="square"/>
+          <a:bodyPr wrap="square" rtlCol="0" anchor="ctr"/>
           <a:lstStyle/>
           <a:p>
             <a:pPr algn="ctr" latinLnBrk="0"/>
@@ -6321,7 +6373,7 @@
           </a:fontRef>
         </p:style>
         <p:txBody>
-          <a:bodyPr rtlCol="0" anchor="ctr" wrap="square"/>
+          <a:bodyPr wrap="square" rtlCol="0" anchor="ctr"/>
           <a:lstStyle/>
           <a:p>
             <a:pPr algn="ctr" latinLnBrk="0"/>
@@ -6346,7 +6398,7 @@
 </file>
 
 <file path=ppt/slides/slide6.xml><?xml version="1.0" encoding="utf-8"?>
-<p:sld xmlns:a="http://schemas.openxmlformats.org/drawingml/2006/main" xmlns:p="http://schemas.openxmlformats.org/presentationml/2006/main" xmlns:r="http://schemas.openxmlformats.org/officeDocument/2006/relationships">
+<p:sld xmlns:a="http://schemas.openxmlformats.org/drawingml/2006/main" xmlns:r="http://schemas.openxmlformats.org/officeDocument/2006/relationships" xmlns:p="http://schemas.openxmlformats.org/presentationml/2006/main">
   <p:cSld>
     <p:bg>
       <p:bgPr>
@@ -6362,7 +6414,14 @@
         <p:cNvGrpSpPr/>
         <p:nvPr/>
       </p:nvGrpSpPr>
-      <p:grpSpPr/>
+      <p:grpSpPr>
+        <a:xfrm>
+          <a:off x="0" y="0"/>
+          <a:ext cx="0" cy="0"/>
+          <a:chOff x="0" y="0"/>
+          <a:chExt cx="0" cy="0"/>
+        </a:xfrm>
+      </p:grpSpPr>
       <p:sp>
         <p:nvSpPr>
           <p:cNvPr id="2" name="TextBox 1"/>
@@ -6380,7 +6439,7 @@
           <a:noFill/>
         </p:spPr>
         <p:txBody>
-          <a:bodyPr wrap="square" anchor="t" lIns="27432" rIns="27432" tIns="18288" bIns="18288">
+          <a:bodyPr wrap="square" lIns="27432" tIns="18288" rIns="27432" bIns="18288" anchor="t">
             <a:spAutoFit/>
           </a:bodyPr>
           <a:lstStyle/>
@@ -6419,7 +6478,7 @@
           <a:noFill/>
         </p:spPr>
         <p:txBody>
-          <a:bodyPr wrap="square" anchor="t" lIns="27432" rIns="27432" tIns="18288" bIns="18288">
+          <a:bodyPr wrap="square" lIns="27432" tIns="18288" rIns="27432" bIns="18288" anchor="t">
             <a:spAutoFit/>
           </a:bodyPr>
           <a:lstStyle/>
@@ -6458,7 +6517,7 @@
           <a:noFill/>
         </p:spPr>
         <p:txBody>
-          <a:bodyPr wrap="square" anchor="t" lIns="27432" rIns="27432" tIns="18288" bIns="18288">
+          <a:bodyPr wrap="square" lIns="27432" tIns="18288" rIns="27432" bIns="18288" anchor="t">
             <a:spAutoFit/>
           </a:bodyPr>
           <a:lstStyle/>
@@ -6488,7 +6547,7 @@
         </p:nvSpPr>
         <p:spPr>
           <a:xfrm>
-            <a:off x="502920" y="6510528"/>
+            <a:off x="502920" y="6629400"/>
             <a:ext cx="4572000" cy="274320"/>
           </a:xfrm>
           <a:prstGeom prst="rect">
@@ -6497,7 +6556,7 @@
           <a:noFill/>
         </p:spPr>
         <p:txBody>
-          <a:bodyPr wrap="square" anchor="t" lIns="27432" rIns="27432" tIns="18288" bIns="18288">
+          <a:bodyPr wrap="square" lIns="27432" tIns="18288" rIns="27432" bIns="18288" anchor="t">
             <a:spAutoFit/>
           </a:bodyPr>
           <a:lstStyle/>
@@ -6508,7 +6567,7 @@
               </a:lnSpc>
             </a:pPr>
             <a:r>
-              <a:rPr sz="1000" b="0">
+              <a:rPr sz="1000" b="0" dirty="0">
                 <a:solidFill>
                   <a:srgbClr val="6E6A60"/>
                 </a:solidFill>
@@ -6538,8 +6597,20 @@
                 <a:tableStyleId>{5C22544A-7EE6-4342-B048-85BDC9FD1C3A}</a:tableStyleId>
               </a:tblPr>
               <a:tblGrid>
-                <a:gridCol w="2377440"/>
-                <a:gridCol w="8778240"/>
+                <a:gridCol w="2377440">
+                  <a:extLst>
+                    <a:ext uri="{9D8B030D-6E8A-4147-A177-3AD203B41FA5}">
+                      <a16:colId xmlns:a16="http://schemas.microsoft.com/office/drawing/2014/main" val="20000"/>
+                    </a:ext>
+                  </a:extLst>
+                </a:gridCol>
+                <a:gridCol w="8778240">
+                  <a:extLst>
+                    <a:ext uri="{9D8B030D-6E8A-4147-A177-3AD203B41FA5}">
+                      <a16:colId xmlns:a16="http://schemas.microsoft.com/office/drawing/2014/main" val="20001"/>
+                    </a:ext>
+                  </a:extLst>
+                </a:gridCol>
               </a:tblGrid>
               <a:tr h="655320">
                 <a:tc>
@@ -6588,6 +6659,11 @@
                     </a:solidFill>
                   </a:tcPr>
                 </a:tc>
+                <a:extLst>
+                  <a:ext uri="{0D108BD9-81ED-4DB2-BD59-A6C34878D82A}">
+                    <a16:rowId xmlns:a16="http://schemas.microsoft.com/office/drawing/2014/main" val="10000"/>
+                  </a:ext>
+                </a:extLst>
               </a:tr>
               <a:tr h="655320">
                 <a:tc>
@@ -6636,6 +6712,11 @@
                     </a:solidFill>
                   </a:tcPr>
                 </a:tc>
+                <a:extLst>
+                  <a:ext uri="{0D108BD9-81ED-4DB2-BD59-A6C34878D82A}">
+                    <a16:rowId xmlns:a16="http://schemas.microsoft.com/office/drawing/2014/main" val="10001"/>
+                  </a:ext>
+                </a:extLst>
               </a:tr>
               <a:tr h="655320">
                 <a:tc>
@@ -6684,6 +6765,11 @@
                     </a:solidFill>
                   </a:tcPr>
                 </a:tc>
+                <a:extLst>
+                  <a:ext uri="{0D108BD9-81ED-4DB2-BD59-A6C34878D82A}">
+                    <a16:rowId xmlns:a16="http://schemas.microsoft.com/office/drawing/2014/main" val="10002"/>
+                  </a:ext>
+                </a:extLst>
               </a:tr>
               <a:tr h="655320">
                 <a:tc>
@@ -6732,6 +6818,11 @@
                     </a:solidFill>
                   </a:tcPr>
                 </a:tc>
+                <a:extLst>
+                  <a:ext uri="{0D108BD9-81ED-4DB2-BD59-A6C34878D82A}">
+                    <a16:rowId xmlns:a16="http://schemas.microsoft.com/office/drawing/2014/main" val="10003"/>
+                  </a:ext>
+                </a:extLst>
               </a:tr>
               <a:tr h="655320">
                 <a:tc>
@@ -6780,6 +6871,11 @@
                     </a:solidFill>
                   </a:tcPr>
                 </a:tc>
+                <a:extLst>
+                  <a:ext uri="{0D108BD9-81ED-4DB2-BD59-A6C34878D82A}">
+                    <a16:rowId xmlns:a16="http://schemas.microsoft.com/office/drawing/2014/main" val="10004"/>
+                  </a:ext>
+                </a:extLst>
               </a:tr>
               <a:tr h="655320">
                 <a:tc>
@@ -6828,6 +6924,11 @@
                     </a:solidFill>
                   </a:tcPr>
                 </a:tc>
+                <a:extLst>
+                  <a:ext uri="{0D108BD9-81ED-4DB2-BD59-A6C34878D82A}">
+                    <a16:rowId xmlns:a16="http://schemas.microsoft.com/office/drawing/2014/main" val="10005"/>
+                  </a:ext>
+                </a:extLst>
               </a:tr>
             </a:tbl>
           </a:graphicData>
@@ -6850,7 +6951,7 @@
           <a:noFill/>
         </p:spPr>
         <p:txBody>
-          <a:bodyPr wrap="square" anchor="t" lIns="27432" rIns="27432" tIns="18288" bIns="18288">
+          <a:bodyPr wrap="square" lIns="27432" tIns="18288" rIns="27432" bIns="18288" anchor="t">
             <a:spAutoFit/>
           </a:bodyPr>
           <a:lstStyle/>
@@ -6910,7 +7011,7 @@
           </a:fontRef>
         </p:style>
         <p:txBody>
-          <a:bodyPr rtlCol="0" anchor="ctr" wrap="square"/>
+          <a:bodyPr wrap="square" rtlCol="0" anchor="ctr"/>
           <a:lstStyle/>
           <a:p>
             <a:pPr algn="ctr" latinLnBrk="0"/>
@@ -6935,7 +7036,7 @@
 </file>
 
 <file path=ppt/slides/slide7.xml><?xml version="1.0" encoding="utf-8"?>
-<p:sld xmlns:a="http://schemas.openxmlformats.org/drawingml/2006/main" xmlns:p="http://schemas.openxmlformats.org/presentationml/2006/main" xmlns:r="http://schemas.openxmlformats.org/officeDocument/2006/relationships">
+<p:sld xmlns:a="http://schemas.openxmlformats.org/drawingml/2006/main" xmlns:r="http://schemas.openxmlformats.org/officeDocument/2006/relationships" xmlns:p="http://schemas.openxmlformats.org/presentationml/2006/main">
   <p:cSld>
     <p:bg>
       <p:bgPr>
@@ -6951,7 +7052,14 @@
         <p:cNvGrpSpPr/>
         <p:nvPr/>
       </p:nvGrpSpPr>
-      <p:grpSpPr/>
+      <p:grpSpPr>
+        <a:xfrm>
+          <a:off x="0" y="0"/>
+          <a:ext cx="0" cy="0"/>
+          <a:chOff x="0" y="0"/>
+          <a:chExt cx="0" cy="0"/>
+        </a:xfrm>
+      </p:grpSpPr>
       <p:sp>
         <p:nvSpPr>
           <p:cNvPr id="2" name="TextBox 1"/>
@@ -6969,7 +7077,7 @@
           <a:noFill/>
         </p:spPr>
         <p:txBody>
-          <a:bodyPr wrap="square" anchor="t" lIns="27432" rIns="27432" tIns="18288" bIns="18288">
+          <a:bodyPr wrap="square" lIns="27432" tIns="18288" rIns="27432" bIns="18288" anchor="t">
             <a:spAutoFit/>
           </a:bodyPr>
           <a:lstStyle/>
@@ -7008,7 +7116,7 @@
           <a:noFill/>
         </p:spPr>
         <p:txBody>
-          <a:bodyPr wrap="square" anchor="t" lIns="27432" rIns="27432" tIns="18288" bIns="18288">
+          <a:bodyPr wrap="square" lIns="27432" tIns="18288" rIns="27432" bIns="18288" anchor="t">
             <a:spAutoFit/>
           </a:bodyPr>
           <a:lstStyle/>
@@ -7047,7 +7155,7 @@
           <a:noFill/>
         </p:spPr>
         <p:txBody>
-          <a:bodyPr wrap="square" anchor="t" lIns="27432" rIns="27432" tIns="18288" bIns="18288">
+          <a:bodyPr wrap="square" lIns="27432" tIns="18288" rIns="27432" bIns="18288" anchor="t">
             <a:spAutoFit/>
           </a:bodyPr>
           <a:lstStyle/>
@@ -7077,7 +7185,7 @@
         </p:nvSpPr>
         <p:spPr>
           <a:xfrm>
-            <a:off x="502920" y="6510528"/>
+            <a:off x="502920" y="6629400"/>
             <a:ext cx="4572000" cy="274320"/>
           </a:xfrm>
           <a:prstGeom prst="rect">
@@ -7086,7 +7194,7 @@
           <a:noFill/>
         </p:spPr>
         <p:txBody>
-          <a:bodyPr wrap="square" anchor="t" lIns="27432" rIns="27432" tIns="18288" bIns="18288">
+          <a:bodyPr wrap="square" lIns="27432" tIns="18288" rIns="27432" bIns="18288" anchor="t">
             <a:spAutoFit/>
           </a:bodyPr>
           <a:lstStyle/>
@@ -7097,7 +7205,7 @@
               </a:lnSpc>
             </a:pPr>
             <a:r>
-              <a:rPr sz="1000" b="0">
+              <a:rPr sz="1000" b="0" dirty="0">
                 <a:solidFill>
                   <a:srgbClr val="6E6A60"/>
                 </a:solidFill>
@@ -7148,7 +7256,7 @@
           </a:fontRef>
         </p:style>
         <p:txBody>
-          <a:bodyPr rtlCol="0" anchor="t" wrap="square" lIns="201168" rIns="201168" tIns="146304"/>
+          <a:bodyPr wrap="square" lIns="201168" tIns="146304" rIns="201168" rtlCol="0" anchor="t"/>
           <a:lstStyle/>
           <a:p>
             <a:pPr algn="l" latinLnBrk="0">
@@ -7188,15 +7296,12 @@
                 <a:spcPts val="400"/>
               </a:spcAft>
             </a:pPr>
-            <a:r>
-              <a:rPr sz="1350" b="0">
-                <a:solidFill>
-                  <a:srgbClr val="24262E"/>
-                </a:solidFill>
-                <a:latin typeface="Segoe UI"/>
-              </a:rPr>
-              <a:t/>
-            </a:r>
+            <a:endParaRPr sz="1350" b="0">
+              <a:solidFill>
+                <a:srgbClr val="24262E"/>
+              </a:solidFill>
+              <a:latin typeface="Segoe UI"/>
+            </a:endParaRPr>
           </a:p>
           <a:p>
             <a:pPr algn="l" latinLnBrk="0">
@@ -7256,7 +7361,7 @@
           </a:fontRef>
         </p:style>
         <p:txBody>
-          <a:bodyPr rtlCol="0" anchor="t" wrap="square" lIns="201168" rIns="201168" tIns="146304"/>
+          <a:bodyPr wrap="square" lIns="201168" tIns="146304" rIns="201168" rtlCol="0" anchor="t"/>
           <a:lstStyle/>
           <a:p>
             <a:pPr algn="l" latinLnBrk="0">
@@ -7296,15 +7401,12 @@
                 <a:spcPts val="400"/>
               </a:spcAft>
             </a:pPr>
-            <a:r>
-              <a:rPr sz="1350" b="0">
-                <a:solidFill>
-                  <a:srgbClr val="24262E"/>
-                </a:solidFill>
-                <a:latin typeface="Segoe UI"/>
-              </a:rPr>
-              <a:t/>
-            </a:r>
+            <a:endParaRPr sz="1350" b="0">
+              <a:solidFill>
+                <a:srgbClr val="24262E"/>
+              </a:solidFill>
+              <a:latin typeface="Segoe UI"/>
+            </a:endParaRPr>
           </a:p>
           <a:p>
             <a:pPr algn="l" latinLnBrk="0">
@@ -7364,7 +7466,7 @@
           </a:fontRef>
         </p:style>
         <p:txBody>
-          <a:bodyPr rtlCol="0" anchor="t" wrap="square" lIns="201168" rIns="201168" tIns="146304"/>
+          <a:bodyPr wrap="square" lIns="201168" tIns="146304" rIns="201168" rtlCol="0" anchor="t"/>
           <a:lstStyle/>
           <a:p>
             <a:pPr algn="l" latinLnBrk="0">
@@ -7404,15 +7506,12 @@
                 <a:spcPts val="400"/>
               </a:spcAft>
             </a:pPr>
-            <a:r>
-              <a:rPr sz="1350" b="0">
-                <a:solidFill>
-                  <a:srgbClr val="24262E"/>
-                </a:solidFill>
-                <a:latin typeface="Segoe UI"/>
-              </a:rPr>
-              <a:t/>
-            </a:r>
+            <a:endParaRPr sz="1350" b="0">
+              <a:solidFill>
+                <a:srgbClr val="24262E"/>
+              </a:solidFill>
+              <a:latin typeface="Segoe UI"/>
+            </a:endParaRPr>
           </a:p>
           <a:p>
             <a:pPr algn="l" latinLnBrk="0">
@@ -7436,15 +7535,12 @@
                 <a:spcPts val="400"/>
               </a:spcAft>
             </a:pPr>
-            <a:r>
-              <a:rPr sz="1350" b="0">
-                <a:solidFill>
-                  <a:srgbClr val="24262E"/>
-                </a:solidFill>
-                <a:latin typeface="Segoe UI"/>
-              </a:rPr>
-              <a:t/>
-            </a:r>
+            <a:endParaRPr sz="1350" b="0">
+              <a:solidFill>
+                <a:srgbClr val="24262E"/>
+              </a:solidFill>
+              <a:latin typeface="Segoe UI"/>
+            </a:endParaRPr>
           </a:p>
           <a:p>
             <a:pPr algn="l" latinLnBrk="0">
@@ -7502,7 +7598,7 @@
           </a:fontRef>
         </p:style>
         <p:txBody>
-          <a:bodyPr rtlCol="0" anchor="ctr" wrap="square"/>
+          <a:bodyPr wrap="square" rtlCol="0" anchor="ctr"/>
           <a:lstStyle/>
           <a:p>
             <a:pPr algn="ctr" latinLnBrk="0"/>
@@ -7527,7 +7623,7 @@
 </file>
 
 <file path=ppt/slides/slide8.xml><?xml version="1.0" encoding="utf-8"?>
-<p:sld xmlns:a="http://schemas.openxmlformats.org/drawingml/2006/main" xmlns:p="http://schemas.openxmlformats.org/presentationml/2006/main" xmlns:r="http://schemas.openxmlformats.org/officeDocument/2006/relationships">
+<p:sld xmlns:a="http://schemas.openxmlformats.org/drawingml/2006/main" xmlns:r="http://schemas.openxmlformats.org/officeDocument/2006/relationships" xmlns:p="http://schemas.openxmlformats.org/presentationml/2006/main">
   <p:cSld>
     <p:bg>
       <p:bgPr>
@@ -7543,7 +7639,14 @@
         <p:cNvGrpSpPr/>
         <p:nvPr/>
       </p:nvGrpSpPr>
-      <p:grpSpPr/>
+      <p:grpSpPr>
+        <a:xfrm>
+          <a:off x="0" y="0"/>
+          <a:ext cx="0" cy="0"/>
+          <a:chOff x="0" y="0"/>
+          <a:chExt cx="0" cy="0"/>
+        </a:xfrm>
+      </p:grpSpPr>
       <p:sp>
         <p:nvSpPr>
           <p:cNvPr id="2" name="TextBox 1"/>
@@ -7561,7 +7664,7 @@
           <a:noFill/>
         </p:spPr>
         <p:txBody>
-          <a:bodyPr wrap="square" anchor="t" lIns="27432" rIns="27432" tIns="18288" bIns="18288">
+          <a:bodyPr wrap="square" lIns="27432" tIns="18288" rIns="27432" bIns="18288" anchor="t">
             <a:spAutoFit/>
           </a:bodyPr>
           <a:lstStyle/>
@@ -7600,7 +7703,7 @@
           <a:noFill/>
         </p:spPr>
         <p:txBody>
-          <a:bodyPr wrap="square" anchor="t" lIns="27432" rIns="27432" tIns="18288" bIns="18288">
+          <a:bodyPr wrap="square" lIns="27432" tIns="18288" rIns="27432" bIns="18288" anchor="t">
             <a:spAutoFit/>
           </a:bodyPr>
           <a:lstStyle/>
@@ -7639,7 +7742,7 @@
           <a:noFill/>
         </p:spPr>
         <p:txBody>
-          <a:bodyPr wrap="square" anchor="t" lIns="27432" rIns="27432" tIns="18288" bIns="18288">
+          <a:bodyPr wrap="square" lIns="27432" tIns="18288" rIns="27432" bIns="18288" anchor="t">
             <a:spAutoFit/>
           </a:bodyPr>
           <a:lstStyle/>
@@ -7678,7 +7781,7 @@
           <a:noFill/>
         </p:spPr>
         <p:txBody>
-          <a:bodyPr wrap="square" anchor="t" lIns="27432" rIns="27432" tIns="18288" bIns="18288">
+          <a:bodyPr wrap="square" lIns="27432" tIns="18288" rIns="27432" bIns="18288" anchor="t">
             <a:spAutoFit/>
           </a:bodyPr>
           <a:lstStyle/>
@@ -7689,7 +7792,7 @@
               </a:lnSpc>
             </a:pPr>
             <a:r>
-              <a:rPr sz="1000" b="0">
+              <a:rPr sz="1000" b="0" dirty="0">
                 <a:solidFill>
                   <a:srgbClr val="6E6A60"/>
                 </a:solidFill>
@@ -7740,7 +7843,7 @@
           </a:fontRef>
         </p:style>
         <p:txBody>
-          <a:bodyPr rtlCol="0" anchor="t" wrap="square" lIns="201168" rIns="201168" tIns="146304"/>
+          <a:bodyPr wrap="square" lIns="201168" tIns="146304" rIns="201168" rtlCol="0" anchor="t"/>
           <a:lstStyle/>
           <a:p>
             <a:pPr algn="l" latinLnBrk="0">
@@ -7816,7 +7919,7 @@
           </a:fontRef>
         </p:style>
         <p:txBody>
-          <a:bodyPr rtlCol="0" anchor="t" wrap="square" lIns="201168" rIns="201168" tIns="146304"/>
+          <a:bodyPr wrap="square" lIns="201168" tIns="146304" rIns="201168" rtlCol="0" anchor="t"/>
           <a:lstStyle/>
           <a:p>
             <a:pPr algn="l" latinLnBrk="0">
@@ -7869,7 +7972,7 @@
           <a:noFill/>
         </p:spPr>
         <p:txBody>
-          <a:bodyPr wrap="square" anchor="t" lIns="27432" rIns="27432" tIns="18288" bIns="18288">
+          <a:bodyPr wrap="square" lIns="27432" tIns="18288" rIns="27432" bIns="18288" anchor="t">
             <a:spAutoFit/>
           </a:bodyPr>
           <a:lstStyle/>
